--- a/05_submission/FIAM_deck.pptx
+++ b/05_submission/FIAM_deck.pptx
@@ -18133,7 +18133,7 @@
         <p:spPr>
           <a:xfrm>
             <a:off x="548640" y="3154680"/>
-            <a:ext cx="5760720" cy="2286000"/>
+            <a:ext cx="5760720" cy="2011680"/>
           </a:xfrm>
           <a:prstGeom prst="rect">
             <a:avLst/>
@@ -18148,8 +18148,8 @@
         </p:nvSpPr>
         <p:spPr>
           <a:xfrm>
-            <a:off x="548640" y="5486400"/>
-            <a:ext cx="5760720" cy="457200"/>
+            <a:off x="548640" y="5230368"/>
+            <a:ext cx="5760720" cy="960120"/>
           </a:xfrm>
           <a:prstGeom prst="rect">
             <a:avLst/>
@@ -18158,14 +18158,37 @@
           <a:ln/>
         </p:spPr>
         <p:txBody>
-          <a:bodyPr wrap="square" lIns="0" tIns="0" rIns="0" bIns="0" rtlCol="0" anchor="ctr"/>
+          <a:bodyPr wrap="square" lIns="0" tIns="0" rIns="0" bIns="0" rtlCol="0" anchor="t"/>
           <a:lstStyle/>
           <a:p>
             <a:pPr indent="0" marL="0">
+              <a:lnSpc>
+                <a:spcPct val="102000"/>
+              </a:lnSpc>
               <a:buNone/>
             </a:pPr>
             <a:r>
-              <a:rPr lang="en-US" sz="1000" i="1" dirty="0">
+              <a:rPr lang="en-US" sz="950" b="1" dirty="0">
+                <a:solidFill>
+                  <a:srgbClr val="1A1A1A"/>
+                </a:solidFill>
+                <a:latin typeface="Calibri" pitchFamily="34" charset="0"/>
+                <a:ea typeface="Calibri" pitchFamily="34" charset="-122"/>
+                <a:cs typeface="Calibri" pitchFamily="34" charset="-120"/>
+              </a:rPr>
+              <a:t>Outside +/-0.3: 7 of 57 windows, which is 3 distinct episodes once the overlap between 12-month windows is collapsed - 2021-01..2022-07, 2024-03..2025-02, 2025-09..2026-08.</a:t>
+            </a:r>
+            <a:endParaRPr lang="en-US" sz="950" dirty="0"/>
+          </a:p>
+          <a:p>
+            <a:pPr indent="0" marL="0">
+              <a:lnSpc>
+                <a:spcPct val="102000"/>
+              </a:lnSpc>
+              <a:buNone/>
+            </a:pPr>
+            <a:r>
+              <a:rPr lang="en-US" sz="950" dirty="0">
                 <a:solidFill>
                   <a:srgbClr val="6B7280"/>
                 </a:solidFill>
@@ -18173,9 +18196,9 @@
                 <a:ea typeface="Calibri" pitchFamily="34" charset="-122"/>
                 <a:cs typeface="Calibri" pitchFamily="34" charset="-120"/>
               </a:rPr>
-              <a:t>Full-period beta is -0.121. The 12-month window leaves the +/-0.3 band around 2022 - we report that rather than only the average.</a:t>
+              <a:t>None of them is distinguishable from zero (largest |t| 1.8). A 12-month window measures beta 2.2x looser than the full period, so a book with our full-period beta would leave the band in 30% of windows on sampling noise alone. We leave it in 12%.</a:t>
             </a:r>
-            <a:endParaRPr lang="en-US" sz="1000" dirty="0"/>
+            <a:endParaRPr lang="en-US" sz="950" dirty="0"/>
           </a:p>
         </p:txBody>
       </p:sp>

--- a/05_submission/FIAM_deck.pptx
+++ b/05_submission/FIAM_deck.pptx
@@ -17,9 +17,10 @@
     <p:sldId id="265" r:id="rId11"/>
     <p:sldId id="266" r:id="rId12"/>
     <p:sldId id="267" r:id="rId13"/>
+    <p:sldId id="268" r:id="rId14"/>
   </p:sldIdLst>
   <p:notesMasterIdLst>
-    <p:notesMasterId r:id="rId14"/>
+    <p:notesMasterId r:id="rId15"/>
   </p:notesMasterIdLst>
   <p:sldSz cx="12192000" cy="6858000"/>
   <p:notesSz cx="6858000" cy="12192000"/>
@@ -801,6 +802,94 @@
             <a:fld id="{F7021451-1387-4CA6-816F-3879F97B5CBC}" type="slidenum">
               <a:rPr lang="en-US"/>
               <a:t>12</a:t>
+            </a:fld>
+            <a:endParaRPr lang="en-US"/>
+          </a:p>
+        </p:txBody>
+      </p:sp>
+    </p:spTree>
+    <p:extLst>
+      <p:ext uri="{BB962C8B-B14F-4D97-AF65-F5344CB8AC3E}">
+        <p14:creationId xmlns:p14="http://schemas.microsoft.com/office/powerpoint/2010/main" val="1024086991"/>
+      </p:ext>
+    </p:extLst>
+  </p:cSld>
+  <p:clrMapOvr>
+    <a:masterClrMapping/>
+  </p:clrMapOvr>
+</p:notes>
+</file>
+
+<file path=ppt/notesSlides/notesSlide13.xml><?xml version="1.0" encoding="utf-8"?>
+<p:notes xmlns:a="http://schemas.openxmlformats.org/drawingml/2006/main" xmlns:r="http://schemas.openxmlformats.org/officeDocument/2006/relationships" xmlns:p="http://schemas.openxmlformats.org/presentationml/2006/main">
+  <p:cSld>
+    <p:spTree>
+      <p:nvGrpSpPr>
+        <p:cNvPr id="1" name=""/>
+        <p:cNvGrpSpPr/>
+        <p:nvPr/>
+      </p:nvGrpSpPr>
+      <p:grpSpPr>
+        <a:xfrm>
+          <a:off x="0" y="0"/>
+          <a:ext cx="0" cy="0"/>
+          <a:chOff x="0" y="0"/>
+          <a:chExt cx="0" cy="0"/>
+        </a:xfrm>
+      </p:grpSpPr>
+      <p:sp>
+        <p:nvSpPr>
+          <p:cNvPr id="2" name="Slide Image Placeholder 1"/>
+          <p:cNvSpPr>
+            <a:spLocks noGrp="1" noRot="1" noChangeAspect="1"/>
+          </p:cNvSpPr>
+          <p:nvPr>
+            <p:ph type="sldImg"/>
+          </p:nvPr>
+        </p:nvSpPr>
+        <p:spPr/>
+      </p:sp>
+      <p:sp>
+        <p:nvSpPr>
+          <p:cNvPr id="3" name="Notes Placeholder 2"/>
+          <p:cNvSpPr>
+            <a:spLocks noGrp="1"/>
+          </p:cNvSpPr>
+          <p:nvPr>
+            <p:ph type="body" idx="1"/>
+          </p:nvPr>
+        </p:nvSpPr>
+        <p:spPr/>
+        <p:txBody>
+          <a:bodyPr/>
+          <a:lstStyle/>
+          <a:p>
+            <a:r>
+              <a:rPr lang="en-US" dirty="0"/>
+              <a:t/>
+            </a:r>
+            <a:endParaRPr lang="en-US" dirty="0"/>
+          </a:p>
+        </p:txBody>
+      </p:sp>
+      <p:sp>
+        <p:nvSpPr>
+          <p:cNvPr id="4" name="Slide Number Placeholder 3"/>
+          <p:cNvSpPr>
+            <a:spLocks noGrp="1"/>
+          </p:cNvSpPr>
+          <p:nvPr>
+            <p:ph type="sldNum" sz="quarter" idx="10"/>
+          </p:nvPr>
+        </p:nvSpPr>
+        <p:spPr/>
+        <p:txBody>
+          <a:bodyPr/>
+          <a:lstStyle/>
+          <a:p>
+            <a:fld id="{F7021451-1387-4CA6-816F-3879F97B5CBC}" type="slidenum">
+              <a:rPr lang="en-US"/>
+              <a:t>13</a:t>
             </a:fld>
             <a:endParaRPr lang="en-US"/>
           </a:p>
@@ -7531,6 +7620,3417 @@
 </p:sld>
 </file>
 
+<file path=ppt/slides/slide13.xml><?xml version="1.0" encoding="utf-8"?>
+<p:sld xmlns:a="http://schemas.openxmlformats.org/drawingml/2006/main" xmlns:r="http://schemas.openxmlformats.org/officeDocument/2006/relationships" xmlns:p="http://schemas.openxmlformats.org/presentationml/2006/main">
+  <p:cSld name="Slide 13">
+    <p:bg>
+      <p:bgPr>
+        <a:solidFill>
+          <a:srgbClr val="FFFFFF"/>
+        </a:solidFill>
+      </p:bgPr>
+    </p:bg>
+    <p:spTree>
+      <p:nvGrpSpPr>
+        <p:cNvPr id="1" name=""/>
+        <p:cNvGrpSpPr/>
+        <p:nvPr/>
+      </p:nvGrpSpPr>
+      <p:grpSpPr>
+        <a:xfrm>
+          <a:off x="0" y="0"/>
+          <a:ext cx="0" cy="0"/>
+          <a:chOff x="0" y="0"/>
+          <a:chExt cx="0" cy="0"/>
+        </a:xfrm>
+      </p:grpSpPr>
+      <p:sp>
+        <p:nvSpPr>
+          <p:cNvPr id="2" name="Text 0"/>
+          <p:cNvSpPr txBox="1"/>
+          <p:nvPr/>
+        </p:nvSpPr>
+        <p:spPr>
+          <a:xfrm>
+            <a:off x="548640" y="274320"/>
+            <a:ext cx="2743200" cy="201168"/>
+          </a:xfrm>
+          <a:prstGeom prst="rect">
+            <a:avLst/>
+          </a:prstGeom>
+          <a:noFill/>
+          <a:ln/>
+        </p:spPr>
+        <p:txBody>
+          <a:bodyPr wrap="square" lIns="0" tIns="0" rIns="0" bIns="0" rtlCol="0" anchor="ctr"/>
+          <a:lstStyle/>
+          <a:p>
+            <a:pPr indent="0" marL="0">
+              <a:buNone/>
+            </a:pPr>
+            <a:r>
+              <a:rPr lang="en-US" sz="950" b="1" spc="80" kern="0" dirty="0">
+                <a:solidFill>
+                  <a:srgbClr val="6B7280"/>
+                </a:solidFill>
+                <a:latin typeface="Calibri" pitchFamily="34" charset="0"/>
+                <a:ea typeface="Calibri" pitchFamily="34" charset="-122"/>
+                <a:cs typeface="Calibri" pitchFamily="34" charset="-120"/>
+              </a:rPr>
+              <a:t>APPENDIX</a:t>
+            </a:r>
+            <a:endParaRPr lang="en-US" sz="950" dirty="0"/>
+          </a:p>
+        </p:txBody>
+      </p:sp>
+      <p:sp>
+        <p:nvSpPr>
+          <p:cNvPr id="3" name="Text 1"/>
+          <p:cNvSpPr txBox="1"/>
+          <p:nvPr/>
+        </p:nvSpPr>
+        <p:spPr>
+          <a:xfrm>
+            <a:off x="548640" y="384048"/>
+            <a:ext cx="11064240" cy="658368"/>
+          </a:xfrm>
+          <a:prstGeom prst="rect">
+            <a:avLst/>
+          </a:prstGeom>
+          <a:noFill/>
+          <a:ln/>
+        </p:spPr>
+        <p:txBody>
+          <a:bodyPr wrap="square" lIns="0" tIns="0" rIns="0" bIns="0" rtlCol="0" anchor="ctr"/>
+          <a:lstStyle/>
+          <a:p>
+            <a:pPr indent="0" marL="0">
+              <a:buNone/>
+            </a:pPr>
+            <a:r>
+              <a:rPr lang="en-US" sz="3200" b="1" dirty="0">
+                <a:solidFill>
+                  <a:srgbClr val="1E2761"/>
+                </a:solidFill>
+                <a:latin typeface="Cambria" pitchFamily="34" charset="0"/>
+                <a:ea typeface="Cambria" pitchFamily="34" charset="-122"/>
+                <a:cs typeface="Cambria" pitchFamily="34" charset="-120"/>
+              </a:rPr>
+              <a:t>A proposed improvement we tested and did not adopt</a:t>
+            </a:r>
+            <a:endParaRPr lang="en-US" sz="3200" dirty="0"/>
+          </a:p>
+        </p:txBody>
+      </p:sp>
+      <p:sp>
+        <p:nvSpPr>
+          <p:cNvPr id="4" name="Text 2"/>
+          <p:cNvSpPr txBox="1"/>
+          <p:nvPr/>
+        </p:nvSpPr>
+        <p:spPr>
+          <a:xfrm>
+            <a:off x="548640" y="1060704"/>
+            <a:ext cx="11064240" cy="310896"/>
+          </a:xfrm>
+          <a:prstGeom prst="rect">
+            <a:avLst/>
+          </a:prstGeom>
+          <a:noFill/>
+          <a:ln/>
+        </p:spPr>
+        <p:txBody>
+          <a:bodyPr wrap="square" lIns="0" tIns="0" rIns="0" bIns="0" rtlCol="0" anchor="ctr"/>
+          <a:lstStyle/>
+          <a:p>
+            <a:pPr indent="0" marL="0">
+              <a:buNone/>
+            </a:pPr>
+            <a:r>
+              <a:rPr lang="en-US" sz="1300" dirty="0">
+                <a:solidFill>
+                  <a:srgbClr val="6B7280"/>
+                </a:solidFill>
+                <a:latin typeface="Calibri" pitchFamily="34" charset="0"/>
+                <a:ea typeface="Calibri" pitchFamily="34" charset="-122"/>
+                <a:cs typeface="Calibri" pitchFamily="34" charset="-120"/>
+              </a:rPr>
+              <a:t>Sector neutrality: what the experiments said, and why they cannot settle it</a:t>
+            </a:r>
+            <a:endParaRPr lang="en-US" sz="1300" dirty="0"/>
+          </a:p>
+        </p:txBody>
+      </p:sp>
+      <p:sp>
+        <p:nvSpPr>
+          <p:cNvPr id="5" name="Text 3"/>
+          <p:cNvSpPr txBox="1"/>
+          <p:nvPr/>
+        </p:nvSpPr>
+        <p:spPr>
+          <a:xfrm>
+            <a:off x="548640" y="1481328"/>
+            <a:ext cx="5577840" cy="256032"/>
+          </a:xfrm>
+          <a:prstGeom prst="rect">
+            <a:avLst/>
+          </a:prstGeom>
+          <a:noFill/>
+          <a:ln/>
+        </p:spPr>
+        <p:txBody>
+          <a:bodyPr wrap="square" lIns="0" tIns="0" rIns="0" bIns="0" rtlCol="0" anchor="ctr"/>
+          <a:lstStyle/>
+          <a:p>
+            <a:pPr indent="0" marL="0">
+              <a:buNone/>
+            </a:pPr>
+            <a:r>
+              <a:rPr lang="en-US" sz="1300" b="1" dirty="0">
+                <a:solidFill>
+                  <a:srgbClr val="1E2761"/>
+                </a:solidFill>
+                <a:latin typeface="Calibri" pitchFamily="34" charset="0"/>
+                <a:ea typeface="Calibri" pitchFamily="34" charset="-122"/>
+                <a:cs typeface="Calibri" pitchFamily="34" charset="-120"/>
+              </a:rPr>
+              <a:t>The book carries a sector bet nobody chose</a:t>
+            </a:r>
+            <a:endParaRPr lang="en-US" sz="1300" dirty="0"/>
+          </a:p>
+        </p:txBody>
+      </p:sp>
+      <p:sp>
+        <p:nvSpPr>
+          <p:cNvPr id="6" name="Text 4"/>
+          <p:cNvSpPr txBox="1"/>
+          <p:nvPr/>
+        </p:nvSpPr>
+        <p:spPr>
+          <a:xfrm>
+            <a:off x="548640" y="1810512"/>
+            <a:ext cx="5577840" cy="731520"/>
+          </a:xfrm>
+          <a:prstGeom prst="rect">
+            <a:avLst/>
+          </a:prstGeom>
+          <a:noFill/>
+          <a:ln/>
+        </p:spPr>
+        <p:txBody>
+          <a:bodyPr wrap="square" lIns="0" tIns="0" rIns="0" bIns="0" rtlCol="0" anchor="t"/>
+          <a:lstStyle/>
+          <a:p>
+            <a:pPr marL="342900" indent="-342900">
+              <a:lnSpc>
+                <a:spcPct val="105000"/>
+              </a:lnSpc>
+              <a:spcAft>
+                <a:spcPts val="600"/>
+              </a:spcAft>
+              <a:buSzPct val="100000"/>
+              <a:buChar char="•"/>
+            </a:pPr>
+            <a:r>
+              <a:rPr lang="en-US" sz="1050" dirty="0">
+                <a:solidFill>
+                  <a:srgbClr val="1A1A1A"/>
+                </a:solidFill>
+                <a:latin typeface="Calibri" pitchFamily="34" charset="0"/>
+                <a:ea typeface="Calibri" pitchFamily="34" charset="-122"/>
+                <a:cs typeface="Calibri" pitchFamily="34" charset="-120"/>
+              </a:rPr>
+              <a:t>Residualising the score on sector dummies removes each sector's mean, not its skew. The traded book averages 8 technology longs against 28 shorts, and 89.7% of capital sits in net sector positions.</a:t>
+            </a:r>
+            <a:endParaRPr lang="en-US" sz="1050" dirty="0"/>
+          </a:p>
+          <a:p>
+            <a:pPr marL="342900" indent="-342900">
+              <a:lnSpc>
+                <a:spcPct val="105000"/>
+              </a:lnSpc>
+              <a:spcAft>
+                <a:spcPts val="600"/>
+              </a:spcAft>
+              <a:buSzPct val="100000"/>
+              <a:buChar char="•"/>
+            </a:pPr>
+            <a:r>
+              <a:rPr lang="en-US" sz="1050" dirty="0">
+                <a:solidFill>
+                  <a:srgbClr val="1A1A1A"/>
+                </a:solidFill>
+                <a:latin typeface="Calibri" pitchFamily="34" charset="0"/>
+                <a:ea typeface="Calibri" pitchFamily="34" charset="-122"/>
+                <a:cs typeface="Calibri" pitchFamily="34" charset="-120"/>
+              </a:rPr>
+              <a:t>Shrinking those nets toward zero and restoring gross traces the whole curve:</a:t>
+            </a:r>
+            <a:endParaRPr lang="en-US" sz="1050" dirty="0"/>
+          </a:p>
+        </p:txBody>
+      </p:sp>
+      <p:graphicFrame>
+        <p:nvGraphicFramePr>
+          <p:cNvPr id="14" name="Table 0"/>
+          <p:cNvGraphicFramePr>
+            <a:graphicFrameLocks noGrp="1"/>
+          </p:cNvGraphicFramePr>
+          <p:nvPr>
+            <p:extLst>
+              <p:ext uri="{D42A27DB-BD31-4B8C-83A1-F6EECF244321}">
+                <p14:modId xmlns:p14="http://schemas.microsoft.com/office/powerpoint/2010/main" val="1579011935"/>
+              </p:ext>
+            </p:extLst>
+          </p:nvPr>
+        </p:nvGraphicFramePr>
+        <p:xfrm>
+          <a:off x="548640" y="2798064"/>
+          <a:ext cx="5577840" cy="914400"/>
+        </p:xfrm>
+        <a:graphic>
+          <a:graphicData uri="http://schemas.openxmlformats.org/drawingml/2006/table">
+            <a:tbl>
+              <a:tblPr/>
+              <a:tblGrid>
+                <a:gridCol w="1691640"/>
+                <a:gridCol w="1051560"/>
+                <a:gridCol w="1051560"/>
+                <a:gridCol w="868680"/>
+                <a:gridCol w="914400"/>
+              </a:tblGrid>
+              <a:tr h="210312">
+                <a:tc>
+                  <a:txBody>
+                    <a:bodyPr/>
+                    <a:lstStyle/>
+                    <a:p>
+                      <a:pPr algn="l" indent="0" marL="0">
+                        <a:buNone/>
+                      </a:pPr>
+                      <a:r>
+                        <a:rPr lang="en-US" sz="900" b="1" dirty="0">
+                          <a:solidFill>
+                            <a:srgbClr val="FFFFFF"/>
+                          </a:solidFill>
+                          <a:latin typeface="Calibri" pitchFamily="34" charset="0"/>
+                          <a:ea typeface="Calibri" pitchFamily="34" charset="-122"/>
+                          <a:cs typeface="Calibri" pitchFamily="34" charset="-120"/>
+                        </a:rPr>
+                        <a:t>Neutralisation</a:t>
+                      </a:r>
+                      <a:endParaRPr lang="en-US" sz="900" dirty="0">
+                        <a:latin typeface="Calibri" charset="0"/>
+                        <a:ea typeface="Calibri" charset="0"/>
+                        <a:cs typeface="Calibri" charset="0"/>
+                      </a:endParaRPr>
+                    </a:p>
+                  </a:txBody>
+                  <a:tcPr marL="50800" marR="50800" marT="50800" marB="50800">
+                    <a:lnL w="6350" cap="flat" cmpd="sng" algn="ctr">
+                      <a:solidFill>
+                        <a:srgbClr val="E3E7F0"/>
+                      </a:solidFill>
+                      <a:prstDash val="solid"/>
+                      <a:round/>
+                      <a:headEnd type="none" w="med" len="med"/>
+                      <a:tailEnd type="none" w="med" len="med"/>
+                    </a:lnL>
+                    <a:lnR w="6350" cap="flat" cmpd="sng" algn="ctr">
+                      <a:solidFill>
+                        <a:srgbClr val="E3E7F0"/>
+                      </a:solidFill>
+                      <a:prstDash val="solid"/>
+                      <a:round/>
+                      <a:headEnd type="none" w="med" len="med"/>
+                      <a:tailEnd type="none" w="med" len="med"/>
+                    </a:lnR>
+                    <a:lnT w="6350" cap="flat" cmpd="sng" algn="ctr">
+                      <a:solidFill>
+                        <a:srgbClr val="E3E7F0"/>
+                      </a:solidFill>
+                      <a:prstDash val="solid"/>
+                      <a:round/>
+                      <a:headEnd type="none" w="med" len="med"/>
+                      <a:tailEnd type="none" w="med" len="med"/>
+                    </a:lnT>
+                    <a:lnB w="6350" cap="flat" cmpd="sng" algn="ctr">
+                      <a:solidFill>
+                        <a:srgbClr val="E3E7F0"/>
+                      </a:solidFill>
+                      <a:prstDash val="solid"/>
+                      <a:round/>
+                      <a:headEnd type="none" w="med" len="med"/>
+                      <a:tailEnd type="none" w="med" len="med"/>
+                    </a:lnB>
+                    <a:solidFill>
+                      <a:srgbClr val="1E2761"/>
+                    </a:solidFill>
+                  </a:tcPr>
+                </a:tc>
+                <a:tc>
+                  <a:txBody>
+                    <a:bodyPr/>
+                    <a:lstStyle/>
+                    <a:p>
+                      <a:pPr algn="r" indent="0" marL="0">
+                        <a:buNone/>
+                      </a:pPr>
+                      <a:r>
+                        <a:rPr lang="en-US" sz="900" b="1" dirty="0">
+                          <a:solidFill>
+                            <a:srgbClr val="FFFFFF"/>
+                          </a:solidFill>
+                          <a:latin typeface="Calibri" pitchFamily="34" charset="0"/>
+                          <a:ea typeface="Calibri" pitchFamily="34" charset="-122"/>
+                          <a:cs typeface="Calibri" pitchFamily="34" charset="-120"/>
+                        </a:rPr>
+                        <a:t>Net sector</a:t>
+                      </a:r>
+                      <a:endParaRPr lang="en-US" sz="900" dirty="0">
+                        <a:latin typeface="Calibri" charset="0"/>
+                        <a:ea typeface="Calibri" charset="0"/>
+                        <a:cs typeface="Calibri" charset="0"/>
+                      </a:endParaRPr>
+                    </a:p>
+                  </a:txBody>
+                  <a:tcPr marL="50800" marR="50800" marT="50800" marB="50800">
+                    <a:lnL w="6350" cap="flat" cmpd="sng" algn="ctr">
+                      <a:solidFill>
+                        <a:srgbClr val="E3E7F0"/>
+                      </a:solidFill>
+                      <a:prstDash val="solid"/>
+                      <a:round/>
+                      <a:headEnd type="none" w="med" len="med"/>
+                      <a:tailEnd type="none" w="med" len="med"/>
+                    </a:lnL>
+                    <a:lnR w="6350" cap="flat" cmpd="sng" algn="ctr">
+                      <a:solidFill>
+                        <a:srgbClr val="E3E7F0"/>
+                      </a:solidFill>
+                      <a:prstDash val="solid"/>
+                      <a:round/>
+                      <a:headEnd type="none" w="med" len="med"/>
+                      <a:tailEnd type="none" w="med" len="med"/>
+                    </a:lnR>
+                    <a:lnT w="6350" cap="flat" cmpd="sng" algn="ctr">
+                      <a:solidFill>
+                        <a:srgbClr val="E3E7F0"/>
+                      </a:solidFill>
+                      <a:prstDash val="solid"/>
+                      <a:round/>
+                      <a:headEnd type="none" w="med" len="med"/>
+                      <a:tailEnd type="none" w="med" len="med"/>
+                    </a:lnT>
+                    <a:lnB w="6350" cap="flat" cmpd="sng" algn="ctr">
+                      <a:solidFill>
+                        <a:srgbClr val="E3E7F0"/>
+                      </a:solidFill>
+                      <a:prstDash val="solid"/>
+                      <a:round/>
+                      <a:headEnd type="none" w="med" len="med"/>
+                      <a:tailEnd type="none" w="med" len="med"/>
+                    </a:lnB>
+                    <a:solidFill>
+                      <a:srgbClr val="1E2761"/>
+                    </a:solidFill>
+                  </a:tcPr>
+                </a:tc>
+                <a:tc>
+                  <a:txBody>
+                    <a:bodyPr/>
+                    <a:lstStyle/>
+                    <a:p>
+                      <a:pPr algn="r" indent="0" marL="0">
+                        <a:buNone/>
+                      </a:pPr>
+                      <a:r>
+                        <a:rPr lang="en-US" sz="900" b="1" dirty="0">
+                          <a:solidFill>
+                            <a:srgbClr val="FFFFFF"/>
+                          </a:solidFill>
+                          <a:latin typeface="Calibri" pitchFamily="34" charset="0"/>
+                          <a:ea typeface="Calibri" pitchFamily="34" charset="-122"/>
+                          <a:cs typeface="Calibri" pitchFamily="34" charset="-120"/>
+                        </a:rPr>
+                        <a:t>Spread</a:t>
+                      </a:r>
+                      <a:endParaRPr lang="en-US" sz="900" dirty="0">
+                        <a:latin typeface="Calibri" charset="0"/>
+                        <a:ea typeface="Calibri" charset="0"/>
+                        <a:cs typeface="Calibri" charset="0"/>
+                      </a:endParaRPr>
+                    </a:p>
+                  </a:txBody>
+                  <a:tcPr marL="50800" marR="50800" marT="50800" marB="50800">
+                    <a:lnL w="6350" cap="flat" cmpd="sng" algn="ctr">
+                      <a:solidFill>
+                        <a:srgbClr val="E3E7F0"/>
+                      </a:solidFill>
+                      <a:prstDash val="solid"/>
+                      <a:round/>
+                      <a:headEnd type="none" w="med" len="med"/>
+                      <a:tailEnd type="none" w="med" len="med"/>
+                    </a:lnL>
+                    <a:lnR w="6350" cap="flat" cmpd="sng" algn="ctr">
+                      <a:solidFill>
+                        <a:srgbClr val="E3E7F0"/>
+                      </a:solidFill>
+                      <a:prstDash val="solid"/>
+                      <a:round/>
+                      <a:headEnd type="none" w="med" len="med"/>
+                      <a:tailEnd type="none" w="med" len="med"/>
+                    </a:lnR>
+                    <a:lnT w="6350" cap="flat" cmpd="sng" algn="ctr">
+                      <a:solidFill>
+                        <a:srgbClr val="E3E7F0"/>
+                      </a:solidFill>
+                      <a:prstDash val="solid"/>
+                      <a:round/>
+                      <a:headEnd type="none" w="med" len="med"/>
+                      <a:tailEnd type="none" w="med" len="med"/>
+                    </a:lnT>
+                    <a:lnB w="6350" cap="flat" cmpd="sng" algn="ctr">
+                      <a:solidFill>
+                        <a:srgbClr val="E3E7F0"/>
+                      </a:solidFill>
+                      <a:prstDash val="solid"/>
+                      <a:round/>
+                      <a:headEnd type="none" w="med" len="med"/>
+                      <a:tailEnd type="none" w="med" len="med"/>
+                    </a:lnB>
+                    <a:solidFill>
+                      <a:srgbClr val="1E2761"/>
+                    </a:solidFill>
+                  </a:tcPr>
+                </a:tc>
+                <a:tc>
+                  <a:txBody>
+                    <a:bodyPr/>
+                    <a:lstStyle/>
+                    <a:p>
+                      <a:pPr algn="r" indent="0" marL="0">
+                        <a:buNone/>
+                      </a:pPr>
+                      <a:r>
+                        <a:rPr lang="en-US" sz="900" b="1" dirty="0">
+                          <a:solidFill>
+                            <a:srgbClr val="FFFFFF"/>
+                          </a:solidFill>
+                          <a:latin typeface="Calibri" pitchFamily="34" charset="0"/>
+                          <a:ea typeface="Calibri" pitchFamily="34" charset="-122"/>
+                          <a:cs typeface="Calibri" pitchFamily="34" charset="-120"/>
+                        </a:rPr>
+                        <a:t>Vol</a:t>
+                      </a:r>
+                      <a:endParaRPr lang="en-US" sz="900" dirty="0">
+                        <a:latin typeface="Calibri" charset="0"/>
+                        <a:ea typeface="Calibri" charset="0"/>
+                        <a:cs typeface="Calibri" charset="0"/>
+                      </a:endParaRPr>
+                    </a:p>
+                  </a:txBody>
+                  <a:tcPr marL="50800" marR="50800" marT="50800" marB="50800">
+                    <a:lnL w="6350" cap="flat" cmpd="sng" algn="ctr">
+                      <a:solidFill>
+                        <a:srgbClr val="E3E7F0"/>
+                      </a:solidFill>
+                      <a:prstDash val="solid"/>
+                      <a:round/>
+                      <a:headEnd type="none" w="med" len="med"/>
+                      <a:tailEnd type="none" w="med" len="med"/>
+                    </a:lnL>
+                    <a:lnR w="6350" cap="flat" cmpd="sng" algn="ctr">
+                      <a:solidFill>
+                        <a:srgbClr val="E3E7F0"/>
+                      </a:solidFill>
+                      <a:prstDash val="solid"/>
+                      <a:round/>
+                      <a:headEnd type="none" w="med" len="med"/>
+                      <a:tailEnd type="none" w="med" len="med"/>
+                    </a:lnR>
+                    <a:lnT w="6350" cap="flat" cmpd="sng" algn="ctr">
+                      <a:solidFill>
+                        <a:srgbClr val="E3E7F0"/>
+                      </a:solidFill>
+                      <a:prstDash val="solid"/>
+                      <a:round/>
+                      <a:headEnd type="none" w="med" len="med"/>
+                      <a:tailEnd type="none" w="med" len="med"/>
+                    </a:lnT>
+                    <a:lnB w="6350" cap="flat" cmpd="sng" algn="ctr">
+                      <a:solidFill>
+                        <a:srgbClr val="E3E7F0"/>
+                      </a:solidFill>
+                      <a:prstDash val="solid"/>
+                      <a:round/>
+                      <a:headEnd type="none" w="med" len="med"/>
+                      <a:tailEnd type="none" w="med" len="med"/>
+                    </a:lnB>
+                    <a:solidFill>
+                      <a:srgbClr val="1E2761"/>
+                    </a:solidFill>
+                  </a:tcPr>
+                </a:tc>
+                <a:tc>
+                  <a:txBody>
+                    <a:bodyPr/>
+                    <a:lstStyle/>
+                    <a:p>
+                      <a:pPr algn="r" indent="0" marL="0">
+                        <a:buNone/>
+                      </a:pPr>
+                      <a:r>
+                        <a:rPr lang="en-US" sz="900" b="1" dirty="0">
+                          <a:solidFill>
+                            <a:srgbClr val="FFFFFF"/>
+                          </a:solidFill>
+                          <a:latin typeface="Calibri" pitchFamily="34" charset="0"/>
+                          <a:ea typeface="Calibri" pitchFamily="34" charset="-122"/>
+                          <a:cs typeface="Calibri" pitchFamily="34" charset="-120"/>
+                        </a:rPr>
+                        <a:t>IR</a:t>
+                      </a:r>
+                      <a:endParaRPr lang="en-US" sz="900" dirty="0">
+                        <a:latin typeface="Calibri" charset="0"/>
+                        <a:ea typeface="Calibri" charset="0"/>
+                        <a:cs typeface="Calibri" charset="0"/>
+                      </a:endParaRPr>
+                    </a:p>
+                  </a:txBody>
+                  <a:tcPr marL="50800" marR="50800" marT="50800" marB="50800">
+                    <a:lnL w="6350" cap="flat" cmpd="sng" algn="ctr">
+                      <a:solidFill>
+                        <a:srgbClr val="E3E7F0"/>
+                      </a:solidFill>
+                      <a:prstDash val="solid"/>
+                      <a:round/>
+                      <a:headEnd type="none" w="med" len="med"/>
+                      <a:tailEnd type="none" w="med" len="med"/>
+                    </a:lnL>
+                    <a:lnR w="6350" cap="flat" cmpd="sng" algn="ctr">
+                      <a:solidFill>
+                        <a:srgbClr val="E3E7F0"/>
+                      </a:solidFill>
+                      <a:prstDash val="solid"/>
+                      <a:round/>
+                      <a:headEnd type="none" w="med" len="med"/>
+                      <a:tailEnd type="none" w="med" len="med"/>
+                    </a:lnR>
+                    <a:lnT w="6350" cap="flat" cmpd="sng" algn="ctr">
+                      <a:solidFill>
+                        <a:srgbClr val="E3E7F0"/>
+                      </a:solidFill>
+                      <a:prstDash val="solid"/>
+                      <a:round/>
+                      <a:headEnd type="none" w="med" len="med"/>
+                      <a:tailEnd type="none" w="med" len="med"/>
+                    </a:lnT>
+                    <a:lnB w="6350" cap="flat" cmpd="sng" algn="ctr">
+                      <a:solidFill>
+                        <a:srgbClr val="E3E7F0"/>
+                      </a:solidFill>
+                      <a:prstDash val="solid"/>
+                      <a:round/>
+                      <a:headEnd type="none" w="med" len="med"/>
+                      <a:tailEnd type="none" w="med" len="med"/>
+                    </a:lnB>
+                    <a:solidFill>
+                      <a:srgbClr val="1E2761"/>
+                    </a:solidFill>
+                  </a:tcPr>
+                </a:tc>
+              </a:tr>
+              <a:tr h="210312">
+                <a:tc>
+                  <a:txBody>
+                    <a:bodyPr/>
+                    <a:lstStyle/>
+                    <a:p>
+                      <a:pPr algn="l" indent="0" marL="0">
+                        <a:buNone/>
+                      </a:pPr>
+                      <a:r>
+                        <a:rPr lang="en-US" sz="950" dirty="0">
+                          <a:solidFill>
+                            <a:srgbClr val="1A1A1A"/>
+                          </a:solidFill>
+                          <a:latin typeface="Calibri" pitchFamily="34" charset="0"/>
+                          <a:ea typeface="Calibri" pitchFamily="34" charset="-122"/>
+                          <a:cs typeface="Calibri" pitchFamily="34" charset="-120"/>
+                        </a:rPr>
+                        <a:t>none (traded book)</a:t>
+                      </a:r>
+                      <a:endParaRPr lang="en-US" sz="950" dirty="0">
+                        <a:latin typeface="Calibri" charset="0"/>
+                        <a:ea typeface="Calibri" charset="0"/>
+                        <a:cs typeface="Calibri" charset="0"/>
+                      </a:endParaRPr>
+                    </a:p>
+                  </a:txBody>
+                  <a:tcPr marL="50800" marR="50800" marT="50800" marB="50800">
+                    <a:lnL w="6350" cap="flat" cmpd="sng" algn="ctr">
+                      <a:solidFill>
+                        <a:srgbClr val="E3E7F0"/>
+                      </a:solidFill>
+                      <a:prstDash val="solid"/>
+                      <a:round/>
+                      <a:headEnd type="none" w="med" len="med"/>
+                      <a:tailEnd type="none" w="med" len="med"/>
+                    </a:lnL>
+                    <a:lnR w="6350" cap="flat" cmpd="sng" algn="ctr">
+                      <a:solidFill>
+                        <a:srgbClr val="E3E7F0"/>
+                      </a:solidFill>
+                      <a:prstDash val="solid"/>
+                      <a:round/>
+                      <a:headEnd type="none" w="med" len="med"/>
+                      <a:tailEnd type="none" w="med" len="med"/>
+                    </a:lnR>
+                    <a:lnT w="6350" cap="flat" cmpd="sng" algn="ctr">
+                      <a:solidFill>
+                        <a:srgbClr val="E3E7F0"/>
+                      </a:solidFill>
+                      <a:prstDash val="solid"/>
+                      <a:round/>
+                      <a:headEnd type="none" w="med" len="med"/>
+                      <a:tailEnd type="none" w="med" len="med"/>
+                    </a:lnT>
+                    <a:lnB w="6350" cap="flat" cmpd="sng" algn="ctr">
+                      <a:solidFill>
+                        <a:srgbClr val="E3E7F0"/>
+                      </a:solidFill>
+                      <a:prstDash val="solid"/>
+                      <a:round/>
+                      <a:headEnd type="none" w="med" len="med"/>
+                      <a:tailEnd type="none" w="med" len="med"/>
+                    </a:lnB>
+                  </a:tcPr>
+                </a:tc>
+                <a:tc>
+                  <a:txBody>
+                    <a:bodyPr/>
+                    <a:lstStyle/>
+                    <a:p>
+                      <a:pPr algn="r" indent="0" marL="0">
+                        <a:buNone/>
+                      </a:pPr>
+                      <a:r>
+                        <a:rPr lang="en-US" sz="950" dirty="0">
+                          <a:solidFill>
+                            <a:srgbClr val="1A1A1A"/>
+                          </a:solidFill>
+                          <a:latin typeface="Calibri" pitchFamily="34" charset="0"/>
+                          <a:ea typeface="Calibri" pitchFamily="34" charset="-122"/>
+                          <a:cs typeface="Calibri" pitchFamily="34" charset="-120"/>
+                        </a:rPr>
+                        <a:t>89.7%</a:t>
+                      </a:r>
+                      <a:endParaRPr lang="en-US" sz="950" dirty="0">
+                        <a:latin typeface="Calibri" charset="0"/>
+                        <a:ea typeface="Calibri" charset="0"/>
+                        <a:cs typeface="Calibri" charset="0"/>
+                      </a:endParaRPr>
+                    </a:p>
+                  </a:txBody>
+                  <a:tcPr marL="50800" marR="50800" marT="50800" marB="50800">
+                    <a:lnL w="6350" cap="flat" cmpd="sng" algn="ctr">
+                      <a:solidFill>
+                        <a:srgbClr val="E3E7F0"/>
+                      </a:solidFill>
+                      <a:prstDash val="solid"/>
+                      <a:round/>
+                      <a:headEnd type="none" w="med" len="med"/>
+                      <a:tailEnd type="none" w="med" len="med"/>
+                    </a:lnL>
+                    <a:lnR w="6350" cap="flat" cmpd="sng" algn="ctr">
+                      <a:solidFill>
+                        <a:srgbClr val="E3E7F0"/>
+                      </a:solidFill>
+                      <a:prstDash val="solid"/>
+                      <a:round/>
+                      <a:headEnd type="none" w="med" len="med"/>
+                      <a:tailEnd type="none" w="med" len="med"/>
+                    </a:lnR>
+                    <a:lnT w="6350" cap="flat" cmpd="sng" algn="ctr">
+                      <a:solidFill>
+                        <a:srgbClr val="E3E7F0"/>
+                      </a:solidFill>
+                      <a:prstDash val="solid"/>
+                      <a:round/>
+                      <a:headEnd type="none" w="med" len="med"/>
+                      <a:tailEnd type="none" w="med" len="med"/>
+                    </a:lnT>
+                    <a:lnB w="6350" cap="flat" cmpd="sng" algn="ctr">
+                      <a:solidFill>
+                        <a:srgbClr val="E3E7F0"/>
+                      </a:solidFill>
+                      <a:prstDash val="solid"/>
+                      <a:round/>
+                      <a:headEnd type="none" w="med" len="med"/>
+                      <a:tailEnd type="none" w="med" len="med"/>
+                    </a:lnB>
+                  </a:tcPr>
+                </a:tc>
+                <a:tc>
+                  <a:txBody>
+                    <a:bodyPr/>
+                    <a:lstStyle/>
+                    <a:p>
+                      <a:pPr algn="r" indent="0" marL="0">
+                        <a:buNone/>
+                      </a:pPr>
+                      <a:r>
+                        <a:rPr lang="en-US" sz="950" dirty="0">
+                          <a:solidFill>
+                            <a:srgbClr val="1A1A1A"/>
+                          </a:solidFill>
+                          <a:latin typeface="Calibri" pitchFamily="34" charset="0"/>
+                          <a:ea typeface="Calibri" pitchFamily="34" charset="-122"/>
+                          <a:cs typeface="Calibri" pitchFamily="34" charset="-120"/>
+                        </a:rPr>
+                        <a:t>+15.62%</a:t>
+                      </a:r>
+                      <a:endParaRPr lang="en-US" sz="950" dirty="0">
+                        <a:latin typeface="Calibri" charset="0"/>
+                        <a:ea typeface="Calibri" charset="0"/>
+                        <a:cs typeface="Calibri" charset="0"/>
+                      </a:endParaRPr>
+                    </a:p>
+                  </a:txBody>
+                  <a:tcPr marL="50800" marR="50800" marT="50800" marB="50800">
+                    <a:lnL w="6350" cap="flat" cmpd="sng" algn="ctr">
+                      <a:solidFill>
+                        <a:srgbClr val="E3E7F0"/>
+                      </a:solidFill>
+                      <a:prstDash val="solid"/>
+                      <a:round/>
+                      <a:headEnd type="none" w="med" len="med"/>
+                      <a:tailEnd type="none" w="med" len="med"/>
+                    </a:lnL>
+                    <a:lnR w="6350" cap="flat" cmpd="sng" algn="ctr">
+                      <a:solidFill>
+                        <a:srgbClr val="E3E7F0"/>
+                      </a:solidFill>
+                      <a:prstDash val="solid"/>
+                      <a:round/>
+                      <a:headEnd type="none" w="med" len="med"/>
+                      <a:tailEnd type="none" w="med" len="med"/>
+                    </a:lnR>
+                    <a:lnT w="6350" cap="flat" cmpd="sng" algn="ctr">
+                      <a:solidFill>
+                        <a:srgbClr val="E3E7F0"/>
+                      </a:solidFill>
+                      <a:prstDash val="solid"/>
+                      <a:round/>
+                      <a:headEnd type="none" w="med" len="med"/>
+                      <a:tailEnd type="none" w="med" len="med"/>
+                    </a:lnT>
+                    <a:lnB w="6350" cap="flat" cmpd="sng" algn="ctr">
+                      <a:solidFill>
+                        <a:srgbClr val="E3E7F0"/>
+                      </a:solidFill>
+                      <a:prstDash val="solid"/>
+                      <a:round/>
+                      <a:headEnd type="none" w="med" len="med"/>
+                      <a:tailEnd type="none" w="med" len="med"/>
+                    </a:lnB>
+                  </a:tcPr>
+                </a:tc>
+                <a:tc>
+                  <a:txBody>
+                    <a:bodyPr/>
+                    <a:lstStyle/>
+                    <a:p>
+                      <a:pPr algn="r" indent="0" marL="0">
+                        <a:buNone/>
+                      </a:pPr>
+                      <a:r>
+                        <a:rPr lang="en-US" sz="950" dirty="0">
+                          <a:solidFill>
+                            <a:srgbClr val="1A1A1A"/>
+                          </a:solidFill>
+                          <a:latin typeface="Calibri" pitchFamily="34" charset="0"/>
+                          <a:ea typeface="Calibri" pitchFamily="34" charset="-122"/>
+                          <a:cs typeface="Calibri" pitchFamily="34" charset="-120"/>
+                        </a:rPr>
+                        <a:t>13.15%</a:t>
+                      </a:r>
+                      <a:endParaRPr lang="en-US" sz="950" dirty="0">
+                        <a:latin typeface="Calibri" charset="0"/>
+                        <a:ea typeface="Calibri" charset="0"/>
+                        <a:cs typeface="Calibri" charset="0"/>
+                      </a:endParaRPr>
+                    </a:p>
+                  </a:txBody>
+                  <a:tcPr marL="50800" marR="50800" marT="50800" marB="50800">
+                    <a:lnL w="6350" cap="flat" cmpd="sng" algn="ctr">
+                      <a:solidFill>
+                        <a:srgbClr val="E3E7F0"/>
+                      </a:solidFill>
+                      <a:prstDash val="solid"/>
+                      <a:round/>
+                      <a:headEnd type="none" w="med" len="med"/>
+                      <a:tailEnd type="none" w="med" len="med"/>
+                    </a:lnL>
+                    <a:lnR w="6350" cap="flat" cmpd="sng" algn="ctr">
+                      <a:solidFill>
+                        <a:srgbClr val="E3E7F0"/>
+                      </a:solidFill>
+                      <a:prstDash val="solid"/>
+                      <a:round/>
+                      <a:headEnd type="none" w="med" len="med"/>
+                      <a:tailEnd type="none" w="med" len="med"/>
+                    </a:lnR>
+                    <a:lnT w="6350" cap="flat" cmpd="sng" algn="ctr">
+                      <a:solidFill>
+                        <a:srgbClr val="E3E7F0"/>
+                      </a:solidFill>
+                      <a:prstDash val="solid"/>
+                      <a:round/>
+                      <a:headEnd type="none" w="med" len="med"/>
+                      <a:tailEnd type="none" w="med" len="med"/>
+                    </a:lnT>
+                    <a:lnB w="6350" cap="flat" cmpd="sng" algn="ctr">
+                      <a:solidFill>
+                        <a:srgbClr val="E3E7F0"/>
+                      </a:solidFill>
+                      <a:prstDash val="solid"/>
+                      <a:round/>
+                      <a:headEnd type="none" w="med" len="med"/>
+                      <a:tailEnd type="none" w="med" len="med"/>
+                    </a:lnB>
+                  </a:tcPr>
+                </a:tc>
+                <a:tc>
+                  <a:txBody>
+                    <a:bodyPr/>
+                    <a:lstStyle/>
+                    <a:p>
+                      <a:pPr algn="r" indent="0" marL="0">
+                        <a:buNone/>
+                      </a:pPr>
+                      <a:r>
+                        <a:rPr lang="en-US" sz="950" dirty="0">
+                          <a:solidFill>
+                            <a:srgbClr val="1A1A1A"/>
+                          </a:solidFill>
+                          <a:latin typeface="Calibri" pitchFamily="34" charset="0"/>
+                          <a:ea typeface="Calibri" pitchFamily="34" charset="-122"/>
+                          <a:cs typeface="Calibri" pitchFamily="34" charset="-120"/>
+                        </a:rPr>
+                        <a:t>+0.88</a:t>
+                      </a:r>
+                      <a:endParaRPr lang="en-US" sz="950" dirty="0">
+                        <a:latin typeface="Calibri" charset="0"/>
+                        <a:ea typeface="Calibri" charset="0"/>
+                        <a:cs typeface="Calibri" charset="0"/>
+                      </a:endParaRPr>
+                    </a:p>
+                  </a:txBody>
+                  <a:tcPr marL="50800" marR="50800" marT="50800" marB="50800">
+                    <a:lnL w="6350" cap="flat" cmpd="sng" algn="ctr">
+                      <a:solidFill>
+                        <a:srgbClr val="E3E7F0"/>
+                      </a:solidFill>
+                      <a:prstDash val="solid"/>
+                      <a:round/>
+                      <a:headEnd type="none" w="med" len="med"/>
+                      <a:tailEnd type="none" w="med" len="med"/>
+                    </a:lnL>
+                    <a:lnR w="6350" cap="flat" cmpd="sng" algn="ctr">
+                      <a:solidFill>
+                        <a:srgbClr val="E3E7F0"/>
+                      </a:solidFill>
+                      <a:prstDash val="solid"/>
+                      <a:round/>
+                      <a:headEnd type="none" w="med" len="med"/>
+                      <a:tailEnd type="none" w="med" len="med"/>
+                    </a:lnR>
+                    <a:lnT w="6350" cap="flat" cmpd="sng" algn="ctr">
+                      <a:solidFill>
+                        <a:srgbClr val="E3E7F0"/>
+                      </a:solidFill>
+                      <a:prstDash val="solid"/>
+                      <a:round/>
+                      <a:headEnd type="none" w="med" len="med"/>
+                      <a:tailEnd type="none" w="med" len="med"/>
+                    </a:lnT>
+                    <a:lnB w="6350" cap="flat" cmpd="sng" algn="ctr">
+                      <a:solidFill>
+                        <a:srgbClr val="E3E7F0"/>
+                      </a:solidFill>
+                      <a:prstDash val="solid"/>
+                      <a:round/>
+                      <a:headEnd type="none" w="med" len="med"/>
+                      <a:tailEnd type="none" w="med" len="med"/>
+                    </a:lnB>
+                  </a:tcPr>
+                </a:tc>
+              </a:tr>
+              <a:tr h="210312">
+                <a:tc>
+                  <a:txBody>
+                    <a:bodyPr/>
+                    <a:lstStyle/>
+                    <a:p>
+                      <a:pPr algn="l" indent="0" marL="0">
+                        <a:buNone/>
+                      </a:pPr>
+                      <a:r>
+                        <a:rPr lang="en-US" sz="950" dirty="0">
+                          <a:solidFill>
+                            <a:srgbClr val="1A1A1A"/>
+                          </a:solidFill>
+                          <a:latin typeface="Calibri" pitchFamily="34" charset="0"/>
+                          <a:ea typeface="Calibri" pitchFamily="34" charset="-122"/>
+                          <a:cs typeface="Calibri" pitchFamily="34" charset="-120"/>
+                        </a:rPr>
+                        <a:t>a quarter removed</a:t>
+                      </a:r>
+                      <a:endParaRPr lang="en-US" sz="950" dirty="0">
+                        <a:latin typeface="Calibri" charset="0"/>
+                        <a:ea typeface="Calibri" charset="0"/>
+                        <a:cs typeface="Calibri" charset="0"/>
+                      </a:endParaRPr>
+                    </a:p>
+                  </a:txBody>
+                  <a:tcPr marL="50800" marR="50800" marT="50800" marB="50800">
+                    <a:lnL w="6350" cap="flat" cmpd="sng" algn="ctr">
+                      <a:solidFill>
+                        <a:srgbClr val="E3E7F0"/>
+                      </a:solidFill>
+                      <a:prstDash val="solid"/>
+                      <a:round/>
+                      <a:headEnd type="none" w="med" len="med"/>
+                      <a:tailEnd type="none" w="med" len="med"/>
+                    </a:lnL>
+                    <a:lnR w="6350" cap="flat" cmpd="sng" algn="ctr">
+                      <a:solidFill>
+                        <a:srgbClr val="E3E7F0"/>
+                      </a:solidFill>
+                      <a:prstDash val="solid"/>
+                      <a:round/>
+                      <a:headEnd type="none" w="med" len="med"/>
+                      <a:tailEnd type="none" w="med" len="med"/>
+                    </a:lnR>
+                    <a:lnT w="6350" cap="flat" cmpd="sng" algn="ctr">
+                      <a:solidFill>
+                        <a:srgbClr val="E3E7F0"/>
+                      </a:solidFill>
+                      <a:prstDash val="solid"/>
+                      <a:round/>
+                      <a:headEnd type="none" w="med" len="med"/>
+                      <a:tailEnd type="none" w="med" len="med"/>
+                    </a:lnT>
+                    <a:lnB w="6350" cap="flat" cmpd="sng" algn="ctr">
+                      <a:solidFill>
+                        <a:srgbClr val="E3E7F0"/>
+                      </a:solidFill>
+                      <a:prstDash val="solid"/>
+                      <a:round/>
+                      <a:headEnd type="none" w="med" len="med"/>
+                      <a:tailEnd type="none" w="med" len="med"/>
+                    </a:lnB>
+                  </a:tcPr>
+                </a:tc>
+                <a:tc>
+                  <a:txBody>
+                    <a:bodyPr/>
+                    <a:lstStyle/>
+                    <a:p>
+                      <a:pPr algn="r" indent="0" marL="0">
+                        <a:buNone/>
+                      </a:pPr>
+                      <a:r>
+                        <a:rPr lang="en-US" sz="950" dirty="0">
+                          <a:solidFill>
+                            <a:srgbClr val="1A1A1A"/>
+                          </a:solidFill>
+                          <a:latin typeface="Calibri" pitchFamily="34" charset="0"/>
+                          <a:ea typeface="Calibri" pitchFamily="34" charset="-122"/>
+                          <a:cs typeface="Calibri" pitchFamily="34" charset="-120"/>
+                        </a:rPr>
+                        <a:t>73.2%</a:t>
+                      </a:r>
+                      <a:endParaRPr lang="en-US" sz="950" dirty="0">
+                        <a:latin typeface="Calibri" charset="0"/>
+                        <a:ea typeface="Calibri" charset="0"/>
+                        <a:cs typeface="Calibri" charset="0"/>
+                      </a:endParaRPr>
+                    </a:p>
+                  </a:txBody>
+                  <a:tcPr marL="50800" marR="50800" marT="50800" marB="50800">
+                    <a:lnL w="6350" cap="flat" cmpd="sng" algn="ctr">
+                      <a:solidFill>
+                        <a:srgbClr val="E3E7F0"/>
+                      </a:solidFill>
+                      <a:prstDash val="solid"/>
+                      <a:round/>
+                      <a:headEnd type="none" w="med" len="med"/>
+                      <a:tailEnd type="none" w="med" len="med"/>
+                    </a:lnL>
+                    <a:lnR w="6350" cap="flat" cmpd="sng" algn="ctr">
+                      <a:solidFill>
+                        <a:srgbClr val="E3E7F0"/>
+                      </a:solidFill>
+                      <a:prstDash val="solid"/>
+                      <a:round/>
+                      <a:headEnd type="none" w="med" len="med"/>
+                      <a:tailEnd type="none" w="med" len="med"/>
+                    </a:lnR>
+                    <a:lnT w="6350" cap="flat" cmpd="sng" algn="ctr">
+                      <a:solidFill>
+                        <a:srgbClr val="E3E7F0"/>
+                      </a:solidFill>
+                      <a:prstDash val="solid"/>
+                      <a:round/>
+                      <a:headEnd type="none" w="med" len="med"/>
+                      <a:tailEnd type="none" w="med" len="med"/>
+                    </a:lnT>
+                    <a:lnB w="6350" cap="flat" cmpd="sng" algn="ctr">
+                      <a:solidFill>
+                        <a:srgbClr val="E3E7F0"/>
+                      </a:solidFill>
+                      <a:prstDash val="solid"/>
+                      <a:round/>
+                      <a:headEnd type="none" w="med" len="med"/>
+                      <a:tailEnd type="none" w="med" len="med"/>
+                    </a:lnB>
+                  </a:tcPr>
+                </a:tc>
+                <a:tc>
+                  <a:txBody>
+                    <a:bodyPr/>
+                    <a:lstStyle/>
+                    <a:p>
+                      <a:pPr algn="r" indent="0" marL="0">
+                        <a:buNone/>
+                      </a:pPr>
+                      <a:r>
+                        <a:rPr lang="en-US" sz="950" dirty="0">
+                          <a:solidFill>
+                            <a:srgbClr val="1A1A1A"/>
+                          </a:solidFill>
+                          <a:latin typeface="Calibri" pitchFamily="34" charset="0"/>
+                          <a:ea typeface="Calibri" pitchFamily="34" charset="-122"/>
+                          <a:cs typeface="Calibri" pitchFamily="34" charset="-120"/>
+                        </a:rPr>
+                        <a:t>+16.16%</a:t>
+                      </a:r>
+                      <a:endParaRPr lang="en-US" sz="950" dirty="0">
+                        <a:latin typeface="Calibri" charset="0"/>
+                        <a:ea typeface="Calibri" charset="0"/>
+                        <a:cs typeface="Calibri" charset="0"/>
+                      </a:endParaRPr>
+                    </a:p>
+                  </a:txBody>
+                  <a:tcPr marL="50800" marR="50800" marT="50800" marB="50800">
+                    <a:lnL w="6350" cap="flat" cmpd="sng" algn="ctr">
+                      <a:solidFill>
+                        <a:srgbClr val="E3E7F0"/>
+                      </a:solidFill>
+                      <a:prstDash val="solid"/>
+                      <a:round/>
+                      <a:headEnd type="none" w="med" len="med"/>
+                      <a:tailEnd type="none" w="med" len="med"/>
+                    </a:lnL>
+                    <a:lnR w="6350" cap="flat" cmpd="sng" algn="ctr">
+                      <a:solidFill>
+                        <a:srgbClr val="E3E7F0"/>
+                      </a:solidFill>
+                      <a:prstDash val="solid"/>
+                      <a:round/>
+                      <a:headEnd type="none" w="med" len="med"/>
+                      <a:tailEnd type="none" w="med" len="med"/>
+                    </a:lnR>
+                    <a:lnT w="6350" cap="flat" cmpd="sng" algn="ctr">
+                      <a:solidFill>
+                        <a:srgbClr val="E3E7F0"/>
+                      </a:solidFill>
+                      <a:prstDash val="solid"/>
+                      <a:round/>
+                      <a:headEnd type="none" w="med" len="med"/>
+                      <a:tailEnd type="none" w="med" len="med"/>
+                    </a:lnT>
+                    <a:lnB w="6350" cap="flat" cmpd="sng" algn="ctr">
+                      <a:solidFill>
+                        <a:srgbClr val="E3E7F0"/>
+                      </a:solidFill>
+                      <a:prstDash val="solid"/>
+                      <a:round/>
+                      <a:headEnd type="none" w="med" len="med"/>
+                      <a:tailEnd type="none" w="med" len="med"/>
+                    </a:lnB>
+                  </a:tcPr>
+                </a:tc>
+                <a:tc>
+                  <a:txBody>
+                    <a:bodyPr/>
+                    <a:lstStyle/>
+                    <a:p>
+                      <a:pPr algn="r" indent="0" marL="0">
+                        <a:buNone/>
+                      </a:pPr>
+                      <a:r>
+                        <a:rPr lang="en-US" sz="950" dirty="0">
+                          <a:solidFill>
+                            <a:srgbClr val="1A1A1A"/>
+                          </a:solidFill>
+                          <a:latin typeface="Calibri" pitchFamily="34" charset="0"/>
+                          <a:ea typeface="Calibri" pitchFamily="34" charset="-122"/>
+                          <a:cs typeface="Calibri" pitchFamily="34" charset="-120"/>
+                        </a:rPr>
+                        <a:t>13.04%</a:t>
+                      </a:r>
+                      <a:endParaRPr lang="en-US" sz="950" dirty="0">
+                        <a:latin typeface="Calibri" charset="0"/>
+                        <a:ea typeface="Calibri" charset="0"/>
+                        <a:cs typeface="Calibri" charset="0"/>
+                      </a:endParaRPr>
+                    </a:p>
+                  </a:txBody>
+                  <a:tcPr marL="50800" marR="50800" marT="50800" marB="50800">
+                    <a:lnL w="6350" cap="flat" cmpd="sng" algn="ctr">
+                      <a:solidFill>
+                        <a:srgbClr val="E3E7F0"/>
+                      </a:solidFill>
+                      <a:prstDash val="solid"/>
+                      <a:round/>
+                      <a:headEnd type="none" w="med" len="med"/>
+                      <a:tailEnd type="none" w="med" len="med"/>
+                    </a:lnL>
+                    <a:lnR w="6350" cap="flat" cmpd="sng" algn="ctr">
+                      <a:solidFill>
+                        <a:srgbClr val="E3E7F0"/>
+                      </a:solidFill>
+                      <a:prstDash val="solid"/>
+                      <a:round/>
+                      <a:headEnd type="none" w="med" len="med"/>
+                      <a:tailEnd type="none" w="med" len="med"/>
+                    </a:lnR>
+                    <a:lnT w="6350" cap="flat" cmpd="sng" algn="ctr">
+                      <a:solidFill>
+                        <a:srgbClr val="E3E7F0"/>
+                      </a:solidFill>
+                      <a:prstDash val="solid"/>
+                      <a:round/>
+                      <a:headEnd type="none" w="med" len="med"/>
+                      <a:tailEnd type="none" w="med" len="med"/>
+                    </a:lnT>
+                    <a:lnB w="6350" cap="flat" cmpd="sng" algn="ctr">
+                      <a:solidFill>
+                        <a:srgbClr val="E3E7F0"/>
+                      </a:solidFill>
+                      <a:prstDash val="solid"/>
+                      <a:round/>
+                      <a:headEnd type="none" w="med" len="med"/>
+                      <a:tailEnd type="none" w="med" len="med"/>
+                    </a:lnB>
+                  </a:tcPr>
+                </a:tc>
+                <a:tc>
+                  <a:txBody>
+                    <a:bodyPr/>
+                    <a:lstStyle/>
+                    <a:p>
+                      <a:pPr algn="r" indent="0" marL="0">
+                        <a:buNone/>
+                      </a:pPr>
+                      <a:r>
+                        <a:rPr lang="en-US" sz="950" dirty="0">
+                          <a:solidFill>
+                            <a:srgbClr val="1A1A1A"/>
+                          </a:solidFill>
+                          <a:latin typeface="Calibri" pitchFamily="34" charset="0"/>
+                          <a:ea typeface="Calibri" pitchFamily="34" charset="-122"/>
+                          <a:cs typeface="Calibri" pitchFamily="34" charset="-120"/>
+                        </a:rPr>
+                        <a:t>+0.93</a:t>
+                      </a:r>
+                      <a:endParaRPr lang="en-US" sz="950" dirty="0">
+                        <a:latin typeface="Calibri" charset="0"/>
+                        <a:ea typeface="Calibri" charset="0"/>
+                        <a:cs typeface="Calibri" charset="0"/>
+                      </a:endParaRPr>
+                    </a:p>
+                  </a:txBody>
+                  <a:tcPr marL="50800" marR="50800" marT="50800" marB="50800">
+                    <a:lnL w="6350" cap="flat" cmpd="sng" algn="ctr">
+                      <a:solidFill>
+                        <a:srgbClr val="E3E7F0"/>
+                      </a:solidFill>
+                      <a:prstDash val="solid"/>
+                      <a:round/>
+                      <a:headEnd type="none" w="med" len="med"/>
+                      <a:tailEnd type="none" w="med" len="med"/>
+                    </a:lnL>
+                    <a:lnR w="6350" cap="flat" cmpd="sng" algn="ctr">
+                      <a:solidFill>
+                        <a:srgbClr val="E3E7F0"/>
+                      </a:solidFill>
+                      <a:prstDash val="solid"/>
+                      <a:round/>
+                      <a:headEnd type="none" w="med" len="med"/>
+                      <a:tailEnd type="none" w="med" len="med"/>
+                    </a:lnR>
+                    <a:lnT w="6350" cap="flat" cmpd="sng" algn="ctr">
+                      <a:solidFill>
+                        <a:srgbClr val="E3E7F0"/>
+                      </a:solidFill>
+                      <a:prstDash val="solid"/>
+                      <a:round/>
+                      <a:headEnd type="none" w="med" len="med"/>
+                      <a:tailEnd type="none" w="med" len="med"/>
+                    </a:lnT>
+                    <a:lnB w="6350" cap="flat" cmpd="sng" algn="ctr">
+                      <a:solidFill>
+                        <a:srgbClr val="E3E7F0"/>
+                      </a:solidFill>
+                      <a:prstDash val="solid"/>
+                      <a:round/>
+                      <a:headEnd type="none" w="med" len="med"/>
+                      <a:tailEnd type="none" w="med" len="med"/>
+                    </a:lnB>
+                  </a:tcPr>
+                </a:tc>
+              </a:tr>
+              <a:tr h="210312">
+                <a:tc>
+                  <a:txBody>
+                    <a:bodyPr/>
+                    <a:lstStyle/>
+                    <a:p>
+                      <a:pPr algn="l" indent="0" marL="0">
+                        <a:buNone/>
+                      </a:pPr>
+                      <a:r>
+                        <a:rPr lang="en-US" sz="950" dirty="0">
+                          <a:solidFill>
+                            <a:srgbClr val="1A1A1A"/>
+                          </a:solidFill>
+                          <a:latin typeface="Calibri" pitchFamily="34" charset="0"/>
+                          <a:ea typeface="Calibri" pitchFamily="34" charset="-122"/>
+                          <a:cs typeface="Calibri" pitchFamily="34" charset="-120"/>
+                        </a:rPr>
+                        <a:t>half removed</a:t>
+                      </a:r>
+                      <a:endParaRPr lang="en-US" sz="950" dirty="0">
+                        <a:latin typeface="Calibri" charset="0"/>
+                        <a:ea typeface="Calibri" charset="0"/>
+                        <a:cs typeface="Calibri" charset="0"/>
+                      </a:endParaRPr>
+                    </a:p>
+                  </a:txBody>
+                  <a:tcPr marL="50800" marR="50800" marT="50800" marB="50800">
+                    <a:lnL w="6350" cap="flat" cmpd="sng" algn="ctr">
+                      <a:solidFill>
+                        <a:srgbClr val="E3E7F0"/>
+                      </a:solidFill>
+                      <a:prstDash val="solid"/>
+                      <a:round/>
+                      <a:headEnd type="none" w="med" len="med"/>
+                      <a:tailEnd type="none" w="med" len="med"/>
+                    </a:lnL>
+                    <a:lnR w="6350" cap="flat" cmpd="sng" algn="ctr">
+                      <a:solidFill>
+                        <a:srgbClr val="E3E7F0"/>
+                      </a:solidFill>
+                      <a:prstDash val="solid"/>
+                      <a:round/>
+                      <a:headEnd type="none" w="med" len="med"/>
+                      <a:tailEnd type="none" w="med" len="med"/>
+                    </a:lnR>
+                    <a:lnT w="6350" cap="flat" cmpd="sng" algn="ctr">
+                      <a:solidFill>
+                        <a:srgbClr val="E3E7F0"/>
+                      </a:solidFill>
+                      <a:prstDash val="solid"/>
+                      <a:round/>
+                      <a:headEnd type="none" w="med" len="med"/>
+                      <a:tailEnd type="none" w="med" len="med"/>
+                    </a:lnT>
+                    <a:lnB w="6350" cap="flat" cmpd="sng" algn="ctr">
+                      <a:solidFill>
+                        <a:srgbClr val="E3E7F0"/>
+                      </a:solidFill>
+                      <a:prstDash val="solid"/>
+                      <a:round/>
+                      <a:headEnd type="none" w="med" len="med"/>
+                      <a:tailEnd type="none" w="med" len="med"/>
+                    </a:lnB>
+                  </a:tcPr>
+                </a:tc>
+                <a:tc>
+                  <a:txBody>
+                    <a:bodyPr/>
+                    <a:lstStyle/>
+                    <a:p>
+                      <a:pPr algn="r" indent="0" marL="0">
+                        <a:buNone/>
+                      </a:pPr>
+                      <a:r>
+                        <a:rPr lang="en-US" sz="950" dirty="0">
+                          <a:solidFill>
+                            <a:srgbClr val="1A1A1A"/>
+                          </a:solidFill>
+                          <a:latin typeface="Calibri" pitchFamily="34" charset="0"/>
+                          <a:ea typeface="Calibri" pitchFamily="34" charset="-122"/>
+                          <a:cs typeface="Calibri" pitchFamily="34" charset="-120"/>
+                        </a:rPr>
+                        <a:t>53.6%</a:t>
+                      </a:r>
+                      <a:endParaRPr lang="en-US" sz="950" dirty="0">
+                        <a:latin typeface="Calibri" charset="0"/>
+                        <a:ea typeface="Calibri" charset="0"/>
+                        <a:cs typeface="Calibri" charset="0"/>
+                      </a:endParaRPr>
+                    </a:p>
+                  </a:txBody>
+                  <a:tcPr marL="50800" marR="50800" marT="50800" marB="50800">
+                    <a:lnL w="6350" cap="flat" cmpd="sng" algn="ctr">
+                      <a:solidFill>
+                        <a:srgbClr val="E3E7F0"/>
+                      </a:solidFill>
+                      <a:prstDash val="solid"/>
+                      <a:round/>
+                      <a:headEnd type="none" w="med" len="med"/>
+                      <a:tailEnd type="none" w="med" len="med"/>
+                    </a:lnL>
+                    <a:lnR w="6350" cap="flat" cmpd="sng" algn="ctr">
+                      <a:solidFill>
+                        <a:srgbClr val="E3E7F0"/>
+                      </a:solidFill>
+                      <a:prstDash val="solid"/>
+                      <a:round/>
+                      <a:headEnd type="none" w="med" len="med"/>
+                      <a:tailEnd type="none" w="med" len="med"/>
+                    </a:lnR>
+                    <a:lnT w="6350" cap="flat" cmpd="sng" algn="ctr">
+                      <a:solidFill>
+                        <a:srgbClr val="E3E7F0"/>
+                      </a:solidFill>
+                      <a:prstDash val="solid"/>
+                      <a:round/>
+                      <a:headEnd type="none" w="med" len="med"/>
+                      <a:tailEnd type="none" w="med" len="med"/>
+                    </a:lnT>
+                    <a:lnB w="6350" cap="flat" cmpd="sng" algn="ctr">
+                      <a:solidFill>
+                        <a:srgbClr val="E3E7F0"/>
+                      </a:solidFill>
+                      <a:prstDash val="solid"/>
+                      <a:round/>
+                      <a:headEnd type="none" w="med" len="med"/>
+                      <a:tailEnd type="none" w="med" len="med"/>
+                    </a:lnB>
+                  </a:tcPr>
+                </a:tc>
+                <a:tc>
+                  <a:txBody>
+                    <a:bodyPr/>
+                    <a:lstStyle/>
+                    <a:p>
+                      <a:pPr algn="r" indent="0" marL="0">
+                        <a:buNone/>
+                      </a:pPr>
+                      <a:r>
+                        <a:rPr lang="en-US" sz="950" dirty="0">
+                          <a:solidFill>
+                            <a:srgbClr val="1A1A1A"/>
+                          </a:solidFill>
+                          <a:latin typeface="Calibri" pitchFamily="34" charset="0"/>
+                          <a:ea typeface="Calibri" pitchFamily="34" charset="-122"/>
+                          <a:cs typeface="Calibri" pitchFamily="34" charset="-120"/>
+                        </a:rPr>
+                        <a:t>+16.87%</a:t>
+                      </a:r>
+                      <a:endParaRPr lang="en-US" sz="950" dirty="0">
+                        <a:latin typeface="Calibri" charset="0"/>
+                        <a:ea typeface="Calibri" charset="0"/>
+                        <a:cs typeface="Calibri" charset="0"/>
+                      </a:endParaRPr>
+                    </a:p>
+                  </a:txBody>
+                  <a:tcPr marL="50800" marR="50800" marT="50800" marB="50800">
+                    <a:lnL w="6350" cap="flat" cmpd="sng" algn="ctr">
+                      <a:solidFill>
+                        <a:srgbClr val="E3E7F0"/>
+                      </a:solidFill>
+                      <a:prstDash val="solid"/>
+                      <a:round/>
+                      <a:headEnd type="none" w="med" len="med"/>
+                      <a:tailEnd type="none" w="med" len="med"/>
+                    </a:lnL>
+                    <a:lnR w="6350" cap="flat" cmpd="sng" algn="ctr">
+                      <a:solidFill>
+                        <a:srgbClr val="E3E7F0"/>
+                      </a:solidFill>
+                      <a:prstDash val="solid"/>
+                      <a:round/>
+                      <a:headEnd type="none" w="med" len="med"/>
+                      <a:tailEnd type="none" w="med" len="med"/>
+                    </a:lnR>
+                    <a:lnT w="6350" cap="flat" cmpd="sng" algn="ctr">
+                      <a:solidFill>
+                        <a:srgbClr val="E3E7F0"/>
+                      </a:solidFill>
+                      <a:prstDash val="solid"/>
+                      <a:round/>
+                      <a:headEnd type="none" w="med" len="med"/>
+                      <a:tailEnd type="none" w="med" len="med"/>
+                    </a:lnT>
+                    <a:lnB w="6350" cap="flat" cmpd="sng" algn="ctr">
+                      <a:solidFill>
+                        <a:srgbClr val="E3E7F0"/>
+                      </a:solidFill>
+                      <a:prstDash val="solid"/>
+                      <a:round/>
+                      <a:headEnd type="none" w="med" len="med"/>
+                      <a:tailEnd type="none" w="med" len="med"/>
+                    </a:lnB>
+                  </a:tcPr>
+                </a:tc>
+                <a:tc>
+                  <a:txBody>
+                    <a:bodyPr/>
+                    <a:lstStyle/>
+                    <a:p>
+                      <a:pPr algn="r" indent="0" marL="0">
+                        <a:buNone/>
+                      </a:pPr>
+                      <a:r>
+                        <a:rPr lang="en-US" sz="950" dirty="0">
+                          <a:solidFill>
+                            <a:srgbClr val="1A1A1A"/>
+                          </a:solidFill>
+                          <a:latin typeface="Calibri" pitchFamily="34" charset="0"/>
+                          <a:ea typeface="Calibri" pitchFamily="34" charset="-122"/>
+                          <a:cs typeface="Calibri" pitchFamily="34" charset="-120"/>
+                        </a:rPr>
+                        <a:t>13.14%</a:t>
+                      </a:r>
+                      <a:endParaRPr lang="en-US" sz="950" dirty="0">
+                        <a:latin typeface="Calibri" charset="0"/>
+                        <a:ea typeface="Calibri" charset="0"/>
+                        <a:cs typeface="Calibri" charset="0"/>
+                      </a:endParaRPr>
+                    </a:p>
+                  </a:txBody>
+                  <a:tcPr marL="50800" marR="50800" marT="50800" marB="50800">
+                    <a:lnL w="6350" cap="flat" cmpd="sng" algn="ctr">
+                      <a:solidFill>
+                        <a:srgbClr val="E3E7F0"/>
+                      </a:solidFill>
+                      <a:prstDash val="solid"/>
+                      <a:round/>
+                      <a:headEnd type="none" w="med" len="med"/>
+                      <a:tailEnd type="none" w="med" len="med"/>
+                    </a:lnL>
+                    <a:lnR w="6350" cap="flat" cmpd="sng" algn="ctr">
+                      <a:solidFill>
+                        <a:srgbClr val="E3E7F0"/>
+                      </a:solidFill>
+                      <a:prstDash val="solid"/>
+                      <a:round/>
+                      <a:headEnd type="none" w="med" len="med"/>
+                      <a:tailEnd type="none" w="med" len="med"/>
+                    </a:lnR>
+                    <a:lnT w="6350" cap="flat" cmpd="sng" algn="ctr">
+                      <a:solidFill>
+                        <a:srgbClr val="E3E7F0"/>
+                      </a:solidFill>
+                      <a:prstDash val="solid"/>
+                      <a:round/>
+                      <a:headEnd type="none" w="med" len="med"/>
+                      <a:tailEnd type="none" w="med" len="med"/>
+                    </a:lnT>
+                    <a:lnB w="6350" cap="flat" cmpd="sng" algn="ctr">
+                      <a:solidFill>
+                        <a:srgbClr val="E3E7F0"/>
+                      </a:solidFill>
+                      <a:prstDash val="solid"/>
+                      <a:round/>
+                      <a:headEnd type="none" w="med" len="med"/>
+                      <a:tailEnd type="none" w="med" len="med"/>
+                    </a:lnB>
+                  </a:tcPr>
+                </a:tc>
+                <a:tc>
+                  <a:txBody>
+                    <a:bodyPr/>
+                    <a:lstStyle/>
+                    <a:p>
+                      <a:pPr algn="r" indent="0" marL="0">
+                        <a:buNone/>
+                      </a:pPr>
+                      <a:r>
+                        <a:rPr lang="en-US" sz="950" dirty="0">
+                          <a:solidFill>
+                            <a:srgbClr val="1A1A1A"/>
+                          </a:solidFill>
+                          <a:latin typeface="Calibri" pitchFamily="34" charset="0"/>
+                          <a:ea typeface="Calibri" pitchFamily="34" charset="-122"/>
+                          <a:cs typeface="Calibri" pitchFamily="34" charset="-120"/>
+                        </a:rPr>
+                        <a:t>+0.98</a:t>
+                      </a:r>
+                      <a:endParaRPr lang="en-US" sz="950" dirty="0">
+                        <a:latin typeface="Calibri" charset="0"/>
+                        <a:ea typeface="Calibri" charset="0"/>
+                        <a:cs typeface="Calibri" charset="0"/>
+                      </a:endParaRPr>
+                    </a:p>
+                  </a:txBody>
+                  <a:tcPr marL="50800" marR="50800" marT="50800" marB="50800">
+                    <a:lnL w="6350" cap="flat" cmpd="sng" algn="ctr">
+                      <a:solidFill>
+                        <a:srgbClr val="E3E7F0"/>
+                      </a:solidFill>
+                      <a:prstDash val="solid"/>
+                      <a:round/>
+                      <a:headEnd type="none" w="med" len="med"/>
+                      <a:tailEnd type="none" w="med" len="med"/>
+                    </a:lnL>
+                    <a:lnR w="6350" cap="flat" cmpd="sng" algn="ctr">
+                      <a:solidFill>
+                        <a:srgbClr val="E3E7F0"/>
+                      </a:solidFill>
+                      <a:prstDash val="solid"/>
+                      <a:round/>
+                      <a:headEnd type="none" w="med" len="med"/>
+                      <a:tailEnd type="none" w="med" len="med"/>
+                    </a:lnR>
+                    <a:lnT w="6350" cap="flat" cmpd="sng" algn="ctr">
+                      <a:solidFill>
+                        <a:srgbClr val="E3E7F0"/>
+                      </a:solidFill>
+                      <a:prstDash val="solid"/>
+                      <a:round/>
+                      <a:headEnd type="none" w="med" len="med"/>
+                      <a:tailEnd type="none" w="med" len="med"/>
+                    </a:lnT>
+                    <a:lnB w="6350" cap="flat" cmpd="sng" algn="ctr">
+                      <a:solidFill>
+                        <a:srgbClr val="E3E7F0"/>
+                      </a:solidFill>
+                      <a:prstDash val="solid"/>
+                      <a:round/>
+                      <a:headEnd type="none" w="med" len="med"/>
+                      <a:tailEnd type="none" w="med" len="med"/>
+                    </a:lnB>
+                  </a:tcPr>
+                </a:tc>
+              </a:tr>
+              <a:tr h="210312">
+                <a:tc>
+                  <a:txBody>
+                    <a:bodyPr/>
+                    <a:lstStyle/>
+                    <a:p>
+                      <a:pPr algn="l" indent="0" marL="0">
+                        <a:buNone/>
+                      </a:pPr>
+                      <a:r>
+                        <a:rPr lang="en-US" sz="950" dirty="0">
+                          <a:solidFill>
+                            <a:srgbClr val="1A1A1A"/>
+                          </a:solidFill>
+                          <a:latin typeface="Calibri" pitchFamily="34" charset="0"/>
+                          <a:ea typeface="Calibri" pitchFamily="34" charset="-122"/>
+                          <a:cs typeface="Calibri" pitchFamily="34" charset="-120"/>
+                        </a:rPr>
+                        <a:t>three quarters</a:t>
+                      </a:r>
+                      <a:endParaRPr lang="en-US" sz="950" dirty="0">
+                        <a:latin typeface="Calibri" charset="0"/>
+                        <a:ea typeface="Calibri" charset="0"/>
+                        <a:cs typeface="Calibri" charset="0"/>
+                      </a:endParaRPr>
+                    </a:p>
+                  </a:txBody>
+                  <a:tcPr marL="50800" marR="50800" marT="50800" marB="50800">
+                    <a:lnL w="6350" cap="flat" cmpd="sng" algn="ctr">
+                      <a:solidFill>
+                        <a:srgbClr val="E3E7F0"/>
+                      </a:solidFill>
+                      <a:prstDash val="solid"/>
+                      <a:round/>
+                      <a:headEnd type="none" w="med" len="med"/>
+                      <a:tailEnd type="none" w="med" len="med"/>
+                    </a:lnL>
+                    <a:lnR w="6350" cap="flat" cmpd="sng" algn="ctr">
+                      <a:solidFill>
+                        <a:srgbClr val="E3E7F0"/>
+                      </a:solidFill>
+                      <a:prstDash val="solid"/>
+                      <a:round/>
+                      <a:headEnd type="none" w="med" len="med"/>
+                      <a:tailEnd type="none" w="med" len="med"/>
+                    </a:lnR>
+                    <a:lnT w="6350" cap="flat" cmpd="sng" algn="ctr">
+                      <a:solidFill>
+                        <a:srgbClr val="E3E7F0"/>
+                      </a:solidFill>
+                      <a:prstDash val="solid"/>
+                      <a:round/>
+                      <a:headEnd type="none" w="med" len="med"/>
+                      <a:tailEnd type="none" w="med" len="med"/>
+                    </a:lnT>
+                    <a:lnB w="6350" cap="flat" cmpd="sng" algn="ctr">
+                      <a:solidFill>
+                        <a:srgbClr val="E3E7F0"/>
+                      </a:solidFill>
+                      <a:prstDash val="solid"/>
+                      <a:round/>
+                      <a:headEnd type="none" w="med" len="med"/>
+                      <a:tailEnd type="none" w="med" len="med"/>
+                    </a:lnB>
+                  </a:tcPr>
+                </a:tc>
+                <a:tc>
+                  <a:txBody>
+                    <a:bodyPr/>
+                    <a:lstStyle/>
+                    <a:p>
+                      <a:pPr algn="r" indent="0" marL="0">
+                        <a:buNone/>
+                      </a:pPr>
+                      <a:r>
+                        <a:rPr lang="en-US" sz="950" dirty="0">
+                          <a:solidFill>
+                            <a:srgbClr val="1A1A1A"/>
+                          </a:solidFill>
+                          <a:latin typeface="Calibri" pitchFamily="34" charset="0"/>
+                          <a:ea typeface="Calibri" pitchFamily="34" charset="-122"/>
+                          <a:cs typeface="Calibri" pitchFamily="34" charset="-120"/>
+                        </a:rPr>
+                        <a:t>29.9%</a:t>
+                      </a:r>
+                      <a:endParaRPr lang="en-US" sz="950" dirty="0">
+                        <a:latin typeface="Calibri" charset="0"/>
+                        <a:ea typeface="Calibri" charset="0"/>
+                        <a:cs typeface="Calibri" charset="0"/>
+                      </a:endParaRPr>
+                    </a:p>
+                  </a:txBody>
+                  <a:tcPr marL="50800" marR="50800" marT="50800" marB="50800">
+                    <a:lnL w="6350" cap="flat" cmpd="sng" algn="ctr">
+                      <a:solidFill>
+                        <a:srgbClr val="E3E7F0"/>
+                      </a:solidFill>
+                      <a:prstDash val="solid"/>
+                      <a:round/>
+                      <a:headEnd type="none" w="med" len="med"/>
+                      <a:tailEnd type="none" w="med" len="med"/>
+                    </a:lnL>
+                    <a:lnR w="6350" cap="flat" cmpd="sng" algn="ctr">
+                      <a:solidFill>
+                        <a:srgbClr val="E3E7F0"/>
+                      </a:solidFill>
+                      <a:prstDash val="solid"/>
+                      <a:round/>
+                      <a:headEnd type="none" w="med" len="med"/>
+                      <a:tailEnd type="none" w="med" len="med"/>
+                    </a:lnR>
+                    <a:lnT w="6350" cap="flat" cmpd="sng" algn="ctr">
+                      <a:solidFill>
+                        <a:srgbClr val="E3E7F0"/>
+                      </a:solidFill>
+                      <a:prstDash val="solid"/>
+                      <a:round/>
+                      <a:headEnd type="none" w="med" len="med"/>
+                      <a:tailEnd type="none" w="med" len="med"/>
+                    </a:lnT>
+                    <a:lnB w="6350" cap="flat" cmpd="sng" algn="ctr">
+                      <a:solidFill>
+                        <a:srgbClr val="E3E7F0"/>
+                      </a:solidFill>
+                      <a:prstDash val="solid"/>
+                      <a:round/>
+                      <a:headEnd type="none" w="med" len="med"/>
+                      <a:tailEnd type="none" w="med" len="med"/>
+                    </a:lnB>
+                  </a:tcPr>
+                </a:tc>
+                <a:tc>
+                  <a:txBody>
+                    <a:bodyPr/>
+                    <a:lstStyle/>
+                    <a:p>
+                      <a:pPr algn="r" indent="0" marL="0">
+                        <a:buNone/>
+                      </a:pPr>
+                      <a:r>
+                        <a:rPr lang="en-US" sz="950" dirty="0">
+                          <a:solidFill>
+                            <a:srgbClr val="1A1A1A"/>
+                          </a:solidFill>
+                          <a:latin typeface="Calibri" pitchFamily="34" charset="0"/>
+                          <a:ea typeface="Calibri" pitchFamily="34" charset="-122"/>
+                          <a:cs typeface="Calibri" pitchFamily="34" charset="-120"/>
+                        </a:rPr>
+                        <a:t>+17.85%</a:t>
+                      </a:r>
+                      <a:endParaRPr lang="en-US" sz="950" dirty="0">
+                        <a:latin typeface="Calibri" charset="0"/>
+                        <a:ea typeface="Calibri" charset="0"/>
+                        <a:cs typeface="Calibri" charset="0"/>
+                      </a:endParaRPr>
+                    </a:p>
+                  </a:txBody>
+                  <a:tcPr marL="50800" marR="50800" marT="50800" marB="50800">
+                    <a:lnL w="6350" cap="flat" cmpd="sng" algn="ctr">
+                      <a:solidFill>
+                        <a:srgbClr val="E3E7F0"/>
+                      </a:solidFill>
+                      <a:prstDash val="solid"/>
+                      <a:round/>
+                      <a:headEnd type="none" w="med" len="med"/>
+                      <a:tailEnd type="none" w="med" len="med"/>
+                    </a:lnL>
+                    <a:lnR w="6350" cap="flat" cmpd="sng" algn="ctr">
+                      <a:solidFill>
+                        <a:srgbClr val="E3E7F0"/>
+                      </a:solidFill>
+                      <a:prstDash val="solid"/>
+                      <a:round/>
+                      <a:headEnd type="none" w="med" len="med"/>
+                      <a:tailEnd type="none" w="med" len="med"/>
+                    </a:lnR>
+                    <a:lnT w="6350" cap="flat" cmpd="sng" algn="ctr">
+                      <a:solidFill>
+                        <a:srgbClr val="E3E7F0"/>
+                      </a:solidFill>
+                      <a:prstDash val="solid"/>
+                      <a:round/>
+                      <a:headEnd type="none" w="med" len="med"/>
+                      <a:tailEnd type="none" w="med" len="med"/>
+                    </a:lnT>
+                    <a:lnB w="6350" cap="flat" cmpd="sng" algn="ctr">
+                      <a:solidFill>
+                        <a:srgbClr val="E3E7F0"/>
+                      </a:solidFill>
+                      <a:prstDash val="solid"/>
+                      <a:round/>
+                      <a:headEnd type="none" w="med" len="med"/>
+                      <a:tailEnd type="none" w="med" len="med"/>
+                    </a:lnB>
+                  </a:tcPr>
+                </a:tc>
+                <a:tc>
+                  <a:txBody>
+                    <a:bodyPr/>
+                    <a:lstStyle/>
+                    <a:p>
+                      <a:pPr algn="r" indent="0" marL="0">
+                        <a:buNone/>
+                      </a:pPr>
+                      <a:r>
+                        <a:rPr lang="en-US" sz="950" dirty="0">
+                          <a:solidFill>
+                            <a:srgbClr val="1A1A1A"/>
+                          </a:solidFill>
+                          <a:latin typeface="Calibri" pitchFamily="34" charset="0"/>
+                          <a:ea typeface="Calibri" pitchFamily="34" charset="-122"/>
+                          <a:cs typeface="Calibri" pitchFamily="34" charset="-120"/>
+                        </a:rPr>
+                        <a:t>13.60%</a:t>
+                      </a:r>
+                      <a:endParaRPr lang="en-US" sz="950" dirty="0">
+                        <a:latin typeface="Calibri" charset="0"/>
+                        <a:ea typeface="Calibri" charset="0"/>
+                        <a:cs typeface="Calibri" charset="0"/>
+                      </a:endParaRPr>
+                    </a:p>
+                  </a:txBody>
+                  <a:tcPr marL="50800" marR="50800" marT="50800" marB="50800">
+                    <a:lnL w="6350" cap="flat" cmpd="sng" algn="ctr">
+                      <a:solidFill>
+                        <a:srgbClr val="E3E7F0"/>
+                      </a:solidFill>
+                      <a:prstDash val="solid"/>
+                      <a:round/>
+                      <a:headEnd type="none" w="med" len="med"/>
+                      <a:tailEnd type="none" w="med" len="med"/>
+                    </a:lnL>
+                    <a:lnR w="6350" cap="flat" cmpd="sng" algn="ctr">
+                      <a:solidFill>
+                        <a:srgbClr val="E3E7F0"/>
+                      </a:solidFill>
+                      <a:prstDash val="solid"/>
+                      <a:round/>
+                      <a:headEnd type="none" w="med" len="med"/>
+                      <a:tailEnd type="none" w="med" len="med"/>
+                    </a:lnR>
+                    <a:lnT w="6350" cap="flat" cmpd="sng" algn="ctr">
+                      <a:solidFill>
+                        <a:srgbClr val="E3E7F0"/>
+                      </a:solidFill>
+                      <a:prstDash val="solid"/>
+                      <a:round/>
+                      <a:headEnd type="none" w="med" len="med"/>
+                      <a:tailEnd type="none" w="med" len="med"/>
+                    </a:lnT>
+                    <a:lnB w="6350" cap="flat" cmpd="sng" algn="ctr">
+                      <a:solidFill>
+                        <a:srgbClr val="E3E7F0"/>
+                      </a:solidFill>
+                      <a:prstDash val="solid"/>
+                      <a:round/>
+                      <a:headEnd type="none" w="med" len="med"/>
+                      <a:tailEnd type="none" w="med" len="med"/>
+                    </a:lnB>
+                  </a:tcPr>
+                </a:tc>
+                <a:tc>
+                  <a:txBody>
+                    <a:bodyPr/>
+                    <a:lstStyle/>
+                    <a:p>
+                      <a:pPr algn="r" indent="0" marL="0">
+                        <a:buNone/>
+                      </a:pPr>
+                      <a:r>
+                        <a:rPr lang="en-US" sz="950" dirty="0">
+                          <a:solidFill>
+                            <a:srgbClr val="1A1A1A"/>
+                          </a:solidFill>
+                          <a:latin typeface="Calibri" pitchFamily="34" charset="0"/>
+                          <a:ea typeface="Calibri" pitchFamily="34" charset="-122"/>
+                          <a:cs typeface="Calibri" pitchFamily="34" charset="-120"/>
+                        </a:rPr>
+                        <a:t>+1.02</a:t>
+                      </a:r>
+                      <a:endParaRPr lang="en-US" sz="950" dirty="0">
+                        <a:latin typeface="Calibri" charset="0"/>
+                        <a:ea typeface="Calibri" charset="0"/>
+                        <a:cs typeface="Calibri" charset="0"/>
+                      </a:endParaRPr>
+                    </a:p>
+                  </a:txBody>
+                  <a:tcPr marL="50800" marR="50800" marT="50800" marB="50800">
+                    <a:lnL w="6350" cap="flat" cmpd="sng" algn="ctr">
+                      <a:solidFill>
+                        <a:srgbClr val="E3E7F0"/>
+                      </a:solidFill>
+                      <a:prstDash val="solid"/>
+                      <a:round/>
+                      <a:headEnd type="none" w="med" len="med"/>
+                      <a:tailEnd type="none" w="med" len="med"/>
+                    </a:lnL>
+                    <a:lnR w="6350" cap="flat" cmpd="sng" algn="ctr">
+                      <a:solidFill>
+                        <a:srgbClr val="E3E7F0"/>
+                      </a:solidFill>
+                      <a:prstDash val="solid"/>
+                      <a:round/>
+                      <a:headEnd type="none" w="med" len="med"/>
+                      <a:tailEnd type="none" w="med" len="med"/>
+                    </a:lnR>
+                    <a:lnT w="6350" cap="flat" cmpd="sng" algn="ctr">
+                      <a:solidFill>
+                        <a:srgbClr val="E3E7F0"/>
+                      </a:solidFill>
+                      <a:prstDash val="solid"/>
+                      <a:round/>
+                      <a:headEnd type="none" w="med" len="med"/>
+                      <a:tailEnd type="none" w="med" len="med"/>
+                    </a:lnT>
+                    <a:lnB w="6350" cap="flat" cmpd="sng" algn="ctr">
+                      <a:solidFill>
+                        <a:srgbClr val="E3E7F0"/>
+                      </a:solidFill>
+                      <a:prstDash val="solid"/>
+                      <a:round/>
+                      <a:headEnd type="none" w="med" len="med"/>
+                      <a:tailEnd type="none" w="med" len="med"/>
+                    </a:lnB>
+                  </a:tcPr>
+                </a:tc>
+              </a:tr>
+              <a:tr h="210312">
+                <a:tc>
+                  <a:txBody>
+                    <a:bodyPr/>
+                    <a:lstStyle/>
+                    <a:p>
+                      <a:pPr algn="l" indent="0" marL="0">
+                        <a:buNone/>
+                      </a:pPr>
+                      <a:r>
+                        <a:rPr lang="en-US" sz="950" dirty="0">
+                          <a:solidFill>
+                            <a:srgbClr val="1A1A1A"/>
+                          </a:solidFill>
+                          <a:latin typeface="Calibri" pitchFamily="34" charset="0"/>
+                          <a:ea typeface="Calibri" pitchFamily="34" charset="-122"/>
+                          <a:cs typeface="Calibri" pitchFamily="34" charset="-120"/>
+                        </a:rPr>
+                        <a:t>fully neutral</a:t>
+                      </a:r>
+                      <a:endParaRPr lang="en-US" sz="950" dirty="0">
+                        <a:latin typeface="Calibri" charset="0"/>
+                        <a:ea typeface="Calibri" charset="0"/>
+                        <a:cs typeface="Calibri" charset="0"/>
+                      </a:endParaRPr>
+                    </a:p>
+                  </a:txBody>
+                  <a:tcPr marL="50800" marR="50800" marT="50800" marB="50800">
+                    <a:lnL w="6350" cap="flat" cmpd="sng" algn="ctr">
+                      <a:solidFill>
+                        <a:srgbClr val="E3E7F0"/>
+                      </a:solidFill>
+                      <a:prstDash val="solid"/>
+                      <a:round/>
+                      <a:headEnd type="none" w="med" len="med"/>
+                      <a:tailEnd type="none" w="med" len="med"/>
+                    </a:lnL>
+                    <a:lnR w="6350" cap="flat" cmpd="sng" algn="ctr">
+                      <a:solidFill>
+                        <a:srgbClr val="E3E7F0"/>
+                      </a:solidFill>
+                      <a:prstDash val="solid"/>
+                      <a:round/>
+                      <a:headEnd type="none" w="med" len="med"/>
+                      <a:tailEnd type="none" w="med" len="med"/>
+                    </a:lnR>
+                    <a:lnT w="6350" cap="flat" cmpd="sng" algn="ctr">
+                      <a:solidFill>
+                        <a:srgbClr val="E3E7F0"/>
+                      </a:solidFill>
+                      <a:prstDash val="solid"/>
+                      <a:round/>
+                      <a:headEnd type="none" w="med" len="med"/>
+                      <a:tailEnd type="none" w="med" len="med"/>
+                    </a:lnT>
+                    <a:lnB w="6350" cap="flat" cmpd="sng" algn="ctr">
+                      <a:solidFill>
+                        <a:srgbClr val="E3E7F0"/>
+                      </a:solidFill>
+                      <a:prstDash val="solid"/>
+                      <a:round/>
+                      <a:headEnd type="none" w="med" len="med"/>
+                      <a:tailEnd type="none" w="med" len="med"/>
+                    </a:lnB>
+                  </a:tcPr>
+                </a:tc>
+                <a:tc>
+                  <a:txBody>
+                    <a:bodyPr/>
+                    <a:lstStyle/>
+                    <a:p>
+                      <a:pPr algn="r" indent="0" marL="0">
+                        <a:buNone/>
+                      </a:pPr>
+                      <a:r>
+                        <a:rPr lang="en-US" sz="950" dirty="0">
+                          <a:solidFill>
+                            <a:srgbClr val="1A1A1A"/>
+                          </a:solidFill>
+                          <a:latin typeface="Calibri" pitchFamily="34" charset="0"/>
+                          <a:ea typeface="Calibri" pitchFamily="34" charset="-122"/>
+                          <a:cs typeface="Calibri" pitchFamily="34" charset="-120"/>
+                        </a:rPr>
+                        <a:t>0.0%</a:t>
+                      </a:r>
+                      <a:endParaRPr lang="en-US" sz="950" dirty="0">
+                        <a:latin typeface="Calibri" charset="0"/>
+                        <a:ea typeface="Calibri" charset="0"/>
+                        <a:cs typeface="Calibri" charset="0"/>
+                      </a:endParaRPr>
+                    </a:p>
+                  </a:txBody>
+                  <a:tcPr marL="50800" marR="50800" marT="50800" marB="50800">
+                    <a:lnL w="6350" cap="flat" cmpd="sng" algn="ctr">
+                      <a:solidFill>
+                        <a:srgbClr val="E3E7F0"/>
+                      </a:solidFill>
+                      <a:prstDash val="solid"/>
+                      <a:round/>
+                      <a:headEnd type="none" w="med" len="med"/>
+                      <a:tailEnd type="none" w="med" len="med"/>
+                    </a:lnL>
+                    <a:lnR w="6350" cap="flat" cmpd="sng" algn="ctr">
+                      <a:solidFill>
+                        <a:srgbClr val="E3E7F0"/>
+                      </a:solidFill>
+                      <a:prstDash val="solid"/>
+                      <a:round/>
+                      <a:headEnd type="none" w="med" len="med"/>
+                      <a:tailEnd type="none" w="med" len="med"/>
+                    </a:lnR>
+                    <a:lnT w="6350" cap="flat" cmpd="sng" algn="ctr">
+                      <a:solidFill>
+                        <a:srgbClr val="E3E7F0"/>
+                      </a:solidFill>
+                      <a:prstDash val="solid"/>
+                      <a:round/>
+                      <a:headEnd type="none" w="med" len="med"/>
+                      <a:tailEnd type="none" w="med" len="med"/>
+                    </a:lnT>
+                    <a:lnB w="6350" cap="flat" cmpd="sng" algn="ctr">
+                      <a:solidFill>
+                        <a:srgbClr val="E3E7F0"/>
+                      </a:solidFill>
+                      <a:prstDash val="solid"/>
+                      <a:round/>
+                      <a:headEnd type="none" w="med" len="med"/>
+                      <a:tailEnd type="none" w="med" len="med"/>
+                    </a:lnB>
+                  </a:tcPr>
+                </a:tc>
+                <a:tc>
+                  <a:txBody>
+                    <a:bodyPr/>
+                    <a:lstStyle/>
+                    <a:p>
+                      <a:pPr algn="r" indent="0" marL="0">
+                        <a:buNone/>
+                      </a:pPr>
+                      <a:r>
+                        <a:rPr lang="en-US" sz="950" dirty="0">
+                          <a:solidFill>
+                            <a:srgbClr val="1A1A1A"/>
+                          </a:solidFill>
+                          <a:latin typeface="Calibri" pitchFamily="34" charset="0"/>
+                          <a:ea typeface="Calibri" pitchFamily="34" charset="-122"/>
+                          <a:cs typeface="Calibri" pitchFamily="34" charset="-120"/>
+                        </a:rPr>
+                        <a:t>+19.28%</a:t>
+                      </a:r>
+                      <a:endParaRPr lang="en-US" sz="950" dirty="0">
+                        <a:latin typeface="Calibri" charset="0"/>
+                        <a:ea typeface="Calibri" charset="0"/>
+                        <a:cs typeface="Calibri" charset="0"/>
+                      </a:endParaRPr>
+                    </a:p>
+                  </a:txBody>
+                  <a:tcPr marL="50800" marR="50800" marT="50800" marB="50800">
+                    <a:lnL w="6350" cap="flat" cmpd="sng" algn="ctr">
+                      <a:solidFill>
+                        <a:srgbClr val="E3E7F0"/>
+                      </a:solidFill>
+                      <a:prstDash val="solid"/>
+                      <a:round/>
+                      <a:headEnd type="none" w="med" len="med"/>
+                      <a:tailEnd type="none" w="med" len="med"/>
+                    </a:lnL>
+                    <a:lnR w="6350" cap="flat" cmpd="sng" algn="ctr">
+                      <a:solidFill>
+                        <a:srgbClr val="E3E7F0"/>
+                      </a:solidFill>
+                      <a:prstDash val="solid"/>
+                      <a:round/>
+                      <a:headEnd type="none" w="med" len="med"/>
+                      <a:tailEnd type="none" w="med" len="med"/>
+                    </a:lnR>
+                    <a:lnT w="6350" cap="flat" cmpd="sng" algn="ctr">
+                      <a:solidFill>
+                        <a:srgbClr val="E3E7F0"/>
+                      </a:solidFill>
+                      <a:prstDash val="solid"/>
+                      <a:round/>
+                      <a:headEnd type="none" w="med" len="med"/>
+                      <a:tailEnd type="none" w="med" len="med"/>
+                    </a:lnT>
+                    <a:lnB w="6350" cap="flat" cmpd="sng" algn="ctr">
+                      <a:solidFill>
+                        <a:srgbClr val="E3E7F0"/>
+                      </a:solidFill>
+                      <a:prstDash val="solid"/>
+                      <a:round/>
+                      <a:headEnd type="none" w="med" len="med"/>
+                      <a:tailEnd type="none" w="med" len="med"/>
+                    </a:lnB>
+                  </a:tcPr>
+                </a:tc>
+                <a:tc>
+                  <a:txBody>
+                    <a:bodyPr/>
+                    <a:lstStyle/>
+                    <a:p>
+                      <a:pPr algn="r" indent="0" marL="0">
+                        <a:buNone/>
+                      </a:pPr>
+                      <a:r>
+                        <a:rPr lang="en-US" sz="950" dirty="0">
+                          <a:solidFill>
+                            <a:srgbClr val="1A1A1A"/>
+                          </a:solidFill>
+                          <a:latin typeface="Calibri" pitchFamily="34" charset="0"/>
+                          <a:ea typeface="Calibri" pitchFamily="34" charset="-122"/>
+                          <a:cs typeface="Calibri" pitchFamily="34" charset="-120"/>
+                        </a:rPr>
+                        <a:t>14.68%</a:t>
+                      </a:r>
+                      <a:endParaRPr lang="en-US" sz="950" dirty="0">
+                        <a:latin typeface="Calibri" charset="0"/>
+                        <a:ea typeface="Calibri" charset="0"/>
+                        <a:cs typeface="Calibri" charset="0"/>
+                      </a:endParaRPr>
+                    </a:p>
+                  </a:txBody>
+                  <a:tcPr marL="50800" marR="50800" marT="50800" marB="50800">
+                    <a:lnL w="6350" cap="flat" cmpd="sng" algn="ctr">
+                      <a:solidFill>
+                        <a:srgbClr val="E3E7F0"/>
+                      </a:solidFill>
+                      <a:prstDash val="solid"/>
+                      <a:round/>
+                      <a:headEnd type="none" w="med" len="med"/>
+                      <a:tailEnd type="none" w="med" len="med"/>
+                    </a:lnL>
+                    <a:lnR w="6350" cap="flat" cmpd="sng" algn="ctr">
+                      <a:solidFill>
+                        <a:srgbClr val="E3E7F0"/>
+                      </a:solidFill>
+                      <a:prstDash val="solid"/>
+                      <a:round/>
+                      <a:headEnd type="none" w="med" len="med"/>
+                      <a:tailEnd type="none" w="med" len="med"/>
+                    </a:lnR>
+                    <a:lnT w="6350" cap="flat" cmpd="sng" algn="ctr">
+                      <a:solidFill>
+                        <a:srgbClr val="E3E7F0"/>
+                      </a:solidFill>
+                      <a:prstDash val="solid"/>
+                      <a:round/>
+                      <a:headEnd type="none" w="med" len="med"/>
+                      <a:tailEnd type="none" w="med" len="med"/>
+                    </a:lnT>
+                    <a:lnB w="6350" cap="flat" cmpd="sng" algn="ctr">
+                      <a:solidFill>
+                        <a:srgbClr val="E3E7F0"/>
+                      </a:solidFill>
+                      <a:prstDash val="solid"/>
+                      <a:round/>
+                      <a:headEnd type="none" w="med" len="med"/>
+                      <a:tailEnd type="none" w="med" len="med"/>
+                    </a:lnB>
+                  </a:tcPr>
+                </a:tc>
+                <a:tc>
+                  <a:txBody>
+                    <a:bodyPr/>
+                    <a:lstStyle/>
+                    <a:p>
+                      <a:pPr algn="r" indent="0" marL="0">
+                        <a:buNone/>
+                      </a:pPr>
+                      <a:r>
+                        <a:rPr lang="en-US" sz="950" dirty="0">
+                          <a:solidFill>
+                            <a:srgbClr val="1A1A1A"/>
+                          </a:solidFill>
+                          <a:latin typeface="Calibri" pitchFamily="34" charset="0"/>
+                          <a:ea typeface="Calibri" pitchFamily="34" charset="-122"/>
+                          <a:cs typeface="Calibri" pitchFamily="34" charset="-120"/>
+                        </a:rPr>
+                        <a:t>+1.04</a:t>
+                      </a:r>
+                      <a:endParaRPr lang="en-US" sz="950" dirty="0">
+                        <a:latin typeface="Calibri" charset="0"/>
+                        <a:ea typeface="Calibri" charset="0"/>
+                        <a:cs typeface="Calibri" charset="0"/>
+                      </a:endParaRPr>
+                    </a:p>
+                  </a:txBody>
+                  <a:tcPr marL="50800" marR="50800" marT="50800" marB="50800">
+                    <a:lnL w="6350" cap="flat" cmpd="sng" algn="ctr">
+                      <a:solidFill>
+                        <a:srgbClr val="E3E7F0"/>
+                      </a:solidFill>
+                      <a:prstDash val="solid"/>
+                      <a:round/>
+                      <a:headEnd type="none" w="med" len="med"/>
+                      <a:tailEnd type="none" w="med" len="med"/>
+                    </a:lnL>
+                    <a:lnR w="6350" cap="flat" cmpd="sng" algn="ctr">
+                      <a:solidFill>
+                        <a:srgbClr val="E3E7F0"/>
+                      </a:solidFill>
+                      <a:prstDash val="solid"/>
+                      <a:round/>
+                      <a:headEnd type="none" w="med" len="med"/>
+                      <a:tailEnd type="none" w="med" len="med"/>
+                    </a:lnR>
+                    <a:lnT w="6350" cap="flat" cmpd="sng" algn="ctr">
+                      <a:solidFill>
+                        <a:srgbClr val="E3E7F0"/>
+                      </a:solidFill>
+                      <a:prstDash val="solid"/>
+                      <a:round/>
+                      <a:headEnd type="none" w="med" len="med"/>
+                      <a:tailEnd type="none" w="med" len="med"/>
+                    </a:lnT>
+                    <a:lnB w="6350" cap="flat" cmpd="sng" algn="ctr">
+                      <a:solidFill>
+                        <a:srgbClr val="E3E7F0"/>
+                      </a:solidFill>
+                      <a:prstDash val="solid"/>
+                      <a:round/>
+                      <a:headEnd type="none" w="med" len="med"/>
+                      <a:tailEnd type="none" w="med" len="med"/>
+                    </a:lnB>
+                  </a:tcPr>
+                </a:tc>
+              </a:tr>
+            </a:tbl>
+          </a:graphicData>
+        </a:graphic>
+      </p:graphicFrame>
+      <p:sp>
+        <p:nvSpPr>
+          <p:cNvPr id="8" name="Text 5"/>
+          <p:cNvSpPr txBox="1"/>
+          <p:nvPr/>
+        </p:nvSpPr>
+        <p:spPr>
+          <a:xfrm>
+            <a:off x="548640" y="4315968"/>
+            <a:ext cx="5577840" cy="457200"/>
+          </a:xfrm>
+          <a:prstGeom prst="rect">
+            <a:avLst/>
+          </a:prstGeom>
+          <a:noFill/>
+          <a:ln/>
+        </p:spPr>
+        <p:txBody>
+          <a:bodyPr wrap="square" lIns="0" tIns="0" rIns="0" bIns="0" rtlCol="0" anchor="ctr"/>
+          <a:lstStyle/>
+          <a:p>
+            <a:pPr indent="0" marL="0">
+              <a:buNone/>
+            </a:pPr>
+            <a:r>
+              <a:rPr lang="en-US" sz="1000" i="1" dirty="0">
+                <a:solidFill>
+                  <a:srgbClr val="6B7280"/>
+                </a:solidFill>
+                <a:latin typeface="Calibri" pitchFamily="34" charset="0"/>
+                <a:ea typeface="Calibri" pitchFamily="34" charset="-122"/>
+                <a:cs typeface="Calibri" pitchFamily="34" charset="-120"/>
+              </a:rPr>
+              <a:t>Volatility is flat until sector exposure falls below about half of capital, then rises. Variant S sits at 38.2%, where the curve predicts its volatility to within 0.11pp - so its flat vol is not a puzzle. Its return, though, beats the curve by 4.2pp: only about a third of variant S's gain is the sector exposure it removes.</a:t>
+            </a:r>
+            <a:endParaRPr lang="en-US" sz="1000" dirty="0"/>
+          </a:p>
+        </p:txBody>
+      </p:sp>
+      <p:sp>
+        <p:nvSpPr>
+          <p:cNvPr id="9" name="Text 6"/>
+          <p:cNvSpPr txBox="1"/>
+          <p:nvPr/>
+        </p:nvSpPr>
+        <p:spPr>
+          <a:xfrm>
+            <a:off x="6492240" y="1481328"/>
+            <a:ext cx="5120640" cy="256032"/>
+          </a:xfrm>
+          <a:prstGeom prst="rect">
+            <a:avLst/>
+          </a:prstGeom>
+          <a:noFill/>
+          <a:ln/>
+        </p:spPr>
+        <p:txBody>
+          <a:bodyPr wrap="square" lIns="0" tIns="0" rIns="0" bIns="0" rtlCol="0" anchor="ctr"/>
+          <a:lstStyle/>
+          <a:p>
+            <a:pPr indent="0" marL="0">
+              <a:buNone/>
+            </a:pPr>
+            <a:r>
+              <a:rPr lang="en-US" sz="1300" b="1" dirty="0">
+                <a:solidFill>
+                  <a:srgbClr val="1E2761"/>
+                </a:solidFill>
+                <a:latin typeface="Calibri" pitchFamily="34" charset="0"/>
+                <a:ea typeface="Calibri" pitchFamily="34" charset="-122"/>
+                <a:cs typeface="Calibri" pitchFamily="34" charset="-120"/>
+              </a:rPr>
+              <a:t>Four rounds of testing, three reversals</a:t>
+            </a:r>
+            <a:endParaRPr lang="en-US" sz="1300" dirty="0"/>
+          </a:p>
+        </p:txBody>
+      </p:sp>
+      <p:sp>
+        <p:nvSpPr>
+          <p:cNvPr id="10" name="Text 7"/>
+          <p:cNvSpPr txBox="1"/>
+          <p:nvPr/>
+        </p:nvSpPr>
+        <p:spPr>
+          <a:xfrm>
+            <a:off x="6492240" y="1810512"/>
+            <a:ext cx="5120640" cy="731520"/>
+          </a:xfrm>
+          <a:prstGeom prst="rect">
+            <a:avLst/>
+          </a:prstGeom>
+          <a:noFill/>
+          <a:ln/>
+        </p:spPr>
+        <p:txBody>
+          <a:bodyPr wrap="square" lIns="0" tIns="0" rIns="0" bIns="0" rtlCol="0" anchor="t"/>
+          <a:lstStyle/>
+          <a:p>
+            <a:pPr marL="342900" indent="-342900">
+              <a:lnSpc>
+                <a:spcPct val="105000"/>
+              </a:lnSpc>
+              <a:spcAft>
+                <a:spcPts val="600"/>
+              </a:spcAft>
+              <a:buSzPct val="100000"/>
+              <a:buChar char="•"/>
+            </a:pPr>
+            <a:r>
+              <a:rPr lang="en-US" sz="1050" dirty="0">
+                <a:solidFill>
+                  <a:srgbClr val="1A1A1A"/>
+                </a:solidFill>
+                <a:latin typeface="Calibri" pitchFamily="34" charset="0"/>
+                <a:ea typeface="Calibri" pitchFamily="34" charset="-122"/>
+                <a:cs typeface="Calibri" pitchFamily="34" charset="-120"/>
+              </a:rPr>
+              <a:t>Picking inside sectors loses on the clean 2019-20 window and gains nothing on the test period - until the quota rule, smoothing and buffer are varied, after which it leads in 7 of 18 configurations (binomial p = 0.48). Under a true null the best of 18 reaches ours essentially always.</a:t>
+            </a:r>
+            <a:endParaRPr lang="en-US" sz="1050" dirty="0"/>
+          </a:p>
+          <a:p>
+            <a:pPr marL="342900" indent="-342900">
+              <a:lnSpc>
+                <a:spcPct val="105000"/>
+              </a:lnSpc>
+              <a:spcAft>
+                <a:spcPts val="600"/>
+              </a:spcAft>
+              <a:buSzPct val="100000"/>
+              <a:buChar char="•"/>
+            </a:pPr>
+            <a:r>
+              <a:rPr lang="en-US" sz="1050" dirty="0">
+                <a:solidFill>
+                  <a:srgbClr val="1A1A1A"/>
+                </a:solidFill>
+                <a:latin typeface="Calibri" pitchFamily="34" charset="0"/>
+                <a:ea typeface="Calibri" pitchFamily="34" charset="-122"/>
+                <a:cs typeface="Calibri" pitchFamily="34" charset="-120"/>
+              </a:rPr>
+              <a:t>A no-sector rule that evicts the weakest names beat the sector cap at one smoothing setting and lost at the other two, net of costs. We withdrew that conclusion too.</a:t>
+            </a:r>
+            <a:endParaRPr lang="en-US" sz="1050" dirty="0"/>
+          </a:p>
+        </p:txBody>
+      </p:sp>
+      <p:graphicFrame>
+        <p:nvGraphicFramePr>
+          <p:cNvPr id="27" name="Table 1"/>
+          <p:cNvGraphicFramePr>
+            <a:graphicFrameLocks noGrp="1"/>
+          </p:cNvGraphicFramePr>
+          <p:nvPr>
+            <p:extLst>
+              <p:ext uri="{D42A27DB-BD31-4B8C-83A1-F6EECF244321}">
+                <p14:modId xmlns:p14="http://schemas.microsoft.com/office/powerpoint/2010/main" val="1579011935"/>
+              </p:ext>
+            </p:extLst>
+          </p:nvPr>
+        </p:nvGraphicFramePr>
+        <p:xfrm>
+          <a:off x="6492240" y="3310128"/>
+          <a:ext cx="5120640" cy="914400"/>
+        </p:xfrm>
+        <a:graphic>
+          <a:graphicData uri="http://schemas.openxmlformats.org/drawingml/2006/table">
+            <a:tbl>
+              <a:tblPr/>
+              <a:tblGrid>
+                <a:gridCol w="2103120"/>
+                <a:gridCol w="1508760"/>
+                <a:gridCol w="1508760"/>
+              </a:tblGrid>
+              <a:tr h="210312">
+                <a:tc>
+                  <a:txBody>
+                    <a:bodyPr/>
+                    <a:lstStyle/>
+                    <a:p>
+                      <a:pPr algn="l" indent="0" marL="0">
+                        <a:buNone/>
+                      </a:pPr>
+                      <a:r>
+                        <a:rPr lang="en-US" sz="950" b="1" dirty="0">
+                          <a:solidFill>
+                            <a:srgbClr val="FFFFFF"/>
+                          </a:solidFill>
+                          <a:latin typeface="Calibri" pitchFamily="34" charset="0"/>
+                          <a:ea typeface="Calibri" pitchFamily="34" charset="-122"/>
+                          <a:cs typeface="Calibri" pitchFamily="34" charset="-120"/>
+                        </a:rPr>
+                        <a:t>Net of 20bps</a:t>
+                      </a:r>
+                      <a:endParaRPr lang="en-US" sz="950" dirty="0">
+                        <a:latin typeface="Calibri" charset="0"/>
+                        <a:ea typeface="Calibri" charset="0"/>
+                        <a:cs typeface="Calibri" charset="0"/>
+                      </a:endParaRPr>
+                    </a:p>
+                  </a:txBody>
+                  <a:tcPr marL="50800" marR="50800" marT="50800" marB="50800">
+                    <a:lnL w="6350" cap="flat" cmpd="sng" algn="ctr">
+                      <a:solidFill>
+                        <a:srgbClr val="E3E7F0"/>
+                      </a:solidFill>
+                      <a:prstDash val="solid"/>
+                      <a:round/>
+                      <a:headEnd type="none" w="med" len="med"/>
+                      <a:tailEnd type="none" w="med" len="med"/>
+                    </a:lnL>
+                    <a:lnR w="6350" cap="flat" cmpd="sng" algn="ctr">
+                      <a:solidFill>
+                        <a:srgbClr val="E3E7F0"/>
+                      </a:solidFill>
+                      <a:prstDash val="solid"/>
+                      <a:round/>
+                      <a:headEnd type="none" w="med" len="med"/>
+                      <a:tailEnd type="none" w="med" len="med"/>
+                    </a:lnR>
+                    <a:lnT w="6350" cap="flat" cmpd="sng" algn="ctr">
+                      <a:solidFill>
+                        <a:srgbClr val="E3E7F0"/>
+                      </a:solidFill>
+                      <a:prstDash val="solid"/>
+                      <a:round/>
+                      <a:headEnd type="none" w="med" len="med"/>
+                      <a:tailEnd type="none" w="med" len="med"/>
+                    </a:lnT>
+                    <a:lnB w="6350" cap="flat" cmpd="sng" algn="ctr">
+                      <a:solidFill>
+                        <a:srgbClr val="E3E7F0"/>
+                      </a:solidFill>
+                      <a:prstDash val="solid"/>
+                      <a:round/>
+                      <a:headEnd type="none" w="med" len="med"/>
+                      <a:tailEnd type="none" w="med" len="med"/>
+                    </a:lnB>
+                    <a:solidFill>
+                      <a:srgbClr val="1E2761"/>
+                    </a:solidFill>
+                  </a:tcPr>
+                </a:tc>
+                <a:tc>
+                  <a:txBody>
+                    <a:bodyPr/>
+                    <a:lstStyle/>
+                    <a:p>
+                      <a:pPr algn="r" indent="0" marL="0">
+                        <a:buNone/>
+                      </a:pPr>
+                      <a:r>
+                        <a:rPr lang="en-US" sz="950" b="1" dirty="0">
+                          <a:solidFill>
+                            <a:srgbClr val="FFFFFF"/>
+                          </a:solidFill>
+                          <a:latin typeface="Calibri" pitchFamily="34" charset="0"/>
+                          <a:ea typeface="Calibri" pitchFamily="34" charset="-122"/>
+                          <a:cs typeface="Calibri" pitchFamily="34" charset="-120"/>
+                        </a:rPr>
+                        <a:t>Validation</a:t>
+                      </a:r>
+                      <a:endParaRPr lang="en-US" sz="950" dirty="0">
+                        <a:latin typeface="Calibri" charset="0"/>
+                        <a:ea typeface="Calibri" charset="0"/>
+                        <a:cs typeface="Calibri" charset="0"/>
+                      </a:endParaRPr>
+                    </a:p>
+                  </a:txBody>
+                  <a:tcPr marL="50800" marR="50800" marT="50800" marB="50800">
+                    <a:lnL w="6350" cap="flat" cmpd="sng" algn="ctr">
+                      <a:solidFill>
+                        <a:srgbClr val="E3E7F0"/>
+                      </a:solidFill>
+                      <a:prstDash val="solid"/>
+                      <a:round/>
+                      <a:headEnd type="none" w="med" len="med"/>
+                      <a:tailEnd type="none" w="med" len="med"/>
+                    </a:lnL>
+                    <a:lnR w="6350" cap="flat" cmpd="sng" algn="ctr">
+                      <a:solidFill>
+                        <a:srgbClr val="E3E7F0"/>
+                      </a:solidFill>
+                      <a:prstDash val="solid"/>
+                      <a:round/>
+                      <a:headEnd type="none" w="med" len="med"/>
+                      <a:tailEnd type="none" w="med" len="med"/>
+                    </a:lnR>
+                    <a:lnT w="6350" cap="flat" cmpd="sng" algn="ctr">
+                      <a:solidFill>
+                        <a:srgbClr val="E3E7F0"/>
+                      </a:solidFill>
+                      <a:prstDash val="solid"/>
+                      <a:round/>
+                      <a:headEnd type="none" w="med" len="med"/>
+                      <a:tailEnd type="none" w="med" len="med"/>
+                    </a:lnT>
+                    <a:lnB w="6350" cap="flat" cmpd="sng" algn="ctr">
+                      <a:solidFill>
+                        <a:srgbClr val="E3E7F0"/>
+                      </a:solidFill>
+                      <a:prstDash val="solid"/>
+                      <a:round/>
+                      <a:headEnd type="none" w="med" len="med"/>
+                      <a:tailEnd type="none" w="med" len="med"/>
+                    </a:lnB>
+                    <a:solidFill>
+                      <a:srgbClr val="1E2761"/>
+                    </a:solidFill>
+                  </a:tcPr>
+                </a:tc>
+                <a:tc>
+                  <a:txBody>
+                    <a:bodyPr/>
+                    <a:lstStyle/>
+                    <a:p>
+                      <a:pPr algn="r" indent="0" marL="0">
+                        <a:buNone/>
+                      </a:pPr>
+                      <a:r>
+                        <a:rPr lang="en-US" sz="950" b="1" dirty="0">
+                          <a:solidFill>
+                            <a:srgbClr val="FFFFFF"/>
+                          </a:solidFill>
+                          <a:latin typeface="Calibri" pitchFamily="34" charset="0"/>
+                          <a:ea typeface="Calibri" pitchFamily="34" charset="-122"/>
+                          <a:cs typeface="Calibri" pitchFamily="34" charset="-120"/>
+                        </a:rPr>
+                        <a:t>Test period</a:t>
+                      </a:r>
+                      <a:endParaRPr lang="en-US" sz="950" dirty="0">
+                        <a:latin typeface="Calibri" charset="0"/>
+                        <a:ea typeface="Calibri" charset="0"/>
+                        <a:cs typeface="Calibri" charset="0"/>
+                      </a:endParaRPr>
+                    </a:p>
+                  </a:txBody>
+                  <a:tcPr marL="50800" marR="50800" marT="50800" marB="50800">
+                    <a:lnL w="6350" cap="flat" cmpd="sng" algn="ctr">
+                      <a:solidFill>
+                        <a:srgbClr val="E3E7F0"/>
+                      </a:solidFill>
+                      <a:prstDash val="solid"/>
+                      <a:round/>
+                      <a:headEnd type="none" w="med" len="med"/>
+                      <a:tailEnd type="none" w="med" len="med"/>
+                    </a:lnL>
+                    <a:lnR w="6350" cap="flat" cmpd="sng" algn="ctr">
+                      <a:solidFill>
+                        <a:srgbClr val="E3E7F0"/>
+                      </a:solidFill>
+                      <a:prstDash val="solid"/>
+                      <a:round/>
+                      <a:headEnd type="none" w="med" len="med"/>
+                      <a:tailEnd type="none" w="med" len="med"/>
+                    </a:lnR>
+                    <a:lnT w="6350" cap="flat" cmpd="sng" algn="ctr">
+                      <a:solidFill>
+                        <a:srgbClr val="E3E7F0"/>
+                      </a:solidFill>
+                      <a:prstDash val="solid"/>
+                      <a:round/>
+                      <a:headEnd type="none" w="med" len="med"/>
+                      <a:tailEnd type="none" w="med" len="med"/>
+                    </a:lnT>
+                    <a:lnB w="6350" cap="flat" cmpd="sng" algn="ctr">
+                      <a:solidFill>
+                        <a:srgbClr val="E3E7F0"/>
+                      </a:solidFill>
+                      <a:prstDash val="solid"/>
+                      <a:round/>
+                      <a:headEnd type="none" w="med" len="med"/>
+                      <a:tailEnd type="none" w="med" len="med"/>
+                    </a:lnB>
+                    <a:solidFill>
+                      <a:srgbClr val="1E2761"/>
+                    </a:solidFill>
+                  </a:tcPr>
+                </a:tc>
+              </a:tr>
+              <a:tr h="210312">
+                <a:tc>
+                  <a:txBody>
+                    <a:bodyPr/>
+                    <a:lstStyle/>
+                    <a:p>
+                      <a:pPr algn="l" indent="0" marL="0">
+                        <a:buNone/>
+                      </a:pPr>
+                      <a:r>
+                        <a:rPr lang="en-US" sz="1000" dirty="0">
+                          <a:solidFill>
+                            <a:srgbClr val="1A1A1A"/>
+                          </a:solidFill>
+                          <a:latin typeface="Calibri" pitchFamily="34" charset="0"/>
+                          <a:ea typeface="Calibri" pitchFamily="34" charset="-122"/>
+                          <a:cs typeface="Calibri" pitchFamily="34" charset="-120"/>
+                        </a:rPr>
+                        <a:t>Traded book</a:t>
+                      </a:r>
+                      <a:endParaRPr lang="en-US" sz="1000" dirty="0">
+                        <a:latin typeface="Calibri" charset="0"/>
+                        <a:ea typeface="Calibri" charset="0"/>
+                        <a:cs typeface="Calibri" charset="0"/>
+                      </a:endParaRPr>
+                    </a:p>
+                  </a:txBody>
+                  <a:tcPr marL="50800" marR="50800" marT="50800" marB="50800">
+                    <a:lnL w="6350" cap="flat" cmpd="sng" algn="ctr">
+                      <a:solidFill>
+                        <a:srgbClr val="E3E7F0"/>
+                      </a:solidFill>
+                      <a:prstDash val="solid"/>
+                      <a:round/>
+                      <a:headEnd type="none" w="med" len="med"/>
+                      <a:tailEnd type="none" w="med" len="med"/>
+                    </a:lnL>
+                    <a:lnR w="6350" cap="flat" cmpd="sng" algn="ctr">
+                      <a:solidFill>
+                        <a:srgbClr val="E3E7F0"/>
+                      </a:solidFill>
+                      <a:prstDash val="solid"/>
+                      <a:round/>
+                      <a:headEnd type="none" w="med" len="med"/>
+                      <a:tailEnd type="none" w="med" len="med"/>
+                    </a:lnR>
+                    <a:lnT w="6350" cap="flat" cmpd="sng" algn="ctr">
+                      <a:solidFill>
+                        <a:srgbClr val="E3E7F0"/>
+                      </a:solidFill>
+                      <a:prstDash val="solid"/>
+                      <a:round/>
+                      <a:headEnd type="none" w="med" len="med"/>
+                      <a:tailEnd type="none" w="med" len="med"/>
+                    </a:lnT>
+                    <a:lnB w="6350" cap="flat" cmpd="sng" algn="ctr">
+                      <a:solidFill>
+                        <a:srgbClr val="E3E7F0"/>
+                      </a:solidFill>
+                      <a:prstDash val="solid"/>
+                      <a:round/>
+                      <a:headEnd type="none" w="med" len="med"/>
+                      <a:tailEnd type="none" w="med" len="med"/>
+                    </a:lnB>
+                  </a:tcPr>
+                </a:tc>
+                <a:tc>
+                  <a:txBody>
+                    <a:bodyPr/>
+                    <a:lstStyle/>
+                    <a:p>
+                      <a:pPr algn="r" indent="0" marL="0">
+                        <a:buNone/>
+                      </a:pPr>
+                      <a:r>
+                        <a:rPr lang="en-US" sz="1000" dirty="0">
+                          <a:solidFill>
+                            <a:srgbClr val="1A1A1A"/>
+                          </a:solidFill>
+                          <a:latin typeface="Calibri" pitchFamily="34" charset="0"/>
+                          <a:ea typeface="Calibri" pitchFamily="34" charset="-122"/>
+                          <a:cs typeface="Calibri" pitchFamily="34" charset="-120"/>
+                        </a:rPr>
+                        <a:t>-0.66</a:t>
+                      </a:r>
+                      <a:endParaRPr lang="en-US" sz="1000" dirty="0">
+                        <a:latin typeface="Calibri" charset="0"/>
+                        <a:ea typeface="Calibri" charset="0"/>
+                        <a:cs typeface="Calibri" charset="0"/>
+                      </a:endParaRPr>
+                    </a:p>
+                  </a:txBody>
+                  <a:tcPr marL="50800" marR="50800" marT="50800" marB="50800">
+                    <a:lnL w="6350" cap="flat" cmpd="sng" algn="ctr">
+                      <a:solidFill>
+                        <a:srgbClr val="E3E7F0"/>
+                      </a:solidFill>
+                      <a:prstDash val="solid"/>
+                      <a:round/>
+                      <a:headEnd type="none" w="med" len="med"/>
+                      <a:tailEnd type="none" w="med" len="med"/>
+                    </a:lnL>
+                    <a:lnR w="6350" cap="flat" cmpd="sng" algn="ctr">
+                      <a:solidFill>
+                        <a:srgbClr val="E3E7F0"/>
+                      </a:solidFill>
+                      <a:prstDash val="solid"/>
+                      <a:round/>
+                      <a:headEnd type="none" w="med" len="med"/>
+                      <a:tailEnd type="none" w="med" len="med"/>
+                    </a:lnR>
+                    <a:lnT w="6350" cap="flat" cmpd="sng" algn="ctr">
+                      <a:solidFill>
+                        <a:srgbClr val="E3E7F0"/>
+                      </a:solidFill>
+                      <a:prstDash val="solid"/>
+                      <a:round/>
+                      <a:headEnd type="none" w="med" len="med"/>
+                      <a:tailEnd type="none" w="med" len="med"/>
+                    </a:lnT>
+                    <a:lnB w="6350" cap="flat" cmpd="sng" algn="ctr">
+                      <a:solidFill>
+                        <a:srgbClr val="E3E7F0"/>
+                      </a:solidFill>
+                      <a:prstDash val="solid"/>
+                      <a:round/>
+                      <a:headEnd type="none" w="med" len="med"/>
+                      <a:tailEnd type="none" w="med" len="med"/>
+                    </a:lnB>
+                  </a:tcPr>
+                </a:tc>
+                <a:tc>
+                  <a:txBody>
+                    <a:bodyPr/>
+                    <a:lstStyle/>
+                    <a:p>
+                      <a:pPr algn="r" indent="0" marL="0">
+                        <a:buNone/>
+                      </a:pPr>
+                      <a:r>
+                        <a:rPr lang="en-US" sz="1000" dirty="0">
+                          <a:solidFill>
+                            <a:srgbClr val="1A1A1A"/>
+                          </a:solidFill>
+                          <a:latin typeface="Calibri" pitchFamily="34" charset="0"/>
+                          <a:ea typeface="Calibri" pitchFamily="34" charset="-122"/>
+                          <a:cs typeface="Calibri" pitchFamily="34" charset="-120"/>
+                        </a:rPr>
+                        <a:t>+0.67</a:t>
+                      </a:r>
+                      <a:endParaRPr lang="en-US" sz="1000" dirty="0">
+                        <a:latin typeface="Calibri" charset="0"/>
+                        <a:ea typeface="Calibri" charset="0"/>
+                        <a:cs typeface="Calibri" charset="0"/>
+                      </a:endParaRPr>
+                    </a:p>
+                  </a:txBody>
+                  <a:tcPr marL="50800" marR="50800" marT="50800" marB="50800">
+                    <a:lnL w="6350" cap="flat" cmpd="sng" algn="ctr">
+                      <a:solidFill>
+                        <a:srgbClr val="E3E7F0"/>
+                      </a:solidFill>
+                      <a:prstDash val="solid"/>
+                      <a:round/>
+                      <a:headEnd type="none" w="med" len="med"/>
+                      <a:tailEnd type="none" w="med" len="med"/>
+                    </a:lnL>
+                    <a:lnR w="6350" cap="flat" cmpd="sng" algn="ctr">
+                      <a:solidFill>
+                        <a:srgbClr val="E3E7F0"/>
+                      </a:solidFill>
+                      <a:prstDash val="solid"/>
+                      <a:round/>
+                      <a:headEnd type="none" w="med" len="med"/>
+                      <a:tailEnd type="none" w="med" len="med"/>
+                    </a:lnR>
+                    <a:lnT w="6350" cap="flat" cmpd="sng" algn="ctr">
+                      <a:solidFill>
+                        <a:srgbClr val="E3E7F0"/>
+                      </a:solidFill>
+                      <a:prstDash val="solid"/>
+                      <a:round/>
+                      <a:headEnd type="none" w="med" len="med"/>
+                      <a:tailEnd type="none" w="med" len="med"/>
+                    </a:lnT>
+                    <a:lnB w="6350" cap="flat" cmpd="sng" algn="ctr">
+                      <a:solidFill>
+                        <a:srgbClr val="E3E7F0"/>
+                      </a:solidFill>
+                      <a:prstDash val="solid"/>
+                      <a:round/>
+                      <a:headEnd type="none" w="med" len="med"/>
+                      <a:tailEnd type="none" w="med" len="med"/>
+                    </a:lnB>
+                  </a:tcPr>
+                </a:tc>
+              </a:tr>
+              <a:tr h="210312">
+                <a:tc>
+                  <a:txBody>
+                    <a:bodyPr/>
+                    <a:lstStyle/>
+                    <a:p>
+                      <a:pPr algn="l" indent="0" marL="0">
+                        <a:buNone/>
+                      </a:pPr>
+                      <a:r>
+                        <a:rPr lang="en-US" sz="1000" dirty="0">
+                          <a:solidFill>
+                            <a:srgbClr val="1A1A1A"/>
+                          </a:solidFill>
+                          <a:latin typeface="Calibri" pitchFamily="34" charset="0"/>
+                          <a:ea typeface="Calibri" pitchFamily="34" charset="-122"/>
+                          <a:cs typeface="Calibri" pitchFamily="34" charset="-120"/>
+                        </a:rPr>
+                        <a:t>Sector cap 5</a:t>
+                      </a:r>
+                      <a:endParaRPr lang="en-US" sz="1000" dirty="0">
+                        <a:latin typeface="Calibri" charset="0"/>
+                        <a:ea typeface="Calibri" charset="0"/>
+                        <a:cs typeface="Calibri" charset="0"/>
+                      </a:endParaRPr>
+                    </a:p>
+                  </a:txBody>
+                  <a:tcPr marL="50800" marR="50800" marT="50800" marB="50800">
+                    <a:lnL w="6350" cap="flat" cmpd="sng" algn="ctr">
+                      <a:solidFill>
+                        <a:srgbClr val="E3E7F0"/>
+                      </a:solidFill>
+                      <a:prstDash val="solid"/>
+                      <a:round/>
+                      <a:headEnd type="none" w="med" len="med"/>
+                      <a:tailEnd type="none" w="med" len="med"/>
+                    </a:lnL>
+                    <a:lnR w="6350" cap="flat" cmpd="sng" algn="ctr">
+                      <a:solidFill>
+                        <a:srgbClr val="E3E7F0"/>
+                      </a:solidFill>
+                      <a:prstDash val="solid"/>
+                      <a:round/>
+                      <a:headEnd type="none" w="med" len="med"/>
+                      <a:tailEnd type="none" w="med" len="med"/>
+                    </a:lnR>
+                    <a:lnT w="6350" cap="flat" cmpd="sng" algn="ctr">
+                      <a:solidFill>
+                        <a:srgbClr val="E3E7F0"/>
+                      </a:solidFill>
+                      <a:prstDash val="solid"/>
+                      <a:round/>
+                      <a:headEnd type="none" w="med" len="med"/>
+                      <a:tailEnd type="none" w="med" len="med"/>
+                    </a:lnT>
+                    <a:lnB w="6350" cap="flat" cmpd="sng" algn="ctr">
+                      <a:solidFill>
+                        <a:srgbClr val="E3E7F0"/>
+                      </a:solidFill>
+                      <a:prstDash val="solid"/>
+                      <a:round/>
+                      <a:headEnd type="none" w="med" len="med"/>
+                      <a:tailEnd type="none" w="med" len="med"/>
+                    </a:lnB>
+                  </a:tcPr>
+                </a:tc>
+                <a:tc>
+                  <a:txBody>
+                    <a:bodyPr/>
+                    <a:lstStyle/>
+                    <a:p>
+                      <a:pPr algn="r" indent="0" marL="0">
+                        <a:buNone/>
+                      </a:pPr>
+                      <a:r>
+                        <a:rPr lang="en-US" sz="1000" dirty="0">
+                          <a:solidFill>
+                            <a:srgbClr val="1A1A1A"/>
+                          </a:solidFill>
+                          <a:latin typeface="Calibri" pitchFamily="34" charset="0"/>
+                          <a:ea typeface="Calibri" pitchFamily="34" charset="-122"/>
+                          <a:cs typeface="Calibri" pitchFamily="34" charset="-120"/>
+                        </a:rPr>
+                        <a:t>-1.05</a:t>
+                      </a:r>
+                      <a:endParaRPr lang="en-US" sz="1000" dirty="0">
+                        <a:latin typeface="Calibri" charset="0"/>
+                        <a:ea typeface="Calibri" charset="0"/>
+                        <a:cs typeface="Calibri" charset="0"/>
+                      </a:endParaRPr>
+                    </a:p>
+                  </a:txBody>
+                  <a:tcPr marL="50800" marR="50800" marT="50800" marB="50800">
+                    <a:lnL w="6350" cap="flat" cmpd="sng" algn="ctr">
+                      <a:solidFill>
+                        <a:srgbClr val="E3E7F0"/>
+                      </a:solidFill>
+                      <a:prstDash val="solid"/>
+                      <a:round/>
+                      <a:headEnd type="none" w="med" len="med"/>
+                      <a:tailEnd type="none" w="med" len="med"/>
+                    </a:lnL>
+                    <a:lnR w="6350" cap="flat" cmpd="sng" algn="ctr">
+                      <a:solidFill>
+                        <a:srgbClr val="E3E7F0"/>
+                      </a:solidFill>
+                      <a:prstDash val="solid"/>
+                      <a:round/>
+                      <a:headEnd type="none" w="med" len="med"/>
+                      <a:tailEnd type="none" w="med" len="med"/>
+                    </a:lnR>
+                    <a:lnT w="6350" cap="flat" cmpd="sng" algn="ctr">
+                      <a:solidFill>
+                        <a:srgbClr val="E3E7F0"/>
+                      </a:solidFill>
+                      <a:prstDash val="solid"/>
+                      <a:round/>
+                      <a:headEnd type="none" w="med" len="med"/>
+                      <a:tailEnd type="none" w="med" len="med"/>
+                    </a:lnT>
+                    <a:lnB w="6350" cap="flat" cmpd="sng" algn="ctr">
+                      <a:solidFill>
+                        <a:srgbClr val="E3E7F0"/>
+                      </a:solidFill>
+                      <a:prstDash val="solid"/>
+                      <a:round/>
+                      <a:headEnd type="none" w="med" len="med"/>
+                      <a:tailEnd type="none" w="med" len="med"/>
+                    </a:lnB>
+                  </a:tcPr>
+                </a:tc>
+                <a:tc>
+                  <a:txBody>
+                    <a:bodyPr/>
+                    <a:lstStyle/>
+                    <a:p>
+                      <a:pPr algn="r" indent="0" marL="0">
+                        <a:buNone/>
+                      </a:pPr>
+                      <a:r>
+                        <a:rPr lang="en-US" sz="1000" dirty="0">
+                          <a:solidFill>
+                            <a:srgbClr val="1A1A1A"/>
+                          </a:solidFill>
+                          <a:latin typeface="Calibri" pitchFamily="34" charset="0"/>
+                          <a:ea typeface="Calibri" pitchFamily="34" charset="-122"/>
+                          <a:cs typeface="Calibri" pitchFamily="34" charset="-120"/>
+                        </a:rPr>
+                        <a:t>+0.91</a:t>
+                      </a:r>
+                      <a:endParaRPr lang="en-US" sz="1000" dirty="0">
+                        <a:latin typeface="Calibri" charset="0"/>
+                        <a:ea typeface="Calibri" charset="0"/>
+                        <a:cs typeface="Calibri" charset="0"/>
+                      </a:endParaRPr>
+                    </a:p>
+                  </a:txBody>
+                  <a:tcPr marL="50800" marR="50800" marT="50800" marB="50800">
+                    <a:lnL w="6350" cap="flat" cmpd="sng" algn="ctr">
+                      <a:solidFill>
+                        <a:srgbClr val="E3E7F0"/>
+                      </a:solidFill>
+                      <a:prstDash val="solid"/>
+                      <a:round/>
+                      <a:headEnd type="none" w="med" len="med"/>
+                      <a:tailEnd type="none" w="med" len="med"/>
+                    </a:lnL>
+                    <a:lnR w="6350" cap="flat" cmpd="sng" algn="ctr">
+                      <a:solidFill>
+                        <a:srgbClr val="E3E7F0"/>
+                      </a:solidFill>
+                      <a:prstDash val="solid"/>
+                      <a:round/>
+                      <a:headEnd type="none" w="med" len="med"/>
+                      <a:tailEnd type="none" w="med" len="med"/>
+                    </a:lnR>
+                    <a:lnT w="6350" cap="flat" cmpd="sng" algn="ctr">
+                      <a:solidFill>
+                        <a:srgbClr val="E3E7F0"/>
+                      </a:solidFill>
+                      <a:prstDash val="solid"/>
+                      <a:round/>
+                      <a:headEnd type="none" w="med" len="med"/>
+                      <a:tailEnd type="none" w="med" len="med"/>
+                    </a:lnT>
+                    <a:lnB w="6350" cap="flat" cmpd="sng" algn="ctr">
+                      <a:solidFill>
+                        <a:srgbClr val="E3E7F0"/>
+                      </a:solidFill>
+                      <a:prstDash val="solid"/>
+                      <a:round/>
+                      <a:headEnd type="none" w="med" len="med"/>
+                      <a:tailEnd type="none" w="med" len="med"/>
+                    </a:lnB>
+                  </a:tcPr>
+                </a:tc>
+              </a:tr>
+              <a:tr h="210312">
+                <a:tc>
+                  <a:txBody>
+                    <a:bodyPr/>
+                    <a:lstStyle/>
+                    <a:p>
+                      <a:pPr algn="l" indent="0" marL="0">
+                        <a:buNone/>
+                      </a:pPr>
+                      <a:r>
+                        <a:rPr lang="en-US" sz="1000" dirty="0">
+                          <a:solidFill>
+                            <a:srgbClr val="1A1A1A"/>
+                          </a:solidFill>
+                          <a:latin typeface="Calibri" pitchFamily="34" charset="0"/>
+                          <a:ea typeface="Calibri" pitchFamily="34" charset="-122"/>
+                          <a:cs typeface="Calibri" pitchFamily="34" charset="-120"/>
+                        </a:rPr>
+                        <a:t>Evict 10/month</a:t>
+                      </a:r>
+                      <a:endParaRPr lang="en-US" sz="1000" dirty="0">
+                        <a:latin typeface="Calibri" charset="0"/>
+                        <a:ea typeface="Calibri" charset="0"/>
+                        <a:cs typeface="Calibri" charset="0"/>
+                      </a:endParaRPr>
+                    </a:p>
+                  </a:txBody>
+                  <a:tcPr marL="50800" marR="50800" marT="50800" marB="50800">
+                    <a:lnL w="6350" cap="flat" cmpd="sng" algn="ctr">
+                      <a:solidFill>
+                        <a:srgbClr val="E3E7F0"/>
+                      </a:solidFill>
+                      <a:prstDash val="solid"/>
+                      <a:round/>
+                      <a:headEnd type="none" w="med" len="med"/>
+                      <a:tailEnd type="none" w="med" len="med"/>
+                    </a:lnL>
+                    <a:lnR w="6350" cap="flat" cmpd="sng" algn="ctr">
+                      <a:solidFill>
+                        <a:srgbClr val="E3E7F0"/>
+                      </a:solidFill>
+                      <a:prstDash val="solid"/>
+                      <a:round/>
+                      <a:headEnd type="none" w="med" len="med"/>
+                      <a:tailEnd type="none" w="med" len="med"/>
+                    </a:lnR>
+                    <a:lnT w="6350" cap="flat" cmpd="sng" algn="ctr">
+                      <a:solidFill>
+                        <a:srgbClr val="E3E7F0"/>
+                      </a:solidFill>
+                      <a:prstDash val="solid"/>
+                      <a:round/>
+                      <a:headEnd type="none" w="med" len="med"/>
+                      <a:tailEnd type="none" w="med" len="med"/>
+                    </a:lnT>
+                    <a:lnB w="6350" cap="flat" cmpd="sng" algn="ctr">
+                      <a:solidFill>
+                        <a:srgbClr val="E3E7F0"/>
+                      </a:solidFill>
+                      <a:prstDash val="solid"/>
+                      <a:round/>
+                      <a:headEnd type="none" w="med" len="med"/>
+                      <a:tailEnd type="none" w="med" len="med"/>
+                    </a:lnB>
+                  </a:tcPr>
+                </a:tc>
+                <a:tc>
+                  <a:txBody>
+                    <a:bodyPr/>
+                    <a:lstStyle/>
+                    <a:p>
+                      <a:pPr algn="r" indent="0" marL="0">
+                        <a:buNone/>
+                      </a:pPr>
+                      <a:r>
+                        <a:rPr lang="en-US" sz="1000" dirty="0">
+                          <a:solidFill>
+                            <a:srgbClr val="1A1A1A"/>
+                          </a:solidFill>
+                          <a:latin typeface="Calibri" pitchFamily="34" charset="0"/>
+                          <a:ea typeface="Calibri" pitchFamily="34" charset="-122"/>
+                          <a:cs typeface="Calibri" pitchFamily="34" charset="-120"/>
+                        </a:rPr>
+                        <a:t>-1.32</a:t>
+                      </a:r>
+                      <a:endParaRPr lang="en-US" sz="1000" dirty="0">
+                        <a:latin typeface="Calibri" charset="0"/>
+                        <a:ea typeface="Calibri" charset="0"/>
+                        <a:cs typeface="Calibri" charset="0"/>
+                      </a:endParaRPr>
+                    </a:p>
+                  </a:txBody>
+                  <a:tcPr marL="50800" marR="50800" marT="50800" marB="50800">
+                    <a:lnL w="6350" cap="flat" cmpd="sng" algn="ctr">
+                      <a:solidFill>
+                        <a:srgbClr val="E3E7F0"/>
+                      </a:solidFill>
+                      <a:prstDash val="solid"/>
+                      <a:round/>
+                      <a:headEnd type="none" w="med" len="med"/>
+                      <a:tailEnd type="none" w="med" len="med"/>
+                    </a:lnL>
+                    <a:lnR w="6350" cap="flat" cmpd="sng" algn="ctr">
+                      <a:solidFill>
+                        <a:srgbClr val="E3E7F0"/>
+                      </a:solidFill>
+                      <a:prstDash val="solid"/>
+                      <a:round/>
+                      <a:headEnd type="none" w="med" len="med"/>
+                      <a:tailEnd type="none" w="med" len="med"/>
+                    </a:lnR>
+                    <a:lnT w="6350" cap="flat" cmpd="sng" algn="ctr">
+                      <a:solidFill>
+                        <a:srgbClr val="E3E7F0"/>
+                      </a:solidFill>
+                      <a:prstDash val="solid"/>
+                      <a:round/>
+                      <a:headEnd type="none" w="med" len="med"/>
+                      <a:tailEnd type="none" w="med" len="med"/>
+                    </a:lnT>
+                    <a:lnB w="6350" cap="flat" cmpd="sng" algn="ctr">
+                      <a:solidFill>
+                        <a:srgbClr val="E3E7F0"/>
+                      </a:solidFill>
+                      <a:prstDash val="solid"/>
+                      <a:round/>
+                      <a:headEnd type="none" w="med" len="med"/>
+                      <a:tailEnd type="none" w="med" len="med"/>
+                    </a:lnB>
+                  </a:tcPr>
+                </a:tc>
+                <a:tc>
+                  <a:txBody>
+                    <a:bodyPr/>
+                    <a:lstStyle/>
+                    <a:p>
+                      <a:pPr algn="r" indent="0" marL="0">
+                        <a:buNone/>
+                      </a:pPr>
+                      <a:r>
+                        <a:rPr lang="en-US" sz="1000" dirty="0">
+                          <a:solidFill>
+                            <a:srgbClr val="1A1A1A"/>
+                          </a:solidFill>
+                          <a:latin typeface="Calibri" pitchFamily="34" charset="0"/>
+                          <a:ea typeface="Calibri" pitchFamily="34" charset="-122"/>
+                          <a:cs typeface="Calibri" pitchFamily="34" charset="-120"/>
+                        </a:rPr>
+                        <a:t>+0.97</a:t>
+                      </a:r>
+                      <a:endParaRPr lang="en-US" sz="1000" dirty="0">
+                        <a:latin typeface="Calibri" charset="0"/>
+                        <a:ea typeface="Calibri" charset="0"/>
+                        <a:cs typeface="Calibri" charset="0"/>
+                      </a:endParaRPr>
+                    </a:p>
+                  </a:txBody>
+                  <a:tcPr marL="50800" marR="50800" marT="50800" marB="50800">
+                    <a:lnL w="6350" cap="flat" cmpd="sng" algn="ctr">
+                      <a:solidFill>
+                        <a:srgbClr val="E3E7F0"/>
+                      </a:solidFill>
+                      <a:prstDash val="solid"/>
+                      <a:round/>
+                      <a:headEnd type="none" w="med" len="med"/>
+                      <a:tailEnd type="none" w="med" len="med"/>
+                    </a:lnL>
+                    <a:lnR w="6350" cap="flat" cmpd="sng" algn="ctr">
+                      <a:solidFill>
+                        <a:srgbClr val="E3E7F0"/>
+                      </a:solidFill>
+                      <a:prstDash val="solid"/>
+                      <a:round/>
+                      <a:headEnd type="none" w="med" len="med"/>
+                      <a:tailEnd type="none" w="med" len="med"/>
+                    </a:lnR>
+                    <a:lnT w="6350" cap="flat" cmpd="sng" algn="ctr">
+                      <a:solidFill>
+                        <a:srgbClr val="E3E7F0"/>
+                      </a:solidFill>
+                      <a:prstDash val="solid"/>
+                      <a:round/>
+                      <a:headEnd type="none" w="med" len="med"/>
+                      <a:tailEnd type="none" w="med" len="med"/>
+                    </a:lnT>
+                    <a:lnB w="6350" cap="flat" cmpd="sng" algn="ctr">
+                      <a:solidFill>
+                        <a:srgbClr val="E3E7F0"/>
+                      </a:solidFill>
+                      <a:prstDash val="solid"/>
+                      <a:round/>
+                      <a:headEnd type="none" w="med" len="med"/>
+                      <a:tailEnd type="none" w="med" len="med"/>
+                    </a:lnB>
+                  </a:tcPr>
+                </a:tc>
+              </a:tr>
+            </a:tbl>
+          </a:graphicData>
+        </a:graphic>
+      </p:graphicFrame>
+      <p:sp>
+        <p:nvSpPr>
+          <p:cNvPr id="12" name="Text 8"/>
+          <p:cNvSpPr txBox="1"/>
+          <p:nvPr/>
+        </p:nvSpPr>
+        <p:spPr>
+          <a:xfrm>
+            <a:off x="6492240" y="4315968"/>
+            <a:ext cx="5120640" cy="457200"/>
+          </a:xfrm>
+          <a:prstGeom prst="rect">
+            <a:avLst/>
+          </a:prstGeom>
+          <a:noFill/>
+          <a:ln/>
+        </p:spPr>
+        <p:txBody>
+          <a:bodyPr wrap="square" lIns="0" tIns="0" rIns="0" bIns="0" rtlCol="0" anchor="ctr"/>
+          <a:lstStyle/>
+          <a:p>
+            <a:pPr indent="0" marL="0">
+              <a:buNone/>
+            </a:pPr>
+            <a:r>
+              <a:rPr lang="en-US" sz="1000" i="1" dirty="0">
+                <a:solidFill>
+                  <a:srgbClr val="6B7280"/>
+                </a:solidFill>
+                <a:latin typeface="Calibri" pitchFamily="34" charset="0"/>
+                <a:ea typeface="Calibri" pitchFamily="34" charset="-122"/>
+                <a:cs typeface="Calibri" pitchFamily="34" charset="-120"/>
+              </a:rPr>
+              <a:t>Every arm beats the traded book on the test period and loses to it on the only window the model never saw. Exploratory arms were run on an earlier build (baseline +0.85); the dose curve and variant S are on the submitted book.</a:t>
+            </a:r>
+            <a:endParaRPr lang="en-US" sz="1000" dirty="0"/>
+          </a:p>
+        </p:txBody>
+      </p:sp>
+      <p:sp>
+        <p:nvSpPr>
+          <p:cNvPr id="13" name="Shape 9"/>
+          <p:cNvSpPr/>
+          <p:nvPr/>
+        </p:nvSpPr>
+        <p:spPr>
+          <a:xfrm>
+            <a:off x="548640" y="5047488"/>
+            <a:ext cx="11064240" cy="1133856"/>
+          </a:xfrm>
+          <a:prstGeom prst="roundRect">
+            <a:avLst>
+              <a:gd name="adj" fmla="val 4032"/>
+            </a:avLst>
+          </a:prstGeom>
+          <a:solidFill>
+            <a:srgbClr val="F2F5FC"/>
+          </a:solidFill>
+          <a:ln w="12700">
+            <a:solidFill>
+              <a:srgbClr val="F2F5FC"/>
+            </a:solidFill>
+            <a:prstDash val="solid"/>
+          </a:ln>
+        </p:spPr>
+      </p:sp>
+      <p:sp>
+        <p:nvSpPr>
+          <p:cNvPr id="14" name="Text 10"/>
+          <p:cNvSpPr txBox="1"/>
+          <p:nvPr/>
+        </p:nvSpPr>
+        <p:spPr>
+          <a:xfrm>
+            <a:off x="777240" y="5175504"/>
+            <a:ext cx="10607040" cy="237744"/>
+          </a:xfrm>
+          <a:prstGeom prst="rect">
+            <a:avLst/>
+          </a:prstGeom>
+          <a:noFill/>
+          <a:ln/>
+        </p:spPr>
+        <p:txBody>
+          <a:bodyPr wrap="square" lIns="0" tIns="0" rIns="0" bIns="0" rtlCol="0" anchor="ctr"/>
+          <a:lstStyle/>
+          <a:p>
+            <a:pPr indent="0" marL="0">
+              <a:buNone/>
+            </a:pPr>
+            <a:r>
+              <a:rPr lang="en-US" sz="1150" b="1" dirty="0">
+                <a:solidFill>
+                  <a:srgbClr val="1E2761"/>
+                </a:solidFill>
+                <a:latin typeface="Calibri" pitchFamily="34" charset="0"/>
+                <a:ea typeface="Calibri" pitchFamily="34" charset="-122"/>
+                <a:cs typeface="Calibri" pitchFamily="34" charset="-120"/>
+              </a:rPr>
+              <a:t>Why none of it can be acted on</a:t>
+            </a:r>
+            <a:endParaRPr lang="en-US" sz="1150" dirty="0"/>
+          </a:p>
+        </p:txBody>
+      </p:sp>
+      <p:sp>
+        <p:nvSpPr>
+          <p:cNvPr id="15" name="Text 11"/>
+          <p:cNvSpPr txBox="1"/>
+          <p:nvPr/>
+        </p:nvSpPr>
+        <p:spPr>
+          <a:xfrm>
+            <a:off x="777240" y="5449824"/>
+            <a:ext cx="10607040" cy="694944"/>
+          </a:xfrm>
+          <a:prstGeom prst="rect">
+            <a:avLst/>
+          </a:prstGeom>
+          <a:noFill/>
+          <a:ln/>
+        </p:spPr>
+        <p:txBody>
+          <a:bodyPr wrap="square" lIns="0" tIns="0" rIns="0" bIns="0" rtlCol="0" anchor="t"/>
+          <a:lstStyle/>
+          <a:p>
+            <a:pPr indent="0" marL="0">
+              <a:lnSpc>
+                <a:spcPct val="102000"/>
+              </a:lnSpc>
+              <a:buNone/>
+            </a:pPr>
+            <a:r>
+              <a:rPr lang="en-US" sz="1050" b="1" dirty="0">
+                <a:solidFill>
+                  <a:srgbClr val="1A1A1A"/>
+                </a:solidFill>
+                <a:latin typeface="Calibri" pitchFamily="34" charset="0"/>
+                <a:ea typeface="Calibri" pitchFamily="34" charset="-122"/>
+                <a:cs typeface="Calibri" pitchFamily="34" charset="-120"/>
+              </a:rPr>
+              <a:t>A 24-month validation window cannot detect an information-ratio gap below 1.12; the 68-month test period cannot detect one below 0.66. Every effect measured here is between +0.2 and +0.4.</a:t>
+            </a:r>
+            <a:endParaRPr lang="en-US" sz="1050" dirty="0"/>
+          </a:p>
+          <a:p>
+            <a:pPr indent="0" marL="0">
+              <a:lnSpc>
+                <a:spcPct val="102000"/>
+              </a:lnSpc>
+              <a:buNone/>
+            </a:pPr>
+            <a:r>
+              <a:rPr lang="en-US" sz="1050" dirty="0">
+                <a:solidFill>
+                  <a:srgbClr val="6B7280"/>
+                </a:solidFill>
+                <a:latin typeface="Calibri" pitchFamily="34" charset="0"/>
+                <a:ea typeface="Calibri" pitchFamily="34" charset="-122"/>
+                <a:cs typeface="Calibri" pitchFamily="34" charset="-120"/>
+              </a:rPr>
+              <a:t>Conclusions that reverse when a smoothing parameter moves are what a sub-resolution effect looks like, and ours reversed three times. We report sector neutrality as untested rather than rejected, and we did not change the book on evidence our own sample cannot resolve.</a:t>
+            </a:r>
+            <a:endParaRPr lang="en-US" sz="1050" dirty="0"/>
+          </a:p>
+        </p:txBody>
+      </p:sp>
+    </p:spTree>
+  </p:cSld>
+  <p:clrMapOvr>
+    <a:masterClrMapping/>
+  </p:clrMapOvr>
+</p:sld>
+</file>
+
 <file path=ppt/slides/slide2.xml><?xml version="1.0" encoding="utf-8"?>
 <p:sld xmlns:a="http://schemas.openxmlformats.org/drawingml/2006/main" xmlns:r="http://schemas.openxmlformats.org/officeDocument/2006/relationships" xmlns:p="http://schemas.openxmlformats.org/presentationml/2006/main">
   <p:cSld name="Slide 2">
@@ -23092,6 +26592,30 @@
             </a:r>
             <a:endParaRPr lang="en-US" sz="1150" dirty="0"/>
           </a:p>
+          <a:p>
+            <a:pPr marL="342900" indent="-342900">
+              <a:lnSpc>
+                <a:spcPct val="105000"/>
+              </a:lnSpc>
+              <a:spcAft>
+                <a:spcPts val="1000"/>
+              </a:spcAft>
+              <a:buSzPct val="100000"/>
+              <a:buChar char="•"/>
+            </a:pPr>
+            <a:r>
+              <a:rPr lang="en-US" sz="1150" dirty="0">
+                <a:solidFill>
+                  <a:srgbClr val="FFFFFF"/>
+                </a:solidFill>
+                <a:latin typeface="Calibri" pitchFamily="34" charset="0"/>
+                <a:ea typeface="Calibri" pitchFamily="34" charset="-122"/>
+                <a:cs typeface="Calibri" pitchFamily="34" charset="-120"/>
+              </a:rPr>
+              <a:t>The improvement we would make next is sector neutrality: 90% of capital sits in sector bets nobody chose. We tested it four ways and report it as untested rather than rejected - the appendix explains why our sample cannot resolve an effect that size.</a:t>
+            </a:r>
+            <a:endParaRPr lang="en-US" sz="1150" dirty="0"/>
+          </a:p>
         </p:txBody>
       </p:sp>
       <p:sp>

--- a/05_submission/FIAM_deck.pptx
+++ b/05_submission/FIAM_deck.pptx
@@ -10903,12 +10903,12 @@
         </p:nvSpPr>
         <p:spPr>
           <a:xfrm>
-            <a:off x="548640" y="5047488"/>
-            <a:ext cx="11064240" cy="1133856"/>
+            <a:off x="548640" y="4956048"/>
+            <a:ext cx="11064240" cy="1243584"/>
           </a:xfrm>
           <a:prstGeom prst="roundRect">
             <a:avLst>
-              <a:gd name="adj" fmla="val 4032"/>
+              <a:gd name="adj" fmla="val 3676"/>
             </a:avLst>
           </a:prstGeom>
           <a:solidFill>
@@ -10930,7 +10930,7 @@
         </p:nvSpPr>
         <p:spPr>
           <a:xfrm>
-            <a:off x="777240" y="5175504"/>
+            <a:off x="777240" y="5074920"/>
             <a:ext cx="10607040" cy="237744"/>
           </a:xfrm>
           <a:prstGeom prst="rect">
@@ -10955,7 +10955,7 @@
                 <a:ea typeface="Calibri" pitchFamily="34" charset="-122"/>
                 <a:cs typeface="Calibri" pitchFamily="34" charset="-120"/>
               </a:rPr>
-              <a:t>Why none of it can be acted on</a:t>
+              <a:t>What this evidence can decide, and what it cannot</a:t>
             </a:r>
             <a:endParaRPr lang="en-US" sz="1150" dirty="0"/>
           </a:p>
@@ -10969,8 +10969,8 @@
         </p:nvSpPr>
         <p:spPr>
           <a:xfrm>
-            <a:off x="777240" y="5449824"/>
-            <a:ext cx="10607040" cy="694944"/>
+            <a:off x="777240" y="5340096"/>
+            <a:ext cx="10607040" cy="804672"/>
           </a:xfrm>
           <a:prstGeom prst="rect">
             <a:avLst/>
@@ -10984,12 +10984,29 @@
           <a:p>
             <a:pPr indent="0" marL="0">
               <a:lnSpc>
-                <a:spcPct val="102000"/>
+                <a:spcPct val="100000"/>
               </a:lnSpc>
               <a:buNone/>
             </a:pPr>
             <a:r>
-              <a:rPr lang="en-US" sz="1050" b="1" dirty="0">
+              <a:rPr lang="en-US" sz="950" b="1" dirty="0">
+                <a:solidFill>
+                  <a:srgbClr val="1E2761"/>
+                </a:solidFill>
+                <a:latin typeface="Calibri" pitchFamily="34" charset="0"/>
+                <a:ea typeface="Calibri" pitchFamily="34" charset="-122"/>
+                <a:cs typeface="Calibri" pitchFamily="34" charset="-120"/>
+              </a:rPr>
+              <a:t>Exact. </a:t>
+            </a:r>
+            <a:pPr indent="0" marL="0">
+              <a:lnSpc>
+                <a:spcPct val="100000"/>
+              </a:lnSpc>
+              <a:buNone/>
+            </a:pPr>
+            <a:r>
+              <a:rPr lang="en-US" sz="950" dirty="0">
                 <a:solidFill>
                   <a:srgbClr val="1A1A1A"/>
                 </a:solidFill>
@@ -10997,29 +11014,83 @@
                 <a:ea typeface="Calibri" pitchFamily="34" charset="-122"/>
                 <a:cs typeface="Calibri" pitchFamily="34" charset="-120"/>
               </a:rPr>
-              <a:t>A 24-month validation window cannot detect an information-ratio gap below 1.12; the 68-month test period cannot detect one below 0.66. Every effect measured here is between +0.2 and +0.4.</a:t>
+              <a:t>Sector net exposure falls from 89.7% of capital to 38.2% of capital. That is arithmetic on the weights and carries no sampling error at all.</a:t>
             </a:r>
-            <a:endParaRPr lang="en-US" sz="1050" dirty="0"/>
+            <a:endParaRPr lang="en-US" sz="950" dirty="0"/>
           </a:p>
           <a:p>
             <a:pPr indent="0" marL="0">
               <a:lnSpc>
-                <a:spcPct val="102000"/>
+                <a:spcPct val="100000"/>
               </a:lnSpc>
               <a:buNone/>
             </a:pPr>
             <a:r>
-              <a:rPr lang="en-US" sz="1050" dirty="0">
+              <a:rPr lang="en-US" sz="950" b="1" dirty="0">
                 <a:solidFill>
-                  <a:srgbClr val="6B7280"/>
+                  <a:srgbClr val="A62B1F"/>
                 </a:solidFill>
                 <a:latin typeface="Calibri" pitchFamily="34" charset="0"/>
                 <a:ea typeface="Calibri" pitchFamily="34" charset="-122"/>
                 <a:cs typeface="Calibri" pitchFamily="34" charset="-120"/>
               </a:rPr>
-              <a:t>Conclusions that reverse when a smoothing parameter moves are what a sub-resolution effect looks like, and ours reversed three times. We report sector neutrality as untested rather than rejected, and we did not change the book on evidence our own sample cannot resolve.</a:t>
+              <a:t>Estimated, and not established. </a:t>
             </a:r>
-            <a:endParaRPr lang="en-US" sz="1050" dirty="0"/>
+            <a:pPr indent="0" marL="0">
+              <a:lnSpc>
+                <a:spcPct val="100000"/>
+              </a:lnSpc>
+              <a:buNone/>
+            </a:pPr>
+            <a:r>
+              <a:rPr lang="en-US" sz="950" dirty="0">
+                <a:solidFill>
+                  <a:srgbClr val="1A1A1A"/>
+                </a:solidFill>
+                <a:latin typeface="Calibri" pitchFamily="34" charset="0"/>
+                <a:ea typeface="Calibri" pitchFamily="34" charset="-122"/>
+                <a:cs typeface="Calibri" pitchFamily="34" charset="-120"/>
+              </a:rPr>
+              <a:t>Market sensitivity is the mandate metric, and it does not hold up: 28 of 57 rolling windows improve (49% -- a coin flip is 28), full-period |beta| moves -0.034 — 0.28 of one standard error — and the headline last window, -0.63 to -0.21, is 1.3 standard errors -- not significant.</a:t>
+            </a:r>
+            <a:endParaRPr lang="en-US" sz="950" dirty="0"/>
+          </a:p>
+          <a:p>
+            <a:pPr indent="0" marL="0">
+              <a:lnSpc>
+                <a:spcPct val="100000"/>
+              </a:lnSpc>
+              <a:buNone/>
+            </a:pPr>
+            <a:r>
+              <a:rPr lang="en-US" sz="950" b="1" dirty="0">
+                <a:solidFill>
+                  <a:srgbClr val="1E2761"/>
+                </a:solidFill>
+                <a:latin typeface="Calibri" pitchFamily="34" charset="0"/>
+                <a:ea typeface="Calibri" pitchFamily="34" charset="-122"/>
+                <a:cs typeface="Calibri" pitchFamily="34" charset="-120"/>
+              </a:rPr>
+              <a:t>Not resolvable. </a:t>
+            </a:r>
+            <a:pPr indent="0" marL="0">
+              <a:lnSpc>
+                <a:spcPct val="100000"/>
+              </a:lnSpc>
+              <a:buNone/>
+            </a:pPr>
+            <a:r>
+              <a:rPr lang="en-US" sz="950" dirty="0">
+                <a:solidFill>
+                  <a:srgbClr val="1A1A1A"/>
+                </a:solidFill>
+                <a:latin typeface="Calibri" pitchFamily="34" charset="0"/>
+                <a:ea typeface="Calibri" pitchFamily="34" charset="-122"/>
+                <a:cs typeface="Calibri" pitchFamily="34" charset="-120"/>
+              </a:rPr>
+              <a:t>Validation cannot detect an IR gap below 1.12, the test period below 0.66; every effect here is between +0.2 and +0.4, and our own conclusions reversed three times. The book is unchanged: adopting would be a judgement about mandate exposure, not a statistical finding, and we would say so.</a:t>
+            </a:r>
+            <a:endParaRPr lang="en-US" sz="950" dirty="0"/>
           </a:p>
         </p:txBody>
       </p:sp>

--- a/05_submission/FIAM_deck.pptx
+++ b/05_submission/FIAM_deck.pptx
@@ -954,7 +954,7 @@
           <a:p>
             <a:r>
               <a:rPr lang="en-US" dirty="0"/>
-              <a:t>Every holding is named by ticker and full company name. The short book is more liquid than the long book: median daily dollar volume $1150.3m against long leg $559.3m.</a:t>
+              <a:t>Page 2 answers the brief's four questions in order: how the legs are built, which neutrality we enforce, which signals drive it, and the top ten of each leg with the cumulative chart. Short book median daily dollar volume $55m, long leg $27m.</a:t>
             </a:r>
             <a:endParaRPr lang="en-US" dirty="0"/>
           </a:p>
@@ -6739,7 +6739,7 @@
                           <a:ea typeface="Calibri" pitchFamily="34" charset="-122"/>
                           <a:cs typeface="Calibri" pitchFamily="34" charset="-120"/>
                         </a:rPr>
-                        <a:t>market only</a:t>
+                        <a:t>market only (FF MKT-RF)</a:t>
                       </a:r>
                       <a:endParaRPr lang="en-US" sz="1000" dirty="0">
                         <a:latin typeface="Calibri" charset="0"/>
@@ -7067,6 +7067,203 @@
                           <a:cs typeface="Calibri" pitchFamily="34" charset="-120"/>
                         </a:rPr>
                         <a:t>t=+2.47, R2 0.15</a:t>
+                      </a:r>
+                      <a:endParaRPr lang="en-US" sz="1000" dirty="0">
+                        <a:latin typeface="Calibri" charset="0"/>
+                        <a:ea typeface="Calibri" charset="0"/>
+                        <a:cs typeface="Calibri" charset="0"/>
+                      </a:endParaRPr>
+                    </a:p>
+                  </a:txBody>
+                  <a:tcPr marL="50800" marR="50800" marT="50800" marB="50800">
+                    <a:lnL w="6350" cap="flat" cmpd="sng" algn="ctr">
+                      <a:solidFill>
+                        <a:srgbClr val="E3E7F0"/>
+                      </a:solidFill>
+                      <a:prstDash val="solid"/>
+                      <a:round/>
+                      <a:headEnd type="none" w="med" len="med"/>
+                      <a:tailEnd type="none" w="med" len="med"/>
+                    </a:lnL>
+                    <a:lnR w="6350" cap="flat" cmpd="sng" algn="ctr">
+                      <a:solidFill>
+                        <a:srgbClr val="E3E7F0"/>
+                      </a:solidFill>
+                      <a:prstDash val="solid"/>
+                      <a:round/>
+                      <a:headEnd type="none" w="med" len="med"/>
+                      <a:tailEnd type="none" w="med" len="med"/>
+                    </a:lnR>
+                    <a:lnT w="6350" cap="flat" cmpd="sng" algn="ctr">
+                      <a:solidFill>
+                        <a:srgbClr val="E3E7F0"/>
+                      </a:solidFill>
+                      <a:prstDash val="solid"/>
+                      <a:round/>
+                      <a:headEnd type="none" w="med" len="med"/>
+                      <a:tailEnd type="none" w="med" len="med"/>
+                    </a:lnT>
+                    <a:lnB w="6350" cap="flat" cmpd="sng" algn="ctr">
+                      <a:solidFill>
+                        <a:srgbClr val="E3E7F0"/>
+                      </a:solidFill>
+                      <a:prstDash val="solid"/>
+                      <a:round/>
+                      <a:headEnd type="none" w="med" len="med"/>
+                      <a:tailEnd type="none" w="med" len="med"/>
+                    </a:lnB>
+                  </a:tcPr>
+                </a:tc>
+              </a:tr>
+              <a:tr h="210312">
+                <a:tc>
+                  <a:txBody>
+                    <a:bodyPr/>
+                    <a:lstStyle/>
+                    <a:p>
+                      <a:pPr algn="l" indent="0" marL="0">
+                        <a:buNone/>
+                      </a:pPr>
+                      <a:r>
+                        <a:rPr lang="en-US" sz="1000" dirty="0">
+                          <a:solidFill>
+                            <a:srgbClr val="1A1A1A"/>
+                          </a:solidFill>
+                          <a:latin typeface="Calibri" pitchFamily="34" charset="0"/>
+                          <a:ea typeface="Calibri" pitchFamily="34" charset="-122"/>
+                          <a:cs typeface="Calibri" pitchFamily="34" charset="-120"/>
+                        </a:rPr>
+                        <a:t>market + size + value + momentum</a:t>
+                      </a:r>
+                      <a:endParaRPr lang="en-US" sz="1000" dirty="0">
+                        <a:latin typeface="Calibri" charset="0"/>
+                        <a:ea typeface="Calibri" charset="0"/>
+                        <a:cs typeface="Calibri" charset="0"/>
+                      </a:endParaRPr>
+                    </a:p>
+                  </a:txBody>
+                  <a:tcPr marL="50800" marR="50800" marT="50800" marB="50800">
+                    <a:lnL w="6350" cap="flat" cmpd="sng" algn="ctr">
+                      <a:solidFill>
+                        <a:srgbClr val="E3E7F0"/>
+                      </a:solidFill>
+                      <a:prstDash val="solid"/>
+                      <a:round/>
+                      <a:headEnd type="none" w="med" len="med"/>
+                      <a:tailEnd type="none" w="med" len="med"/>
+                    </a:lnL>
+                    <a:lnR w="6350" cap="flat" cmpd="sng" algn="ctr">
+                      <a:solidFill>
+                        <a:srgbClr val="E3E7F0"/>
+                      </a:solidFill>
+                      <a:prstDash val="solid"/>
+                      <a:round/>
+                      <a:headEnd type="none" w="med" len="med"/>
+                      <a:tailEnd type="none" w="med" len="med"/>
+                    </a:lnR>
+                    <a:lnT w="6350" cap="flat" cmpd="sng" algn="ctr">
+                      <a:solidFill>
+                        <a:srgbClr val="E3E7F0"/>
+                      </a:solidFill>
+                      <a:prstDash val="solid"/>
+                      <a:round/>
+                      <a:headEnd type="none" w="med" len="med"/>
+                      <a:tailEnd type="none" w="med" len="med"/>
+                    </a:lnT>
+                    <a:lnB w="6350" cap="flat" cmpd="sng" algn="ctr">
+                      <a:solidFill>
+                        <a:srgbClr val="E3E7F0"/>
+                      </a:solidFill>
+                      <a:prstDash val="solid"/>
+                      <a:round/>
+                      <a:headEnd type="none" w="med" len="med"/>
+                      <a:tailEnd type="none" w="med" len="med"/>
+                    </a:lnB>
+                  </a:tcPr>
+                </a:tc>
+                <a:tc>
+                  <a:txBody>
+                    <a:bodyPr/>
+                    <a:lstStyle/>
+                    <a:p>
+                      <a:pPr algn="r" indent="0" marL="0">
+                        <a:buNone/>
+                      </a:pPr>
+                      <a:r>
+                        <a:rPr lang="en-US" sz="1000" dirty="0">
+                          <a:solidFill>
+                            <a:srgbClr val="1A1A1A"/>
+                          </a:solidFill>
+                          <a:latin typeface="Calibri" pitchFamily="34" charset="0"/>
+                          <a:ea typeface="Calibri" pitchFamily="34" charset="-122"/>
+                          <a:cs typeface="Calibri" pitchFamily="34" charset="-120"/>
+                        </a:rPr>
+                        <a:t>+15.15%</a:t>
+                      </a:r>
+                      <a:endParaRPr lang="en-US" sz="1000" dirty="0">
+                        <a:latin typeface="Calibri" charset="0"/>
+                        <a:ea typeface="Calibri" charset="0"/>
+                        <a:cs typeface="Calibri" charset="0"/>
+                      </a:endParaRPr>
+                    </a:p>
+                  </a:txBody>
+                  <a:tcPr marL="50800" marR="50800" marT="50800" marB="50800">
+                    <a:lnL w="6350" cap="flat" cmpd="sng" algn="ctr">
+                      <a:solidFill>
+                        <a:srgbClr val="E3E7F0"/>
+                      </a:solidFill>
+                      <a:prstDash val="solid"/>
+                      <a:round/>
+                      <a:headEnd type="none" w="med" len="med"/>
+                      <a:tailEnd type="none" w="med" len="med"/>
+                    </a:lnL>
+                    <a:lnR w="6350" cap="flat" cmpd="sng" algn="ctr">
+                      <a:solidFill>
+                        <a:srgbClr val="E3E7F0"/>
+                      </a:solidFill>
+                      <a:prstDash val="solid"/>
+                      <a:round/>
+                      <a:headEnd type="none" w="med" len="med"/>
+                      <a:tailEnd type="none" w="med" len="med"/>
+                    </a:lnR>
+                    <a:lnT w="6350" cap="flat" cmpd="sng" algn="ctr">
+                      <a:solidFill>
+                        <a:srgbClr val="E3E7F0"/>
+                      </a:solidFill>
+                      <a:prstDash val="solid"/>
+                      <a:round/>
+                      <a:headEnd type="none" w="med" len="med"/>
+                      <a:tailEnd type="none" w="med" len="med"/>
+                    </a:lnT>
+                    <a:lnB w="6350" cap="flat" cmpd="sng" algn="ctr">
+                      <a:solidFill>
+                        <a:srgbClr val="E3E7F0"/>
+                      </a:solidFill>
+                      <a:prstDash val="solid"/>
+                      <a:round/>
+                      <a:headEnd type="none" w="med" len="med"/>
+                      <a:tailEnd type="none" w="med" len="med"/>
+                    </a:lnB>
+                  </a:tcPr>
+                </a:tc>
+                <a:tc>
+                  <a:txBody>
+                    <a:bodyPr/>
+                    <a:lstStyle/>
+                    <a:p>
+                      <a:pPr algn="r" indent="0" marL="0">
+                        <a:buNone/>
+                      </a:pPr>
+                      <a:r>
+                        <a:rPr lang="en-US" sz="1000" dirty="0">
+                          <a:solidFill>
+                            <a:srgbClr val="1A1A1A"/>
+                          </a:solidFill>
+                          <a:latin typeface="Calibri" pitchFamily="34" charset="0"/>
+                          <a:ea typeface="Calibri" pitchFamily="34" charset="-122"/>
+                          <a:cs typeface="Calibri" pitchFamily="34" charset="-120"/>
+                        </a:rPr>
+                        <a:t>t=+2.68, R2 0.17</a:t>
                       </a:r>
                       <a:endParaRPr lang="en-US" sz="1000" dirty="0">
                         <a:latin typeface="Calibri" charset="0"/>
@@ -11212,8 +11409,8 @@
         </p:nvSpPr>
         <p:spPr>
           <a:xfrm>
-            <a:off x="566928" y="1627632"/>
-            <a:ext cx="347472" cy="347472"/>
+            <a:off x="566928" y="1444752"/>
+            <a:ext cx="274320" cy="274320"/>
           </a:xfrm>
           <a:prstGeom prst="ellipse">
             <a:avLst/>
@@ -11237,8 +11434,8 @@
         </p:nvSpPr>
         <p:spPr>
           <a:xfrm>
-            <a:off x="566928" y="1673352"/>
-            <a:ext cx="347472" cy="256032"/>
+            <a:off x="566928" y="1476756"/>
+            <a:ext cx="274320" cy="219456"/>
           </a:xfrm>
           <a:prstGeom prst="rect">
             <a:avLst/>
@@ -11254,7 +11451,7 @@
               <a:buNone/>
             </a:pPr>
             <a:r>
-              <a:rPr lang="en-US" sz="1300" b="1" dirty="0">
+              <a:rPr lang="en-US" sz="1100" b="1" dirty="0">
                 <a:solidFill>
                   <a:srgbClr val="FFFFFF"/>
                 </a:solidFill>
@@ -11264,7 +11461,7 @@
               </a:rPr>
               <a:t>1</a:t>
             </a:r>
-            <a:endParaRPr lang="en-US" sz="1300" dirty="0"/>
+            <a:endParaRPr lang="en-US" sz="1100" dirty="0"/>
           </a:p>
         </p:txBody>
       </p:sp>
@@ -11276,8 +11473,8 @@
         </p:nvSpPr>
         <p:spPr>
           <a:xfrm>
-            <a:off x="1042416" y="1572768"/>
-            <a:ext cx="1920240" cy="274320"/>
+            <a:off x="950976" y="1426464"/>
+            <a:ext cx="4846320" cy="475488"/>
           </a:xfrm>
           <a:prstGeom prst="rect">
             <a:avLst/>
@@ -11286,46 +11483,7 @@
           <a:ln/>
         </p:spPr>
         <p:txBody>
-          <a:bodyPr wrap="square" lIns="0" tIns="0" rIns="0" bIns="0" rtlCol="0" anchor="ctr"/>
-          <a:lstStyle/>
-          <a:p>
-            <a:pPr indent="0" marL="0">
-              <a:buNone/>
-            </a:pPr>
-            <a:r>
-              <a:rPr lang="en-US" sz="1300" b="1" dirty="0">
-                <a:solidFill>
-                  <a:srgbClr val="1E2761"/>
-                </a:solidFill>
-                <a:latin typeface="Calibri" pitchFamily="34" charset="0"/>
-                <a:ea typeface="Calibri" pitchFamily="34" charset="-122"/>
-                <a:cs typeface="Calibri" pitchFamily="34" charset="-120"/>
-              </a:rPr>
-              <a:t>Screen</a:t>
-            </a:r>
-            <a:endParaRPr lang="en-US" sz="1300" dirty="0"/>
-          </a:p>
-        </p:txBody>
-      </p:sp>
-      <p:sp>
-        <p:nvSpPr>
-          <p:cNvPr id="7" name="Text 5"/>
-          <p:cNvSpPr txBox="1"/>
-          <p:nvPr/>
-        </p:nvSpPr>
-        <p:spPr>
-          <a:xfrm>
-            <a:off x="1042416" y="1847088"/>
-            <a:ext cx="5029200" cy="603504"/>
-          </a:xfrm>
-          <a:prstGeom prst="rect">
-            <a:avLst/>
-          </a:prstGeom>
-          <a:noFill/>
-          <a:ln/>
-        </p:spPr>
-        <p:txBody>
-          <a:bodyPr wrap="square" lIns="0" tIns="0" rIns="0" bIns="0" rtlCol="0" anchor="ctr"/>
+          <a:bodyPr wrap="square" lIns="0" tIns="0" rIns="0" bIns="0" rtlCol="0" anchor="t"/>
           <a:lstStyle/>
           <a:p>
             <a:pPr indent="0" marL="0">
@@ -11335,7 +11493,24 @@
               <a:buNone/>
             </a:pPr>
             <a:r>
-              <a:rPr lang="en-US" sz="1050" dirty="0">
+              <a:rPr lang="en-US" sz="1000" b="1" dirty="0">
+                <a:solidFill>
+                  <a:srgbClr val="1E2761"/>
+                </a:solidFill>
+                <a:latin typeface="Calibri" pitchFamily="34" charset="0"/>
+                <a:ea typeface="Calibri" pitchFamily="34" charset="-122"/>
+                <a:cs typeface="Calibri" pitchFamily="34" charset="-120"/>
+              </a:rPr>
+              <a:t>Screen  </a:t>
+            </a:r>
+            <a:pPr indent="0" marL="0">
+              <a:lnSpc>
+                <a:spcPct val="100000"/>
+              </a:lnSpc>
+              <a:buNone/>
+            </a:pPr>
+            <a:r>
+              <a:rPr lang="en-US" sz="1000" dirty="0">
                 <a:solidFill>
                   <a:srgbClr val="1A1A1A"/>
                 </a:solidFill>
@@ -11343,22 +11518,22 @@
                 <a:ea typeface="Calibri" pitchFamily="34" charset="-122"/>
                 <a:cs typeface="Calibri" pitchFamily="34" charset="-120"/>
               </a:rPr>
-              <a:t>Price &gt;= $5, no nano or micro caps. Without it the short book fills with penny stocks: median cap $50m, and -48% in January 2021 alone.</a:t>
+              <a:t>Price &gt;= $5, no nano or micro caps. Unscreened, the short book had a $50m median cap and a $2.63 median price - not borrowable at size.</a:t>
             </a:r>
-            <a:endParaRPr lang="en-US" sz="1050" dirty="0"/>
+            <a:endParaRPr lang="en-US" sz="1000" dirty="0"/>
           </a:p>
         </p:txBody>
       </p:sp>
       <p:sp>
         <p:nvSpPr>
-          <p:cNvPr id="8" name="Shape 6"/>
+          <p:cNvPr id="7" name="Shape 5"/>
           <p:cNvSpPr/>
           <p:nvPr/>
         </p:nvSpPr>
         <p:spPr>
           <a:xfrm>
-            <a:off x="566928" y="2560320"/>
-            <a:ext cx="347472" cy="347472"/>
+            <a:off x="566928" y="1947672"/>
+            <a:ext cx="274320" cy="274320"/>
           </a:xfrm>
           <a:prstGeom prst="ellipse">
             <a:avLst/>
@@ -11376,14 +11551,14 @@
       </p:sp>
       <p:sp>
         <p:nvSpPr>
-          <p:cNvPr id="9" name="Text 7"/>
+          <p:cNvPr id="8" name="Text 6"/>
           <p:cNvSpPr txBox="1"/>
           <p:nvPr/>
         </p:nvSpPr>
         <p:spPr>
           <a:xfrm>
-            <a:off x="566928" y="2606040"/>
-            <a:ext cx="347472" cy="256032"/>
+            <a:off x="566928" y="1979676"/>
+            <a:ext cx="274320" cy="219456"/>
           </a:xfrm>
           <a:prstGeom prst="rect">
             <a:avLst/>
@@ -11399,7 +11574,7 @@
               <a:buNone/>
             </a:pPr>
             <a:r>
-              <a:rPr lang="en-US" sz="1300" b="1" dirty="0">
+              <a:rPr lang="en-US" sz="1100" b="1" dirty="0">
                 <a:solidFill>
                   <a:srgbClr val="FFFFFF"/>
                 </a:solidFill>
@@ -11409,20 +11584,20 @@
               </a:rPr>
               <a:t>2</a:t>
             </a:r>
-            <a:endParaRPr lang="en-US" sz="1300" dirty="0"/>
+            <a:endParaRPr lang="en-US" sz="1100" dirty="0"/>
           </a:p>
         </p:txBody>
       </p:sp>
       <p:sp>
         <p:nvSpPr>
-          <p:cNvPr id="10" name="Text 8"/>
+          <p:cNvPr id="9" name="Text 7"/>
           <p:cNvSpPr txBox="1"/>
           <p:nvPr/>
         </p:nvSpPr>
         <p:spPr>
           <a:xfrm>
-            <a:off x="1042416" y="2505456"/>
-            <a:ext cx="1920240" cy="274320"/>
+            <a:off x="950976" y="1929384"/>
+            <a:ext cx="4846320" cy="475488"/>
           </a:xfrm>
           <a:prstGeom prst="rect">
             <a:avLst/>
@@ -11431,46 +11606,7 @@
           <a:ln/>
         </p:spPr>
         <p:txBody>
-          <a:bodyPr wrap="square" lIns="0" tIns="0" rIns="0" bIns="0" rtlCol="0" anchor="ctr"/>
-          <a:lstStyle/>
-          <a:p>
-            <a:pPr indent="0" marL="0">
-              <a:buNone/>
-            </a:pPr>
-            <a:r>
-              <a:rPr lang="en-US" sz="1300" b="1" dirty="0">
-                <a:solidFill>
-                  <a:srgbClr val="1E2761"/>
-                </a:solidFill>
-                <a:latin typeface="Calibri" pitchFamily="34" charset="0"/>
-                <a:ea typeface="Calibri" pitchFamily="34" charset="-122"/>
-                <a:cs typeface="Calibri" pitchFamily="34" charset="-120"/>
-              </a:rPr>
-              <a:t>Residualise</a:t>
-            </a:r>
-            <a:endParaRPr lang="en-US" sz="1300" dirty="0"/>
-          </a:p>
-        </p:txBody>
-      </p:sp>
-      <p:sp>
-        <p:nvSpPr>
-          <p:cNvPr id="11" name="Text 9"/>
-          <p:cNvSpPr txBox="1"/>
-          <p:nvPr/>
-        </p:nvSpPr>
-        <p:spPr>
-          <a:xfrm>
-            <a:off x="1042416" y="2779776"/>
-            <a:ext cx="5029200" cy="603504"/>
-          </a:xfrm>
-          <a:prstGeom prst="rect">
-            <a:avLst/>
-          </a:prstGeom>
-          <a:noFill/>
-          <a:ln/>
-        </p:spPr>
-        <p:txBody>
-          <a:bodyPr wrap="square" lIns="0" tIns="0" rIns="0" bIns="0" rtlCol="0" anchor="ctr"/>
+          <a:bodyPr wrap="square" lIns="0" tIns="0" rIns="0" bIns="0" rtlCol="0" anchor="t"/>
           <a:lstStyle/>
           <a:p>
             <a:pPr indent="0" marL="0">
@@ -11480,7 +11616,24 @@
               <a:buNone/>
             </a:pPr>
             <a:r>
-              <a:rPr lang="en-US" sz="1050" dirty="0">
+              <a:rPr lang="en-US" sz="1000" b="1" dirty="0">
+                <a:solidFill>
+                  <a:srgbClr val="1E2761"/>
+                </a:solidFill>
+                <a:latin typeface="Calibri" pitchFamily="34" charset="0"/>
+                <a:ea typeface="Calibri" pitchFamily="34" charset="-122"/>
+                <a:cs typeface="Calibri" pitchFamily="34" charset="-120"/>
+              </a:rPr>
+              <a:t>Residualise  </a:t>
+            </a:r>
+            <a:pPr indent="0" marL="0">
+              <a:lnSpc>
+                <a:spcPct val="100000"/>
+              </a:lnSpc>
+              <a:buNone/>
+            </a:pPr>
+            <a:r>
+              <a:rPr lang="en-US" sz="1000" dirty="0">
                 <a:solidFill>
                   <a:srgbClr val="1A1A1A"/>
                 </a:solidFill>
@@ -11488,22 +11641,22 @@
                 <a:ea typeface="Calibri" pitchFamily="34" charset="-122"/>
                 <a:cs typeface="Calibri" pitchFamily="34" charset="-120"/>
               </a:rPr>
-              <a:t>The forecast is regressed on sector, size and beta each month; only the residual is traded. Neutrality is enforced on the signal, not patched onto the weights.</a:t>
+              <a:t>The forecast is regressed on sector, size and beta each month; only the residual is traded.</a:t>
             </a:r>
-            <a:endParaRPr lang="en-US" sz="1050" dirty="0"/>
+            <a:endParaRPr lang="en-US" sz="1000" dirty="0"/>
           </a:p>
         </p:txBody>
       </p:sp>
       <p:sp>
         <p:nvSpPr>
-          <p:cNvPr id="12" name="Shape 10"/>
+          <p:cNvPr id="10" name="Shape 8"/>
           <p:cNvSpPr/>
           <p:nvPr/>
         </p:nvSpPr>
         <p:spPr>
           <a:xfrm>
-            <a:off x="566928" y="3493008"/>
-            <a:ext cx="347472" cy="347472"/>
+            <a:off x="566928" y="2450592"/>
+            <a:ext cx="274320" cy="274320"/>
           </a:xfrm>
           <a:prstGeom prst="ellipse">
             <a:avLst/>
@@ -11521,14 +11674,14 @@
       </p:sp>
       <p:sp>
         <p:nvSpPr>
-          <p:cNvPr id="13" name="Text 11"/>
+          <p:cNvPr id="11" name="Text 9"/>
           <p:cNvSpPr txBox="1"/>
           <p:nvPr/>
         </p:nvSpPr>
         <p:spPr>
           <a:xfrm>
-            <a:off x="566928" y="3538728"/>
-            <a:ext cx="347472" cy="256032"/>
+            <a:off x="566928" y="2482596"/>
+            <a:ext cx="274320" cy="219456"/>
           </a:xfrm>
           <a:prstGeom prst="rect">
             <a:avLst/>
@@ -11544,7 +11697,7 @@
               <a:buNone/>
             </a:pPr>
             <a:r>
-              <a:rPr lang="en-US" sz="1300" b="1" dirty="0">
+              <a:rPr lang="en-US" sz="1100" b="1" dirty="0">
                 <a:solidFill>
                   <a:srgbClr val="FFFFFF"/>
                 </a:solidFill>
@@ -11554,9 +11707,93 @@
               </a:rPr>
               <a:t>3</a:t>
             </a:r>
-            <a:endParaRPr lang="en-US" sz="1300" dirty="0"/>
+            <a:endParaRPr lang="en-US" sz="1100" dirty="0"/>
           </a:p>
         </p:txBody>
+      </p:sp>
+      <p:sp>
+        <p:nvSpPr>
+          <p:cNvPr id="12" name="Text 10"/>
+          <p:cNvSpPr txBox="1"/>
+          <p:nvPr/>
+        </p:nvSpPr>
+        <p:spPr>
+          <a:xfrm>
+            <a:off x="950976" y="2432304"/>
+            <a:ext cx="4846320" cy="475488"/>
+          </a:xfrm>
+          <a:prstGeom prst="rect">
+            <a:avLst/>
+          </a:prstGeom>
+          <a:noFill/>
+          <a:ln/>
+        </p:spPr>
+        <p:txBody>
+          <a:bodyPr wrap="square" lIns="0" tIns="0" rIns="0" bIns="0" rtlCol="0" anchor="t"/>
+          <a:lstStyle/>
+          <a:p>
+            <a:pPr indent="0" marL="0">
+              <a:lnSpc>
+                <a:spcPct val="100000"/>
+              </a:lnSpc>
+              <a:buNone/>
+            </a:pPr>
+            <a:r>
+              <a:rPr lang="en-US" sz="1000" b="1" dirty="0">
+                <a:solidFill>
+                  <a:srgbClr val="1E2761"/>
+                </a:solidFill>
+                <a:latin typeface="Calibri" pitchFamily="34" charset="0"/>
+                <a:ea typeface="Calibri" pitchFamily="34" charset="-122"/>
+                <a:cs typeface="Calibri" pitchFamily="34" charset="-120"/>
+              </a:rPr>
+              <a:t>Smooth  </a:t>
+            </a:r>
+            <a:pPr indent="0" marL="0">
+              <a:lnSpc>
+                <a:spcPct val="100000"/>
+              </a:lnSpc>
+              <a:buNone/>
+            </a:pPr>
+            <a:r>
+              <a:rPr lang="en-US" sz="1000" dirty="0">
+                <a:solidFill>
+                  <a:srgbClr val="1A1A1A"/>
+                </a:solidFill>
+                <a:latin typeface="Calibri" pitchFamily="34" charset="0"/>
+                <a:ea typeface="Calibri" pitchFamily="34" charset="-122"/>
+                <a:cs typeface="Calibri" pitchFamily="34" charset="-120"/>
+              </a:rPr>
+              <a:t>Scores averaged over three months. Turnover falls 56% to 24.6%; break-even rises to 100 bps.</a:t>
+            </a:r>
+            <a:endParaRPr lang="en-US" sz="1000" dirty="0"/>
+          </a:p>
+        </p:txBody>
+      </p:sp>
+      <p:sp>
+        <p:nvSpPr>
+          <p:cNvPr id="13" name="Shape 11"/>
+          <p:cNvSpPr/>
+          <p:nvPr/>
+        </p:nvSpPr>
+        <p:spPr>
+          <a:xfrm>
+            <a:off x="566928" y="2953512"/>
+            <a:ext cx="274320" cy="274320"/>
+          </a:xfrm>
+          <a:prstGeom prst="ellipse">
+            <a:avLst/>
+          </a:prstGeom>
+          <a:solidFill>
+            <a:srgbClr val="1E2761"/>
+          </a:solidFill>
+          <a:ln w="12700">
+            <a:solidFill>
+              <a:srgbClr val="1E2761"/>
+            </a:solidFill>
+            <a:prstDash val="solid"/>
+          </a:ln>
+        </p:spPr>
       </p:sp>
       <p:sp>
         <p:nvSpPr>
@@ -11566,8 +11803,8 @@
         </p:nvSpPr>
         <p:spPr>
           <a:xfrm>
-            <a:off x="1042416" y="3438144"/>
-            <a:ext cx="1920240" cy="274320"/>
+            <a:off x="566928" y="2985516"/>
+            <a:ext cx="274320" cy="219456"/>
           </a:xfrm>
           <a:prstGeom prst="rect">
             <a:avLst/>
@@ -11579,21 +11816,21 @@
           <a:bodyPr wrap="square" lIns="0" tIns="0" rIns="0" bIns="0" rtlCol="0" anchor="ctr"/>
           <a:lstStyle/>
           <a:p>
-            <a:pPr indent="0" marL="0">
+            <a:pPr algn="ctr" indent="0" marL="0">
               <a:buNone/>
             </a:pPr>
             <a:r>
-              <a:rPr lang="en-US" sz="1300" b="1" dirty="0">
+              <a:rPr lang="en-US" sz="1100" b="1" dirty="0">
                 <a:solidFill>
-                  <a:srgbClr val="1E2761"/>
+                  <a:srgbClr val="FFFFFF"/>
                 </a:solidFill>
                 <a:latin typeface="Calibri" pitchFamily="34" charset="0"/>
                 <a:ea typeface="Calibri" pitchFamily="34" charset="-122"/>
                 <a:cs typeface="Calibri" pitchFamily="34" charset="-120"/>
               </a:rPr>
-              <a:t>Smooth</a:t>
+              <a:t>4</a:t>
             </a:r>
-            <a:endParaRPr lang="en-US" sz="1300" dirty="0"/>
+            <a:endParaRPr lang="en-US" sz="1100" dirty="0"/>
           </a:p>
         </p:txBody>
       </p:sp>
@@ -11605,8 +11842,8 @@
         </p:nvSpPr>
         <p:spPr>
           <a:xfrm>
-            <a:off x="1042416" y="3712464"/>
-            <a:ext cx="5029200" cy="603504"/>
+            <a:off x="950976" y="2935224"/>
+            <a:ext cx="4846320" cy="475488"/>
           </a:xfrm>
           <a:prstGeom prst="rect">
             <a:avLst/>
@@ -11615,7 +11852,7 @@
           <a:ln/>
         </p:spPr>
         <p:txBody>
-          <a:bodyPr wrap="square" lIns="0" tIns="0" rIns="0" bIns="0" rtlCol="0" anchor="ctr"/>
+          <a:bodyPr wrap="square" lIns="0" tIns="0" rIns="0" bIns="0" rtlCol="0" anchor="t"/>
           <a:lstStyle/>
           <a:p>
             <a:pPr indent="0" marL="0">
@@ -11625,7 +11862,24 @@
               <a:buNone/>
             </a:pPr>
             <a:r>
-              <a:rPr lang="en-US" sz="1050" dirty="0">
+              <a:rPr lang="en-US" sz="1000" b="1" dirty="0">
+                <a:solidFill>
+                  <a:srgbClr val="1E2761"/>
+                </a:solidFill>
+                <a:latin typeface="Calibri" pitchFamily="34" charset="0"/>
+                <a:ea typeface="Calibri" pitchFamily="34" charset="-122"/>
+                <a:cs typeface="Calibri" pitchFamily="34" charset="-120"/>
+              </a:rPr>
+              <a:t>Size  </a:t>
+            </a:r>
+            <a:pPr indent="0" marL="0">
+              <a:lnSpc>
+                <a:spcPct val="100000"/>
+              </a:lnSpc>
+              <a:buNone/>
+            </a:pPr>
+            <a:r>
+              <a:rPr lang="en-US" sz="1000" dirty="0">
                 <a:solidFill>
                   <a:srgbClr val="1A1A1A"/>
                 </a:solidFill>
@@ -11633,9 +11887,9 @@
                 <a:ea typeface="Calibri" pitchFamily="34" charset="-122"/>
                 <a:cs typeface="Calibri" pitchFamily="34" charset="-120"/>
               </a:rPr>
-              <a:t>Scores averaged over three months. Turnover falls from 56% to 24.6%; break-even cost rises to 93bps.</a:t>
+              <a:t>Inverse-volatility weights inside each leg, capped near 2% of capital.</a:t>
             </a:r>
-            <a:endParaRPr lang="en-US" sz="1050" dirty="0"/>
+            <a:endParaRPr lang="en-US" sz="1000" dirty="0"/>
           </a:p>
         </p:txBody>
       </p:sp>
@@ -11647,8 +11901,8 @@
         </p:nvSpPr>
         <p:spPr>
           <a:xfrm>
-            <a:off x="566928" y="4425696"/>
-            <a:ext cx="347472" cy="347472"/>
+            <a:off x="566928" y="3456432"/>
+            <a:ext cx="274320" cy="274320"/>
           </a:xfrm>
           <a:prstGeom prst="ellipse">
             <a:avLst/>
@@ -11672,8 +11926,8 @@
         </p:nvSpPr>
         <p:spPr>
           <a:xfrm>
-            <a:off x="566928" y="4471416"/>
-            <a:ext cx="347472" cy="256032"/>
+            <a:off x="566928" y="3488436"/>
+            <a:ext cx="274320" cy="219456"/>
           </a:xfrm>
           <a:prstGeom prst="rect">
             <a:avLst/>
@@ -11689,7 +11943,7 @@
               <a:buNone/>
             </a:pPr>
             <a:r>
-              <a:rPr lang="en-US" sz="1300" b="1" dirty="0">
+              <a:rPr lang="en-US" sz="1100" b="1" dirty="0">
                 <a:solidFill>
                   <a:srgbClr val="FFFFFF"/>
                 </a:solidFill>
@@ -11697,9 +11951,9 @@
                 <a:ea typeface="Calibri" pitchFamily="34" charset="-122"/>
                 <a:cs typeface="Calibri" pitchFamily="34" charset="-120"/>
               </a:rPr>
-              <a:t>4</a:t>
+              <a:t>5</a:t>
             </a:r>
-            <a:endParaRPr lang="en-US" sz="1300" dirty="0"/>
+            <a:endParaRPr lang="en-US" sz="1100" dirty="0"/>
           </a:p>
         </p:txBody>
       </p:sp>
@@ -11711,8 +11965,236 @@
         </p:nvSpPr>
         <p:spPr>
           <a:xfrm>
-            <a:off x="1042416" y="4370832"/>
-            <a:ext cx="1920240" cy="274320"/>
+            <a:off x="950976" y="3438144"/>
+            <a:ext cx="4846320" cy="475488"/>
+          </a:xfrm>
+          <a:prstGeom prst="rect">
+            <a:avLst/>
+          </a:prstGeom>
+          <a:noFill/>
+          <a:ln/>
+        </p:spPr>
+        <p:txBody>
+          <a:bodyPr wrap="square" lIns="0" tIns="0" rIns="0" bIns="0" rtlCol="0" anchor="t"/>
+          <a:lstStyle/>
+          <a:p>
+            <a:pPr indent="0" marL="0">
+              <a:lnSpc>
+                <a:spcPct val="100000"/>
+              </a:lnSpc>
+              <a:buNone/>
+            </a:pPr>
+            <a:r>
+              <a:rPr lang="en-US" sz="1000" b="1" dirty="0">
+                <a:solidFill>
+                  <a:srgbClr val="1E2761"/>
+                </a:solidFill>
+                <a:latin typeface="Calibri" pitchFamily="34" charset="0"/>
+                <a:ea typeface="Calibri" pitchFamily="34" charset="-122"/>
+                <a:cs typeface="Calibri" pitchFamily="34" charset="-120"/>
+              </a:rPr>
+              <a:t>Match beta  </a:t>
+            </a:r>
+            <a:pPr indent="0" marL="0">
+              <a:lnSpc>
+                <a:spcPct val="100000"/>
+              </a:lnSpc>
+              <a:buNone/>
+            </a:pPr>
+            <a:r>
+              <a:rPr lang="en-US" sz="1000" dirty="0">
+                <a:solidFill>
+                  <a:srgbClr val="1A1A1A"/>
+                </a:solidFill>
+                <a:latin typeface="Calibri" pitchFamily="34" charset="0"/>
+                <a:ea typeface="Calibri" pitchFamily="34" charset="-122"/>
+                <a:cs typeface="Calibri" pitchFamily="34" charset="-120"/>
+              </a:rPr>
+              <a:t>Leg notionals set from each leg's own realised sensitivity over 24 completed months, not from per-stock estimates.</a:t>
+            </a:r>
+            <a:endParaRPr lang="en-US" sz="1000" dirty="0"/>
+          </a:p>
+        </p:txBody>
+      </p:sp>
+      <p:sp>
+        <p:nvSpPr>
+          <p:cNvPr id="19" name="Shape 17"/>
+          <p:cNvSpPr/>
+          <p:nvPr/>
+        </p:nvSpPr>
+        <p:spPr>
+          <a:xfrm>
+            <a:off x="548640" y="3968496"/>
+            <a:ext cx="5349240" cy="932688"/>
+          </a:xfrm>
+          <a:prstGeom prst="roundRect">
+            <a:avLst>
+              <a:gd name="adj" fmla="val 4902"/>
+            </a:avLst>
+          </a:prstGeom>
+          <a:solidFill>
+            <a:srgbClr val="F2F5FC"/>
+          </a:solidFill>
+          <a:ln w="12700">
+            <a:solidFill>
+              <a:srgbClr val="F2F5FC"/>
+            </a:solidFill>
+            <a:prstDash val="solid"/>
+          </a:ln>
+        </p:spPr>
+      </p:sp>
+      <p:sp>
+        <p:nvSpPr>
+          <p:cNvPr id="20" name="Text 18"/>
+          <p:cNvSpPr txBox="1"/>
+          <p:nvPr/>
+        </p:nvSpPr>
+        <p:spPr>
+          <a:xfrm>
+            <a:off x="749808" y="4059936"/>
+            <a:ext cx="4983480" cy="457200"/>
+          </a:xfrm>
+          <a:prstGeom prst="rect">
+            <a:avLst/>
+          </a:prstGeom>
+          <a:noFill/>
+          <a:ln/>
+        </p:spPr>
+        <p:txBody>
+          <a:bodyPr wrap="square" lIns="0" tIns="0" rIns="0" bIns="0" rtlCol="0" anchor="t"/>
+          <a:lstStyle/>
+          <a:p>
+            <a:pPr indent="0" marL="0">
+              <a:lnSpc>
+                <a:spcPct val="100000"/>
+              </a:lnSpc>
+              <a:buNone/>
+            </a:pPr>
+            <a:r>
+              <a:rPr lang="en-US" sz="950" b="1" dirty="0">
+                <a:solidFill>
+                  <a:srgbClr val="1E2761"/>
+                </a:solidFill>
+                <a:latin typeface="Calibri" pitchFamily="34" charset="0"/>
+                <a:ea typeface="Calibri" pitchFamily="34" charset="-122"/>
+                <a:cs typeface="Calibri" pitchFamily="34" charset="-120"/>
+              </a:rPr>
+              <a:t>Neutrality enforced: beta, not dollar. </a:t>
+            </a:r>
+            <a:pPr indent="0" marL="0">
+              <a:lnSpc>
+                <a:spcPct val="100000"/>
+              </a:lnSpc>
+              <a:buNone/>
+            </a:pPr>
+            <a:r>
+              <a:rPr lang="en-US" sz="950" dirty="0">
+                <a:solidFill>
+                  <a:srgbClr val="1A1A1A"/>
+                </a:solidFill>
+                <a:latin typeface="Calibri" pitchFamily="34" charset="0"/>
+                <a:ea typeface="Calibri" pitchFamily="34" charset="-122"/>
+                <a:cs typeface="Calibri" pitchFamily="34" charset="-120"/>
+              </a:rPr>
+              <a:t>The legs are sized so their beta-weighted exposures cancel, so net dollar exposure averages +12.5% rather than zero. Realised beta is -0.159 (se 0.120), correlation with the S&amp;P 500 -0.19.</a:t>
+            </a:r>
+            <a:endParaRPr lang="en-US" sz="950" dirty="0"/>
+          </a:p>
+        </p:txBody>
+      </p:sp>
+      <p:sp>
+        <p:nvSpPr>
+          <p:cNvPr id="21" name="Text 19"/>
+          <p:cNvSpPr txBox="1"/>
+          <p:nvPr/>
+        </p:nvSpPr>
+        <p:spPr>
+          <a:xfrm>
+            <a:off x="749808" y="4535424"/>
+            <a:ext cx="4983480" cy="310896"/>
+          </a:xfrm>
+          <a:prstGeom prst="rect">
+            <a:avLst/>
+          </a:prstGeom>
+          <a:noFill/>
+          <a:ln/>
+        </p:spPr>
+        <p:txBody>
+          <a:bodyPr wrap="square" lIns="0" tIns="0" rIns="0" bIns="0" rtlCol="0" anchor="t"/>
+          <a:lstStyle/>
+          <a:p>
+            <a:pPr indent="0" marL="0">
+              <a:lnSpc>
+                <a:spcPct val="100000"/>
+              </a:lnSpc>
+              <a:buNone/>
+            </a:pPr>
+            <a:r>
+              <a:rPr lang="en-US" sz="900" b="1" dirty="0">
+                <a:solidFill>
+                  <a:srgbClr val="1E2761"/>
+                </a:solidFill>
+                <a:latin typeface="Calibri" pitchFamily="34" charset="0"/>
+                <a:ea typeface="Calibri" pitchFamily="34" charset="-122"/>
+                <a:cs typeface="Calibri" pitchFamily="34" charset="-120"/>
+              </a:rPr>
+              <a:t>Signals driving the forecast: </a:t>
+            </a:r>
+            <a:pPr indent="0" marL="0">
+              <a:lnSpc>
+                <a:spcPct val="100000"/>
+              </a:lnSpc>
+              <a:buNone/>
+            </a:pPr>
+            <a:r>
+              <a:rPr lang="en-US" sz="900" dirty="0">
+                <a:solidFill>
+                  <a:srgbClr val="1A1A1A"/>
+                </a:solidFill>
+                <a:latin typeface="Calibri" pitchFamily="34" charset="0"/>
+                <a:ea typeface="Calibri" pitchFamily="34" charset="-122"/>
+                <a:cs typeface="Calibri" pitchFamily="34" charset="-120"/>
+              </a:rPr>
+              <a:t>profitability 20%, investment 19%, risk 19%, past returns 11% of the model's split gain, across 147 characteristics. Full ranking on page 3.</a:t>
+            </a:r>
+            <a:endParaRPr lang="en-US" sz="900" dirty="0"/>
+          </a:p>
+        </p:txBody>
+      </p:sp>
+      <p:pic>
+        <p:nvPicPr>
+          <p:cNvPr id="22" name="Image 0" descr="C:\Users\junho\AppData\Local\Temp\claude\fiam_team\05_submission\figures\cumulative.png">    </p:cNvPr>
+          <p:cNvPicPr>
+            <a:picLocks noChangeAspect="1"/>
+          </p:cNvPicPr>
+          <p:nvPr/>
+        </p:nvPicPr>
+        <p:blipFill>
+          <a:blip r:embed="rId1"/>
+          <a:stretch>
+            <a:fillRect/>
+          </a:stretch>
+        </p:blipFill>
+        <p:spPr>
+          <a:xfrm>
+            <a:off x="457200" y="4983480"/>
+            <a:ext cx="5486400" cy="1755648"/>
+          </a:xfrm>
+          <a:prstGeom prst="rect">
+            <a:avLst/>
+          </a:prstGeom>
+        </p:spPr>
+      </p:pic>
+      <p:sp>
+        <p:nvSpPr>
+          <p:cNvPr id="23" name="Text 20"/>
+          <p:cNvSpPr txBox="1"/>
+          <p:nvPr/>
+        </p:nvSpPr>
+        <p:spPr>
+          <a:xfrm>
+            <a:off x="6172200" y="1371600"/>
+            <a:ext cx="5486400" cy="219456"/>
           </a:xfrm>
           <a:prstGeom prst="rect">
             <a:avLst/>
@@ -11728,7 +12210,7 @@
               <a:buNone/>
             </a:pPr>
             <a:r>
-              <a:rPr lang="en-US" sz="1300" b="1" dirty="0">
+              <a:rPr lang="en-US" sz="1050" b="1" dirty="0">
                 <a:solidFill>
                   <a:srgbClr val="1E2761"/>
                 </a:solidFill>
@@ -11736,235 +12218,9 @@
                 <a:ea typeface="Calibri" pitchFamily="34" charset="-122"/>
                 <a:cs typeface="Calibri" pitchFamily="34" charset="-120"/>
               </a:rPr>
-              <a:t>Size</a:t>
-            </a:r>
-            <a:endParaRPr lang="en-US" sz="1300" dirty="0"/>
-          </a:p>
-        </p:txBody>
-      </p:sp>
-      <p:sp>
-        <p:nvSpPr>
-          <p:cNvPr id="19" name="Text 17"/>
-          <p:cNvSpPr txBox="1"/>
-          <p:nvPr/>
-        </p:nvSpPr>
-        <p:spPr>
-          <a:xfrm>
-            <a:off x="1042416" y="4645152"/>
-            <a:ext cx="5029200" cy="603504"/>
-          </a:xfrm>
-          <a:prstGeom prst="rect">
-            <a:avLst/>
-          </a:prstGeom>
-          <a:noFill/>
-          <a:ln/>
-        </p:spPr>
-        <p:txBody>
-          <a:bodyPr wrap="square" lIns="0" tIns="0" rIns="0" bIns="0" rtlCol="0" anchor="ctr"/>
-          <a:lstStyle/>
-          <a:p>
-            <a:pPr indent="0" marL="0">
-              <a:lnSpc>
-                <a:spcPct val="100000"/>
-              </a:lnSpc>
-              <a:buNone/>
-            </a:pPr>
-            <a:r>
-              <a:rPr lang="en-US" sz="1050" dirty="0">
-                <a:solidFill>
-                  <a:srgbClr val="1A1A1A"/>
-                </a:solidFill>
-                <a:latin typeface="Calibri" pitchFamily="34" charset="0"/>
-                <a:ea typeface="Calibri" pitchFamily="34" charset="-122"/>
-                <a:cs typeface="Calibri" pitchFamily="34" charset="-120"/>
-              </a:rPr>
-              <a:t>Inverse-volatility weights inside each leg, capped near 2%. The information ratio is a ratio - the denominator counts.</a:t>
+              <a:t>Top 10 long positions, average weight 01/2021-08/2026</a:t>
             </a:r>
             <a:endParaRPr lang="en-US" sz="1050" dirty="0"/>
-          </a:p>
-        </p:txBody>
-      </p:sp>
-      <p:sp>
-        <p:nvSpPr>
-          <p:cNvPr id="20" name="Shape 18"/>
-          <p:cNvSpPr/>
-          <p:nvPr/>
-        </p:nvSpPr>
-        <p:spPr>
-          <a:xfrm>
-            <a:off x="566928" y="5358384"/>
-            <a:ext cx="347472" cy="347472"/>
-          </a:xfrm>
-          <a:prstGeom prst="ellipse">
-            <a:avLst/>
-          </a:prstGeom>
-          <a:solidFill>
-            <a:srgbClr val="1E2761"/>
-          </a:solidFill>
-          <a:ln w="12700">
-            <a:solidFill>
-              <a:srgbClr val="1E2761"/>
-            </a:solidFill>
-            <a:prstDash val="solid"/>
-          </a:ln>
-        </p:spPr>
-      </p:sp>
-      <p:sp>
-        <p:nvSpPr>
-          <p:cNvPr id="21" name="Text 19"/>
-          <p:cNvSpPr txBox="1"/>
-          <p:nvPr/>
-        </p:nvSpPr>
-        <p:spPr>
-          <a:xfrm>
-            <a:off x="566928" y="5404104"/>
-            <a:ext cx="347472" cy="256032"/>
-          </a:xfrm>
-          <a:prstGeom prst="rect">
-            <a:avLst/>
-          </a:prstGeom>
-          <a:noFill/>
-          <a:ln/>
-        </p:spPr>
-        <p:txBody>
-          <a:bodyPr wrap="square" lIns="0" tIns="0" rIns="0" bIns="0" rtlCol="0" anchor="ctr"/>
-          <a:lstStyle/>
-          <a:p>
-            <a:pPr algn="ctr" indent="0" marL="0">
-              <a:buNone/>
-            </a:pPr>
-            <a:r>
-              <a:rPr lang="en-US" sz="1300" b="1" dirty="0">
-                <a:solidFill>
-                  <a:srgbClr val="FFFFFF"/>
-                </a:solidFill>
-                <a:latin typeface="Calibri" pitchFamily="34" charset="0"/>
-                <a:ea typeface="Calibri" pitchFamily="34" charset="-122"/>
-                <a:cs typeface="Calibri" pitchFamily="34" charset="-120"/>
-              </a:rPr>
-              <a:t>5</a:t>
-            </a:r>
-            <a:endParaRPr lang="en-US" sz="1300" dirty="0"/>
-          </a:p>
-        </p:txBody>
-      </p:sp>
-      <p:sp>
-        <p:nvSpPr>
-          <p:cNvPr id="22" name="Text 20"/>
-          <p:cNvSpPr txBox="1"/>
-          <p:nvPr/>
-        </p:nvSpPr>
-        <p:spPr>
-          <a:xfrm>
-            <a:off x="1042416" y="5303520"/>
-            <a:ext cx="1920240" cy="274320"/>
-          </a:xfrm>
-          <a:prstGeom prst="rect">
-            <a:avLst/>
-          </a:prstGeom>
-          <a:noFill/>
-          <a:ln/>
-        </p:spPr>
-        <p:txBody>
-          <a:bodyPr wrap="square" lIns="0" tIns="0" rIns="0" bIns="0" rtlCol="0" anchor="ctr"/>
-          <a:lstStyle/>
-          <a:p>
-            <a:pPr indent="0" marL="0">
-              <a:buNone/>
-            </a:pPr>
-            <a:r>
-              <a:rPr lang="en-US" sz="1300" b="1" dirty="0">
-                <a:solidFill>
-                  <a:srgbClr val="1E2761"/>
-                </a:solidFill>
-                <a:latin typeface="Calibri" pitchFamily="34" charset="0"/>
-                <a:ea typeface="Calibri" pitchFamily="34" charset="-122"/>
-                <a:cs typeface="Calibri" pitchFamily="34" charset="-120"/>
-              </a:rPr>
-              <a:t>Match beta</a:t>
-            </a:r>
-            <a:endParaRPr lang="en-US" sz="1300" dirty="0"/>
-          </a:p>
-        </p:txBody>
-      </p:sp>
-      <p:sp>
-        <p:nvSpPr>
-          <p:cNvPr id="23" name="Text 21"/>
-          <p:cNvSpPr txBox="1"/>
-          <p:nvPr/>
-        </p:nvSpPr>
-        <p:spPr>
-          <a:xfrm>
-            <a:off x="1042416" y="5577840"/>
-            <a:ext cx="5029200" cy="603504"/>
-          </a:xfrm>
-          <a:prstGeom prst="rect">
-            <a:avLst/>
-          </a:prstGeom>
-          <a:noFill/>
-          <a:ln/>
-        </p:spPr>
-        <p:txBody>
-          <a:bodyPr wrap="square" lIns="0" tIns="0" rIns="0" bIns="0" rtlCol="0" anchor="ctr"/>
-          <a:lstStyle/>
-          <a:p>
-            <a:pPr indent="0" marL="0">
-              <a:lnSpc>
-                <a:spcPct val="100000"/>
-              </a:lnSpc>
-              <a:buNone/>
-            </a:pPr>
-            <a:r>
-              <a:rPr lang="en-US" sz="1050" dirty="0">
-                <a:solidFill>
-                  <a:srgbClr val="1A1A1A"/>
-                </a:solidFill>
-                <a:latin typeface="Calibri" pitchFamily="34" charset="0"/>
-                <a:ea typeface="Calibri" pitchFamily="34" charset="-122"/>
-                <a:cs typeface="Calibri" pitchFamily="34" charset="-120"/>
-              </a:rPr>
-              <a:t>Leg notionals set from each leg's own realised sensitivity over 24 completed months, not from per-stock estimates, which ran 0.30 too high on the long side.</a:t>
-            </a:r>
-            <a:endParaRPr lang="en-US" sz="1050" dirty="0"/>
-          </a:p>
-        </p:txBody>
-      </p:sp>
-      <p:sp>
-        <p:nvSpPr>
-          <p:cNvPr id="24" name="Text 22"/>
-          <p:cNvSpPr txBox="1"/>
-          <p:nvPr/>
-        </p:nvSpPr>
-        <p:spPr>
-          <a:xfrm>
-            <a:off x="6492240" y="1517904"/>
-            <a:ext cx="2651760" cy="237744"/>
-          </a:xfrm>
-          <a:prstGeom prst="rect">
-            <a:avLst/>
-          </a:prstGeom>
-          <a:noFill/>
-          <a:ln/>
-        </p:spPr>
-        <p:txBody>
-          <a:bodyPr wrap="square" lIns="0" tIns="0" rIns="0" bIns="0" rtlCol="0" anchor="ctr"/>
-          <a:lstStyle/>
-          <a:p>
-            <a:pPr indent="0" marL="0">
-              <a:buNone/>
-            </a:pPr>
-            <a:r>
-              <a:rPr lang="en-US" sz="1100" b="1" dirty="0">
-                <a:solidFill>
-                  <a:srgbClr val="1E2761"/>
-                </a:solidFill>
-                <a:latin typeface="Calibri" pitchFamily="34" charset="0"/>
-                <a:ea typeface="Calibri" pitchFamily="34" charset="-122"/>
-                <a:cs typeface="Calibri" pitchFamily="34" charset="-120"/>
-              </a:rPr>
-              <a:t>Largest average long positions</a:t>
-            </a:r>
-            <a:endParaRPr lang="en-US" sz="1100" dirty="0"/>
           </a:p>
         </p:txBody>
       </p:sp>
@@ -11983,8 +12239,8 @@
           </p:nvPr>
         </p:nvGraphicFramePr>
         <p:xfrm>
-          <a:off x="6492240" y="1792224"/>
-          <a:ext cx="5120640" cy="914400"/>
+          <a:off x="6172200" y="1609344"/>
+          <a:ext cx="5440680" cy="914400"/>
         </p:xfrm>
         <a:graphic>
           <a:graphicData uri="http://schemas.openxmlformats.org/drawingml/2006/table">
@@ -11992,10 +12248,10 @@
               <a:tblPr/>
               <a:tblGrid>
                 <a:gridCol w="777240"/>
-                <a:gridCol w="3291840"/>
-                <a:gridCol w="1051560"/>
+                <a:gridCol w="3657600"/>
+                <a:gridCol w="1005840"/>
               </a:tblGrid>
-              <a:tr h="210312">
+              <a:tr h="187452">
                 <a:tc>
                   <a:txBody>
                     <a:bodyPr/>
@@ -12005,7 +12261,7 @@
                         <a:buNone/>
                       </a:pPr>
                       <a:r>
-                        <a:rPr lang="en-US" sz="900" b="1" dirty="0">
+                        <a:rPr lang="en-US" sz="800" b="1" dirty="0">
                           <a:solidFill>
                             <a:srgbClr val="FFFFFF"/>
                           </a:solidFill>
@@ -12015,14 +12271,14 @@
                         </a:rPr>
                         <a:t>Ticker</a:t>
                       </a:r>
-                      <a:endParaRPr lang="en-US" sz="900" dirty="0">
-                        <a:latin typeface="Calibri" charset="0"/>
-                        <a:ea typeface="Calibri" charset="0"/>
-                        <a:cs typeface="Calibri" charset="0"/>
-                      </a:endParaRPr>
-                    </a:p>
-                  </a:txBody>
-                  <a:tcPr marL="50800" marR="50800" marT="50800" marB="50800">
+                      <a:endParaRPr lang="en-US" sz="800" dirty="0">
+                        <a:latin typeface="Calibri" charset="0"/>
+                        <a:ea typeface="Calibri" charset="0"/>
+                        <a:cs typeface="Calibri" charset="0"/>
+                      </a:endParaRPr>
+                    </a:p>
+                  </a:txBody>
+                  <a:tcPr marL="25400" marR="25400" marT="25400" marB="25400">
                     <a:lnL w="6350" cap="flat" cmpd="sng" algn="ctr">
                       <a:solidFill>
                         <a:srgbClr val="E3E7F0"/>
@@ -12073,7 +12329,7 @@
                         <a:buNone/>
                       </a:pPr>
                       <a:r>
-                        <a:rPr lang="en-US" sz="900" b="1" dirty="0">
+                        <a:rPr lang="en-US" sz="800" b="1" dirty="0">
                           <a:solidFill>
                             <a:srgbClr val="FFFFFF"/>
                           </a:solidFill>
@@ -12081,16 +12337,16 @@
                           <a:ea typeface="Calibri" pitchFamily="34" charset="-122"/>
                           <a:cs typeface="Calibri" pitchFamily="34" charset="-120"/>
                         </a:rPr>
-                        <a:t>Company</a:t>
-                      </a:r>
-                      <a:endParaRPr lang="en-US" sz="900" dirty="0">
-                        <a:latin typeface="Calibri" charset="0"/>
-                        <a:ea typeface="Calibri" charset="0"/>
-                        <a:cs typeface="Calibri" charset="0"/>
-                      </a:endParaRPr>
-                    </a:p>
-                  </a:txBody>
-                  <a:tcPr marL="50800" marR="50800" marT="50800" marB="50800">
+                        <a:t>Company name</a:t>
+                      </a:r>
+                      <a:endParaRPr lang="en-US" sz="800" dirty="0">
+                        <a:latin typeface="Calibri" charset="0"/>
+                        <a:ea typeface="Calibri" charset="0"/>
+                        <a:cs typeface="Calibri" charset="0"/>
+                      </a:endParaRPr>
+                    </a:p>
+                  </a:txBody>
+                  <a:tcPr marL="25400" marR="25400" marT="25400" marB="25400">
                     <a:lnL w="6350" cap="flat" cmpd="sng" algn="ctr">
                       <a:solidFill>
                         <a:srgbClr val="E3E7F0"/>
@@ -12141,7 +12397,7 @@
                         <a:buNone/>
                       </a:pPr>
                       <a:r>
-                        <a:rPr lang="en-US" sz="900" b="1" dirty="0">
+                        <a:rPr lang="en-US" sz="800" b="1" dirty="0">
                           <a:solidFill>
                             <a:srgbClr val="FFFFFF"/>
                           </a:solidFill>
@@ -12151,14 +12407,14 @@
                         </a:rPr>
                         <a:t>Avg wt</a:t>
                       </a:r>
-                      <a:endParaRPr lang="en-US" sz="900" dirty="0">
-                        <a:latin typeface="Calibri" charset="0"/>
-                        <a:ea typeface="Calibri" charset="0"/>
-                        <a:cs typeface="Calibri" charset="0"/>
-                      </a:endParaRPr>
-                    </a:p>
-                  </a:txBody>
-                  <a:tcPr marL="50800" marR="50800" marT="50800" marB="50800">
+                      <a:endParaRPr lang="en-US" sz="800" dirty="0">
+                        <a:latin typeface="Calibri" charset="0"/>
+                        <a:ea typeface="Calibri" charset="0"/>
+                        <a:cs typeface="Calibri" charset="0"/>
+                      </a:endParaRPr>
+                    </a:p>
+                  </a:txBody>
+                  <a:tcPr marL="25400" marR="25400" marT="25400" marB="25400">
                     <a:lnL w="6350" cap="flat" cmpd="sng" algn="ctr">
                       <a:solidFill>
                         <a:srgbClr val="E3E7F0"/>
@@ -12201,7 +12457,7 @@
                   </a:tcPr>
                 </a:tc>
               </a:tr>
-              <a:tr h="210312">
+              <a:tr h="187452">
                 <a:tc>
                   <a:txBody>
                     <a:bodyPr/>
@@ -12211,7 +12467,7 @@
                         <a:buNone/>
                       </a:pPr>
                       <a:r>
-                        <a:rPr lang="en-US" sz="950" dirty="0">
+                        <a:rPr lang="en-US" sz="850" dirty="0">
                           <a:solidFill>
                             <a:srgbClr val="1A1A1A"/>
                           </a:solidFill>
@@ -12221,14 +12477,14 @@
                         </a:rPr>
                         <a:t>INCY</a:t>
                       </a:r>
-                      <a:endParaRPr lang="en-US" sz="950" dirty="0">
-                        <a:latin typeface="Calibri" charset="0"/>
-                        <a:ea typeface="Calibri" charset="0"/>
-                        <a:cs typeface="Calibri" charset="0"/>
-                      </a:endParaRPr>
-                    </a:p>
-                  </a:txBody>
-                  <a:tcPr marL="50800" marR="50800" marT="50800" marB="50800">
+                      <a:endParaRPr lang="en-US" sz="850" dirty="0">
+                        <a:latin typeface="Calibri" charset="0"/>
+                        <a:ea typeface="Calibri" charset="0"/>
+                        <a:cs typeface="Calibri" charset="0"/>
+                      </a:endParaRPr>
+                    </a:p>
+                  </a:txBody>
+                  <a:tcPr marL="25400" marR="25400" marT="25400" marB="25400">
                     <a:lnL w="6350" cap="flat" cmpd="sng" algn="ctr">
                       <a:solidFill>
                         <a:srgbClr val="E3E7F0"/>
@@ -12276,7 +12532,7 @@
                         <a:buNone/>
                       </a:pPr>
                       <a:r>
-                        <a:rPr lang="en-US" sz="950" dirty="0">
+                        <a:rPr lang="en-US" sz="850" dirty="0">
                           <a:solidFill>
                             <a:srgbClr val="1A1A1A"/>
                           </a:solidFill>
@@ -12284,16 +12540,16 @@
                           <a:ea typeface="Calibri" pitchFamily="34" charset="-122"/>
                           <a:cs typeface="Calibri" pitchFamily="34" charset="-120"/>
                         </a:rPr>
-                        <a:t>INCYTE CORP</a:t>
-                      </a:r>
-                      <a:endParaRPr lang="en-US" sz="950" dirty="0">
-                        <a:latin typeface="Calibri" charset="0"/>
-                        <a:ea typeface="Calibri" charset="0"/>
-                        <a:cs typeface="Calibri" charset="0"/>
-                      </a:endParaRPr>
-                    </a:p>
-                  </a:txBody>
-                  <a:tcPr marL="50800" marR="50800" marT="50800" marB="50800">
+                        <a:t>Incyte Corp</a:t>
+                      </a:r>
+                      <a:endParaRPr lang="en-US" sz="850" dirty="0">
+                        <a:latin typeface="Calibri" charset="0"/>
+                        <a:ea typeface="Calibri" charset="0"/>
+                        <a:cs typeface="Calibri" charset="0"/>
+                      </a:endParaRPr>
+                    </a:p>
+                  </a:txBody>
+                  <a:tcPr marL="25400" marR="25400" marT="25400" marB="25400">
                     <a:lnL w="6350" cap="flat" cmpd="sng" algn="ctr">
                       <a:solidFill>
                         <a:srgbClr val="E3E7F0"/>
@@ -12341,7 +12597,7 @@
                         <a:buNone/>
                       </a:pPr>
                       <a:r>
-                        <a:rPr lang="en-US" sz="950" dirty="0">
+                        <a:rPr lang="en-US" sz="850" dirty="0">
                           <a:solidFill>
                             <a:srgbClr val="1A1A1A"/>
                           </a:solidFill>
@@ -12351,14 +12607,14 @@
                         </a:rPr>
                         <a:t>1.13%</a:t>
                       </a:r>
-                      <a:endParaRPr lang="en-US" sz="950" dirty="0">
-                        <a:latin typeface="Calibri" charset="0"/>
-                        <a:ea typeface="Calibri" charset="0"/>
-                        <a:cs typeface="Calibri" charset="0"/>
-                      </a:endParaRPr>
-                    </a:p>
-                  </a:txBody>
-                  <a:tcPr marL="50800" marR="50800" marT="50800" marB="50800">
+                      <a:endParaRPr lang="en-US" sz="850" dirty="0">
+                        <a:latin typeface="Calibri" charset="0"/>
+                        <a:ea typeface="Calibri" charset="0"/>
+                        <a:cs typeface="Calibri" charset="0"/>
+                      </a:endParaRPr>
+                    </a:p>
+                  </a:txBody>
+                  <a:tcPr marL="25400" marR="25400" marT="25400" marB="25400">
                     <a:lnL w="6350" cap="flat" cmpd="sng" algn="ctr">
                       <a:solidFill>
                         <a:srgbClr val="E3E7F0"/>
@@ -12398,7 +12654,7 @@
                   </a:tcPr>
                 </a:tc>
               </a:tr>
-              <a:tr h="210312">
+              <a:tr h="187452">
                 <a:tc>
                   <a:txBody>
                     <a:bodyPr/>
@@ -12408,7 +12664,7 @@
                         <a:buNone/>
                       </a:pPr>
                       <a:r>
-                        <a:rPr lang="en-US" sz="950" dirty="0">
+                        <a:rPr lang="en-US" sz="850" dirty="0">
                           <a:solidFill>
                             <a:srgbClr val="1A1A1A"/>
                           </a:solidFill>
@@ -12418,14 +12674,14 @@
                         </a:rPr>
                         <a:t>USNA</a:t>
                       </a:r>
-                      <a:endParaRPr lang="en-US" sz="950" dirty="0">
-                        <a:latin typeface="Calibri" charset="0"/>
-                        <a:ea typeface="Calibri" charset="0"/>
-                        <a:cs typeface="Calibri" charset="0"/>
-                      </a:endParaRPr>
-                    </a:p>
-                  </a:txBody>
-                  <a:tcPr marL="50800" marR="50800" marT="50800" marB="50800">
+                      <a:endParaRPr lang="en-US" sz="850" dirty="0">
+                        <a:latin typeface="Calibri" charset="0"/>
+                        <a:ea typeface="Calibri" charset="0"/>
+                        <a:cs typeface="Calibri" charset="0"/>
+                      </a:endParaRPr>
+                    </a:p>
+                  </a:txBody>
+                  <a:tcPr marL="25400" marR="25400" marT="25400" marB="25400">
                     <a:lnL w="6350" cap="flat" cmpd="sng" algn="ctr">
                       <a:solidFill>
                         <a:srgbClr val="E3E7F0"/>
@@ -12473,7 +12729,7 @@
                         <a:buNone/>
                       </a:pPr>
                       <a:r>
-                        <a:rPr lang="en-US" sz="950" dirty="0">
+                        <a:rPr lang="en-US" sz="850" dirty="0">
                           <a:solidFill>
                             <a:srgbClr val="1A1A1A"/>
                           </a:solidFill>
@@ -12481,16 +12737,16 @@
                           <a:ea typeface="Calibri" pitchFamily="34" charset="-122"/>
                           <a:cs typeface="Calibri" pitchFamily="34" charset="-120"/>
                         </a:rPr>
-                        <a:t>USANA HEALTH SCIENCES INC</a:t>
-                      </a:r>
-                      <a:endParaRPr lang="en-US" sz="950" dirty="0">
-                        <a:latin typeface="Calibri" charset="0"/>
-                        <a:ea typeface="Calibri" charset="0"/>
-                        <a:cs typeface="Calibri" charset="0"/>
-                      </a:endParaRPr>
-                    </a:p>
-                  </a:txBody>
-                  <a:tcPr marL="50800" marR="50800" marT="50800" marB="50800">
+                        <a:t>Usana Health Sciences Inc</a:t>
+                      </a:r>
+                      <a:endParaRPr lang="en-US" sz="850" dirty="0">
+                        <a:latin typeface="Calibri" charset="0"/>
+                        <a:ea typeface="Calibri" charset="0"/>
+                        <a:cs typeface="Calibri" charset="0"/>
+                      </a:endParaRPr>
+                    </a:p>
+                  </a:txBody>
+                  <a:tcPr marL="25400" marR="25400" marT="25400" marB="25400">
                     <a:lnL w="6350" cap="flat" cmpd="sng" algn="ctr">
                       <a:solidFill>
                         <a:srgbClr val="E3E7F0"/>
@@ -12538,7 +12794,7 @@
                         <a:buNone/>
                       </a:pPr>
                       <a:r>
-                        <a:rPr lang="en-US" sz="950" dirty="0">
+                        <a:rPr lang="en-US" sz="850" dirty="0">
                           <a:solidFill>
                             <a:srgbClr val="1A1A1A"/>
                           </a:solidFill>
@@ -12548,14 +12804,14 @@
                         </a:rPr>
                         <a:t>0.78%</a:t>
                       </a:r>
-                      <a:endParaRPr lang="en-US" sz="950" dirty="0">
-                        <a:latin typeface="Calibri" charset="0"/>
-                        <a:ea typeface="Calibri" charset="0"/>
-                        <a:cs typeface="Calibri" charset="0"/>
-                      </a:endParaRPr>
-                    </a:p>
-                  </a:txBody>
-                  <a:tcPr marL="50800" marR="50800" marT="50800" marB="50800">
+                      <a:endParaRPr lang="en-US" sz="850" dirty="0">
+                        <a:latin typeface="Calibri" charset="0"/>
+                        <a:ea typeface="Calibri" charset="0"/>
+                        <a:cs typeface="Calibri" charset="0"/>
+                      </a:endParaRPr>
+                    </a:p>
+                  </a:txBody>
+                  <a:tcPr marL="25400" marR="25400" marT="25400" marB="25400">
                     <a:lnL w="6350" cap="flat" cmpd="sng" algn="ctr">
                       <a:solidFill>
                         <a:srgbClr val="E3E7F0"/>
@@ -12595,7 +12851,7 @@
                   </a:tcPr>
                 </a:tc>
               </a:tr>
-              <a:tr h="210312">
+              <a:tr h="187452">
                 <a:tc>
                   <a:txBody>
                     <a:bodyPr/>
@@ -12605,7 +12861,7 @@
                         <a:buNone/>
                       </a:pPr>
                       <a:r>
-                        <a:rPr lang="en-US" sz="950" dirty="0">
+                        <a:rPr lang="en-US" sz="850" dirty="0">
                           <a:solidFill>
                             <a:srgbClr val="1A1A1A"/>
                           </a:solidFill>
@@ -12615,14 +12871,14 @@
                         </a:rPr>
                         <a:t>YELP</a:t>
                       </a:r>
-                      <a:endParaRPr lang="en-US" sz="950" dirty="0">
-                        <a:latin typeface="Calibri" charset="0"/>
-                        <a:ea typeface="Calibri" charset="0"/>
-                        <a:cs typeface="Calibri" charset="0"/>
-                      </a:endParaRPr>
-                    </a:p>
-                  </a:txBody>
-                  <a:tcPr marL="50800" marR="50800" marT="50800" marB="50800">
+                      <a:endParaRPr lang="en-US" sz="850" dirty="0">
+                        <a:latin typeface="Calibri" charset="0"/>
+                        <a:ea typeface="Calibri" charset="0"/>
+                        <a:cs typeface="Calibri" charset="0"/>
+                      </a:endParaRPr>
+                    </a:p>
+                  </a:txBody>
+                  <a:tcPr marL="25400" marR="25400" marT="25400" marB="25400">
                     <a:lnL w="6350" cap="flat" cmpd="sng" algn="ctr">
                       <a:solidFill>
                         <a:srgbClr val="E3E7F0"/>
@@ -12670,7 +12926,7 @@
                         <a:buNone/>
                       </a:pPr>
                       <a:r>
-                        <a:rPr lang="en-US" sz="950" dirty="0">
+                        <a:rPr lang="en-US" sz="850" dirty="0">
                           <a:solidFill>
                             <a:srgbClr val="1A1A1A"/>
                           </a:solidFill>
@@ -12678,16 +12934,16 @@
                           <a:ea typeface="Calibri" pitchFamily="34" charset="-122"/>
                           <a:cs typeface="Calibri" pitchFamily="34" charset="-120"/>
                         </a:rPr>
-                        <a:t>YELP INC</a:t>
-                      </a:r>
-                      <a:endParaRPr lang="en-US" sz="950" dirty="0">
-                        <a:latin typeface="Calibri" charset="0"/>
-                        <a:ea typeface="Calibri" charset="0"/>
-                        <a:cs typeface="Calibri" charset="0"/>
-                      </a:endParaRPr>
-                    </a:p>
-                  </a:txBody>
-                  <a:tcPr marL="50800" marR="50800" marT="50800" marB="50800">
+                        <a:t>Yelp Inc</a:t>
+                      </a:r>
+                      <a:endParaRPr lang="en-US" sz="850" dirty="0">
+                        <a:latin typeface="Calibri" charset="0"/>
+                        <a:ea typeface="Calibri" charset="0"/>
+                        <a:cs typeface="Calibri" charset="0"/>
+                      </a:endParaRPr>
+                    </a:p>
+                  </a:txBody>
+                  <a:tcPr marL="25400" marR="25400" marT="25400" marB="25400">
                     <a:lnL w="6350" cap="flat" cmpd="sng" algn="ctr">
                       <a:solidFill>
                         <a:srgbClr val="E3E7F0"/>
@@ -12735,7 +12991,7 @@
                         <a:buNone/>
                       </a:pPr>
                       <a:r>
-                        <a:rPr lang="en-US" sz="950" dirty="0">
+                        <a:rPr lang="en-US" sz="850" dirty="0">
                           <a:solidFill>
                             <a:srgbClr val="1A1A1A"/>
                           </a:solidFill>
@@ -12745,14 +13001,14 @@
                         </a:rPr>
                         <a:t>0.76%</a:t>
                       </a:r>
-                      <a:endParaRPr lang="en-US" sz="950" dirty="0">
-                        <a:latin typeface="Calibri" charset="0"/>
-                        <a:ea typeface="Calibri" charset="0"/>
-                        <a:cs typeface="Calibri" charset="0"/>
-                      </a:endParaRPr>
-                    </a:p>
-                  </a:txBody>
-                  <a:tcPr marL="50800" marR="50800" marT="50800" marB="50800">
+                      <a:endParaRPr lang="en-US" sz="850" dirty="0">
+                        <a:latin typeface="Calibri" charset="0"/>
+                        <a:ea typeface="Calibri" charset="0"/>
+                        <a:cs typeface="Calibri" charset="0"/>
+                      </a:endParaRPr>
+                    </a:p>
+                  </a:txBody>
+                  <a:tcPr marL="25400" marR="25400" marT="25400" marB="25400">
                     <a:lnL w="6350" cap="flat" cmpd="sng" algn="ctr">
                       <a:solidFill>
                         <a:srgbClr val="E3E7F0"/>
@@ -12792,7 +13048,7 @@
                   </a:tcPr>
                 </a:tc>
               </a:tr>
-              <a:tr h="210312">
+              <a:tr h="187452">
                 <a:tc>
                   <a:txBody>
                     <a:bodyPr/>
@@ -12802,7 +13058,7 @@
                         <a:buNone/>
                       </a:pPr>
                       <a:r>
-                        <a:rPr lang="en-US" sz="950" dirty="0">
+                        <a:rPr lang="en-US" sz="850" dirty="0">
                           <a:solidFill>
                             <a:srgbClr val="1A1A1A"/>
                           </a:solidFill>
@@ -12812,14 +13068,14 @@
                         </a:rPr>
                         <a:t>NNI</a:t>
                       </a:r>
-                      <a:endParaRPr lang="en-US" sz="950" dirty="0">
-                        <a:latin typeface="Calibri" charset="0"/>
-                        <a:ea typeface="Calibri" charset="0"/>
-                        <a:cs typeface="Calibri" charset="0"/>
-                      </a:endParaRPr>
-                    </a:p>
-                  </a:txBody>
-                  <a:tcPr marL="50800" marR="50800" marT="50800" marB="50800">
+                      <a:endParaRPr lang="en-US" sz="850" dirty="0">
+                        <a:latin typeface="Calibri" charset="0"/>
+                        <a:ea typeface="Calibri" charset="0"/>
+                        <a:cs typeface="Calibri" charset="0"/>
+                      </a:endParaRPr>
+                    </a:p>
+                  </a:txBody>
+                  <a:tcPr marL="25400" marR="25400" marT="25400" marB="25400">
                     <a:lnL w="6350" cap="flat" cmpd="sng" algn="ctr">
                       <a:solidFill>
                         <a:srgbClr val="E3E7F0"/>
@@ -12867,7 +13123,7 @@
                         <a:buNone/>
                       </a:pPr>
                       <a:r>
-                        <a:rPr lang="en-US" sz="950" dirty="0">
+                        <a:rPr lang="en-US" sz="850" dirty="0">
                           <a:solidFill>
                             <a:srgbClr val="1A1A1A"/>
                           </a:solidFill>
@@ -12875,16 +13131,16 @@
                           <a:ea typeface="Calibri" pitchFamily="34" charset="-122"/>
                           <a:cs typeface="Calibri" pitchFamily="34" charset="-120"/>
                         </a:rPr>
-                        <a:t>NELNET INC</a:t>
-                      </a:r>
-                      <a:endParaRPr lang="en-US" sz="950" dirty="0">
-                        <a:latin typeface="Calibri" charset="0"/>
-                        <a:ea typeface="Calibri" charset="0"/>
-                        <a:cs typeface="Calibri" charset="0"/>
-                      </a:endParaRPr>
-                    </a:p>
-                  </a:txBody>
-                  <a:tcPr marL="50800" marR="50800" marT="50800" marB="50800">
+                        <a:t>Nelnet Inc</a:t>
+                      </a:r>
+                      <a:endParaRPr lang="en-US" sz="850" dirty="0">
+                        <a:latin typeface="Calibri" charset="0"/>
+                        <a:ea typeface="Calibri" charset="0"/>
+                        <a:cs typeface="Calibri" charset="0"/>
+                      </a:endParaRPr>
+                    </a:p>
+                  </a:txBody>
+                  <a:tcPr marL="25400" marR="25400" marT="25400" marB="25400">
                     <a:lnL w="6350" cap="flat" cmpd="sng" algn="ctr">
                       <a:solidFill>
                         <a:srgbClr val="E3E7F0"/>
@@ -12932,7 +13188,7 @@
                         <a:buNone/>
                       </a:pPr>
                       <a:r>
-                        <a:rPr lang="en-US" sz="950" dirty="0">
+                        <a:rPr lang="en-US" sz="850" dirty="0">
                           <a:solidFill>
                             <a:srgbClr val="1A1A1A"/>
                           </a:solidFill>
@@ -12942,14 +13198,14 @@
                         </a:rPr>
                         <a:t>0.74%</a:t>
                       </a:r>
-                      <a:endParaRPr lang="en-US" sz="950" dirty="0">
-                        <a:latin typeface="Calibri" charset="0"/>
-                        <a:ea typeface="Calibri" charset="0"/>
-                        <a:cs typeface="Calibri" charset="0"/>
-                      </a:endParaRPr>
-                    </a:p>
-                  </a:txBody>
-                  <a:tcPr marL="50800" marR="50800" marT="50800" marB="50800">
+                      <a:endParaRPr lang="en-US" sz="850" dirty="0">
+                        <a:latin typeface="Calibri" charset="0"/>
+                        <a:ea typeface="Calibri" charset="0"/>
+                        <a:cs typeface="Calibri" charset="0"/>
+                      </a:endParaRPr>
+                    </a:p>
+                  </a:txBody>
+                  <a:tcPr marL="25400" marR="25400" marT="25400" marB="25400">
                     <a:lnL w="6350" cap="flat" cmpd="sng" algn="ctr">
                       <a:solidFill>
                         <a:srgbClr val="E3E7F0"/>
@@ -12989,7 +13245,7 @@
                   </a:tcPr>
                 </a:tc>
               </a:tr>
-              <a:tr h="210312">
+              <a:tr h="187452">
                 <a:tc>
                   <a:txBody>
                     <a:bodyPr/>
@@ -12999,7 +13255,7 @@
                         <a:buNone/>
                       </a:pPr>
                       <a:r>
-                        <a:rPr lang="en-US" sz="950" dirty="0">
+                        <a:rPr lang="en-US" sz="850" dirty="0">
                           <a:solidFill>
                             <a:srgbClr val="1A1A1A"/>
                           </a:solidFill>
@@ -13009,14 +13265,14 @@
                         </a:rPr>
                         <a:t>GOOGL</a:t>
                       </a:r>
-                      <a:endParaRPr lang="en-US" sz="950" dirty="0">
-                        <a:latin typeface="Calibri" charset="0"/>
-                        <a:ea typeface="Calibri" charset="0"/>
-                        <a:cs typeface="Calibri" charset="0"/>
-                      </a:endParaRPr>
-                    </a:p>
-                  </a:txBody>
-                  <a:tcPr marL="50800" marR="50800" marT="50800" marB="50800">
+                      <a:endParaRPr lang="en-US" sz="850" dirty="0">
+                        <a:latin typeface="Calibri" charset="0"/>
+                        <a:ea typeface="Calibri" charset="0"/>
+                        <a:cs typeface="Calibri" charset="0"/>
+                      </a:endParaRPr>
+                    </a:p>
+                  </a:txBody>
+                  <a:tcPr marL="25400" marR="25400" marT="25400" marB="25400">
                     <a:lnL w="6350" cap="flat" cmpd="sng" algn="ctr">
                       <a:solidFill>
                         <a:srgbClr val="E3E7F0"/>
@@ -13064,7 +13320,7 @@
                         <a:buNone/>
                       </a:pPr>
                       <a:r>
-                        <a:rPr lang="en-US" sz="950" dirty="0">
+                        <a:rPr lang="en-US" sz="850" dirty="0">
                           <a:solidFill>
                             <a:srgbClr val="1A1A1A"/>
                           </a:solidFill>
@@ -13072,16 +13328,16 @@
                           <a:ea typeface="Calibri" pitchFamily="34" charset="-122"/>
                           <a:cs typeface="Calibri" pitchFamily="34" charset="-120"/>
                         </a:rPr>
-                        <a:t>ALPHABET INC</a:t>
-                      </a:r>
-                      <a:endParaRPr lang="en-US" sz="950" dirty="0">
-                        <a:latin typeface="Calibri" charset="0"/>
-                        <a:ea typeface="Calibri" charset="0"/>
-                        <a:cs typeface="Calibri" charset="0"/>
-                      </a:endParaRPr>
-                    </a:p>
-                  </a:txBody>
-                  <a:tcPr marL="50800" marR="50800" marT="50800" marB="50800">
+                        <a:t>Alphabet Inc</a:t>
+                      </a:r>
+                      <a:endParaRPr lang="en-US" sz="850" dirty="0">
+                        <a:latin typeface="Calibri" charset="0"/>
+                        <a:ea typeface="Calibri" charset="0"/>
+                        <a:cs typeface="Calibri" charset="0"/>
+                      </a:endParaRPr>
+                    </a:p>
+                  </a:txBody>
+                  <a:tcPr marL="25400" marR="25400" marT="25400" marB="25400">
                     <a:lnL w="6350" cap="flat" cmpd="sng" algn="ctr">
                       <a:solidFill>
                         <a:srgbClr val="E3E7F0"/>
@@ -13129,7 +13385,7 @@
                         <a:buNone/>
                       </a:pPr>
                       <a:r>
-                        <a:rPr lang="en-US" sz="950" dirty="0">
+                        <a:rPr lang="en-US" sz="850" dirty="0">
                           <a:solidFill>
                             <a:srgbClr val="1A1A1A"/>
                           </a:solidFill>
@@ -13139,14 +13395,14 @@
                         </a:rPr>
                         <a:t>0.72%</a:t>
                       </a:r>
-                      <a:endParaRPr lang="en-US" sz="950" dirty="0">
-                        <a:latin typeface="Calibri" charset="0"/>
-                        <a:ea typeface="Calibri" charset="0"/>
-                        <a:cs typeface="Calibri" charset="0"/>
-                      </a:endParaRPr>
-                    </a:p>
-                  </a:txBody>
-                  <a:tcPr marL="50800" marR="50800" marT="50800" marB="50800">
+                      <a:endParaRPr lang="en-US" sz="850" dirty="0">
+                        <a:latin typeface="Calibri" charset="0"/>
+                        <a:ea typeface="Calibri" charset="0"/>
+                        <a:cs typeface="Calibri" charset="0"/>
+                      </a:endParaRPr>
+                    </a:p>
+                  </a:txBody>
+                  <a:tcPr marL="25400" marR="25400" marT="25400" marB="25400">
                     <a:lnL w="6350" cap="flat" cmpd="sng" algn="ctr">
                       <a:solidFill>
                         <a:srgbClr val="E3E7F0"/>
@@ -13186,7 +13442,7 @@
                   </a:tcPr>
                 </a:tc>
               </a:tr>
-              <a:tr h="210312">
+              <a:tr h="187452">
                 <a:tc>
                   <a:txBody>
                     <a:bodyPr/>
@@ -13196,7 +13452,7 @@
                         <a:buNone/>
                       </a:pPr>
                       <a:r>
-                        <a:rPr lang="en-US" sz="950" dirty="0">
+                        <a:rPr lang="en-US" sz="850" dirty="0">
                           <a:solidFill>
                             <a:srgbClr val="1A1A1A"/>
                           </a:solidFill>
@@ -13206,14 +13462,14 @@
                         </a:rPr>
                         <a:t>HSTM</a:t>
                       </a:r>
-                      <a:endParaRPr lang="en-US" sz="950" dirty="0">
-                        <a:latin typeface="Calibri" charset="0"/>
-                        <a:ea typeface="Calibri" charset="0"/>
-                        <a:cs typeface="Calibri" charset="0"/>
-                      </a:endParaRPr>
-                    </a:p>
-                  </a:txBody>
-                  <a:tcPr marL="50800" marR="50800" marT="50800" marB="50800">
+                      <a:endParaRPr lang="en-US" sz="850" dirty="0">
+                        <a:latin typeface="Calibri" charset="0"/>
+                        <a:ea typeface="Calibri" charset="0"/>
+                        <a:cs typeface="Calibri" charset="0"/>
+                      </a:endParaRPr>
+                    </a:p>
+                  </a:txBody>
+                  <a:tcPr marL="25400" marR="25400" marT="25400" marB="25400">
                     <a:lnL w="6350" cap="flat" cmpd="sng" algn="ctr">
                       <a:solidFill>
                         <a:srgbClr val="E3E7F0"/>
@@ -13261,7 +13517,7 @@
                         <a:buNone/>
                       </a:pPr>
                       <a:r>
-                        <a:rPr lang="en-US" sz="950" dirty="0">
+                        <a:rPr lang="en-US" sz="850" dirty="0">
                           <a:solidFill>
                             <a:srgbClr val="1A1A1A"/>
                           </a:solidFill>
@@ -13269,16 +13525,16 @@
                           <a:ea typeface="Calibri" pitchFamily="34" charset="-122"/>
                           <a:cs typeface="Calibri" pitchFamily="34" charset="-120"/>
                         </a:rPr>
-                        <a:t>HEALTHSTREAM INC</a:t>
-                      </a:r>
-                      <a:endParaRPr lang="en-US" sz="950" dirty="0">
-                        <a:latin typeface="Calibri" charset="0"/>
-                        <a:ea typeface="Calibri" charset="0"/>
-                        <a:cs typeface="Calibri" charset="0"/>
-                      </a:endParaRPr>
-                    </a:p>
-                  </a:txBody>
-                  <a:tcPr marL="50800" marR="50800" marT="50800" marB="50800">
+                        <a:t>Healthstream Inc</a:t>
+                      </a:r>
+                      <a:endParaRPr lang="en-US" sz="850" dirty="0">
+                        <a:latin typeface="Calibri" charset="0"/>
+                        <a:ea typeface="Calibri" charset="0"/>
+                        <a:cs typeface="Calibri" charset="0"/>
+                      </a:endParaRPr>
+                    </a:p>
+                  </a:txBody>
+                  <a:tcPr marL="25400" marR="25400" marT="25400" marB="25400">
                     <a:lnL w="6350" cap="flat" cmpd="sng" algn="ctr">
                       <a:solidFill>
                         <a:srgbClr val="E3E7F0"/>
@@ -13326,7 +13582,7 @@
                         <a:buNone/>
                       </a:pPr>
                       <a:r>
-                        <a:rPr lang="en-US" sz="950" dirty="0">
+                        <a:rPr lang="en-US" sz="850" dirty="0">
                           <a:solidFill>
                             <a:srgbClr val="1A1A1A"/>
                           </a:solidFill>
@@ -13336,14 +13592,14 @@
                         </a:rPr>
                         <a:t>0.69%</a:t>
                       </a:r>
-                      <a:endParaRPr lang="en-US" sz="950" dirty="0">
-                        <a:latin typeface="Calibri" charset="0"/>
-                        <a:ea typeface="Calibri" charset="0"/>
-                        <a:cs typeface="Calibri" charset="0"/>
-                      </a:endParaRPr>
-                    </a:p>
-                  </a:txBody>
-                  <a:tcPr marL="50800" marR="50800" marT="50800" marB="50800">
+                      <a:endParaRPr lang="en-US" sz="850" dirty="0">
+                        <a:latin typeface="Calibri" charset="0"/>
+                        <a:ea typeface="Calibri" charset="0"/>
+                        <a:cs typeface="Calibri" charset="0"/>
+                      </a:endParaRPr>
+                    </a:p>
+                  </a:txBody>
+                  <a:tcPr marL="25400" marR="25400" marT="25400" marB="25400">
                     <a:lnL w="6350" cap="flat" cmpd="sng" algn="ctr">
                       <a:solidFill>
                         <a:srgbClr val="E3E7F0"/>
@@ -13383,7 +13639,7 @@
                   </a:tcPr>
                 </a:tc>
               </a:tr>
-              <a:tr h="210312">
+              <a:tr h="187452">
                 <a:tc>
                   <a:txBody>
                     <a:bodyPr/>
@@ -13393,7 +13649,7 @@
                         <a:buNone/>
                       </a:pPr>
                       <a:r>
-                        <a:rPr lang="en-US" sz="950" dirty="0">
+                        <a:rPr lang="en-US" sz="850" dirty="0">
                           <a:solidFill>
                             <a:srgbClr val="1A1A1A"/>
                           </a:solidFill>
@@ -13403,14 +13659,14 @@
                         </a:rPr>
                         <a:t>TNET</a:t>
                       </a:r>
-                      <a:endParaRPr lang="en-US" sz="950" dirty="0">
-                        <a:latin typeface="Calibri" charset="0"/>
-                        <a:ea typeface="Calibri" charset="0"/>
-                        <a:cs typeface="Calibri" charset="0"/>
-                      </a:endParaRPr>
-                    </a:p>
-                  </a:txBody>
-                  <a:tcPr marL="50800" marR="50800" marT="50800" marB="50800">
+                      <a:endParaRPr lang="en-US" sz="850" dirty="0">
+                        <a:latin typeface="Calibri" charset="0"/>
+                        <a:ea typeface="Calibri" charset="0"/>
+                        <a:cs typeface="Calibri" charset="0"/>
+                      </a:endParaRPr>
+                    </a:p>
+                  </a:txBody>
+                  <a:tcPr marL="25400" marR="25400" marT="25400" marB="25400">
                     <a:lnL w="6350" cap="flat" cmpd="sng" algn="ctr">
                       <a:solidFill>
                         <a:srgbClr val="E3E7F0"/>
@@ -13458,7 +13714,7 @@
                         <a:buNone/>
                       </a:pPr>
                       <a:r>
-                        <a:rPr lang="en-US" sz="950" dirty="0">
+                        <a:rPr lang="en-US" sz="850" dirty="0">
                           <a:solidFill>
                             <a:srgbClr val="1A1A1A"/>
                           </a:solidFill>
@@ -13466,16 +13722,16 @@
                           <a:ea typeface="Calibri" pitchFamily="34" charset="-122"/>
                           <a:cs typeface="Calibri" pitchFamily="34" charset="-120"/>
                         </a:rPr>
-                        <a:t>TRINET GROUP INC</a:t>
-                      </a:r>
-                      <a:endParaRPr lang="en-US" sz="950" dirty="0">
-                        <a:latin typeface="Calibri" charset="0"/>
-                        <a:ea typeface="Calibri" charset="0"/>
-                        <a:cs typeface="Calibri" charset="0"/>
-                      </a:endParaRPr>
-                    </a:p>
-                  </a:txBody>
-                  <a:tcPr marL="50800" marR="50800" marT="50800" marB="50800">
+                        <a:t>Trinet Group Inc</a:t>
+                      </a:r>
+                      <a:endParaRPr lang="en-US" sz="850" dirty="0">
+                        <a:latin typeface="Calibri" charset="0"/>
+                        <a:ea typeface="Calibri" charset="0"/>
+                        <a:cs typeface="Calibri" charset="0"/>
+                      </a:endParaRPr>
+                    </a:p>
+                  </a:txBody>
+                  <a:tcPr marL="25400" marR="25400" marT="25400" marB="25400">
                     <a:lnL w="6350" cap="flat" cmpd="sng" algn="ctr">
                       <a:solidFill>
                         <a:srgbClr val="E3E7F0"/>
@@ -13523,7 +13779,7 @@
                         <a:buNone/>
                       </a:pPr>
                       <a:r>
-                        <a:rPr lang="en-US" sz="950" dirty="0">
+                        <a:rPr lang="en-US" sz="850" dirty="0">
                           <a:solidFill>
                             <a:srgbClr val="1A1A1A"/>
                           </a:solidFill>
@@ -13533,14 +13789,14 @@
                         </a:rPr>
                         <a:t>0.67%</a:t>
                       </a:r>
-                      <a:endParaRPr lang="en-US" sz="950" dirty="0">
-                        <a:latin typeface="Calibri" charset="0"/>
-                        <a:ea typeface="Calibri" charset="0"/>
-                        <a:cs typeface="Calibri" charset="0"/>
-                      </a:endParaRPr>
-                    </a:p>
-                  </a:txBody>
-                  <a:tcPr marL="50800" marR="50800" marT="50800" marB="50800">
+                      <a:endParaRPr lang="en-US" sz="850" dirty="0">
+                        <a:latin typeface="Calibri" charset="0"/>
+                        <a:ea typeface="Calibri" charset="0"/>
+                        <a:cs typeface="Calibri" charset="0"/>
+                      </a:endParaRPr>
+                    </a:p>
+                  </a:txBody>
+                  <a:tcPr marL="25400" marR="25400" marT="25400" marB="25400">
                     <a:lnL w="6350" cap="flat" cmpd="sng" algn="ctr">
                       <a:solidFill>
                         <a:srgbClr val="E3E7F0"/>
@@ -13580,7 +13836,7 @@
                   </a:tcPr>
                 </a:tc>
               </a:tr>
-              <a:tr h="210312">
+              <a:tr h="187452">
                 <a:tc>
                   <a:txBody>
                     <a:bodyPr/>
@@ -13590,7 +13846,7 @@
                         <a:buNone/>
                       </a:pPr>
                       <a:r>
-                        <a:rPr lang="en-US" sz="950" dirty="0">
+                        <a:rPr lang="en-US" sz="850" dirty="0">
                           <a:solidFill>
                             <a:srgbClr val="1A1A1A"/>
                           </a:solidFill>
@@ -13600,14 +13856,14 @@
                         </a:rPr>
                         <a:t>CORT</a:t>
                       </a:r>
-                      <a:endParaRPr lang="en-US" sz="950" dirty="0">
-                        <a:latin typeface="Calibri" charset="0"/>
-                        <a:ea typeface="Calibri" charset="0"/>
-                        <a:cs typeface="Calibri" charset="0"/>
-                      </a:endParaRPr>
-                    </a:p>
-                  </a:txBody>
-                  <a:tcPr marL="50800" marR="50800" marT="50800" marB="50800">
+                      <a:endParaRPr lang="en-US" sz="850" dirty="0">
+                        <a:latin typeface="Calibri" charset="0"/>
+                        <a:ea typeface="Calibri" charset="0"/>
+                        <a:cs typeface="Calibri" charset="0"/>
+                      </a:endParaRPr>
+                    </a:p>
+                  </a:txBody>
+                  <a:tcPr marL="25400" marR="25400" marT="25400" marB="25400">
                     <a:lnL w="6350" cap="flat" cmpd="sng" algn="ctr">
                       <a:solidFill>
                         <a:srgbClr val="E3E7F0"/>
@@ -13655,7 +13911,7 @@
                         <a:buNone/>
                       </a:pPr>
                       <a:r>
-                        <a:rPr lang="en-US" sz="950" dirty="0">
+                        <a:rPr lang="en-US" sz="850" dirty="0">
                           <a:solidFill>
                             <a:srgbClr val="1A1A1A"/>
                           </a:solidFill>
@@ -13663,16 +13919,16 @@
                           <a:ea typeface="Calibri" pitchFamily="34" charset="-122"/>
                           <a:cs typeface="Calibri" pitchFamily="34" charset="-120"/>
                         </a:rPr>
-                        <a:t>CORCEPT THERAPEUTICS INC</a:t>
-                      </a:r>
-                      <a:endParaRPr lang="en-US" sz="950" dirty="0">
-                        <a:latin typeface="Calibri" charset="0"/>
-                        <a:ea typeface="Calibri" charset="0"/>
-                        <a:cs typeface="Calibri" charset="0"/>
-                      </a:endParaRPr>
-                    </a:p>
-                  </a:txBody>
-                  <a:tcPr marL="50800" marR="50800" marT="50800" marB="50800">
+                        <a:t>Corcept Therapeutics Inc</a:t>
+                      </a:r>
+                      <a:endParaRPr lang="en-US" sz="850" dirty="0">
+                        <a:latin typeface="Calibri" charset="0"/>
+                        <a:ea typeface="Calibri" charset="0"/>
+                        <a:cs typeface="Calibri" charset="0"/>
+                      </a:endParaRPr>
+                    </a:p>
+                  </a:txBody>
+                  <a:tcPr marL="25400" marR="25400" marT="25400" marB="25400">
                     <a:lnL w="6350" cap="flat" cmpd="sng" algn="ctr">
                       <a:solidFill>
                         <a:srgbClr val="E3E7F0"/>
@@ -13720,7 +13976,7 @@
                         <a:buNone/>
                       </a:pPr>
                       <a:r>
-                        <a:rPr lang="en-US" sz="950" dirty="0">
+                        <a:rPr lang="en-US" sz="850" dirty="0">
                           <a:solidFill>
                             <a:srgbClr val="1A1A1A"/>
                           </a:solidFill>
@@ -13730,14 +13986,408 @@
                         </a:rPr>
                         <a:t>0.66%</a:t>
                       </a:r>
-                      <a:endParaRPr lang="en-US" sz="950" dirty="0">
-                        <a:latin typeface="Calibri" charset="0"/>
-                        <a:ea typeface="Calibri" charset="0"/>
-                        <a:cs typeface="Calibri" charset="0"/>
-                      </a:endParaRPr>
-                    </a:p>
-                  </a:txBody>
-                  <a:tcPr marL="50800" marR="50800" marT="50800" marB="50800">
+                      <a:endParaRPr lang="en-US" sz="850" dirty="0">
+                        <a:latin typeface="Calibri" charset="0"/>
+                        <a:ea typeface="Calibri" charset="0"/>
+                        <a:cs typeface="Calibri" charset="0"/>
+                      </a:endParaRPr>
+                    </a:p>
+                  </a:txBody>
+                  <a:tcPr marL="25400" marR="25400" marT="25400" marB="25400">
+                    <a:lnL w="6350" cap="flat" cmpd="sng" algn="ctr">
+                      <a:solidFill>
+                        <a:srgbClr val="E3E7F0"/>
+                      </a:solidFill>
+                      <a:prstDash val="solid"/>
+                      <a:round/>
+                      <a:headEnd type="none" w="med" len="med"/>
+                      <a:tailEnd type="none" w="med" len="med"/>
+                    </a:lnL>
+                    <a:lnR w="6350" cap="flat" cmpd="sng" algn="ctr">
+                      <a:solidFill>
+                        <a:srgbClr val="E3E7F0"/>
+                      </a:solidFill>
+                      <a:prstDash val="solid"/>
+                      <a:round/>
+                      <a:headEnd type="none" w="med" len="med"/>
+                      <a:tailEnd type="none" w="med" len="med"/>
+                    </a:lnR>
+                    <a:lnT w="6350" cap="flat" cmpd="sng" algn="ctr">
+                      <a:solidFill>
+                        <a:srgbClr val="E3E7F0"/>
+                      </a:solidFill>
+                      <a:prstDash val="solid"/>
+                      <a:round/>
+                      <a:headEnd type="none" w="med" len="med"/>
+                      <a:tailEnd type="none" w="med" len="med"/>
+                    </a:lnT>
+                    <a:lnB w="6350" cap="flat" cmpd="sng" algn="ctr">
+                      <a:solidFill>
+                        <a:srgbClr val="E3E7F0"/>
+                      </a:solidFill>
+                      <a:prstDash val="solid"/>
+                      <a:round/>
+                      <a:headEnd type="none" w="med" len="med"/>
+                      <a:tailEnd type="none" w="med" len="med"/>
+                    </a:lnB>
+                  </a:tcPr>
+                </a:tc>
+              </a:tr>
+              <a:tr h="187452">
+                <a:tc>
+                  <a:txBody>
+                    <a:bodyPr/>
+                    <a:lstStyle/>
+                    <a:p>
+                      <a:pPr algn="l" indent="0" marL="0">
+                        <a:buNone/>
+                      </a:pPr>
+                      <a:r>
+                        <a:rPr lang="en-US" sz="850" dirty="0">
+                          <a:solidFill>
+                            <a:srgbClr val="1A1A1A"/>
+                          </a:solidFill>
+                          <a:latin typeface="Calibri" pitchFamily="34" charset="0"/>
+                          <a:ea typeface="Calibri" pitchFamily="34" charset="-122"/>
+                          <a:cs typeface="Calibri" pitchFamily="34" charset="-120"/>
+                        </a:rPr>
+                        <a:t>USLM</a:t>
+                      </a:r>
+                      <a:endParaRPr lang="en-US" sz="850" dirty="0">
+                        <a:latin typeface="Calibri" charset="0"/>
+                        <a:ea typeface="Calibri" charset="0"/>
+                        <a:cs typeface="Calibri" charset="0"/>
+                      </a:endParaRPr>
+                    </a:p>
+                  </a:txBody>
+                  <a:tcPr marL="25400" marR="25400" marT="25400" marB="25400">
+                    <a:lnL w="6350" cap="flat" cmpd="sng" algn="ctr">
+                      <a:solidFill>
+                        <a:srgbClr val="E3E7F0"/>
+                      </a:solidFill>
+                      <a:prstDash val="solid"/>
+                      <a:round/>
+                      <a:headEnd type="none" w="med" len="med"/>
+                      <a:tailEnd type="none" w="med" len="med"/>
+                    </a:lnL>
+                    <a:lnR w="6350" cap="flat" cmpd="sng" algn="ctr">
+                      <a:solidFill>
+                        <a:srgbClr val="E3E7F0"/>
+                      </a:solidFill>
+                      <a:prstDash val="solid"/>
+                      <a:round/>
+                      <a:headEnd type="none" w="med" len="med"/>
+                      <a:tailEnd type="none" w="med" len="med"/>
+                    </a:lnR>
+                    <a:lnT w="6350" cap="flat" cmpd="sng" algn="ctr">
+                      <a:solidFill>
+                        <a:srgbClr val="E3E7F0"/>
+                      </a:solidFill>
+                      <a:prstDash val="solid"/>
+                      <a:round/>
+                      <a:headEnd type="none" w="med" len="med"/>
+                      <a:tailEnd type="none" w="med" len="med"/>
+                    </a:lnT>
+                    <a:lnB w="6350" cap="flat" cmpd="sng" algn="ctr">
+                      <a:solidFill>
+                        <a:srgbClr val="E3E7F0"/>
+                      </a:solidFill>
+                      <a:prstDash val="solid"/>
+                      <a:round/>
+                      <a:headEnd type="none" w="med" len="med"/>
+                      <a:tailEnd type="none" w="med" len="med"/>
+                    </a:lnB>
+                  </a:tcPr>
+                </a:tc>
+                <a:tc>
+                  <a:txBody>
+                    <a:bodyPr/>
+                    <a:lstStyle/>
+                    <a:p>
+                      <a:pPr algn="r" indent="0" marL="0">
+                        <a:buNone/>
+                      </a:pPr>
+                      <a:r>
+                        <a:rPr lang="en-US" sz="850" dirty="0">
+                          <a:solidFill>
+                            <a:srgbClr val="1A1A1A"/>
+                          </a:solidFill>
+                          <a:latin typeface="Calibri" pitchFamily="34" charset="0"/>
+                          <a:ea typeface="Calibri" pitchFamily="34" charset="-122"/>
+                          <a:cs typeface="Calibri" pitchFamily="34" charset="-120"/>
+                        </a:rPr>
+                        <a:t>United States Lime Minerals Inc</a:t>
+                      </a:r>
+                      <a:endParaRPr lang="en-US" sz="850" dirty="0">
+                        <a:latin typeface="Calibri" charset="0"/>
+                        <a:ea typeface="Calibri" charset="0"/>
+                        <a:cs typeface="Calibri" charset="0"/>
+                      </a:endParaRPr>
+                    </a:p>
+                  </a:txBody>
+                  <a:tcPr marL="25400" marR="25400" marT="25400" marB="25400">
+                    <a:lnL w="6350" cap="flat" cmpd="sng" algn="ctr">
+                      <a:solidFill>
+                        <a:srgbClr val="E3E7F0"/>
+                      </a:solidFill>
+                      <a:prstDash val="solid"/>
+                      <a:round/>
+                      <a:headEnd type="none" w="med" len="med"/>
+                      <a:tailEnd type="none" w="med" len="med"/>
+                    </a:lnL>
+                    <a:lnR w="6350" cap="flat" cmpd="sng" algn="ctr">
+                      <a:solidFill>
+                        <a:srgbClr val="E3E7F0"/>
+                      </a:solidFill>
+                      <a:prstDash val="solid"/>
+                      <a:round/>
+                      <a:headEnd type="none" w="med" len="med"/>
+                      <a:tailEnd type="none" w="med" len="med"/>
+                    </a:lnR>
+                    <a:lnT w="6350" cap="flat" cmpd="sng" algn="ctr">
+                      <a:solidFill>
+                        <a:srgbClr val="E3E7F0"/>
+                      </a:solidFill>
+                      <a:prstDash val="solid"/>
+                      <a:round/>
+                      <a:headEnd type="none" w="med" len="med"/>
+                      <a:tailEnd type="none" w="med" len="med"/>
+                    </a:lnT>
+                    <a:lnB w="6350" cap="flat" cmpd="sng" algn="ctr">
+                      <a:solidFill>
+                        <a:srgbClr val="E3E7F0"/>
+                      </a:solidFill>
+                      <a:prstDash val="solid"/>
+                      <a:round/>
+                      <a:headEnd type="none" w="med" len="med"/>
+                      <a:tailEnd type="none" w="med" len="med"/>
+                    </a:lnB>
+                  </a:tcPr>
+                </a:tc>
+                <a:tc>
+                  <a:txBody>
+                    <a:bodyPr/>
+                    <a:lstStyle/>
+                    <a:p>
+                      <a:pPr algn="r" indent="0" marL="0">
+                        <a:buNone/>
+                      </a:pPr>
+                      <a:r>
+                        <a:rPr lang="en-US" sz="850" dirty="0">
+                          <a:solidFill>
+                            <a:srgbClr val="1A1A1A"/>
+                          </a:solidFill>
+                          <a:latin typeface="Calibri" pitchFamily="34" charset="0"/>
+                          <a:ea typeface="Calibri" pitchFamily="34" charset="-122"/>
+                          <a:cs typeface="Calibri" pitchFamily="34" charset="-120"/>
+                        </a:rPr>
+                        <a:t>0.64%</a:t>
+                      </a:r>
+                      <a:endParaRPr lang="en-US" sz="850" dirty="0">
+                        <a:latin typeface="Calibri" charset="0"/>
+                        <a:ea typeface="Calibri" charset="0"/>
+                        <a:cs typeface="Calibri" charset="0"/>
+                      </a:endParaRPr>
+                    </a:p>
+                  </a:txBody>
+                  <a:tcPr marL="25400" marR="25400" marT="25400" marB="25400">
+                    <a:lnL w="6350" cap="flat" cmpd="sng" algn="ctr">
+                      <a:solidFill>
+                        <a:srgbClr val="E3E7F0"/>
+                      </a:solidFill>
+                      <a:prstDash val="solid"/>
+                      <a:round/>
+                      <a:headEnd type="none" w="med" len="med"/>
+                      <a:tailEnd type="none" w="med" len="med"/>
+                    </a:lnL>
+                    <a:lnR w="6350" cap="flat" cmpd="sng" algn="ctr">
+                      <a:solidFill>
+                        <a:srgbClr val="E3E7F0"/>
+                      </a:solidFill>
+                      <a:prstDash val="solid"/>
+                      <a:round/>
+                      <a:headEnd type="none" w="med" len="med"/>
+                      <a:tailEnd type="none" w="med" len="med"/>
+                    </a:lnR>
+                    <a:lnT w="6350" cap="flat" cmpd="sng" algn="ctr">
+                      <a:solidFill>
+                        <a:srgbClr val="E3E7F0"/>
+                      </a:solidFill>
+                      <a:prstDash val="solid"/>
+                      <a:round/>
+                      <a:headEnd type="none" w="med" len="med"/>
+                      <a:tailEnd type="none" w="med" len="med"/>
+                    </a:lnT>
+                    <a:lnB w="6350" cap="flat" cmpd="sng" algn="ctr">
+                      <a:solidFill>
+                        <a:srgbClr val="E3E7F0"/>
+                      </a:solidFill>
+                      <a:prstDash val="solid"/>
+                      <a:round/>
+                      <a:headEnd type="none" w="med" len="med"/>
+                      <a:tailEnd type="none" w="med" len="med"/>
+                    </a:lnB>
+                  </a:tcPr>
+                </a:tc>
+              </a:tr>
+              <a:tr h="187452">
+                <a:tc>
+                  <a:txBody>
+                    <a:bodyPr/>
+                    <a:lstStyle/>
+                    <a:p>
+                      <a:pPr algn="l" indent="0" marL="0">
+                        <a:buNone/>
+                      </a:pPr>
+                      <a:r>
+                        <a:rPr lang="en-US" sz="850" dirty="0">
+                          <a:solidFill>
+                            <a:srgbClr val="1A1A1A"/>
+                          </a:solidFill>
+                          <a:latin typeface="Calibri" pitchFamily="34" charset="0"/>
+                          <a:ea typeface="Calibri" pitchFamily="34" charset="-122"/>
+                          <a:cs typeface="Calibri" pitchFamily="34" charset="-120"/>
+                        </a:rPr>
+                        <a:t>WINA</a:t>
+                      </a:r>
+                      <a:endParaRPr lang="en-US" sz="850" dirty="0">
+                        <a:latin typeface="Calibri" charset="0"/>
+                        <a:ea typeface="Calibri" charset="0"/>
+                        <a:cs typeface="Calibri" charset="0"/>
+                      </a:endParaRPr>
+                    </a:p>
+                  </a:txBody>
+                  <a:tcPr marL="25400" marR="25400" marT="25400" marB="25400">
+                    <a:lnL w="6350" cap="flat" cmpd="sng" algn="ctr">
+                      <a:solidFill>
+                        <a:srgbClr val="E3E7F0"/>
+                      </a:solidFill>
+                      <a:prstDash val="solid"/>
+                      <a:round/>
+                      <a:headEnd type="none" w="med" len="med"/>
+                      <a:tailEnd type="none" w="med" len="med"/>
+                    </a:lnL>
+                    <a:lnR w="6350" cap="flat" cmpd="sng" algn="ctr">
+                      <a:solidFill>
+                        <a:srgbClr val="E3E7F0"/>
+                      </a:solidFill>
+                      <a:prstDash val="solid"/>
+                      <a:round/>
+                      <a:headEnd type="none" w="med" len="med"/>
+                      <a:tailEnd type="none" w="med" len="med"/>
+                    </a:lnR>
+                    <a:lnT w="6350" cap="flat" cmpd="sng" algn="ctr">
+                      <a:solidFill>
+                        <a:srgbClr val="E3E7F0"/>
+                      </a:solidFill>
+                      <a:prstDash val="solid"/>
+                      <a:round/>
+                      <a:headEnd type="none" w="med" len="med"/>
+                      <a:tailEnd type="none" w="med" len="med"/>
+                    </a:lnT>
+                    <a:lnB w="6350" cap="flat" cmpd="sng" algn="ctr">
+                      <a:solidFill>
+                        <a:srgbClr val="E3E7F0"/>
+                      </a:solidFill>
+                      <a:prstDash val="solid"/>
+                      <a:round/>
+                      <a:headEnd type="none" w="med" len="med"/>
+                      <a:tailEnd type="none" w="med" len="med"/>
+                    </a:lnB>
+                  </a:tcPr>
+                </a:tc>
+                <a:tc>
+                  <a:txBody>
+                    <a:bodyPr/>
+                    <a:lstStyle/>
+                    <a:p>
+                      <a:pPr algn="r" indent="0" marL="0">
+                        <a:buNone/>
+                      </a:pPr>
+                      <a:r>
+                        <a:rPr lang="en-US" sz="850" dirty="0">
+                          <a:solidFill>
+                            <a:srgbClr val="1A1A1A"/>
+                          </a:solidFill>
+                          <a:latin typeface="Calibri" pitchFamily="34" charset="0"/>
+                          <a:ea typeface="Calibri" pitchFamily="34" charset="-122"/>
+                          <a:cs typeface="Calibri" pitchFamily="34" charset="-120"/>
+                        </a:rPr>
+                        <a:t>Winmark Corp</a:t>
+                      </a:r>
+                      <a:endParaRPr lang="en-US" sz="850" dirty="0">
+                        <a:latin typeface="Calibri" charset="0"/>
+                        <a:ea typeface="Calibri" charset="0"/>
+                        <a:cs typeface="Calibri" charset="0"/>
+                      </a:endParaRPr>
+                    </a:p>
+                  </a:txBody>
+                  <a:tcPr marL="25400" marR="25400" marT="25400" marB="25400">
+                    <a:lnL w="6350" cap="flat" cmpd="sng" algn="ctr">
+                      <a:solidFill>
+                        <a:srgbClr val="E3E7F0"/>
+                      </a:solidFill>
+                      <a:prstDash val="solid"/>
+                      <a:round/>
+                      <a:headEnd type="none" w="med" len="med"/>
+                      <a:tailEnd type="none" w="med" len="med"/>
+                    </a:lnL>
+                    <a:lnR w="6350" cap="flat" cmpd="sng" algn="ctr">
+                      <a:solidFill>
+                        <a:srgbClr val="E3E7F0"/>
+                      </a:solidFill>
+                      <a:prstDash val="solid"/>
+                      <a:round/>
+                      <a:headEnd type="none" w="med" len="med"/>
+                      <a:tailEnd type="none" w="med" len="med"/>
+                    </a:lnR>
+                    <a:lnT w="6350" cap="flat" cmpd="sng" algn="ctr">
+                      <a:solidFill>
+                        <a:srgbClr val="E3E7F0"/>
+                      </a:solidFill>
+                      <a:prstDash val="solid"/>
+                      <a:round/>
+                      <a:headEnd type="none" w="med" len="med"/>
+                      <a:tailEnd type="none" w="med" len="med"/>
+                    </a:lnT>
+                    <a:lnB w="6350" cap="flat" cmpd="sng" algn="ctr">
+                      <a:solidFill>
+                        <a:srgbClr val="E3E7F0"/>
+                      </a:solidFill>
+                      <a:prstDash val="solid"/>
+                      <a:round/>
+                      <a:headEnd type="none" w="med" len="med"/>
+                      <a:tailEnd type="none" w="med" len="med"/>
+                    </a:lnB>
+                  </a:tcPr>
+                </a:tc>
+                <a:tc>
+                  <a:txBody>
+                    <a:bodyPr/>
+                    <a:lstStyle/>
+                    <a:p>
+                      <a:pPr algn="r" indent="0" marL="0">
+                        <a:buNone/>
+                      </a:pPr>
+                      <a:r>
+                        <a:rPr lang="en-US" sz="850" dirty="0">
+                          <a:solidFill>
+                            <a:srgbClr val="1A1A1A"/>
+                          </a:solidFill>
+                          <a:latin typeface="Calibri" pitchFamily="34" charset="0"/>
+                          <a:ea typeface="Calibri" pitchFamily="34" charset="-122"/>
+                          <a:cs typeface="Calibri" pitchFamily="34" charset="-120"/>
+                        </a:rPr>
+                        <a:t>0.62%</a:t>
+                      </a:r>
+                      <a:endParaRPr lang="en-US" sz="850" dirty="0">
+                        <a:latin typeface="Calibri" charset="0"/>
+                        <a:ea typeface="Calibri" charset="0"/>
+                        <a:cs typeface="Calibri" charset="0"/>
+                      </a:endParaRPr>
+                    </a:p>
+                  </a:txBody>
+                  <a:tcPr marL="25400" marR="25400" marT="25400" marB="25400">
                     <a:lnL w="6350" cap="flat" cmpd="sng" algn="ctr">
                       <a:solidFill>
                         <a:srgbClr val="E3E7F0"/>
@@ -13783,14 +14433,14 @@
       </p:graphicFrame>
       <p:sp>
         <p:nvSpPr>
-          <p:cNvPr id="26" name="Text 23"/>
+          <p:cNvPr id="25" name="Text 21"/>
           <p:cNvSpPr txBox="1"/>
           <p:nvPr/>
         </p:nvSpPr>
         <p:spPr>
           <a:xfrm>
-            <a:off x="6492240" y="4114800"/>
-            <a:ext cx="2651760" cy="237744"/>
+            <a:off x="6172200" y="4059936"/>
+            <a:ext cx="5486400" cy="219456"/>
           </a:xfrm>
           <a:prstGeom prst="rect">
             <a:avLst/>
@@ -13806,7 +14456,7 @@
               <a:buNone/>
             </a:pPr>
             <a:r>
-              <a:rPr lang="en-US" sz="1100" b="1" dirty="0">
+              <a:rPr lang="en-US" sz="1050" b="1" dirty="0">
                 <a:solidFill>
                   <a:srgbClr val="1E2761"/>
                 </a:solidFill>
@@ -13814,9 +14464,9 @@
                 <a:ea typeface="Calibri" pitchFamily="34" charset="-122"/>
                 <a:cs typeface="Calibri" pitchFamily="34" charset="-120"/>
               </a:rPr>
-              <a:t>Largest average short positions</a:t>
+              <a:t>Top 10 short positions, average weight 01/2021-08/2026</a:t>
             </a:r>
-            <a:endParaRPr lang="en-US" sz="1100" dirty="0"/>
+            <a:endParaRPr lang="en-US" sz="1050" dirty="0"/>
           </a:p>
         </p:txBody>
       </p:sp>
@@ -13835,8 +14485,8 @@
           </p:nvPr>
         </p:nvGraphicFramePr>
         <p:xfrm>
-          <a:off x="6492240" y="4389120"/>
-          <a:ext cx="5120640" cy="914400"/>
+          <a:off x="6172200" y="4297680"/>
+          <a:ext cx="5440680" cy="914400"/>
         </p:xfrm>
         <a:graphic>
           <a:graphicData uri="http://schemas.openxmlformats.org/drawingml/2006/table">
@@ -13844,10 +14494,10 @@
               <a:tblPr/>
               <a:tblGrid>
                 <a:gridCol w="777240"/>
-                <a:gridCol w="3291840"/>
-                <a:gridCol w="1051560"/>
+                <a:gridCol w="3657600"/>
+                <a:gridCol w="1005840"/>
               </a:tblGrid>
-              <a:tr h="210312">
+              <a:tr h="187452">
                 <a:tc>
                   <a:txBody>
                     <a:bodyPr/>
@@ -13857,7 +14507,7 @@
                         <a:buNone/>
                       </a:pPr>
                       <a:r>
-                        <a:rPr lang="en-US" sz="900" b="1" dirty="0">
+                        <a:rPr lang="en-US" sz="800" b="1" dirty="0">
                           <a:solidFill>
                             <a:srgbClr val="FFFFFF"/>
                           </a:solidFill>
@@ -13867,14 +14517,14 @@
                         </a:rPr>
                         <a:t>Ticker</a:t>
                       </a:r>
-                      <a:endParaRPr lang="en-US" sz="900" dirty="0">
-                        <a:latin typeface="Calibri" charset="0"/>
-                        <a:ea typeface="Calibri" charset="0"/>
-                        <a:cs typeface="Calibri" charset="0"/>
-                      </a:endParaRPr>
-                    </a:p>
-                  </a:txBody>
-                  <a:tcPr marL="50800" marR="50800" marT="50800" marB="50800">
+                      <a:endParaRPr lang="en-US" sz="800" dirty="0">
+                        <a:latin typeface="Calibri" charset="0"/>
+                        <a:ea typeface="Calibri" charset="0"/>
+                        <a:cs typeface="Calibri" charset="0"/>
+                      </a:endParaRPr>
+                    </a:p>
+                  </a:txBody>
+                  <a:tcPr marL="25400" marR="25400" marT="25400" marB="25400">
                     <a:lnL w="6350" cap="flat" cmpd="sng" algn="ctr">
                       <a:solidFill>
                         <a:srgbClr val="E3E7F0"/>
@@ -13925,7 +14575,7 @@
                         <a:buNone/>
                       </a:pPr>
                       <a:r>
-                        <a:rPr lang="en-US" sz="900" b="1" dirty="0">
+                        <a:rPr lang="en-US" sz="800" b="1" dirty="0">
                           <a:solidFill>
                             <a:srgbClr val="FFFFFF"/>
                           </a:solidFill>
@@ -13933,16 +14583,16 @@
                           <a:ea typeface="Calibri" pitchFamily="34" charset="-122"/>
                           <a:cs typeface="Calibri" pitchFamily="34" charset="-120"/>
                         </a:rPr>
-                        <a:t>Company</a:t>
-                      </a:r>
-                      <a:endParaRPr lang="en-US" sz="900" dirty="0">
-                        <a:latin typeface="Calibri" charset="0"/>
-                        <a:ea typeface="Calibri" charset="0"/>
-                        <a:cs typeface="Calibri" charset="0"/>
-                      </a:endParaRPr>
-                    </a:p>
-                  </a:txBody>
-                  <a:tcPr marL="50800" marR="50800" marT="50800" marB="50800">
+                        <a:t>Company name</a:t>
+                      </a:r>
+                      <a:endParaRPr lang="en-US" sz="800" dirty="0">
+                        <a:latin typeface="Calibri" charset="0"/>
+                        <a:ea typeface="Calibri" charset="0"/>
+                        <a:cs typeface="Calibri" charset="0"/>
+                      </a:endParaRPr>
+                    </a:p>
+                  </a:txBody>
+                  <a:tcPr marL="25400" marR="25400" marT="25400" marB="25400">
                     <a:lnL w="6350" cap="flat" cmpd="sng" algn="ctr">
                       <a:solidFill>
                         <a:srgbClr val="E3E7F0"/>
@@ -13993,7 +14643,7 @@
                         <a:buNone/>
                       </a:pPr>
                       <a:r>
-                        <a:rPr lang="en-US" sz="900" b="1" dirty="0">
+                        <a:rPr lang="en-US" sz="800" b="1" dirty="0">
                           <a:solidFill>
                             <a:srgbClr val="FFFFFF"/>
                           </a:solidFill>
@@ -14003,14 +14653,14 @@
                         </a:rPr>
                         <a:t>Avg wt</a:t>
                       </a:r>
-                      <a:endParaRPr lang="en-US" sz="900" dirty="0">
-                        <a:latin typeface="Calibri" charset="0"/>
-                        <a:ea typeface="Calibri" charset="0"/>
-                        <a:cs typeface="Calibri" charset="0"/>
-                      </a:endParaRPr>
-                    </a:p>
-                  </a:txBody>
-                  <a:tcPr marL="50800" marR="50800" marT="50800" marB="50800">
+                      <a:endParaRPr lang="en-US" sz="800" dirty="0">
+                        <a:latin typeface="Calibri" charset="0"/>
+                        <a:ea typeface="Calibri" charset="0"/>
+                        <a:cs typeface="Calibri" charset="0"/>
+                      </a:endParaRPr>
+                    </a:p>
+                  </a:txBody>
+                  <a:tcPr marL="25400" marR="25400" marT="25400" marB="25400">
                     <a:lnL w="6350" cap="flat" cmpd="sng" algn="ctr">
                       <a:solidFill>
                         <a:srgbClr val="E3E7F0"/>
@@ -14053,7 +14703,7 @@
                   </a:tcPr>
                 </a:tc>
               </a:tr>
-              <a:tr h="210312">
+              <a:tr h="187452">
                 <a:tc>
                   <a:txBody>
                     <a:bodyPr/>
@@ -14063,7 +14713,7 @@
                         <a:buNone/>
                       </a:pPr>
                       <a:r>
-                        <a:rPr lang="en-US" sz="950" dirty="0">
+                        <a:rPr lang="en-US" sz="850" dirty="0">
                           <a:solidFill>
                             <a:srgbClr val="1A1A1A"/>
                           </a:solidFill>
@@ -14073,14 +14723,14 @@
                         </a:rPr>
                         <a:t>FSLR</a:t>
                       </a:r>
-                      <a:endParaRPr lang="en-US" sz="950" dirty="0">
-                        <a:latin typeface="Calibri" charset="0"/>
-                        <a:ea typeface="Calibri" charset="0"/>
-                        <a:cs typeface="Calibri" charset="0"/>
-                      </a:endParaRPr>
-                    </a:p>
-                  </a:txBody>
-                  <a:tcPr marL="50800" marR="50800" marT="50800" marB="50800">
+                      <a:endParaRPr lang="en-US" sz="850" dirty="0">
+                        <a:latin typeface="Calibri" charset="0"/>
+                        <a:ea typeface="Calibri" charset="0"/>
+                        <a:cs typeface="Calibri" charset="0"/>
+                      </a:endParaRPr>
+                    </a:p>
+                  </a:txBody>
+                  <a:tcPr marL="25400" marR="25400" marT="25400" marB="25400">
                     <a:lnL w="6350" cap="flat" cmpd="sng" algn="ctr">
                       <a:solidFill>
                         <a:srgbClr val="E3E7F0"/>
@@ -14128,7 +14778,7 @@
                         <a:buNone/>
                       </a:pPr>
                       <a:r>
-                        <a:rPr lang="en-US" sz="950" dirty="0">
+                        <a:rPr lang="en-US" sz="850" dirty="0">
                           <a:solidFill>
                             <a:srgbClr val="1A1A1A"/>
                           </a:solidFill>
@@ -14136,16 +14786,16 @@
                           <a:ea typeface="Calibri" pitchFamily="34" charset="-122"/>
                           <a:cs typeface="Calibri" pitchFamily="34" charset="-120"/>
                         </a:rPr>
-                        <a:t>FIRST SOLAR INC</a:t>
-                      </a:r>
-                      <a:endParaRPr lang="en-US" sz="950" dirty="0">
-                        <a:latin typeface="Calibri" charset="0"/>
-                        <a:ea typeface="Calibri" charset="0"/>
-                        <a:cs typeface="Calibri" charset="0"/>
-                      </a:endParaRPr>
-                    </a:p>
-                  </a:txBody>
-                  <a:tcPr marL="50800" marR="50800" marT="50800" marB="50800">
+                        <a:t>First Solar Inc</a:t>
+                      </a:r>
+                      <a:endParaRPr lang="en-US" sz="850" dirty="0">
+                        <a:latin typeface="Calibri" charset="0"/>
+                        <a:ea typeface="Calibri" charset="0"/>
+                        <a:cs typeface="Calibri" charset="0"/>
+                      </a:endParaRPr>
+                    </a:p>
+                  </a:txBody>
+                  <a:tcPr marL="25400" marR="25400" marT="25400" marB="25400">
                     <a:lnL w="6350" cap="flat" cmpd="sng" algn="ctr">
                       <a:solidFill>
                         <a:srgbClr val="E3E7F0"/>
@@ -14193,7 +14843,7 @@
                         <a:buNone/>
                       </a:pPr>
                       <a:r>
-                        <a:rPr lang="en-US" sz="950" dirty="0">
+                        <a:rPr lang="en-US" sz="850" dirty="0">
                           <a:solidFill>
                             <a:srgbClr val="1A1A1A"/>
                           </a:solidFill>
@@ -14203,14 +14853,14 @@
                         </a:rPr>
                         <a:t>-0.73%</a:t>
                       </a:r>
-                      <a:endParaRPr lang="en-US" sz="950" dirty="0">
-                        <a:latin typeface="Calibri" charset="0"/>
-                        <a:ea typeface="Calibri" charset="0"/>
-                        <a:cs typeface="Calibri" charset="0"/>
-                      </a:endParaRPr>
-                    </a:p>
-                  </a:txBody>
-                  <a:tcPr marL="50800" marR="50800" marT="50800" marB="50800">
+                      <a:endParaRPr lang="en-US" sz="850" dirty="0">
+                        <a:latin typeface="Calibri" charset="0"/>
+                        <a:ea typeface="Calibri" charset="0"/>
+                        <a:cs typeface="Calibri" charset="0"/>
+                      </a:endParaRPr>
+                    </a:p>
+                  </a:txBody>
+                  <a:tcPr marL="25400" marR="25400" marT="25400" marB="25400">
                     <a:lnL w="6350" cap="flat" cmpd="sng" algn="ctr">
                       <a:solidFill>
                         <a:srgbClr val="E3E7F0"/>
@@ -14250,7 +14900,7 @@
                   </a:tcPr>
                 </a:tc>
               </a:tr>
-              <a:tr h="210312">
+              <a:tr h="187452">
                 <a:tc>
                   <a:txBody>
                     <a:bodyPr/>
@@ -14260,7 +14910,7 @@
                         <a:buNone/>
                       </a:pPr>
                       <a:r>
-                        <a:rPr lang="en-US" sz="950" dirty="0">
+                        <a:rPr lang="en-US" sz="850" dirty="0">
                           <a:solidFill>
                             <a:srgbClr val="1A1A1A"/>
                           </a:solidFill>
@@ -14270,14 +14920,14 @@
                         </a:rPr>
                         <a:t>DAL</a:t>
                       </a:r>
-                      <a:endParaRPr lang="en-US" sz="950" dirty="0">
-                        <a:latin typeface="Calibri" charset="0"/>
-                        <a:ea typeface="Calibri" charset="0"/>
-                        <a:cs typeface="Calibri" charset="0"/>
-                      </a:endParaRPr>
-                    </a:p>
-                  </a:txBody>
-                  <a:tcPr marL="50800" marR="50800" marT="50800" marB="50800">
+                      <a:endParaRPr lang="en-US" sz="850" dirty="0">
+                        <a:latin typeface="Calibri" charset="0"/>
+                        <a:ea typeface="Calibri" charset="0"/>
+                        <a:cs typeface="Calibri" charset="0"/>
+                      </a:endParaRPr>
+                    </a:p>
+                  </a:txBody>
+                  <a:tcPr marL="25400" marR="25400" marT="25400" marB="25400">
                     <a:lnL w="6350" cap="flat" cmpd="sng" algn="ctr">
                       <a:solidFill>
                         <a:srgbClr val="E3E7F0"/>
@@ -14325,7 +14975,7 @@
                         <a:buNone/>
                       </a:pPr>
                       <a:r>
-                        <a:rPr lang="en-US" sz="950" dirty="0">
+                        <a:rPr lang="en-US" sz="850" dirty="0">
                           <a:solidFill>
                             <a:srgbClr val="1A1A1A"/>
                           </a:solidFill>
@@ -14333,16 +14983,16 @@
                           <a:ea typeface="Calibri" pitchFamily="34" charset="-122"/>
                           <a:cs typeface="Calibri" pitchFamily="34" charset="-120"/>
                         </a:rPr>
-                        <a:t>DELTA AIR LINES INC</a:t>
-                      </a:r>
-                      <a:endParaRPr lang="en-US" sz="950" dirty="0">
-                        <a:latin typeface="Calibri" charset="0"/>
-                        <a:ea typeface="Calibri" charset="0"/>
-                        <a:cs typeface="Calibri" charset="0"/>
-                      </a:endParaRPr>
-                    </a:p>
-                  </a:txBody>
-                  <a:tcPr marL="50800" marR="50800" marT="50800" marB="50800">
+                        <a:t>Delta Air Lines Inc</a:t>
+                      </a:r>
+                      <a:endParaRPr lang="en-US" sz="850" dirty="0">
+                        <a:latin typeface="Calibri" charset="0"/>
+                        <a:ea typeface="Calibri" charset="0"/>
+                        <a:cs typeface="Calibri" charset="0"/>
+                      </a:endParaRPr>
+                    </a:p>
+                  </a:txBody>
+                  <a:tcPr marL="25400" marR="25400" marT="25400" marB="25400">
                     <a:lnL w="6350" cap="flat" cmpd="sng" algn="ctr">
                       <a:solidFill>
                         <a:srgbClr val="E3E7F0"/>
@@ -14390,7 +15040,7 @@
                         <a:buNone/>
                       </a:pPr>
                       <a:r>
-                        <a:rPr lang="en-US" sz="950" dirty="0">
+                        <a:rPr lang="en-US" sz="850" dirty="0">
                           <a:solidFill>
                             <a:srgbClr val="1A1A1A"/>
                           </a:solidFill>
@@ -14400,14 +15050,14 @@
                         </a:rPr>
                         <a:t>-0.72%</a:t>
                       </a:r>
-                      <a:endParaRPr lang="en-US" sz="950" dirty="0">
-                        <a:latin typeface="Calibri" charset="0"/>
-                        <a:ea typeface="Calibri" charset="0"/>
-                        <a:cs typeface="Calibri" charset="0"/>
-                      </a:endParaRPr>
-                    </a:p>
-                  </a:txBody>
-                  <a:tcPr marL="50800" marR="50800" marT="50800" marB="50800">
+                      <a:endParaRPr lang="en-US" sz="850" dirty="0">
+                        <a:latin typeface="Calibri" charset="0"/>
+                        <a:ea typeface="Calibri" charset="0"/>
+                        <a:cs typeface="Calibri" charset="0"/>
+                      </a:endParaRPr>
+                    </a:p>
+                  </a:txBody>
+                  <a:tcPr marL="25400" marR="25400" marT="25400" marB="25400">
                     <a:lnL w="6350" cap="flat" cmpd="sng" algn="ctr">
                       <a:solidFill>
                         <a:srgbClr val="E3E7F0"/>
@@ -14447,7 +15097,7 @@
                   </a:tcPr>
                 </a:tc>
               </a:tr>
-              <a:tr h="210312">
+              <a:tr h="187452">
                 <a:tc>
                   <a:txBody>
                     <a:bodyPr/>
@@ -14457,7 +15107,7 @@
                         <a:buNone/>
                       </a:pPr>
                       <a:r>
-                        <a:rPr lang="en-US" sz="950" dirty="0">
+                        <a:rPr lang="en-US" sz="850" dirty="0">
                           <a:solidFill>
                             <a:srgbClr val="1A1A1A"/>
                           </a:solidFill>
@@ -14467,14 +15117,14 @@
                         </a:rPr>
                         <a:t>LVS</a:t>
                       </a:r>
-                      <a:endParaRPr lang="en-US" sz="950" dirty="0">
-                        <a:latin typeface="Calibri" charset="0"/>
-                        <a:ea typeface="Calibri" charset="0"/>
-                        <a:cs typeface="Calibri" charset="0"/>
-                      </a:endParaRPr>
-                    </a:p>
-                  </a:txBody>
-                  <a:tcPr marL="50800" marR="50800" marT="50800" marB="50800">
+                      <a:endParaRPr lang="en-US" sz="850" dirty="0">
+                        <a:latin typeface="Calibri" charset="0"/>
+                        <a:ea typeface="Calibri" charset="0"/>
+                        <a:cs typeface="Calibri" charset="0"/>
+                      </a:endParaRPr>
+                    </a:p>
+                  </a:txBody>
+                  <a:tcPr marL="25400" marR="25400" marT="25400" marB="25400">
                     <a:lnL w="6350" cap="flat" cmpd="sng" algn="ctr">
                       <a:solidFill>
                         <a:srgbClr val="E3E7F0"/>
@@ -14522,7 +15172,7 @@
                         <a:buNone/>
                       </a:pPr>
                       <a:r>
-                        <a:rPr lang="en-US" sz="950" dirty="0">
+                        <a:rPr lang="en-US" sz="850" dirty="0">
                           <a:solidFill>
                             <a:srgbClr val="1A1A1A"/>
                           </a:solidFill>
@@ -14530,16 +15180,16 @@
                           <a:ea typeface="Calibri" pitchFamily="34" charset="-122"/>
                           <a:cs typeface="Calibri" pitchFamily="34" charset="-120"/>
                         </a:rPr>
-                        <a:t>LAS VEGAS SANDS CORP</a:t>
-                      </a:r>
-                      <a:endParaRPr lang="en-US" sz="950" dirty="0">
-                        <a:latin typeface="Calibri" charset="0"/>
-                        <a:ea typeface="Calibri" charset="0"/>
-                        <a:cs typeface="Calibri" charset="0"/>
-                      </a:endParaRPr>
-                    </a:p>
-                  </a:txBody>
-                  <a:tcPr marL="50800" marR="50800" marT="50800" marB="50800">
+                        <a:t>Las Vegas Sands Corp</a:t>
+                      </a:r>
+                      <a:endParaRPr lang="en-US" sz="850" dirty="0">
+                        <a:latin typeface="Calibri" charset="0"/>
+                        <a:ea typeface="Calibri" charset="0"/>
+                        <a:cs typeface="Calibri" charset="0"/>
+                      </a:endParaRPr>
+                    </a:p>
+                  </a:txBody>
+                  <a:tcPr marL="25400" marR="25400" marT="25400" marB="25400">
                     <a:lnL w="6350" cap="flat" cmpd="sng" algn="ctr">
                       <a:solidFill>
                         <a:srgbClr val="E3E7F0"/>
@@ -14587,7 +15237,7 @@
                         <a:buNone/>
                       </a:pPr>
                       <a:r>
-                        <a:rPr lang="en-US" sz="950" dirty="0">
+                        <a:rPr lang="en-US" sz="850" dirty="0">
                           <a:solidFill>
                             <a:srgbClr val="1A1A1A"/>
                           </a:solidFill>
@@ -14597,14 +15247,14 @@
                         </a:rPr>
                         <a:t>-0.68%</a:t>
                       </a:r>
-                      <a:endParaRPr lang="en-US" sz="950" dirty="0">
-                        <a:latin typeface="Calibri" charset="0"/>
-                        <a:ea typeface="Calibri" charset="0"/>
-                        <a:cs typeface="Calibri" charset="0"/>
-                      </a:endParaRPr>
-                    </a:p>
-                  </a:txBody>
-                  <a:tcPr marL="50800" marR="50800" marT="50800" marB="50800">
+                      <a:endParaRPr lang="en-US" sz="850" dirty="0">
+                        <a:latin typeface="Calibri" charset="0"/>
+                        <a:ea typeface="Calibri" charset="0"/>
+                        <a:cs typeface="Calibri" charset="0"/>
+                      </a:endParaRPr>
+                    </a:p>
+                  </a:txBody>
+                  <a:tcPr marL="25400" marR="25400" marT="25400" marB="25400">
                     <a:lnL w="6350" cap="flat" cmpd="sng" algn="ctr">
                       <a:solidFill>
                         <a:srgbClr val="E3E7F0"/>
@@ -14644,7 +15294,7 @@
                   </a:tcPr>
                 </a:tc>
               </a:tr>
-              <a:tr h="210312">
+              <a:tr h="187452">
                 <a:tc>
                   <a:txBody>
                     <a:bodyPr/>
@@ -14654,7 +15304,7 @@
                         <a:buNone/>
                       </a:pPr>
                       <a:r>
-                        <a:rPr lang="en-US" sz="950" dirty="0">
+                        <a:rPr lang="en-US" sz="850" dirty="0">
                           <a:solidFill>
                             <a:srgbClr val="1A1A1A"/>
                           </a:solidFill>
@@ -14664,14 +15314,14 @@
                         </a:rPr>
                         <a:t>UAL</a:t>
                       </a:r>
-                      <a:endParaRPr lang="en-US" sz="950" dirty="0">
-                        <a:latin typeface="Calibri" charset="0"/>
-                        <a:ea typeface="Calibri" charset="0"/>
-                        <a:cs typeface="Calibri" charset="0"/>
-                      </a:endParaRPr>
-                    </a:p>
-                  </a:txBody>
-                  <a:tcPr marL="50800" marR="50800" marT="50800" marB="50800">
+                      <a:endParaRPr lang="en-US" sz="850" dirty="0">
+                        <a:latin typeface="Calibri" charset="0"/>
+                        <a:ea typeface="Calibri" charset="0"/>
+                        <a:cs typeface="Calibri" charset="0"/>
+                      </a:endParaRPr>
+                    </a:p>
+                  </a:txBody>
+                  <a:tcPr marL="25400" marR="25400" marT="25400" marB="25400">
                     <a:lnL w="6350" cap="flat" cmpd="sng" algn="ctr">
                       <a:solidFill>
                         <a:srgbClr val="E3E7F0"/>
@@ -14719,7 +15369,7 @@
                         <a:buNone/>
                       </a:pPr>
                       <a:r>
-                        <a:rPr lang="en-US" sz="950" dirty="0">
+                        <a:rPr lang="en-US" sz="850" dirty="0">
                           <a:solidFill>
                             <a:srgbClr val="1A1A1A"/>
                           </a:solidFill>
@@ -14727,16 +15377,16 @@
                           <a:ea typeface="Calibri" pitchFamily="34" charset="-122"/>
                           <a:cs typeface="Calibri" pitchFamily="34" charset="-120"/>
                         </a:rPr>
-                        <a:t>UNITED AIRLINES HOLDINGS I</a:t>
-                      </a:r>
-                      <a:endParaRPr lang="en-US" sz="950" dirty="0">
-                        <a:latin typeface="Calibri" charset="0"/>
-                        <a:ea typeface="Calibri" charset="0"/>
-                        <a:cs typeface="Calibri" charset="0"/>
-                      </a:endParaRPr>
-                    </a:p>
-                  </a:txBody>
-                  <a:tcPr marL="50800" marR="50800" marT="50800" marB="50800">
+                        <a:t>United Airlines Holdings Inc</a:t>
+                      </a:r>
+                      <a:endParaRPr lang="en-US" sz="850" dirty="0">
+                        <a:latin typeface="Calibri" charset="0"/>
+                        <a:ea typeface="Calibri" charset="0"/>
+                        <a:cs typeface="Calibri" charset="0"/>
+                      </a:endParaRPr>
+                    </a:p>
+                  </a:txBody>
+                  <a:tcPr marL="25400" marR="25400" marT="25400" marB="25400">
                     <a:lnL w="6350" cap="flat" cmpd="sng" algn="ctr">
                       <a:solidFill>
                         <a:srgbClr val="E3E7F0"/>
@@ -14784,7 +15434,7 @@
                         <a:buNone/>
                       </a:pPr>
                       <a:r>
-                        <a:rPr lang="en-US" sz="950" dirty="0">
+                        <a:rPr lang="en-US" sz="850" dirty="0">
                           <a:solidFill>
                             <a:srgbClr val="1A1A1A"/>
                           </a:solidFill>
@@ -14794,14 +15444,14 @@
                         </a:rPr>
                         <a:t>-0.60%</a:t>
                       </a:r>
-                      <a:endParaRPr lang="en-US" sz="950" dirty="0">
-                        <a:latin typeface="Calibri" charset="0"/>
-                        <a:ea typeface="Calibri" charset="0"/>
-                        <a:cs typeface="Calibri" charset="0"/>
-                      </a:endParaRPr>
-                    </a:p>
-                  </a:txBody>
-                  <a:tcPr marL="50800" marR="50800" marT="50800" marB="50800">
+                      <a:endParaRPr lang="en-US" sz="850" dirty="0">
+                        <a:latin typeface="Calibri" charset="0"/>
+                        <a:ea typeface="Calibri" charset="0"/>
+                        <a:cs typeface="Calibri" charset="0"/>
+                      </a:endParaRPr>
+                    </a:p>
+                  </a:txBody>
+                  <a:tcPr marL="25400" marR="25400" marT="25400" marB="25400">
                     <a:lnL w="6350" cap="flat" cmpd="sng" algn="ctr">
                       <a:solidFill>
                         <a:srgbClr val="E3E7F0"/>
@@ -14841,7 +15491,7 @@
                   </a:tcPr>
                 </a:tc>
               </a:tr>
-              <a:tr h="210312">
+              <a:tr h="187452">
                 <a:tc>
                   <a:txBody>
                     <a:bodyPr/>
@@ -14851,7 +15501,7 @@
                         <a:buNone/>
                       </a:pPr>
                       <a:r>
-                        <a:rPr lang="en-US" sz="950" dirty="0">
+                        <a:rPr lang="en-US" sz="850" dirty="0">
                           <a:solidFill>
                             <a:srgbClr val="1A1A1A"/>
                           </a:solidFill>
@@ -14861,14 +15511,14 @@
                         </a:rPr>
                         <a:t>SWCH</a:t>
                       </a:r>
-                      <a:endParaRPr lang="en-US" sz="950" dirty="0">
-                        <a:latin typeface="Calibri" charset="0"/>
-                        <a:ea typeface="Calibri" charset="0"/>
-                        <a:cs typeface="Calibri" charset="0"/>
-                      </a:endParaRPr>
-                    </a:p>
-                  </a:txBody>
-                  <a:tcPr marL="50800" marR="50800" marT="50800" marB="50800">
+                      <a:endParaRPr lang="en-US" sz="850" dirty="0">
+                        <a:latin typeface="Calibri" charset="0"/>
+                        <a:ea typeface="Calibri" charset="0"/>
+                        <a:cs typeface="Calibri" charset="0"/>
+                      </a:endParaRPr>
+                    </a:p>
+                  </a:txBody>
+                  <a:tcPr marL="25400" marR="25400" marT="25400" marB="25400">
                     <a:lnL w="6350" cap="flat" cmpd="sng" algn="ctr">
                       <a:solidFill>
                         <a:srgbClr val="E3E7F0"/>
@@ -14916,7 +15566,7 @@
                         <a:buNone/>
                       </a:pPr>
                       <a:r>
-                        <a:rPr lang="en-US" sz="950" dirty="0">
+                        <a:rPr lang="en-US" sz="850" dirty="0">
                           <a:solidFill>
                             <a:srgbClr val="1A1A1A"/>
                           </a:solidFill>
@@ -14924,16 +15574,16 @@
                           <a:ea typeface="Calibri" pitchFamily="34" charset="-122"/>
                           <a:cs typeface="Calibri" pitchFamily="34" charset="-120"/>
                         </a:rPr>
-                        <a:t>SWITCH INC</a:t>
-                      </a:r>
-                      <a:endParaRPr lang="en-US" sz="950" dirty="0">
-                        <a:latin typeface="Calibri" charset="0"/>
-                        <a:ea typeface="Calibri" charset="0"/>
-                        <a:cs typeface="Calibri" charset="0"/>
-                      </a:endParaRPr>
-                    </a:p>
-                  </a:txBody>
-                  <a:tcPr marL="50800" marR="50800" marT="50800" marB="50800">
+                        <a:t>Switch Inc</a:t>
+                      </a:r>
+                      <a:endParaRPr lang="en-US" sz="850" dirty="0">
+                        <a:latin typeface="Calibri" charset="0"/>
+                        <a:ea typeface="Calibri" charset="0"/>
+                        <a:cs typeface="Calibri" charset="0"/>
+                      </a:endParaRPr>
+                    </a:p>
+                  </a:txBody>
+                  <a:tcPr marL="25400" marR="25400" marT="25400" marB="25400">
                     <a:lnL w="6350" cap="flat" cmpd="sng" algn="ctr">
                       <a:solidFill>
                         <a:srgbClr val="E3E7F0"/>
@@ -14981,7 +15631,7 @@
                         <a:buNone/>
                       </a:pPr>
                       <a:r>
-                        <a:rPr lang="en-US" sz="950" dirty="0">
+                        <a:rPr lang="en-US" sz="850" dirty="0">
                           <a:solidFill>
                             <a:srgbClr val="1A1A1A"/>
                           </a:solidFill>
@@ -14991,14 +15641,14 @@
                         </a:rPr>
                         <a:t>-0.58%</a:t>
                       </a:r>
-                      <a:endParaRPr lang="en-US" sz="950" dirty="0">
-                        <a:latin typeface="Calibri" charset="0"/>
-                        <a:ea typeface="Calibri" charset="0"/>
-                        <a:cs typeface="Calibri" charset="0"/>
-                      </a:endParaRPr>
-                    </a:p>
-                  </a:txBody>
-                  <a:tcPr marL="50800" marR="50800" marT="50800" marB="50800">
+                      <a:endParaRPr lang="en-US" sz="850" dirty="0">
+                        <a:latin typeface="Calibri" charset="0"/>
+                        <a:ea typeface="Calibri" charset="0"/>
+                        <a:cs typeface="Calibri" charset="0"/>
+                      </a:endParaRPr>
+                    </a:p>
+                  </a:txBody>
+                  <a:tcPr marL="25400" marR="25400" marT="25400" marB="25400">
                     <a:lnL w="6350" cap="flat" cmpd="sng" algn="ctr">
                       <a:solidFill>
                         <a:srgbClr val="E3E7F0"/>
@@ -15038,7 +15688,7 @@
                   </a:tcPr>
                 </a:tc>
               </a:tr>
-              <a:tr h="210312">
+              <a:tr h="187452">
                 <a:tc>
                   <a:txBody>
                     <a:bodyPr/>
@@ -15048,7 +15698,7 @@
                         <a:buNone/>
                       </a:pPr>
                       <a:r>
-                        <a:rPr lang="en-US" sz="950" dirty="0">
+                        <a:rPr lang="en-US" sz="850" dirty="0">
                           <a:solidFill>
                             <a:srgbClr val="1A1A1A"/>
                           </a:solidFill>
@@ -15058,14 +15708,14 @@
                         </a:rPr>
                         <a:t>VIRT</a:t>
                       </a:r>
-                      <a:endParaRPr lang="en-US" sz="950" dirty="0">
-                        <a:latin typeface="Calibri" charset="0"/>
-                        <a:ea typeface="Calibri" charset="0"/>
-                        <a:cs typeface="Calibri" charset="0"/>
-                      </a:endParaRPr>
-                    </a:p>
-                  </a:txBody>
-                  <a:tcPr marL="50800" marR="50800" marT="50800" marB="50800">
+                      <a:endParaRPr lang="en-US" sz="850" dirty="0">
+                        <a:latin typeface="Calibri" charset="0"/>
+                        <a:ea typeface="Calibri" charset="0"/>
+                        <a:cs typeface="Calibri" charset="0"/>
+                      </a:endParaRPr>
+                    </a:p>
+                  </a:txBody>
+                  <a:tcPr marL="25400" marR="25400" marT="25400" marB="25400">
                     <a:lnL w="6350" cap="flat" cmpd="sng" algn="ctr">
                       <a:solidFill>
                         <a:srgbClr val="E3E7F0"/>
@@ -15113,7 +15763,7 @@
                         <a:buNone/>
                       </a:pPr>
                       <a:r>
-                        <a:rPr lang="en-US" sz="950" dirty="0">
+                        <a:rPr lang="en-US" sz="850" dirty="0">
                           <a:solidFill>
                             <a:srgbClr val="1A1A1A"/>
                           </a:solidFill>
@@ -15121,16 +15771,16 @@
                           <a:ea typeface="Calibri" pitchFamily="34" charset="-122"/>
                           <a:cs typeface="Calibri" pitchFamily="34" charset="-120"/>
                         </a:rPr>
-                        <a:t>VIRTU FINANCIAL INC</a:t>
-                      </a:r>
-                      <a:endParaRPr lang="en-US" sz="950" dirty="0">
-                        <a:latin typeface="Calibri" charset="0"/>
-                        <a:ea typeface="Calibri" charset="0"/>
-                        <a:cs typeface="Calibri" charset="0"/>
-                      </a:endParaRPr>
-                    </a:p>
-                  </a:txBody>
-                  <a:tcPr marL="50800" marR="50800" marT="50800" marB="50800">
+                        <a:t>Virtu Financial Inc</a:t>
+                      </a:r>
+                      <a:endParaRPr lang="en-US" sz="850" dirty="0">
+                        <a:latin typeface="Calibri" charset="0"/>
+                        <a:ea typeface="Calibri" charset="0"/>
+                        <a:cs typeface="Calibri" charset="0"/>
+                      </a:endParaRPr>
+                    </a:p>
+                  </a:txBody>
+                  <a:tcPr marL="25400" marR="25400" marT="25400" marB="25400">
                     <a:lnL w="6350" cap="flat" cmpd="sng" algn="ctr">
                       <a:solidFill>
                         <a:srgbClr val="E3E7F0"/>
@@ -15178,7 +15828,7 @@
                         <a:buNone/>
                       </a:pPr>
                       <a:r>
-                        <a:rPr lang="en-US" sz="950" dirty="0">
+                        <a:rPr lang="en-US" sz="850" dirty="0">
                           <a:solidFill>
                             <a:srgbClr val="1A1A1A"/>
                           </a:solidFill>
@@ -15188,14 +15838,14 @@
                         </a:rPr>
                         <a:t>-0.58%</a:t>
                       </a:r>
-                      <a:endParaRPr lang="en-US" sz="950" dirty="0">
-                        <a:latin typeface="Calibri" charset="0"/>
-                        <a:ea typeface="Calibri" charset="0"/>
-                        <a:cs typeface="Calibri" charset="0"/>
-                      </a:endParaRPr>
-                    </a:p>
-                  </a:txBody>
-                  <a:tcPr marL="50800" marR="50800" marT="50800" marB="50800">
+                      <a:endParaRPr lang="en-US" sz="850" dirty="0">
+                        <a:latin typeface="Calibri" charset="0"/>
+                        <a:ea typeface="Calibri" charset="0"/>
+                        <a:cs typeface="Calibri" charset="0"/>
+                      </a:endParaRPr>
+                    </a:p>
+                  </a:txBody>
+                  <a:tcPr marL="25400" marR="25400" marT="25400" marB="25400">
                     <a:lnL w="6350" cap="flat" cmpd="sng" algn="ctr">
                       <a:solidFill>
                         <a:srgbClr val="E3E7F0"/>
@@ -15235,7 +15885,7 @@
                   </a:tcPr>
                 </a:tc>
               </a:tr>
-              <a:tr h="210312">
+              <a:tr h="187452">
                 <a:tc>
                   <a:txBody>
                     <a:bodyPr/>
@@ -15245,7 +15895,7 @@
                         <a:buNone/>
                       </a:pPr>
                       <a:r>
-                        <a:rPr lang="en-US" sz="950" dirty="0">
+                        <a:rPr lang="en-US" sz="850" dirty="0">
                           <a:solidFill>
                             <a:srgbClr val="1A1A1A"/>
                           </a:solidFill>
@@ -15255,14 +15905,14 @@
                         </a:rPr>
                         <a:t>PCG</a:t>
                       </a:r>
-                      <a:endParaRPr lang="en-US" sz="950" dirty="0">
-                        <a:latin typeface="Calibri" charset="0"/>
-                        <a:ea typeface="Calibri" charset="0"/>
-                        <a:cs typeface="Calibri" charset="0"/>
-                      </a:endParaRPr>
-                    </a:p>
-                  </a:txBody>
-                  <a:tcPr marL="50800" marR="50800" marT="50800" marB="50800">
+                      <a:endParaRPr lang="en-US" sz="850" dirty="0">
+                        <a:latin typeface="Calibri" charset="0"/>
+                        <a:ea typeface="Calibri" charset="0"/>
+                        <a:cs typeface="Calibri" charset="0"/>
+                      </a:endParaRPr>
+                    </a:p>
+                  </a:txBody>
+                  <a:tcPr marL="25400" marR="25400" marT="25400" marB="25400">
                     <a:lnL w="6350" cap="flat" cmpd="sng" algn="ctr">
                       <a:solidFill>
                         <a:srgbClr val="E3E7F0"/>
@@ -15310,7 +15960,7 @@
                         <a:buNone/>
                       </a:pPr>
                       <a:r>
-                        <a:rPr lang="en-US" sz="950" dirty="0">
+                        <a:rPr lang="en-US" sz="850" dirty="0">
                           <a:solidFill>
                             <a:srgbClr val="1A1A1A"/>
                           </a:solidFill>
@@ -15318,16 +15968,16 @@
                           <a:ea typeface="Calibri" pitchFamily="34" charset="-122"/>
                           <a:cs typeface="Calibri" pitchFamily="34" charset="-120"/>
                         </a:rPr>
-                        <a:t>P G &amp; E CORP</a:t>
-                      </a:r>
-                      <a:endParaRPr lang="en-US" sz="950" dirty="0">
-                        <a:latin typeface="Calibri" charset="0"/>
-                        <a:ea typeface="Calibri" charset="0"/>
-                        <a:cs typeface="Calibri" charset="0"/>
-                      </a:endParaRPr>
-                    </a:p>
-                  </a:txBody>
-                  <a:tcPr marL="50800" marR="50800" marT="50800" marB="50800">
+                        <a:t>PG&amp;E Corp</a:t>
+                      </a:r>
+                      <a:endParaRPr lang="en-US" sz="850" dirty="0">
+                        <a:latin typeface="Calibri" charset="0"/>
+                        <a:ea typeface="Calibri" charset="0"/>
+                        <a:cs typeface="Calibri" charset="0"/>
+                      </a:endParaRPr>
+                    </a:p>
+                  </a:txBody>
+                  <a:tcPr marL="25400" marR="25400" marT="25400" marB="25400">
                     <a:lnL w="6350" cap="flat" cmpd="sng" algn="ctr">
                       <a:solidFill>
                         <a:srgbClr val="E3E7F0"/>
@@ -15375,7 +16025,7 @@
                         <a:buNone/>
                       </a:pPr>
                       <a:r>
-                        <a:rPr lang="en-US" sz="950" dirty="0">
+                        <a:rPr lang="en-US" sz="850" dirty="0">
                           <a:solidFill>
                             <a:srgbClr val="1A1A1A"/>
                           </a:solidFill>
@@ -15385,14 +16035,14 @@
                         </a:rPr>
                         <a:t>-0.57%</a:t>
                       </a:r>
-                      <a:endParaRPr lang="en-US" sz="950" dirty="0">
-                        <a:latin typeface="Calibri" charset="0"/>
-                        <a:ea typeface="Calibri" charset="0"/>
-                        <a:cs typeface="Calibri" charset="0"/>
-                      </a:endParaRPr>
-                    </a:p>
-                  </a:txBody>
-                  <a:tcPr marL="50800" marR="50800" marT="50800" marB="50800">
+                      <a:endParaRPr lang="en-US" sz="850" dirty="0">
+                        <a:latin typeface="Calibri" charset="0"/>
+                        <a:ea typeface="Calibri" charset="0"/>
+                        <a:cs typeface="Calibri" charset="0"/>
+                      </a:endParaRPr>
+                    </a:p>
+                  </a:txBody>
+                  <a:tcPr marL="25400" marR="25400" marT="25400" marB="25400">
                     <a:lnL w="6350" cap="flat" cmpd="sng" algn="ctr">
                       <a:solidFill>
                         <a:srgbClr val="E3E7F0"/>
@@ -15432,7 +16082,7 @@
                   </a:tcPr>
                 </a:tc>
               </a:tr>
-              <a:tr h="210312">
+              <a:tr h="187452">
                 <a:tc>
                   <a:txBody>
                     <a:bodyPr/>
@@ -15442,7 +16092,7 @@
                         <a:buNone/>
                       </a:pPr>
                       <a:r>
-                        <a:rPr lang="en-US" sz="950" dirty="0">
+                        <a:rPr lang="en-US" sz="850" dirty="0">
                           <a:solidFill>
                             <a:srgbClr val="1A1A1A"/>
                           </a:solidFill>
@@ -15452,14 +16102,14 @@
                         </a:rPr>
                         <a:t>AAL</a:t>
                       </a:r>
-                      <a:endParaRPr lang="en-US" sz="950" dirty="0">
-                        <a:latin typeface="Calibri" charset="0"/>
-                        <a:ea typeface="Calibri" charset="0"/>
-                        <a:cs typeface="Calibri" charset="0"/>
-                      </a:endParaRPr>
-                    </a:p>
-                  </a:txBody>
-                  <a:tcPr marL="50800" marR="50800" marT="50800" marB="50800">
+                      <a:endParaRPr lang="en-US" sz="850" dirty="0">
+                        <a:latin typeface="Calibri" charset="0"/>
+                        <a:ea typeface="Calibri" charset="0"/>
+                        <a:cs typeface="Calibri" charset="0"/>
+                      </a:endParaRPr>
+                    </a:p>
+                  </a:txBody>
+                  <a:tcPr marL="25400" marR="25400" marT="25400" marB="25400">
                     <a:lnL w="6350" cap="flat" cmpd="sng" algn="ctr">
                       <a:solidFill>
                         <a:srgbClr val="E3E7F0"/>
@@ -15507,7 +16157,7 @@
                         <a:buNone/>
                       </a:pPr>
                       <a:r>
-                        <a:rPr lang="en-US" sz="950" dirty="0">
+                        <a:rPr lang="en-US" sz="850" dirty="0">
                           <a:solidFill>
                             <a:srgbClr val="1A1A1A"/>
                           </a:solidFill>
@@ -15515,16 +16165,16 @@
                           <a:ea typeface="Calibri" pitchFamily="34" charset="-122"/>
                           <a:cs typeface="Calibri" pitchFamily="34" charset="-120"/>
                         </a:rPr>
-                        <a:t>AMERICAN AIRLINES GROUP IN</a:t>
-                      </a:r>
-                      <a:endParaRPr lang="en-US" sz="950" dirty="0">
-                        <a:latin typeface="Calibri" charset="0"/>
-                        <a:ea typeface="Calibri" charset="0"/>
-                        <a:cs typeface="Calibri" charset="0"/>
-                      </a:endParaRPr>
-                    </a:p>
-                  </a:txBody>
-                  <a:tcPr marL="50800" marR="50800" marT="50800" marB="50800">
+                        <a:t>American Airlines Group Inc</a:t>
+                      </a:r>
+                      <a:endParaRPr lang="en-US" sz="850" dirty="0">
+                        <a:latin typeface="Calibri" charset="0"/>
+                        <a:ea typeface="Calibri" charset="0"/>
+                        <a:cs typeface="Calibri" charset="0"/>
+                      </a:endParaRPr>
+                    </a:p>
+                  </a:txBody>
+                  <a:tcPr marL="25400" marR="25400" marT="25400" marB="25400">
                     <a:lnL w="6350" cap="flat" cmpd="sng" algn="ctr">
                       <a:solidFill>
                         <a:srgbClr val="E3E7F0"/>
@@ -15572,7 +16222,7 @@
                         <a:buNone/>
                       </a:pPr>
                       <a:r>
-                        <a:rPr lang="en-US" sz="950" dirty="0">
+                        <a:rPr lang="en-US" sz="850" dirty="0">
                           <a:solidFill>
                             <a:srgbClr val="1A1A1A"/>
                           </a:solidFill>
@@ -15582,14 +16232,408 @@
                         </a:rPr>
                         <a:t>-0.55%</a:t>
                       </a:r>
-                      <a:endParaRPr lang="en-US" sz="950" dirty="0">
-                        <a:latin typeface="Calibri" charset="0"/>
-                        <a:ea typeface="Calibri" charset="0"/>
-                        <a:cs typeface="Calibri" charset="0"/>
-                      </a:endParaRPr>
-                    </a:p>
-                  </a:txBody>
-                  <a:tcPr marL="50800" marR="50800" marT="50800" marB="50800">
+                      <a:endParaRPr lang="en-US" sz="850" dirty="0">
+                        <a:latin typeface="Calibri" charset="0"/>
+                        <a:ea typeface="Calibri" charset="0"/>
+                        <a:cs typeface="Calibri" charset="0"/>
+                      </a:endParaRPr>
+                    </a:p>
+                  </a:txBody>
+                  <a:tcPr marL="25400" marR="25400" marT="25400" marB="25400">
+                    <a:lnL w="6350" cap="flat" cmpd="sng" algn="ctr">
+                      <a:solidFill>
+                        <a:srgbClr val="E3E7F0"/>
+                      </a:solidFill>
+                      <a:prstDash val="solid"/>
+                      <a:round/>
+                      <a:headEnd type="none" w="med" len="med"/>
+                      <a:tailEnd type="none" w="med" len="med"/>
+                    </a:lnL>
+                    <a:lnR w="6350" cap="flat" cmpd="sng" algn="ctr">
+                      <a:solidFill>
+                        <a:srgbClr val="E3E7F0"/>
+                      </a:solidFill>
+                      <a:prstDash val="solid"/>
+                      <a:round/>
+                      <a:headEnd type="none" w="med" len="med"/>
+                      <a:tailEnd type="none" w="med" len="med"/>
+                    </a:lnR>
+                    <a:lnT w="6350" cap="flat" cmpd="sng" algn="ctr">
+                      <a:solidFill>
+                        <a:srgbClr val="E3E7F0"/>
+                      </a:solidFill>
+                      <a:prstDash val="solid"/>
+                      <a:round/>
+                      <a:headEnd type="none" w="med" len="med"/>
+                      <a:tailEnd type="none" w="med" len="med"/>
+                    </a:lnT>
+                    <a:lnB w="6350" cap="flat" cmpd="sng" algn="ctr">
+                      <a:solidFill>
+                        <a:srgbClr val="E3E7F0"/>
+                      </a:solidFill>
+                      <a:prstDash val="solid"/>
+                      <a:round/>
+                      <a:headEnd type="none" w="med" len="med"/>
+                      <a:tailEnd type="none" w="med" len="med"/>
+                    </a:lnB>
+                  </a:tcPr>
+                </a:tc>
+              </a:tr>
+              <a:tr h="187452">
+                <a:tc>
+                  <a:txBody>
+                    <a:bodyPr/>
+                    <a:lstStyle/>
+                    <a:p>
+                      <a:pPr algn="l" indent="0" marL="0">
+                        <a:buNone/>
+                      </a:pPr>
+                      <a:r>
+                        <a:rPr lang="en-US" sz="850" dirty="0">
+                          <a:solidFill>
+                            <a:srgbClr val="1A1A1A"/>
+                          </a:solidFill>
+                          <a:latin typeface="Calibri" pitchFamily="34" charset="0"/>
+                          <a:ea typeface="Calibri" pitchFamily="34" charset="-122"/>
+                          <a:cs typeface="Calibri" pitchFamily="34" charset="-120"/>
+                        </a:rPr>
+                        <a:t>CNNE</a:t>
+                      </a:r>
+                      <a:endParaRPr lang="en-US" sz="850" dirty="0">
+                        <a:latin typeface="Calibri" charset="0"/>
+                        <a:ea typeface="Calibri" charset="0"/>
+                        <a:cs typeface="Calibri" charset="0"/>
+                      </a:endParaRPr>
+                    </a:p>
+                  </a:txBody>
+                  <a:tcPr marL="25400" marR="25400" marT="25400" marB="25400">
+                    <a:lnL w="6350" cap="flat" cmpd="sng" algn="ctr">
+                      <a:solidFill>
+                        <a:srgbClr val="E3E7F0"/>
+                      </a:solidFill>
+                      <a:prstDash val="solid"/>
+                      <a:round/>
+                      <a:headEnd type="none" w="med" len="med"/>
+                      <a:tailEnd type="none" w="med" len="med"/>
+                    </a:lnL>
+                    <a:lnR w="6350" cap="flat" cmpd="sng" algn="ctr">
+                      <a:solidFill>
+                        <a:srgbClr val="E3E7F0"/>
+                      </a:solidFill>
+                      <a:prstDash val="solid"/>
+                      <a:round/>
+                      <a:headEnd type="none" w="med" len="med"/>
+                      <a:tailEnd type="none" w="med" len="med"/>
+                    </a:lnR>
+                    <a:lnT w="6350" cap="flat" cmpd="sng" algn="ctr">
+                      <a:solidFill>
+                        <a:srgbClr val="E3E7F0"/>
+                      </a:solidFill>
+                      <a:prstDash val="solid"/>
+                      <a:round/>
+                      <a:headEnd type="none" w="med" len="med"/>
+                      <a:tailEnd type="none" w="med" len="med"/>
+                    </a:lnT>
+                    <a:lnB w="6350" cap="flat" cmpd="sng" algn="ctr">
+                      <a:solidFill>
+                        <a:srgbClr val="E3E7F0"/>
+                      </a:solidFill>
+                      <a:prstDash val="solid"/>
+                      <a:round/>
+                      <a:headEnd type="none" w="med" len="med"/>
+                      <a:tailEnd type="none" w="med" len="med"/>
+                    </a:lnB>
+                  </a:tcPr>
+                </a:tc>
+                <a:tc>
+                  <a:txBody>
+                    <a:bodyPr/>
+                    <a:lstStyle/>
+                    <a:p>
+                      <a:pPr algn="r" indent="0" marL="0">
+                        <a:buNone/>
+                      </a:pPr>
+                      <a:r>
+                        <a:rPr lang="en-US" sz="850" dirty="0">
+                          <a:solidFill>
+                            <a:srgbClr val="1A1A1A"/>
+                          </a:solidFill>
+                          <a:latin typeface="Calibri" pitchFamily="34" charset="0"/>
+                          <a:ea typeface="Calibri" pitchFamily="34" charset="-122"/>
+                          <a:cs typeface="Calibri" pitchFamily="34" charset="-120"/>
+                        </a:rPr>
+                        <a:t>Cannae Holdings Inc</a:t>
+                      </a:r>
+                      <a:endParaRPr lang="en-US" sz="850" dirty="0">
+                        <a:latin typeface="Calibri" charset="0"/>
+                        <a:ea typeface="Calibri" charset="0"/>
+                        <a:cs typeface="Calibri" charset="0"/>
+                      </a:endParaRPr>
+                    </a:p>
+                  </a:txBody>
+                  <a:tcPr marL="25400" marR="25400" marT="25400" marB="25400">
+                    <a:lnL w="6350" cap="flat" cmpd="sng" algn="ctr">
+                      <a:solidFill>
+                        <a:srgbClr val="E3E7F0"/>
+                      </a:solidFill>
+                      <a:prstDash val="solid"/>
+                      <a:round/>
+                      <a:headEnd type="none" w="med" len="med"/>
+                      <a:tailEnd type="none" w="med" len="med"/>
+                    </a:lnL>
+                    <a:lnR w="6350" cap="flat" cmpd="sng" algn="ctr">
+                      <a:solidFill>
+                        <a:srgbClr val="E3E7F0"/>
+                      </a:solidFill>
+                      <a:prstDash val="solid"/>
+                      <a:round/>
+                      <a:headEnd type="none" w="med" len="med"/>
+                      <a:tailEnd type="none" w="med" len="med"/>
+                    </a:lnR>
+                    <a:lnT w="6350" cap="flat" cmpd="sng" algn="ctr">
+                      <a:solidFill>
+                        <a:srgbClr val="E3E7F0"/>
+                      </a:solidFill>
+                      <a:prstDash val="solid"/>
+                      <a:round/>
+                      <a:headEnd type="none" w="med" len="med"/>
+                      <a:tailEnd type="none" w="med" len="med"/>
+                    </a:lnT>
+                    <a:lnB w="6350" cap="flat" cmpd="sng" algn="ctr">
+                      <a:solidFill>
+                        <a:srgbClr val="E3E7F0"/>
+                      </a:solidFill>
+                      <a:prstDash val="solid"/>
+                      <a:round/>
+                      <a:headEnd type="none" w="med" len="med"/>
+                      <a:tailEnd type="none" w="med" len="med"/>
+                    </a:lnB>
+                  </a:tcPr>
+                </a:tc>
+                <a:tc>
+                  <a:txBody>
+                    <a:bodyPr/>
+                    <a:lstStyle/>
+                    <a:p>
+                      <a:pPr algn="r" indent="0" marL="0">
+                        <a:buNone/>
+                      </a:pPr>
+                      <a:r>
+                        <a:rPr lang="en-US" sz="850" dirty="0">
+                          <a:solidFill>
+                            <a:srgbClr val="1A1A1A"/>
+                          </a:solidFill>
+                          <a:latin typeface="Calibri" pitchFamily="34" charset="0"/>
+                          <a:ea typeface="Calibri" pitchFamily="34" charset="-122"/>
+                          <a:cs typeface="Calibri" pitchFamily="34" charset="-120"/>
+                        </a:rPr>
+                        <a:t>-0.54%</a:t>
+                      </a:r>
+                      <a:endParaRPr lang="en-US" sz="850" dirty="0">
+                        <a:latin typeface="Calibri" charset="0"/>
+                        <a:ea typeface="Calibri" charset="0"/>
+                        <a:cs typeface="Calibri" charset="0"/>
+                      </a:endParaRPr>
+                    </a:p>
+                  </a:txBody>
+                  <a:tcPr marL="25400" marR="25400" marT="25400" marB="25400">
+                    <a:lnL w="6350" cap="flat" cmpd="sng" algn="ctr">
+                      <a:solidFill>
+                        <a:srgbClr val="E3E7F0"/>
+                      </a:solidFill>
+                      <a:prstDash val="solid"/>
+                      <a:round/>
+                      <a:headEnd type="none" w="med" len="med"/>
+                      <a:tailEnd type="none" w="med" len="med"/>
+                    </a:lnL>
+                    <a:lnR w="6350" cap="flat" cmpd="sng" algn="ctr">
+                      <a:solidFill>
+                        <a:srgbClr val="E3E7F0"/>
+                      </a:solidFill>
+                      <a:prstDash val="solid"/>
+                      <a:round/>
+                      <a:headEnd type="none" w="med" len="med"/>
+                      <a:tailEnd type="none" w="med" len="med"/>
+                    </a:lnR>
+                    <a:lnT w="6350" cap="flat" cmpd="sng" algn="ctr">
+                      <a:solidFill>
+                        <a:srgbClr val="E3E7F0"/>
+                      </a:solidFill>
+                      <a:prstDash val="solid"/>
+                      <a:round/>
+                      <a:headEnd type="none" w="med" len="med"/>
+                      <a:tailEnd type="none" w="med" len="med"/>
+                    </a:lnT>
+                    <a:lnB w="6350" cap="flat" cmpd="sng" algn="ctr">
+                      <a:solidFill>
+                        <a:srgbClr val="E3E7F0"/>
+                      </a:solidFill>
+                      <a:prstDash val="solid"/>
+                      <a:round/>
+                      <a:headEnd type="none" w="med" len="med"/>
+                      <a:tailEnd type="none" w="med" len="med"/>
+                    </a:lnB>
+                  </a:tcPr>
+                </a:tc>
+              </a:tr>
+              <a:tr h="187452">
+                <a:tc>
+                  <a:txBody>
+                    <a:bodyPr/>
+                    <a:lstStyle/>
+                    <a:p>
+                      <a:pPr algn="l" indent="0" marL="0">
+                        <a:buNone/>
+                      </a:pPr>
+                      <a:r>
+                        <a:rPr lang="en-US" sz="850" dirty="0">
+                          <a:solidFill>
+                            <a:srgbClr val="1A1A1A"/>
+                          </a:solidFill>
+                          <a:latin typeface="Calibri" pitchFamily="34" charset="0"/>
+                          <a:ea typeface="Calibri" pitchFamily="34" charset="-122"/>
+                          <a:cs typeface="Calibri" pitchFamily="34" charset="-120"/>
+                        </a:rPr>
+                        <a:t>COOP</a:t>
+                      </a:r>
+                      <a:endParaRPr lang="en-US" sz="850" dirty="0">
+                        <a:latin typeface="Calibri" charset="0"/>
+                        <a:ea typeface="Calibri" charset="0"/>
+                        <a:cs typeface="Calibri" charset="0"/>
+                      </a:endParaRPr>
+                    </a:p>
+                  </a:txBody>
+                  <a:tcPr marL="25400" marR="25400" marT="25400" marB="25400">
+                    <a:lnL w="6350" cap="flat" cmpd="sng" algn="ctr">
+                      <a:solidFill>
+                        <a:srgbClr val="E3E7F0"/>
+                      </a:solidFill>
+                      <a:prstDash val="solid"/>
+                      <a:round/>
+                      <a:headEnd type="none" w="med" len="med"/>
+                      <a:tailEnd type="none" w="med" len="med"/>
+                    </a:lnL>
+                    <a:lnR w="6350" cap="flat" cmpd="sng" algn="ctr">
+                      <a:solidFill>
+                        <a:srgbClr val="E3E7F0"/>
+                      </a:solidFill>
+                      <a:prstDash val="solid"/>
+                      <a:round/>
+                      <a:headEnd type="none" w="med" len="med"/>
+                      <a:tailEnd type="none" w="med" len="med"/>
+                    </a:lnR>
+                    <a:lnT w="6350" cap="flat" cmpd="sng" algn="ctr">
+                      <a:solidFill>
+                        <a:srgbClr val="E3E7F0"/>
+                      </a:solidFill>
+                      <a:prstDash val="solid"/>
+                      <a:round/>
+                      <a:headEnd type="none" w="med" len="med"/>
+                      <a:tailEnd type="none" w="med" len="med"/>
+                    </a:lnT>
+                    <a:lnB w="6350" cap="flat" cmpd="sng" algn="ctr">
+                      <a:solidFill>
+                        <a:srgbClr val="E3E7F0"/>
+                      </a:solidFill>
+                      <a:prstDash val="solid"/>
+                      <a:round/>
+                      <a:headEnd type="none" w="med" len="med"/>
+                      <a:tailEnd type="none" w="med" len="med"/>
+                    </a:lnB>
+                  </a:tcPr>
+                </a:tc>
+                <a:tc>
+                  <a:txBody>
+                    <a:bodyPr/>
+                    <a:lstStyle/>
+                    <a:p>
+                      <a:pPr algn="r" indent="0" marL="0">
+                        <a:buNone/>
+                      </a:pPr>
+                      <a:r>
+                        <a:rPr lang="en-US" sz="850" dirty="0">
+                          <a:solidFill>
+                            <a:srgbClr val="1A1A1A"/>
+                          </a:solidFill>
+                          <a:latin typeface="Calibri" pitchFamily="34" charset="0"/>
+                          <a:ea typeface="Calibri" pitchFamily="34" charset="-122"/>
+                          <a:cs typeface="Calibri" pitchFamily="34" charset="-120"/>
+                        </a:rPr>
+                        <a:t>Mr Cooper Group Inc</a:t>
+                      </a:r>
+                      <a:endParaRPr lang="en-US" sz="850" dirty="0">
+                        <a:latin typeface="Calibri" charset="0"/>
+                        <a:ea typeface="Calibri" charset="0"/>
+                        <a:cs typeface="Calibri" charset="0"/>
+                      </a:endParaRPr>
+                    </a:p>
+                  </a:txBody>
+                  <a:tcPr marL="25400" marR="25400" marT="25400" marB="25400">
+                    <a:lnL w="6350" cap="flat" cmpd="sng" algn="ctr">
+                      <a:solidFill>
+                        <a:srgbClr val="E3E7F0"/>
+                      </a:solidFill>
+                      <a:prstDash val="solid"/>
+                      <a:round/>
+                      <a:headEnd type="none" w="med" len="med"/>
+                      <a:tailEnd type="none" w="med" len="med"/>
+                    </a:lnL>
+                    <a:lnR w="6350" cap="flat" cmpd="sng" algn="ctr">
+                      <a:solidFill>
+                        <a:srgbClr val="E3E7F0"/>
+                      </a:solidFill>
+                      <a:prstDash val="solid"/>
+                      <a:round/>
+                      <a:headEnd type="none" w="med" len="med"/>
+                      <a:tailEnd type="none" w="med" len="med"/>
+                    </a:lnR>
+                    <a:lnT w="6350" cap="flat" cmpd="sng" algn="ctr">
+                      <a:solidFill>
+                        <a:srgbClr val="E3E7F0"/>
+                      </a:solidFill>
+                      <a:prstDash val="solid"/>
+                      <a:round/>
+                      <a:headEnd type="none" w="med" len="med"/>
+                      <a:tailEnd type="none" w="med" len="med"/>
+                    </a:lnT>
+                    <a:lnB w="6350" cap="flat" cmpd="sng" algn="ctr">
+                      <a:solidFill>
+                        <a:srgbClr val="E3E7F0"/>
+                      </a:solidFill>
+                      <a:prstDash val="solid"/>
+                      <a:round/>
+                      <a:headEnd type="none" w="med" len="med"/>
+                      <a:tailEnd type="none" w="med" len="med"/>
+                    </a:lnB>
+                  </a:tcPr>
+                </a:tc>
+                <a:tc>
+                  <a:txBody>
+                    <a:bodyPr/>
+                    <a:lstStyle/>
+                    <a:p>
+                      <a:pPr algn="r" indent="0" marL="0">
+                        <a:buNone/>
+                      </a:pPr>
+                      <a:r>
+                        <a:rPr lang="en-US" sz="850" dirty="0">
+                          <a:solidFill>
+                            <a:srgbClr val="1A1A1A"/>
+                          </a:solidFill>
+                          <a:latin typeface="Calibri" pitchFamily="34" charset="0"/>
+                          <a:ea typeface="Calibri" pitchFamily="34" charset="-122"/>
+                          <a:cs typeface="Calibri" pitchFamily="34" charset="-120"/>
+                        </a:rPr>
+                        <a:t>-0.54%</a:t>
+                      </a:r>
+                      <a:endParaRPr lang="en-US" sz="850" dirty="0">
+                        <a:latin typeface="Calibri" charset="0"/>
+                        <a:ea typeface="Calibri" charset="0"/>
+                        <a:cs typeface="Calibri" charset="0"/>
+                      </a:endParaRPr>
+                    </a:p>
+                  </a:txBody>
+                  <a:tcPr marL="25400" marR="25400" marT="25400" marB="25400">
                     <a:lnL w="6350" cap="flat" cmpd="sng" algn="ctr">
                       <a:solidFill>
                         <a:srgbClr val="E3E7F0"/>
@@ -25379,7 +26423,7 @@
                           <a:ea typeface="Calibri" pitchFamily="34" charset="-122"/>
                           <a:cs typeface="Calibri" pitchFamily="34" charset="-120"/>
                         </a:rPr>
-                        <a:t>$1150.3m</a:t>
+                        <a:t>$55m</a:t>
                       </a:r>
                       <a:endParaRPr lang="en-US" sz="950" dirty="0">
                         <a:latin typeface="Calibri" charset="0"/>
@@ -25444,7 +26488,7 @@
                           <a:ea typeface="Calibri" pitchFamily="34" charset="-122"/>
                           <a:cs typeface="Calibri" pitchFamily="34" charset="-120"/>
                         </a:rPr>
-                        <a:t>$559.3m</a:t>
+                        <a:t>$27m -- 126-day average, not the monthly total</a:t>
                       </a:r>
                       <a:endParaRPr lang="en-US" sz="950" dirty="0">
                         <a:latin typeface="Calibri" charset="0"/>

--- a/05_submission/FIAM_deck.pptx
+++ b/05_submission/FIAM_deck.pptx
@@ -2703,6 +2703,68 @@
           </a:p>
         </p:txBody>
       </p:sp>
+      <p:sp>
+        <p:nvSpPr>
+          <p:cNvPr id="22" name="Text 20"/>
+          <p:cNvSpPr txBox="1"/>
+          <p:nvPr/>
+        </p:nvSpPr>
+        <p:spPr>
+          <a:xfrm>
+            <a:off x="731520" y="6053328"/>
+            <a:ext cx="10698480" cy="566928"/>
+          </a:xfrm>
+          <a:prstGeom prst="rect">
+            <a:avLst/>
+          </a:prstGeom>
+          <a:noFill/>
+          <a:ln/>
+        </p:spPr>
+        <p:txBody>
+          <a:bodyPr wrap="square" lIns="0" tIns="0" rIns="0" bIns="0" rtlCol="0" anchor="t"/>
+          <a:lstStyle/>
+          <a:p>
+            <a:pPr indent="0" marL="0">
+              <a:lnSpc>
+                <a:spcPct val="105000"/>
+              </a:lnSpc>
+              <a:buNone/>
+            </a:pPr>
+            <a:r>
+              <a:rPr lang="en-US" sz="1200" b="1" dirty="0">
+                <a:solidFill>
+                  <a:srgbClr val="FFFFFF"/>
+                </a:solidFill>
+                <a:latin typeface="Calibri" pitchFamily="34" charset="0"/>
+                <a:ea typeface="Calibri" pitchFamily="34" charset="-122"/>
+                <a:cs typeface="Calibri" pitchFamily="34" charset="-120"/>
+              </a:rPr>
+              <a:t>[TEAM NAME - FILL IN]</a:t>
+            </a:r>
+            <a:endParaRPr lang="en-US" sz="1200" dirty="0"/>
+          </a:p>
+          <a:p>
+            <a:pPr indent="0" marL="0">
+              <a:lnSpc>
+                <a:spcPct val="105000"/>
+              </a:lnSpc>
+              <a:buNone/>
+            </a:pPr>
+            <a:r>
+              <a:rPr lang="en-US" sz="1200" dirty="0">
+                <a:solidFill>
+                  <a:srgbClr val="CADCFC"/>
+                </a:solidFill>
+                <a:latin typeface="Calibri" pitchFamily="34" charset="0"/>
+                <a:ea typeface="Calibri" pitchFamily="34" charset="-122"/>
+                <a:cs typeface="Calibri" pitchFamily="34" charset="-120"/>
+              </a:rPr>
+              <a:t>Junhong Zhou   ·   Tony Tran   ·   Faig Haji   ·   Bohan Zhang   ·   Alex [surname]</a:t>
+            </a:r>
+            <a:endParaRPr lang="en-US" sz="1200" dirty="0"/>
+          </a:p>
+        </p:txBody>
+      </p:sp>
     </p:spTree>
   </p:cSld>
   <p:clrMapOvr>

--- a/05_submission/FIAM_deck.pptx
+++ b/05_submission/FIAM_deck.pptx
@@ -1042,7 +1042,7 @@
           <a:p>
             <a:r>
               <a:rPr lang="en-US" dirty="0"/>
-              <a:t>The text answer is a measured null with three independent lines of evidence, plus one signal that the aggregate was hiding. That is a result, not a gap.</a:t>
+              <a:t>Page 3 answers three of the brief's questions: why this model, how training is structured, and which characteristics drive it. The agentic paragraph answers the fourth honestly - our pipeline is not agentic, and that is a choice we can defend rather than a gap.</a:t>
             </a:r>
             <a:endParaRPr lang="en-US" dirty="0"/>
           </a:p>
@@ -1482,7 +1482,7 @@
           <a:p>
             <a:r>
               <a:rPr lang="en-US" dirty="0"/>
-              <a:t>This is the page the rules are really asking for: did it do what you trained it to, what drove it, and what would you change.</a:t>
+              <a:t>This is the page the rules are really asking for: did it do what you trained it to, which signals drove it, which positions, which macro events, and what you would change.</a:t>
             </a:r>
             <a:endParaRPr lang="en-US" dirty="0"/>
           </a:p>
@@ -7709,7 +7709,7 @@
                 <a:ea typeface="Calibri" pitchFamily="34" charset="-122"/>
                 <a:cs typeface="Calibri" pitchFamily="34" charset="-120"/>
               </a:rPr>
-              <a:t>Three were genuine trials: the tree model, turnover control, and the 8-K feature set. We removed the third after it failed its pre-declared test.</a:t>
+              <a:t>Four were genuine trials: the tree model, turnover control, the 8-K feature set, and sector neutrality. The 8-K set was removed after it failed its pre-declared test. Sector neutrality was proposed after the diagnosis that 90% of capital sits in sector positions nobody chose; it was implemented two ways, scored first on the pre-registered 2019-20 window, and then varied across quota rule, smoothing and buffer. It led in 7 of 18 configurations (binomial p = 0.48) and our own conclusion about it reversed three times. It is reported as untested rather than rejected and the book was not changed.</a:t>
             </a:r>
             <a:endParaRPr lang="en-US" sz="1200" dirty="0"/>
           </a:p>
@@ -7757,7 +7757,7 @@
                 <a:ea typeface="Calibri" pitchFamily="34" charset="-122"/>
                 <a:cs typeface="Calibri" pitchFamily="34" charset="-120"/>
               </a:rPr>
-              <a:t>What we take from this: with 68 months and this many looks, a t-statistic near 2 is not evidence. What makes a result worth keeping is effect size, a reason to expect it in advance, and survival across regimes - not the t.</a:t>
+              <a:t>What we take from this: with 68 months and this many looks, a t-statistic near 2 is not evidence. What makes a result worth keeping is effect size, a reason to expect it in advance, and survival across regimes - not the t. The sector work put a number on the limit: this validation window cannot resolve an information-ratio gap below 1.12, and the test period below 0.66, so effects of the size we were chasing are invisible to us either way.</a:t>
             </a:r>
             <a:endParaRPr lang="en-US" sz="1200" dirty="0"/>
           </a:p>
@@ -16843,7 +16843,7 @@
                 <a:ea typeface="Calibri" pitchFamily="34" charset="-122"/>
                 <a:cs typeface="Calibri" pitchFamily="34" charset="-120"/>
               </a:rPr>
-              <a:t>147 supplied characteristics; the 8-K corpus measured and reported</a:t>
+              <a:t>147 supplied characteristics; which of them the model actually uses</a:t>
             </a:r>
             <a:endParaRPr lang="en-US" sz="1300" dirty="0"/>
           </a:p>
@@ -16857,8 +16857,8 @@
         </p:nvSpPr>
         <p:spPr>
           <a:xfrm>
-            <a:off x="548640" y="1481328"/>
-            <a:ext cx="5303520" cy="256032"/>
+            <a:off x="548640" y="1444752"/>
+            <a:ext cx="5303520" cy="237744"/>
           </a:xfrm>
           <a:prstGeom prst="rect">
             <a:avLst/>
@@ -16874,7 +16874,7 @@
               <a:buNone/>
             </a:pPr>
             <a:r>
-              <a:rPr lang="en-US" sz="1300" b="1" dirty="0">
+              <a:rPr lang="en-US" sz="1250" b="1" dirty="0">
                 <a:solidFill>
                   <a:srgbClr val="1E2761"/>
                 </a:solidFill>
@@ -16884,7 +16884,7 @@
               </a:rPr>
               <a:t>Forecast</a:t>
             </a:r>
-            <a:endParaRPr lang="en-US" sz="1300" dirty="0"/>
+            <a:endParaRPr lang="en-US" sz="1250" dirty="0"/>
           </a:p>
         </p:txBody>
       </p:sp>
@@ -16896,7 +16896,7 @@
         </p:nvSpPr>
         <p:spPr>
           <a:xfrm>
-            <a:off x="548640" y="1773936"/>
+            <a:off x="548640" y="1700784"/>
             <a:ext cx="5394960" cy="1463040"/>
           </a:xfrm>
           <a:prstGeom prst="rect">
@@ -16920,7 +16920,7 @@
               <a:buChar char="•"/>
             </a:pPr>
             <a:r>
-              <a:rPr lang="en-US" sz="1050" dirty="0">
+              <a:rPr lang="en-US" sz="1000" dirty="0">
                 <a:solidFill>
                   <a:srgbClr val="1A1A1A"/>
                 </a:solidFill>
@@ -16928,9 +16928,9 @@
                 <a:ea typeface="Calibri" pitchFamily="34" charset="-122"/>
                 <a:cs typeface="Calibri" pitchFamily="34" charset="-120"/>
               </a:rPr>
-              <a:t>Gradient-boosted trees, refit annually on an expanding window with a rolling two-year validation block, split by target month.</a:t>
+              <a:t>Gradient-boosted trees, refit annually on an expanding window with a rolling two-year validation block, split by target month. Chosen over the linear models on validation rank correlation, fold by fold.</a:t>
             </a:r>
-            <a:endParaRPr lang="en-US" sz="1050" dirty="0"/>
+            <a:endParaRPr lang="en-US" sz="1000" dirty="0"/>
           </a:p>
           <a:p>
             <a:pPr marL="342900" indent="-342900">
@@ -16944,7 +16944,7 @@
               <a:buChar char="•"/>
             </a:pPr>
             <a:r>
-              <a:rPr lang="en-US" sz="1050" dirty="0">
+              <a:rPr lang="en-US" sz="1000" dirty="0">
                 <a:solidFill>
                   <a:srgbClr val="1A1A1A"/>
                 </a:solidFill>
@@ -16954,7 +16954,7 @@
               </a:rPr>
               <a:t>Missing values are NOT imputed for the trees. Missingness is informative - stocks missing the most characteristics have a median cap of $282m against $1,687m.</a:t>
             </a:r>
-            <a:endParaRPr lang="en-US" sz="1050" dirty="0"/>
+            <a:endParaRPr lang="en-US" sz="1000" dirty="0"/>
           </a:p>
           <a:p>
             <a:pPr marL="342900" indent="-342900">
@@ -16968,7 +16968,7 @@
               <a:buChar char="•"/>
             </a:pPr>
             <a:r>
-              <a:rPr lang="en-US" sz="1050" dirty="0">
+              <a:rPr lang="en-US" sz="1000" dirty="0">
                 <a:solidFill>
                   <a:srgbClr val="1A1A1A"/>
                 </a:solidFill>
@@ -16978,7 +16978,7 @@
               </a:rPr>
               <a:t>The target is demeaned within each month. Fitting raw returns stopped after ONE boosting round: training averaged +0.27%/month against +2.52% in validation.</a:t>
             </a:r>
-            <a:endParaRPr lang="en-US" sz="1050" dirty="0"/>
+            <a:endParaRPr lang="en-US" sz="1000" dirty="0"/>
           </a:p>
           <a:p>
             <a:pPr marL="342900" indent="-342900">
@@ -16992,7 +16992,7 @@
               <a:buChar char="•"/>
             </a:pPr>
             <a:r>
-              <a:rPr lang="en-US" sz="1050" dirty="0">
+              <a:rPr lang="en-US" sz="1000" dirty="0">
                 <a:solidFill>
                   <a:srgbClr val="1A1A1A"/>
                 </a:solidFill>
@@ -17002,7 +17002,7 @@
               </a:rPr>
               <a:t>Model choice is made inside each fold on that fold's validation block only.</a:t>
             </a:r>
-            <a:endParaRPr lang="en-US" sz="1050" dirty="0"/>
+            <a:endParaRPr lang="en-US" sz="1000" dirty="0"/>
           </a:p>
         </p:txBody>
       </p:sp>
@@ -17014,8 +17014,8 @@
         </p:nvSpPr>
         <p:spPr>
           <a:xfrm>
-            <a:off x="548640" y="3977640"/>
-            <a:ext cx="5394960" cy="256032"/>
+            <a:off x="548640" y="3675888"/>
+            <a:ext cx="5394960" cy="237744"/>
           </a:xfrm>
           <a:prstGeom prst="rect">
             <a:avLst/>
@@ -17031,7 +17031,7 @@
               <a:buNone/>
             </a:pPr>
             <a:r>
-              <a:rPr lang="en-US" sz="1200" b="1" dirty="0">
+              <a:rPr lang="en-US" sz="1150" b="1" dirty="0">
                 <a:solidFill>
                   <a:srgbClr val="1E2761"/>
                 </a:solidFill>
@@ -17041,7 +17041,7 @@
               </a:rPr>
               <a:t>Out-of-sample R-squared, benchmarked against zero</a:t>
             </a:r>
-            <a:endParaRPr lang="en-US" sz="1200" dirty="0"/>
+            <a:endParaRPr lang="en-US" sz="1150" dirty="0"/>
           </a:p>
         </p:txBody>
       </p:sp>
@@ -17060,7 +17060,7 @@
           </p:nvPr>
         </p:nvGraphicFramePr>
         <p:xfrm>
-          <a:off x="548640" y="4261104"/>
+          <a:off x="548640" y="3931920"/>
           <a:ext cx="5394960" cy="914400"/>
         </p:xfrm>
         <a:graphic>
@@ -17082,7 +17082,7 @@
                         <a:buNone/>
                       </a:pPr>
                       <a:r>
-                        <a:rPr lang="en-US" sz="950" b="1" dirty="0">
+                        <a:rPr lang="en-US" sz="900" b="1" dirty="0">
                           <a:solidFill>
                             <a:srgbClr val="FFFFFF"/>
                           </a:solidFill>
@@ -17092,7 +17092,7 @@
                         </a:rPr>
                         <a:t>Model</a:t>
                       </a:r>
-                      <a:endParaRPr lang="en-US" sz="950" dirty="0">
+                      <a:endParaRPr lang="en-US" sz="900" dirty="0">
                         <a:latin typeface="Calibri" charset="0"/>
                         <a:ea typeface="Calibri" charset="0"/>
                         <a:cs typeface="Calibri" charset="0"/>
@@ -17150,7 +17150,7 @@
                         <a:buNone/>
                       </a:pPr>
                       <a:r>
-                        <a:rPr lang="en-US" sz="950" b="1" dirty="0">
+                        <a:rPr lang="en-US" sz="900" b="1" dirty="0">
                           <a:solidFill>
                             <a:srgbClr val="FFFFFF"/>
                           </a:solidFill>
@@ -17160,7 +17160,7 @@
                         </a:rPr>
                         <a:t>OOS R2</a:t>
                       </a:r>
-                      <a:endParaRPr lang="en-US" sz="950" dirty="0">
+                      <a:endParaRPr lang="en-US" sz="900" dirty="0">
                         <a:latin typeface="Calibri" charset="0"/>
                         <a:ea typeface="Calibri" charset="0"/>
                         <a:cs typeface="Calibri" charset="0"/>
@@ -17218,7 +17218,7 @@
                         <a:buNone/>
                       </a:pPr>
                       <a:r>
-                        <a:rPr lang="en-US" sz="950" b="1" dirty="0">
+                        <a:rPr lang="en-US" sz="900" b="1" dirty="0">
                           <a:solidFill>
                             <a:srgbClr val="FFFFFF"/>
                           </a:solidFill>
@@ -17228,7 +17228,7 @@
                         </a:rPr>
                         <a:t>Monthly IC</a:t>
                       </a:r>
-                      <a:endParaRPr lang="en-US" sz="950" dirty="0">
+                      <a:endParaRPr lang="en-US" sz="900" dirty="0">
                         <a:latin typeface="Calibri" charset="0"/>
                         <a:ea typeface="Calibri" charset="0"/>
                         <a:cs typeface="Calibri" charset="0"/>
@@ -17288,7 +17288,7 @@
                         <a:buNone/>
                       </a:pPr>
                       <a:r>
-                        <a:rPr lang="en-US" sz="1000" dirty="0">
+                        <a:rPr lang="en-US" sz="950" dirty="0">
                           <a:solidFill>
                             <a:srgbClr val="1A1A1A"/>
                           </a:solidFill>
@@ -17298,7 +17298,7 @@
                         </a:rPr>
                         <a:t>Gradient-boosted trees</a:t>
                       </a:r>
-                      <a:endParaRPr lang="en-US" sz="1000" dirty="0">
+                      <a:endParaRPr lang="en-US" sz="950" dirty="0">
                         <a:latin typeface="Calibri" charset="0"/>
                         <a:ea typeface="Calibri" charset="0"/>
                         <a:cs typeface="Calibri" charset="0"/>
@@ -17353,7 +17353,7 @@
                         <a:buNone/>
                       </a:pPr>
                       <a:r>
-                        <a:rPr lang="en-US" sz="1000" dirty="0">
+                        <a:rPr lang="en-US" sz="950" dirty="0">
                           <a:solidFill>
                             <a:srgbClr val="1A1A1A"/>
                           </a:solidFill>
@@ -17363,7 +17363,7 @@
                         </a:rPr>
                         <a:t>+0.3956%</a:t>
                       </a:r>
-                      <a:endParaRPr lang="en-US" sz="1000" dirty="0">
+                      <a:endParaRPr lang="en-US" sz="950" dirty="0">
                         <a:latin typeface="Calibri" charset="0"/>
                         <a:ea typeface="Calibri" charset="0"/>
                         <a:cs typeface="Calibri" charset="0"/>
@@ -17418,7 +17418,7 @@
                         <a:buNone/>
                       </a:pPr>
                       <a:r>
-                        <a:rPr lang="en-US" sz="1000" dirty="0">
+                        <a:rPr lang="en-US" sz="950" dirty="0">
                           <a:solidFill>
                             <a:srgbClr val="1A1A1A"/>
                           </a:solidFill>
@@ -17428,7 +17428,7 @@
                         </a:rPr>
                         <a:t>+0.1354</a:t>
                       </a:r>
-                      <a:endParaRPr lang="en-US" sz="1000" dirty="0">
+                      <a:endParaRPr lang="en-US" sz="950" dirty="0">
                         <a:latin typeface="Calibri" charset="0"/>
                         <a:ea typeface="Calibri" charset="0"/>
                         <a:cs typeface="Calibri" charset="0"/>
@@ -17485,7 +17485,7 @@
                         <a:buNone/>
                       </a:pPr>
                       <a:r>
-                        <a:rPr lang="en-US" sz="1000" dirty="0">
+                        <a:rPr lang="en-US" sz="950" dirty="0">
                           <a:solidFill>
                             <a:srgbClr val="1A1A1A"/>
                           </a:solidFill>
@@ -17495,7 +17495,7 @@
                         </a:rPr>
                         <a:t>Ridge</a:t>
                       </a:r>
-                      <a:endParaRPr lang="en-US" sz="1000" dirty="0">
+                      <a:endParaRPr lang="en-US" sz="950" dirty="0">
                         <a:latin typeface="Calibri" charset="0"/>
                         <a:ea typeface="Calibri" charset="0"/>
                         <a:cs typeface="Calibri" charset="0"/>
@@ -17550,7 +17550,7 @@
                         <a:buNone/>
                       </a:pPr>
                       <a:r>
-                        <a:rPr lang="en-US" sz="1000" dirty="0">
+                        <a:rPr lang="en-US" sz="950" dirty="0">
                           <a:solidFill>
                             <a:srgbClr val="1A1A1A"/>
                           </a:solidFill>
@@ -17560,7 +17560,7 @@
                         </a:rPr>
                         <a:t>+0.0278%</a:t>
                       </a:r>
-                      <a:endParaRPr lang="en-US" sz="1000" dirty="0">
+                      <a:endParaRPr lang="en-US" sz="950" dirty="0">
                         <a:latin typeface="Calibri" charset="0"/>
                         <a:ea typeface="Calibri" charset="0"/>
                         <a:cs typeface="Calibri" charset="0"/>
@@ -17615,7 +17615,7 @@
                         <a:buNone/>
                       </a:pPr>
                       <a:r>
-                        <a:rPr lang="en-US" sz="1000" dirty="0">
+                        <a:rPr lang="en-US" sz="950" dirty="0">
                           <a:solidFill>
                             <a:srgbClr val="1A1A1A"/>
                           </a:solidFill>
@@ -17625,7 +17625,7 @@
                         </a:rPr>
                         <a:t>+0.1193</a:t>
                       </a:r>
-                      <a:endParaRPr lang="en-US" sz="1000" dirty="0">
+                      <a:endParaRPr lang="en-US" sz="950" dirty="0">
                         <a:latin typeface="Calibri" charset="0"/>
                         <a:ea typeface="Calibri" charset="0"/>
                         <a:cs typeface="Calibri" charset="0"/>
@@ -17682,7 +17682,7 @@
                         <a:buNone/>
                       </a:pPr>
                       <a:r>
-                        <a:rPr lang="en-US" sz="1000" dirty="0">
+                        <a:rPr lang="en-US" sz="950" dirty="0">
                           <a:solidFill>
                             <a:srgbClr val="1A1A1A"/>
                           </a:solidFill>
@@ -17692,7 +17692,7 @@
                         </a:rPr>
                         <a:t>OLS</a:t>
                       </a:r>
-                      <a:endParaRPr lang="en-US" sz="1000" dirty="0">
+                      <a:endParaRPr lang="en-US" sz="950" dirty="0">
                         <a:latin typeface="Calibri" charset="0"/>
                         <a:ea typeface="Calibri" charset="0"/>
                         <a:cs typeface="Calibri" charset="0"/>
@@ -17747,7 +17747,7 @@
                         <a:buNone/>
                       </a:pPr>
                       <a:r>
-                        <a:rPr lang="en-US" sz="1000" dirty="0">
+                        <a:rPr lang="en-US" sz="950" dirty="0">
                           <a:solidFill>
                             <a:srgbClr val="1A1A1A"/>
                           </a:solidFill>
@@ -17757,7 +17757,7 @@
                         </a:rPr>
                         <a:t>-0.0068%</a:t>
                       </a:r>
-                      <a:endParaRPr lang="en-US" sz="1000" dirty="0">
+                      <a:endParaRPr lang="en-US" sz="950" dirty="0">
                         <a:latin typeface="Calibri" charset="0"/>
                         <a:ea typeface="Calibri" charset="0"/>
                         <a:cs typeface="Calibri" charset="0"/>
@@ -17812,7 +17812,7 @@
                         <a:buNone/>
                       </a:pPr>
                       <a:r>
-                        <a:rPr lang="en-US" sz="1000" dirty="0">
+                        <a:rPr lang="en-US" sz="950" dirty="0">
                           <a:solidFill>
                             <a:srgbClr val="1A1A1A"/>
                           </a:solidFill>
@@ -17822,7 +17822,7 @@
                         </a:rPr>
                         <a:t>+0.0806</a:t>
                       </a:r>
-                      <a:endParaRPr lang="en-US" sz="1000" dirty="0">
+                      <a:endParaRPr lang="en-US" sz="950" dirty="0">
                         <a:latin typeface="Calibri" charset="0"/>
                         <a:ea typeface="Calibri" charset="0"/>
                         <a:cs typeface="Calibri" charset="0"/>
@@ -17879,7 +17879,7 @@
                         <a:buNone/>
                       </a:pPr>
                       <a:r>
-                        <a:rPr lang="en-US" sz="1000" dirty="0">
+                        <a:rPr lang="en-US" sz="950" dirty="0">
                           <a:solidFill>
                             <a:srgbClr val="1A1A1A"/>
                           </a:solidFill>
@@ -17889,7 +17889,7 @@
                         </a:rPr>
                         <a:t>Lasso / Elastic Net</a:t>
                       </a:r>
-                      <a:endParaRPr lang="en-US" sz="1000" dirty="0">
+                      <a:endParaRPr lang="en-US" sz="950" dirty="0">
                         <a:latin typeface="Calibri" charset="0"/>
                         <a:ea typeface="Calibri" charset="0"/>
                         <a:cs typeface="Calibri" charset="0"/>
@@ -17944,7 +17944,7 @@
                         <a:buNone/>
                       </a:pPr>
                       <a:r>
-                        <a:rPr lang="en-US" sz="1000" dirty="0">
+                        <a:rPr lang="en-US" sz="950" dirty="0">
                           <a:solidFill>
                             <a:srgbClr val="1A1A1A"/>
                           </a:solidFill>
@@ -17954,7 +17954,7 @@
                         </a:rPr>
                         <a:t>negative</a:t>
                       </a:r>
-                      <a:endParaRPr lang="en-US" sz="1000" dirty="0">
+                      <a:endParaRPr lang="en-US" sz="950" dirty="0">
                         <a:latin typeface="Calibri" charset="0"/>
                         <a:ea typeface="Calibri" charset="0"/>
                         <a:cs typeface="Calibri" charset="0"/>
@@ -18009,7 +18009,7 @@
                         <a:buNone/>
                       </a:pPr>
                       <a:r>
-                        <a:rPr lang="en-US" sz="1000" dirty="0">
+                        <a:rPr lang="en-US" sz="950" dirty="0">
                           <a:solidFill>
                             <a:srgbClr val="1A1A1A"/>
                           </a:solidFill>
@@ -18019,7 +18019,7 @@
                         </a:rPr>
                         <a:t>+0.08</a:t>
                       </a:r>
-                      <a:endParaRPr lang="en-US" sz="1000" dirty="0">
+                      <a:endParaRPr lang="en-US" sz="950" dirty="0">
                         <a:latin typeface="Calibri" charset="0"/>
                         <a:ea typeface="Calibri" charset="0"/>
                         <a:cs typeface="Calibri" charset="0"/>
@@ -18078,7 +18078,7 @@
         </p:nvSpPr>
         <p:spPr>
           <a:xfrm>
-            <a:off x="548640" y="5440680"/>
+            <a:off x="548640" y="5321808"/>
             <a:ext cx="5394960" cy="457200"/>
           </a:xfrm>
           <a:prstGeom prst="rect">
@@ -18103,7 +18103,7 @@
                 <a:ea typeface="Calibri" pitchFamily="34" charset="-122"/>
                 <a:cs typeface="Calibri" pitchFamily="34" charset="-120"/>
               </a:rPr>
-              <a:t>The rules note 1-2% is typical even for neural networks. A large positive number would mean a leak, not skill.</a:t>
+              <a:t>The rules note 1-2% is typical even for neural networks; a large positive number would mean a leak, not skill. The 8-K corpus was measured and excluded - three independent tests, one null, one exception, in the appendix.</a:t>
             </a:r>
             <a:endParaRPr lang="en-US" sz="1000" dirty="0"/>
           </a:p>
@@ -18117,8 +18117,8 @@
         </p:nvSpPr>
         <p:spPr>
           <a:xfrm>
-            <a:off x="6309360" y="1481328"/>
-            <a:ext cx="5303520" cy="256032"/>
+            <a:off x="6172200" y="1444752"/>
+            <a:ext cx="5440680" cy="237744"/>
           </a:xfrm>
           <a:prstGeom prst="rect">
             <a:avLst/>
@@ -18134,7 +18134,7 @@
               <a:buNone/>
             </a:pPr>
             <a:r>
-              <a:rPr lang="en-US" sz="1300" b="1" dirty="0">
+              <a:rPr lang="en-US" sz="1250" b="1" dirty="0">
                 <a:solidFill>
                   <a:srgbClr val="1E2761"/>
                 </a:solidFill>
@@ -18142,22 +18142,1114 @@
                 <a:ea typeface="Calibri" pitchFamily="34" charset="-122"/>
                 <a:cs typeface="Calibri" pitchFamily="34" charset="-120"/>
               </a:rPr>
-              <a:t>The 8-K corpus: measured, not assumed</a:t>
+              <a:t>Which characteristics the model uses</a:t>
             </a:r>
-            <a:endParaRPr lang="en-US" sz="1300" dirty="0"/>
+            <a:endParaRPr lang="en-US" sz="1250" dirty="0"/>
           </a:p>
         </p:txBody>
       </p:sp>
+      <p:graphicFrame>
+        <p:nvGraphicFramePr>
+          <p:cNvPr id="7" name="Table 1"/>
+          <p:cNvGraphicFramePr>
+            <a:graphicFrameLocks noGrp="1"/>
+          </p:cNvGraphicFramePr>
+          <p:nvPr>
+            <p:extLst>
+              <p:ext uri="{D42A27DB-BD31-4B8C-83A1-F6EECF244321}">
+                <p14:modId xmlns:p14="http://schemas.microsoft.com/office/powerpoint/2010/main" val="1579011935"/>
+              </p:ext>
+            </p:extLst>
+          </p:nvPr>
+        </p:nvGraphicFramePr>
+        <p:xfrm>
+          <a:off x="6172200" y="1719072"/>
+          <a:ext cx="5440680" cy="914400"/>
+        </p:xfrm>
+        <a:graphic>
+          <a:graphicData uri="http://schemas.openxmlformats.org/drawingml/2006/table">
+            <a:tbl>
+              <a:tblPr/>
+              <a:tblGrid>
+                <a:gridCol w="3840480"/>
+                <a:gridCol w="1600200"/>
+              </a:tblGrid>
+              <a:tr h="187452">
+                <a:tc>
+                  <a:txBody>
+                    <a:bodyPr/>
+                    <a:lstStyle/>
+                    <a:p>
+                      <a:pPr algn="l" indent="0" marL="0">
+                        <a:buNone/>
+                      </a:pPr>
+                      <a:r>
+                        <a:rPr lang="en-US" sz="800" b="1" dirty="0">
+                          <a:solidFill>
+                            <a:srgbClr val="FFFFFF"/>
+                          </a:solidFill>
+                          <a:latin typeface="Calibri" pitchFamily="34" charset="0"/>
+                          <a:ea typeface="Calibri" pitchFamily="34" charset="-122"/>
+                          <a:cs typeface="Calibri" pitchFamily="34" charset="-120"/>
+                        </a:rPr>
+                        <a:t>Family</a:t>
+                      </a:r>
+                      <a:endParaRPr lang="en-US" sz="800" dirty="0">
+                        <a:latin typeface="Calibri" charset="0"/>
+                        <a:ea typeface="Calibri" charset="0"/>
+                        <a:cs typeface="Calibri" charset="0"/>
+                      </a:endParaRPr>
+                    </a:p>
+                  </a:txBody>
+                  <a:tcPr marL="25400" marR="25400" marT="25400" marB="25400">
+                    <a:lnL w="6350" cap="flat" cmpd="sng" algn="ctr">
+                      <a:solidFill>
+                        <a:srgbClr val="E3E7F0"/>
+                      </a:solidFill>
+                      <a:prstDash val="solid"/>
+                      <a:round/>
+                      <a:headEnd type="none" w="med" len="med"/>
+                      <a:tailEnd type="none" w="med" len="med"/>
+                    </a:lnL>
+                    <a:lnR w="6350" cap="flat" cmpd="sng" algn="ctr">
+                      <a:solidFill>
+                        <a:srgbClr val="E3E7F0"/>
+                      </a:solidFill>
+                      <a:prstDash val="solid"/>
+                      <a:round/>
+                      <a:headEnd type="none" w="med" len="med"/>
+                      <a:tailEnd type="none" w="med" len="med"/>
+                    </a:lnR>
+                    <a:lnT w="6350" cap="flat" cmpd="sng" algn="ctr">
+                      <a:solidFill>
+                        <a:srgbClr val="E3E7F0"/>
+                      </a:solidFill>
+                      <a:prstDash val="solid"/>
+                      <a:round/>
+                      <a:headEnd type="none" w="med" len="med"/>
+                      <a:tailEnd type="none" w="med" len="med"/>
+                    </a:lnT>
+                    <a:lnB w="6350" cap="flat" cmpd="sng" algn="ctr">
+                      <a:solidFill>
+                        <a:srgbClr val="E3E7F0"/>
+                      </a:solidFill>
+                      <a:prstDash val="solid"/>
+                      <a:round/>
+                      <a:headEnd type="none" w="med" len="med"/>
+                      <a:tailEnd type="none" w="med" len="med"/>
+                    </a:lnB>
+                    <a:solidFill>
+                      <a:srgbClr val="1E2761"/>
+                    </a:solidFill>
+                  </a:tcPr>
+                </a:tc>
+                <a:tc>
+                  <a:txBody>
+                    <a:bodyPr/>
+                    <a:lstStyle/>
+                    <a:p>
+                      <a:pPr algn="r" indent="0" marL="0">
+                        <a:buNone/>
+                      </a:pPr>
+                      <a:r>
+                        <a:rPr lang="en-US" sz="800" b="1" dirty="0">
+                          <a:solidFill>
+                            <a:srgbClr val="FFFFFF"/>
+                          </a:solidFill>
+                          <a:latin typeface="Calibri" pitchFamily="34" charset="0"/>
+                          <a:ea typeface="Calibri" pitchFamily="34" charset="-122"/>
+                          <a:cs typeface="Calibri" pitchFamily="34" charset="-120"/>
+                        </a:rPr>
+                        <a:t>Share of split gain</a:t>
+                      </a:r>
+                      <a:endParaRPr lang="en-US" sz="800" dirty="0">
+                        <a:latin typeface="Calibri" charset="0"/>
+                        <a:ea typeface="Calibri" charset="0"/>
+                        <a:cs typeface="Calibri" charset="0"/>
+                      </a:endParaRPr>
+                    </a:p>
+                  </a:txBody>
+                  <a:tcPr marL="25400" marR="25400" marT="25400" marB="25400">
+                    <a:lnL w="6350" cap="flat" cmpd="sng" algn="ctr">
+                      <a:solidFill>
+                        <a:srgbClr val="E3E7F0"/>
+                      </a:solidFill>
+                      <a:prstDash val="solid"/>
+                      <a:round/>
+                      <a:headEnd type="none" w="med" len="med"/>
+                      <a:tailEnd type="none" w="med" len="med"/>
+                    </a:lnL>
+                    <a:lnR w="6350" cap="flat" cmpd="sng" algn="ctr">
+                      <a:solidFill>
+                        <a:srgbClr val="E3E7F0"/>
+                      </a:solidFill>
+                      <a:prstDash val="solid"/>
+                      <a:round/>
+                      <a:headEnd type="none" w="med" len="med"/>
+                      <a:tailEnd type="none" w="med" len="med"/>
+                    </a:lnR>
+                    <a:lnT w="6350" cap="flat" cmpd="sng" algn="ctr">
+                      <a:solidFill>
+                        <a:srgbClr val="E3E7F0"/>
+                      </a:solidFill>
+                      <a:prstDash val="solid"/>
+                      <a:round/>
+                      <a:headEnd type="none" w="med" len="med"/>
+                      <a:tailEnd type="none" w="med" len="med"/>
+                    </a:lnT>
+                    <a:lnB w="6350" cap="flat" cmpd="sng" algn="ctr">
+                      <a:solidFill>
+                        <a:srgbClr val="E3E7F0"/>
+                      </a:solidFill>
+                      <a:prstDash val="solid"/>
+                      <a:round/>
+                      <a:headEnd type="none" w="med" len="med"/>
+                      <a:tailEnd type="none" w="med" len="med"/>
+                    </a:lnB>
+                    <a:solidFill>
+                      <a:srgbClr val="1E2761"/>
+                    </a:solidFill>
+                  </a:tcPr>
+                </a:tc>
+              </a:tr>
+              <a:tr h="187452">
+                <a:tc>
+                  <a:txBody>
+                    <a:bodyPr/>
+                    <a:lstStyle/>
+                    <a:p>
+                      <a:pPr algn="l" indent="0" marL="0">
+                        <a:buNone/>
+                      </a:pPr>
+                      <a:r>
+                        <a:rPr lang="en-US" sz="850" dirty="0">
+                          <a:solidFill>
+                            <a:srgbClr val="1A1A1A"/>
+                          </a:solidFill>
+                          <a:latin typeface="Calibri" pitchFamily="34" charset="0"/>
+                          <a:ea typeface="Calibri" pitchFamily="34" charset="-122"/>
+                          <a:cs typeface="Calibri" pitchFamily="34" charset="-120"/>
+                        </a:rPr>
+                        <a:t>profitability</a:t>
+                      </a:r>
+                      <a:endParaRPr lang="en-US" sz="850" dirty="0">
+                        <a:latin typeface="Calibri" charset="0"/>
+                        <a:ea typeface="Calibri" charset="0"/>
+                        <a:cs typeface="Calibri" charset="0"/>
+                      </a:endParaRPr>
+                    </a:p>
+                  </a:txBody>
+                  <a:tcPr marL="25400" marR="25400" marT="25400" marB="25400">
+                    <a:lnL w="6350" cap="flat" cmpd="sng" algn="ctr">
+                      <a:solidFill>
+                        <a:srgbClr val="E3E7F0"/>
+                      </a:solidFill>
+                      <a:prstDash val="solid"/>
+                      <a:round/>
+                      <a:headEnd type="none" w="med" len="med"/>
+                      <a:tailEnd type="none" w="med" len="med"/>
+                    </a:lnL>
+                    <a:lnR w="6350" cap="flat" cmpd="sng" algn="ctr">
+                      <a:solidFill>
+                        <a:srgbClr val="E3E7F0"/>
+                      </a:solidFill>
+                      <a:prstDash val="solid"/>
+                      <a:round/>
+                      <a:headEnd type="none" w="med" len="med"/>
+                      <a:tailEnd type="none" w="med" len="med"/>
+                    </a:lnR>
+                    <a:lnT w="6350" cap="flat" cmpd="sng" algn="ctr">
+                      <a:solidFill>
+                        <a:srgbClr val="E3E7F0"/>
+                      </a:solidFill>
+                      <a:prstDash val="solid"/>
+                      <a:round/>
+                      <a:headEnd type="none" w="med" len="med"/>
+                      <a:tailEnd type="none" w="med" len="med"/>
+                    </a:lnT>
+                    <a:lnB w="6350" cap="flat" cmpd="sng" algn="ctr">
+                      <a:solidFill>
+                        <a:srgbClr val="E3E7F0"/>
+                      </a:solidFill>
+                      <a:prstDash val="solid"/>
+                      <a:round/>
+                      <a:headEnd type="none" w="med" len="med"/>
+                      <a:tailEnd type="none" w="med" len="med"/>
+                    </a:lnB>
+                  </a:tcPr>
+                </a:tc>
+                <a:tc>
+                  <a:txBody>
+                    <a:bodyPr/>
+                    <a:lstStyle/>
+                    <a:p>
+                      <a:pPr algn="r" indent="0" marL="0">
+                        <a:buNone/>
+                      </a:pPr>
+                      <a:r>
+                        <a:rPr lang="en-US" sz="850" dirty="0">
+                          <a:solidFill>
+                            <a:srgbClr val="1A1A1A"/>
+                          </a:solidFill>
+                          <a:latin typeface="Calibri" pitchFamily="34" charset="0"/>
+                          <a:ea typeface="Calibri" pitchFamily="34" charset="-122"/>
+                          <a:cs typeface="Calibri" pitchFamily="34" charset="-120"/>
+                        </a:rPr>
+                        <a:t>20.0%</a:t>
+                      </a:r>
+                      <a:endParaRPr lang="en-US" sz="850" dirty="0">
+                        <a:latin typeface="Calibri" charset="0"/>
+                        <a:ea typeface="Calibri" charset="0"/>
+                        <a:cs typeface="Calibri" charset="0"/>
+                      </a:endParaRPr>
+                    </a:p>
+                  </a:txBody>
+                  <a:tcPr marL="25400" marR="25400" marT="25400" marB="25400">
+                    <a:lnL w="6350" cap="flat" cmpd="sng" algn="ctr">
+                      <a:solidFill>
+                        <a:srgbClr val="E3E7F0"/>
+                      </a:solidFill>
+                      <a:prstDash val="solid"/>
+                      <a:round/>
+                      <a:headEnd type="none" w="med" len="med"/>
+                      <a:tailEnd type="none" w="med" len="med"/>
+                    </a:lnL>
+                    <a:lnR w="6350" cap="flat" cmpd="sng" algn="ctr">
+                      <a:solidFill>
+                        <a:srgbClr val="E3E7F0"/>
+                      </a:solidFill>
+                      <a:prstDash val="solid"/>
+                      <a:round/>
+                      <a:headEnd type="none" w="med" len="med"/>
+                      <a:tailEnd type="none" w="med" len="med"/>
+                    </a:lnR>
+                    <a:lnT w="6350" cap="flat" cmpd="sng" algn="ctr">
+                      <a:solidFill>
+                        <a:srgbClr val="E3E7F0"/>
+                      </a:solidFill>
+                      <a:prstDash val="solid"/>
+                      <a:round/>
+                      <a:headEnd type="none" w="med" len="med"/>
+                      <a:tailEnd type="none" w="med" len="med"/>
+                    </a:lnT>
+                    <a:lnB w="6350" cap="flat" cmpd="sng" algn="ctr">
+                      <a:solidFill>
+                        <a:srgbClr val="E3E7F0"/>
+                      </a:solidFill>
+                      <a:prstDash val="solid"/>
+                      <a:round/>
+                      <a:headEnd type="none" w="med" len="med"/>
+                      <a:tailEnd type="none" w="med" len="med"/>
+                    </a:lnB>
+                  </a:tcPr>
+                </a:tc>
+              </a:tr>
+              <a:tr h="187452">
+                <a:tc>
+                  <a:txBody>
+                    <a:bodyPr/>
+                    <a:lstStyle/>
+                    <a:p>
+                      <a:pPr algn="l" indent="0" marL="0">
+                        <a:buNone/>
+                      </a:pPr>
+                      <a:r>
+                        <a:rPr lang="en-US" sz="850" dirty="0">
+                          <a:solidFill>
+                            <a:srgbClr val="1A1A1A"/>
+                          </a:solidFill>
+                          <a:latin typeface="Calibri" pitchFamily="34" charset="0"/>
+                          <a:ea typeface="Calibri" pitchFamily="34" charset="-122"/>
+                          <a:cs typeface="Calibri" pitchFamily="34" charset="-120"/>
+                        </a:rPr>
+                        <a:t>investment / growth</a:t>
+                      </a:r>
+                      <a:endParaRPr lang="en-US" sz="850" dirty="0">
+                        <a:latin typeface="Calibri" charset="0"/>
+                        <a:ea typeface="Calibri" charset="0"/>
+                        <a:cs typeface="Calibri" charset="0"/>
+                      </a:endParaRPr>
+                    </a:p>
+                  </a:txBody>
+                  <a:tcPr marL="25400" marR="25400" marT="25400" marB="25400">
+                    <a:lnL w="6350" cap="flat" cmpd="sng" algn="ctr">
+                      <a:solidFill>
+                        <a:srgbClr val="E3E7F0"/>
+                      </a:solidFill>
+                      <a:prstDash val="solid"/>
+                      <a:round/>
+                      <a:headEnd type="none" w="med" len="med"/>
+                      <a:tailEnd type="none" w="med" len="med"/>
+                    </a:lnL>
+                    <a:lnR w="6350" cap="flat" cmpd="sng" algn="ctr">
+                      <a:solidFill>
+                        <a:srgbClr val="E3E7F0"/>
+                      </a:solidFill>
+                      <a:prstDash val="solid"/>
+                      <a:round/>
+                      <a:headEnd type="none" w="med" len="med"/>
+                      <a:tailEnd type="none" w="med" len="med"/>
+                    </a:lnR>
+                    <a:lnT w="6350" cap="flat" cmpd="sng" algn="ctr">
+                      <a:solidFill>
+                        <a:srgbClr val="E3E7F0"/>
+                      </a:solidFill>
+                      <a:prstDash val="solid"/>
+                      <a:round/>
+                      <a:headEnd type="none" w="med" len="med"/>
+                      <a:tailEnd type="none" w="med" len="med"/>
+                    </a:lnT>
+                    <a:lnB w="6350" cap="flat" cmpd="sng" algn="ctr">
+                      <a:solidFill>
+                        <a:srgbClr val="E3E7F0"/>
+                      </a:solidFill>
+                      <a:prstDash val="solid"/>
+                      <a:round/>
+                      <a:headEnd type="none" w="med" len="med"/>
+                      <a:tailEnd type="none" w="med" len="med"/>
+                    </a:lnB>
+                  </a:tcPr>
+                </a:tc>
+                <a:tc>
+                  <a:txBody>
+                    <a:bodyPr/>
+                    <a:lstStyle/>
+                    <a:p>
+                      <a:pPr algn="r" indent="0" marL="0">
+                        <a:buNone/>
+                      </a:pPr>
+                      <a:r>
+                        <a:rPr lang="en-US" sz="850" dirty="0">
+                          <a:solidFill>
+                            <a:srgbClr val="1A1A1A"/>
+                          </a:solidFill>
+                          <a:latin typeface="Calibri" pitchFamily="34" charset="0"/>
+                          <a:ea typeface="Calibri" pitchFamily="34" charset="-122"/>
+                          <a:cs typeface="Calibri" pitchFamily="34" charset="-120"/>
+                        </a:rPr>
+                        <a:t>18.9%</a:t>
+                      </a:r>
+                      <a:endParaRPr lang="en-US" sz="850" dirty="0">
+                        <a:latin typeface="Calibri" charset="0"/>
+                        <a:ea typeface="Calibri" charset="0"/>
+                        <a:cs typeface="Calibri" charset="0"/>
+                      </a:endParaRPr>
+                    </a:p>
+                  </a:txBody>
+                  <a:tcPr marL="25400" marR="25400" marT="25400" marB="25400">
+                    <a:lnL w="6350" cap="flat" cmpd="sng" algn="ctr">
+                      <a:solidFill>
+                        <a:srgbClr val="E3E7F0"/>
+                      </a:solidFill>
+                      <a:prstDash val="solid"/>
+                      <a:round/>
+                      <a:headEnd type="none" w="med" len="med"/>
+                      <a:tailEnd type="none" w="med" len="med"/>
+                    </a:lnL>
+                    <a:lnR w="6350" cap="flat" cmpd="sng" algn="ctr">
+                      <a:solidFill>
+                        <a:srgbClr val="E3E7F0"/>
+                      </a:solidFill>
+                      <a:prstDash val="solid"/>
+                      <a:round/>
+                      <a:headEnd type="none" w="med" len="med"/>
+                      <a:tailEnd type="none" w="med" len="med"/>
+                    </a:lnR>
+                    <a:lnT w="6350" cap="flat" cmpd="sng" algn="ctr">
+                      <a:solidFill>
+                        <a:srgbClr val="E3E7F0"/>
+                      </a:solidFill>
+                      <a:prstDash val="solid"/>
+                      <a:round/>
+                      <a:headEnd type="none" w="med" len="med"/>
+                      <a:tailEnd type="none" w="med" len="med"/>
+                    </a:lnT>
+                    <a:lnB w="6350" cap="flat" cmpd="sng" algn="ctr">
+                      <a:solidFill>
+                        <a:srgbClr val="E3E7F0"/>
+                      </a:solidFill>
+                      <a:prstDash val="solid"/>
+                      <a:round/>
+                      <a:headEnd type="none" w="med" len="med"/>
+                      <a:tailEnd type="none" w="med" len="med"/>
+                    </a:lnB>
+                  </a:tcPr>
+                </a:tc>
+              </a:tr>
+              <a:tr h="187452">
+                <a:tc>
+                  <a:txBody>
+                    <a:bodyPr/>
+                    <a:lstStyle/>
+                    <a:p>
+                      <a:pPr algn="l" indent="0" marL="0">
+                        <a:buNone/>
+                      </a:pPr>
+                      <a:r>
+                        <a:rPr lang="en-US" sz="850" dirty="0">
+                          <a:solidFill>
+                            <a:srgbClr val="1A1A1A"/>
+                          </a:solidFill>
+                          <a:latin typeface="Calibri" pitchFamily="34" charset="0"/>
+                          <a:ea typeface="Calibri" pitchFamily="34" charset="-122"/>
+                          <a:cs typeface="Calibri" pitchFamily="34" charset="-120"/>
+                        </a:rPr>
+                        <a:t>risk / volatility / beta</a:t>
+                      </a:r>
+                      <a:endParaRPr lang="en-US" sz="850" dirty="0">
+                        <a:latin typeface="Calibri" charset="0"/>
+                        <a:ea typeface="Calibri" charset="0"/>
+                        <a:cs typeface="Calibri" charset="0"/>
+                      </a:endParaRPr>
+                    </a:p>
+                  </a:txBody>
+                  <a:tcPr marL="25400" marR="25400" marT="25400" marB="25400">
+                    <a:lnL w="6350" cap="flat" cmpd="sng" algn="ctr">
+                      <a:solidFill>
+                        <a:srgbClr val="E3E7F0"/>
+                      </a:solidFill>
+                      <a:prstDash val="solid"/>
+                      <a:round/>
+                      <a:headEnd type="none" w="med" len="med"/>
+                      <a:tailEnd type="none" w="med" len="med"/>
+                    </a:lnL>
+                    <a:lnR w="6350" cap="flat" cmpd="sng" algn="ctr">
+                      <a:solidFill>
+                        <a:srgbClr val="E3E7F0"/>
+                      </a:solidFill>
+                      <a:prstDash val="solid"/>
+                      <a:round/>
+                      <a:headEnd type="none" w="med" len="med"/>
+                      <a:tailEnd type="none" w="med" len="med"/>
+                    </a:lnR>
+                    <a:lnT w="6350" cap="flat" cmpd="sng" algn="ctr">
+                      <a:solidFill>
+                        <a:srgbClr val="E3E7F0"/>
+                      </a:solidFill>
+                      <a:prstDash val="solid"/>
+                      <a:round/>
+                      <a:headEnd type="none" w="med" len="med"/>
+                      <a:tailEnd type="none" w="med" len="med"/>
+                    </a:lnT>
+                    <a:lnB w="6350" cap="flat" cmpd="sng" algn="ctr">
+                      <a:solidFill>
+                        <a:srgbClr val="E3E7F0"/>
+                      </a:solidFill>
+                      <a:prstDash val="solid"/>
+                      <a:round/>
+                      <a:headEnd type="none" w="med" len="med"/>
+                      <a:tailEnd type="none" w="med" len="med"/>
+                    </a:lnB>
+                  </a:tcPr>
+                </a:tc>
+                <a:tc>
+                  <a:txBody>
+                    <a:bodyPr/>
+                    <a:lstStyle/>
+                    <a:p>
+                      <a:pPr algn="r" indent="0" marL="0">
+                        <a:buNone/>
+                      </a:pPr>
+                      <a:r>
+                        <a:rPr lang="en-US" sz="850" dirty="0">
+                          <a:solidFill>
+                            <a:srgbClr val="1A1A1A"/>
+                          </a:solidFill>
+                          <a:latin typeface="Calibri" pitchFamily="34" charset="0"/>
+                          <a:ea typeface="Calibri" pitchFamily="34" charset="-122"/>
+                          <a:cs typeface="Calibri" pitchFamily="34" charset="-120"/>
+                        </a:rPr>
+                        <a:t>18.6%</a:t>
+                      </a:r>
+                      <a:endParaRPr lang="en-US" sz="850" dirty="0">
+                        <a:latin typeface="Calibri" charset="0"/>
+                        <a:ea typeface="Calibri" charset="0"/>
+                        <a:cs typeface="Calibri" charset="0"/>
+                      </a:endParaRPr>
+                    </a:p>
+                  </a:txBody>
+                  <a:tcPr marL="25400" marR="25400" marT="25400" marB="25400">
+                    <a:lnL w="6350" cap="flat" cmpd="sng" algn="ctr">
+                      <a:solidFill>
+                        <a:srgbClr val="E3E7F0"/>
+                      </a:solidFill>
+                      <a:prstDash val="solid"/>
+                      <a:round/>
+                      <a:headEnd type="none" w="med" len="med"/>
+                      <a:tailEnd type="none" w="med" len="med"/>
+                    </a:lnL>
+                    <a:lnR w="6350" cap="flat" cmpd="sng" algn="ctr">
+                      <a:solidFill>
+                        <a:srgbClr val="E3E7F0"/>
+                      </a:solidFill>
+                      <a:prstDash val="solid"/>
+                      <a:round/>
+                      <a:headEnd type="none" w="med" len="med"/>
+                      <a:tailEnd type="none" w="med" len="med"/>
+                    </a:lnR>
+                    <a:lnT w="6350" cap="flat" cmpd="sng" algn="ctr">
+                      <a:solidFill>
+                        <a:srgbClr val="E3E7F0"/>
+                      </a:solidFill>
+                      <a:prstDash val="solid"/>
+                      <a:round/>
+                      <a:headEnd type="none" w="med" len="med"/>
+                      <a:tailEnd type="none" w="med" len="med"/>
+                    </a:lnT>
+                    <a:lnB w="6350" cap="flat" cmpd="sng" algn="ctr">
+                      <a:solidFill>
+                        <a:srgbClr val="E3E7F0"/>
+                      </a:solidFill>
+                      <a:prstDash val="solid"/>
+                      <a:round/>
+                      <a:headEnd type="none" w="med" len="med"/>
+                      <a:tailEnd type="none" w="med" len="med"/>
+                    </a:lnB>
+                  </a:tcPr>
+                </a:tc>
+              </a:tr>
+              <a:tr h="187452">
+                <a:tc>
+                  <a:txBody>
+                    <a:bodyPr/>
+                    <a:lstStyle/>
+                    <a:p>
+                      <a:pPr algn="l" indent="0" marL="0">
+                        <a:buNone/>
+                      </a:pPr>
+                      <a:r>
+                        <a:rPr lang="en-US" sz="850" dirty="0">
+                          <a:solidFill>
+                            <a:srgbClr val="1A1A1A"/>
+                          </a:solidFill>
+                          <a:latin typeface="Calibri" pitchFamily="34" charset="0"/>
+                          <a:ea typeface="Calibri" pitchFamily="34" charset="-122"/>
+                          <a:cs typeface="Calibri" pitchFamily="34" charset="-120"/>
+                        </a:rPr>
+                        <a:t>past returns / momentum</a:t>
+                      </a:r>
+                      <a:endParaRPr lang="en-US" sz="850" dirty="0">
+                        <a:latin typeface="Calibri" charset="0"/>
+                        <a:ea typeface="Calibri" charset="0"/>
+                        <a:cs typeface="Calibri" charset="0"/>
+                      </a:endParaRPr>
+                    </a:p>
+                  </a:txBody>
+                  <a:tcPr marL="25400" marR="25400" marT="25400" marB="25400">
+                    <a:lnL w="6350" cap="flat" cmpd="sng" algn="ctr">
+                      <a:solidFill>
+                        <a:srgbClr val="E3E7F0"/>
+                      </a:solidFill>
+                      <a:prstDash val="solid"/>
+                      <a:round/>
+                      <a:headEnd type="none" w="med" len="med"/>
+                      <a:tailEnd type="none" w="med" len="med"/>
+                    </a:lnL>
+                    <a:lnR w="6350" cap="flat" cmpd="sng" algn="ctr">
+                      <a:solidFill>
+                        <a:srgbClr val="E3E7F0"/>
+                      </a:solidFill>
+                      <a:prstDash val="solid"/>
+                      <a:round/>
+                      <a:headEnd type="none" w="med" len="med"/>
+                      <a:tailEnd type="none" w="med" len="med"/>
+                    </a:lnR>
+                    <a:lnT w="6350" cap="flat" cmpd="sng" algn="ctr">
+                      <a:solidFill>
+                        <a:srgbClr val="E3E7F0"/>
+                      </a:solidFill>
+                      <a:prstDash val="solid"/>
+                      <a:round/>
+                      <a:headEnd type="none" w="med" len="med"/>
+                      <a:tailEnd type="none" w="med" len="med"/>
+                    </a:lnT>
+                    <a:lnB w="6350" cap="flat" cmpd="sng" algn="ctr">
+                      <a:solidFill>
+                        <a:srgbClr val="E3E7F0"/>
+                      </a:solidFill>
+                      <a:prstDash val="solid"/>
+                      <a:round/>
+                      <a:headEnd type="none" w="med" len="med"/>
+                      <a:tailEnd type="none" w="med" len="med"/>
+                    </a:lnB>
+                  </a:tcPr>
+                </a:tc>
+                <a:tc>
+                  <a:txBody>
+                    <a:bodyPr/>
+                    <a:lstStyle/>
+                    <a:p>
+                      <a:pPr algn="r" indent="0" marL="0">
+                        <a:buNone/>
+                      </a:pPr>
+                      <a:r>
+                        <a:rPr lang="en-US" sz="850" dirty="0">
+                          <a:solidFill>
+                            <a:srgbClr val="1A1A1A"/>
+                          </a:solidFill>
+                          <a:latin typeface="Calibri" pitchFamily="34" charset="0"/>
+                          <a:ea typeface="Calibri" pitchFamily="34" charset="-122"/>
+                          <a:cs typeface="Calibri" pitchFamily="34" charset="-120"/>
+                        </a:rPr>
+                        <a:t>11.1%</a:t>
+                      </a:r>
+                      <a:endParaRPr lang="en-US" sz="850" dirty="0">
+                        <a:latin typeface="Calibri" charset="0"/>
+                        <a:ea typeface="Calibri" charset="0"/>
+                        <a:cs typeface="Calibri" charset="0"/>
+                      </a:endParaRPr>
+                    </a:p>
+                  </a:txBody>
+                  <a:tcPr marL="25400" marR="25400" marT="25400" marB="25400">
+                    <a:lnL w="6350" cap="flat" cmpd="sng" algn="ctr">
+                      <a:solidFill>
+                        <a:srgbClr val="E3E7F0"/>
+                      </a:solidFill>
+                      <a:prstDash val="solid"/>
+                      <a:round/>
+                      <a:headEnd type="none" w="med" len="med"/>
+                      <a:tailEnd type="none" w="med" len="med"/>
+                    </a:lnL>
+                    <a:lnR w="6350" cap="flat" cmpd="sng" algn="ctr">
+                      <a:solidFill>
+                        <a:srgbClr val="E3E7F0"/>
+                      </a:solidFill>
+                      <a:prstDash val="solid"/>
+                      <a:round/>
+                      <a:headEnd type="none" w="med" len="med"/>
+                      <a:tailEnd type="none" w="med" len="med"/>
+                    </a:lnR>
+                    <a:lnT w="6350" cap="flat" cmpd="sng" algn="ctr">
+                      <a:solidFill>
+                        <a:srgbClr val="E3E7F0"/>
+                      </a:solidFill>
+                      <a:prstDash val="solid"/>
+                      <a:round/>
+                      <a:headEnd type="none" w="med" len="med"/>
+                      <a:tailEnd type="none" w="med" len="med"/>
+                    </a:lnT>
+                    <a:lnB w="6350" cap="flat" cmpd="sng" algn="ctr">
+                      <a:solidFill>
+                        <a:srgbClr val="E3E7F0"/>
+                      </a:solidFill>
+                      <a:prstDash val="solid"/>
+                      <a:round/>
+                      <a:headEnd type="none" w="med" len="med"/>
+                      <a:tailEnd type="none" w="med" len="med"/>
+                    </a:lnB>
+                  </a:tcPr>
+                </a:tc>
+              </a:tr>
+              <a:tr h="187452">
+                <a:tc>
+                  <a:txBody>
+                    <a:bodyPr/>
+                    <a:lstStyle/>
+                    <a:p>
+                      <a:pPr algn="l" indent="0" marL="0">
+                        <a:buNone/>
+                      </a:pPr>
+                      <a:r>
+                        <a:rPr lang="en-US" sz="850" dirty="0">
+                          <a:solidFill>
+                            <a:srgbClr val="1A1A1A"/>
+                          </a:solidFill>
+                          <a:latin typeface="Calibri" pitchFamily="34" charset="0"/>
+                          <a:ea typeface="Calibri" pitchFamily="34" charset="-122"/>
+                          <a:cs typeface="Calibri" pitchFamily="34" charset="-120"/>
+                        </a:rPr>
+                        <a:t>liquidity / trading</a:t>
+                      </a:r>
+                      <a:endParaRPr lang="en-US" sz="850" dirty="0">
+                        <a:latin typeface="Calibri" charset="0"/>
+                        <a:ea typeface="Calibri" charset="0"/>
+                        <a:cs typeface="Calibri" charset="0"/>
+                      </a:endParaRPr>
+                    </a:p>
+                  </a:txBody>
+                  <a:tcPr marL="25400" marR="25400" marT="25400" marB="25400">
+                    <a:lnL w="6350" cap="flat" cmpd="sng" algn="ctr">
+                      <a:solidFill>
+                        <a:srgbClr val="E3E7F0"/>
+                      </a:solidFill>
+                      <a:prstDash val="solid"/>
+                      <a:round/>
+                      <a:headEnd type="none" w="med" len="med"/>
+                      <a:tailEnd type="none" w="med" len="med"/>
+                    </a:lnL>
+                    <a:lnR w="6350" cap="flat" cmpd="sng" algn="ctr">
+                      <a:solidFill>
+                        <a:srgbClr val="E3E7F0"/>
+                      </a:solidFill>
+                      <a:prstDash val="solid"/>
+                      <a:round/>
+                      <a:headEnd type="none" w="med" len="med"/>
+                      <a:tailEnd type="none" w="med" len="med"/>
+                    </a:lnR>
+                    <a:lnT w="6350" cap="flat" cmpd="sng" algn="ctr">
+                      <a:solidFill>
+                        <a:srgbClr val="E3E7F0"/>
+                      </a:solidFill>
+                      <a:prstDash val="solid"/>
+                      <a:round/>
+                      <a:headEnd type="none" w="med" len="med"/>
+                      <a:tailEnd type="none" w="med" len="med"/>
+                    </a:lnT>
+                    <a:lnB w="6350" cap="flat" cmpd="sng" algn="ctr">
+                      <a:solidFill>
+                        <a:srgbClr val="E3E7F0"/>
+                      </a:solidFill>
+                      <a:prstDash val="solid"/>
+                      <a:round/>
+                      <a:headEnd type="none" w="med" len="med"/>
+                      <a:tailEnd type="none" w="med" len="med"/>
+                    </a:lnB>
+                  </a:tcPr>
+                </a:tc>
+                <a:tc>
+                  <a:txBody>
+                    <a:bodyPr/>
+                    <a:lstStyle/>
+                    <a:p>
+                      <a:pPr algn="r" indent="0" marL="0">
+                        <a:buNone/>
+                      </a:pPr>
+                      <a:r>
+                        <a:rPr lang="en-US" sz="850" dirty="0">
+                          <a:solidFill>
+                            <a:srgbClr val="1A1A1A"/>
+                          </a:solidFill>
+                          <a:latin typeface="Calibri" pitchFamily="34" charset="0"/>
+                          <a:ea typeface="Calibri" pitchFamily="34" charset="-122"/>
+                          <a:cs typeface="Calibri" pitchFamily="34" charset="-120"/>
+                        </a:rPr>
+                        <a:t>10.9%</a:t>
+                      </a:r>
+                      <a:endParaRPr lang="en-US" sz="850" dirty="0">
+                        <a:latin typeface="Calibri" charset="0"/>
+                        <a:ea typeface="Calibri" charset="0"/>
+                        <a:cs typeface="Calibri" charset="0"/>
+                      </a:endParaRPr>
+                    </a:p>
+                  </a:txBody>
+                  <a:tcPr marL="25400" marR="25400" marT="25400" marB="25400">
+                    <a:lnL w="6350" cap="flat" cmpd="sng" algn="ctr">
+                      <a:solidFill>
+                        <a:srgbClr val="E3E7F0"/>
+                      </a:solidFill>
+                      <a:prstDash val="solid"/>
+                      <a:round/>
+                      <a:headEnd type="none" w="med" len="med"/>
+                      <a:tailEnd type="none" w="med" len="med"/>
+                    </a:lnL>
+                    <a:lnR w="6350" cap="flat" cmpd="sng" algn="ctr">
+                      <a:solidFill>
+                        <a:srgbClr val="E3E7F0"/>
+                      </a:solidFill>
+                      <a:prstDash val="solid"/>
+                      <a:round/>
+                      <a:headEnd type="none" w="med" len="med"/>
+                      <a:tailEnd type="none" w="med" len="med"/>
+                    </a:lnR>
+                    <a:lnT w="6350" cap="flat" cmpd="sng" algn="ctr">
+                      <a:solidFill>
+                        <a:srgbClr val="E3E7F0"/>
+                      </a:solidFill>
+                      <a:prstDash val="solid"/>
+                      <a:round/>
+                      <a:headEnd type="none" w="med" len="med"/>
+                      <a:tailEnd type="none" w="med" len="med"/>
+                    </a:lnT>
+                    <a:lnB w="6350" cap="flat" cmpd="sng" algn="ctr">
+                      <a:solidFill>
+                        <a:srgbClr val="E3E7F0"/>
+                      </a:solidFill>
+                      <a:prstDash val="solid"/>
+                      <a:round/>
+                      <a:headEnd type="none" w="med" len="med"/>
+                      <a:tailEnd type="none" w="med" len="med"/>
+                    </a:lnB>
+                  </a:tcPr>
+                </a:tc>
+              </a:tr>
+              <a:tr h="187452">
+                <a:tc>
+                  <a:txBody>
+                    <a:bodyPr/>
+                    <a:lstStyle/>
+                    <a:p>
+                      <a:pPr algn="l" indent="0" marL="0">
+                        <a:buNone/>
+                      </a:pPr>
+                      <a:r>
+                        <a:rPr lang="en-US" sz="850" dirty="0">
+                          <a:solidFill>
+                            <a:srgbClr val="1A1A1A"/>
+                          </a:solidFill>
+                          <a:latin typeface="Calibri" pitchFamily="34" charset="0"/>
+                          <a:ea typeface="Calibri" pitchFamily="34" charset="-122"/>
+                          <a:cs typeface="Calibri" pitchFamily="34" charset="-120"/>
+                        </a:rPr>
+                        <a:t>valuation</a:t>
+                      </a:r>
+                      <a:endParaRPr lang="en-US" sz="850" dirty="0">
+                        <a:latin typeface="Calibri" charset="0"/>
+                        <a:ea typeface="Calibri" charset="0"/>
+                        <a:cs typeface="Calibri" charset="0"/>
+                      </a:endParaRPr>
+                    </a:p>
+                  </a:txBody>
+                  <a:tcPr marL="25400" marR="25400" marT="25400" marB="25400">
+                    <a:lnL w="6350" cap="flat" cmpd="sng" algn="ctr">
+                      <a:solidFill>
+                        <a:srgbClr val="E3E7F0"/>
+                      </a:solidFill>
+                      <a:prstDash val="solid"/>
+                      <a:round/>
+                      <a:headEnd type="none" w="med" len="med"/>
+                      <a:tailEnd type="none" w="med" len="med"/>
+                    </a:lnL>
+                    <a:lnR w="6350" cap="flat" cmpd="sng" algn="ctr">
+                      <a:solidFill>
+                        <a:srgbClr val="E3E7F0"/>
+                      </a:solidFill>
+                      <a:prstDash val="solid"/>
+                      <a:round/>
+                      <a:headEnd type="none" w="med" len="med"/>
+                      <a:tailEnd type="none" w="med" len="med"/>
+                    </a:lnR>
+                    <a:lnT w="6350" cap="flat" cmpd="sng" algn="ctr">
+                      <a:solidFill>
+                        <a:srgbClr val="E3E7F0"/>
+                      </a:solidFill>
+                      <a:prstDash val="solid"/>
+                      <a:round/>
+                      <a:headEnd type="none" w="med" len="med"/>
+                      <a:tailEnd type="none" w="med" len="med"/>
+                    </a:lnT>
+                    <a:lnB w="6350" cap="flat" cmpd="sng" algn="ctr">
+                      <a:solidFill>
+                        <a:srgbClr val="E3E7F0"/>
+                      </a:solidFill>
+                      <a:prstDash val="solid"/>
+                      <a:round/>
+                      <a:headEnd type="none" w="med" len="med"/>
+                      <a:tailEnd type="none" w="med" len="med"/>
+                    </a:lnB>
+                  </a:tcPr>
+                </a:tc>
+                <a:tc>
+                  <a:txBody>
+                    <a:bodyPr/>
+                    <a:lstStyle/>
+                    <a:p>
+                      <a:pPr algn="r" indent="0" marL="0">
+                        <a:buNone/>
+                      </a:pPr>
+                      <a:r>
+                        <a:rPr lang="en-US" sz="850" dirty="0">
+                          <a:solidFill>
+                            <a:srgbClr val="1A1A1A"/>
+                          </a:solidFill>
+                          <a:latin typeface="Calibri" pitchFamily="34" charset="0"/>
+                          <a:ea typeface="Calibri" pitchFamily="34" charset="-122"/>
+                          <a:cs typeface="Calibri" pitchFamily="34" charset="-120"/>
+                        </a:rPr>
+                        <a:t>10.8%</a:t>
+                      </a:r>
+                      <a:endParaRPr lang="en-US" sz="850" dirty="0">
+                        <a:latin typeface="Calibri" charset="0"/>
+                        <a:ea typeface="Calibri" charset="0"/>
+                        <a:cs typeface="Calibri" charset="0"/>
+                      </a:endParaRPr>
+                    </a:p>
+                  </a:txBody>
+                  <a:tcPr marL="25400" marR="25400" marT="25400" marB="25400">
+                    <a:lnL w="6350" cap="flat" cmpd="sng" algn="ctr">
+                      <a:solidFill>
+                        <a:srgbClr val="E3E7F0"/>
+                      </a:solidFill>
+                      <a:prstDash val="solid"/>
+                      <a:round/>
+                      <a:headEnd type="none" w="med" len="med"/>
+                      <a:tailEnd type="none" w="med" len="med"/>
+                    </a:lnL>
+                    <a:lnR w="6350" cap="flat" cmpd="sng" algn="ctr">
+                      <a:solidFill>
+                        <a:srgbClr val="E3E7F0"/>
+                      </a:solidFill>
+                      <a:prstDash val="solid"/>
+                      <a:round/>
+                      <a:headEnd type="none" w="med" len="med"/>
+                      <a:tailEnd type="none" w="med" len="med"/>
+                    </a:lnR>
+                    <a:lnT w="6350" cap="flat" cmpd="sng" algn="ctr">
+                      <a:solidFill>
+                        <a:srgbClr val="E3E7F0"/>
+                      </a:solidFill>
+                      <a:prstDash val="solid"/>
+                      <a:round/>
+                      <a:headEnd type="none" w="med" len="med"/>
+                      <a:tailEnd type="none" w="med" len="med"/>
+                    </a:lnT>
+                    <a:lnB w="6350" cap="flat" cmpd="sng" algn="ctr">
+                      <a:solidFill>
+                        <a:srgbClr val="E3E7F0"/>
+                      </a:solidFill>
+                      <a:prstDash val="solid"/>
+                      <a:round/>
+                      <a:headEnd type="none" w="med" len="med"/>
+                      <a:tailEnd type="none" w="med" len="med"/>
+                    </a:lnB>
+                  </a:tcPr>
+                </a:tc>
+              </a:tr>
+              <a:tr h="187452">
+                <a:tc>
+                  <a:txBody>
+                    <a:bodyPr/>
+                    <a:lstStyle/>
+                    <a:p>
+                      <a:pPr algn="l" indent="0" marL="0">
+                        <a:buNone/>
+                      </a:pPr>
+                      <a:r>
+                        <a:rPr lang="en-US" sz="850" dirty="0">
+                          <a:solidFill>
+                            <a:srgbClr val="1A1A1A"/>
+                          </a:solidFill>
+                          <a:latin typeface="Calibri" pitchFamily="34" charset="0"/>
+                          <a:ea typeface="Calibri" pitchFamily="34" charset="-122"/>
+                          <a:cs typeface="Calibri" pitchFamily="34" charset="-120"/>
+                        </a:rPr>
+                        <a:t>accruals / quality / distress</a:t>
+                      </a:r>
+                      <a:endParaRPr lang="en-US" sz="850" dirty="0">
+                        <a:latin typeface="Calibri" charset="0"/>
+                        <a:ea typeface="Calibri" charset="0"/>
+                        <a:cs typeface="Calibri" charset="0"/>
+                      </a:endParaRPr>
+                    </a:p>
+                  </a:txBody>
+                  <a:tcPr marL="25400" marR="25400" marT="25400" marB="25400">
+                    <a:lnL w="6350" cap="flat" cmpd="sng" algn="ctr">
+                      <a:solidFill>
+                        <a:srgbClr val="E3E7F0"/>
+                      </a:solidFill>
+                      <a:prstDash val="solid"/>
+                      <a:round/>
+                      <a:headEnd type="none" w="med" len="med"/>
+                      <a:tailEnd type="none" w="med" len="med"/>
+                    </a:lnL>
+                    <a:lnR w="6350" cap="flat" cmpd="sng" algn="ctr">
+                      <a:solidFill>
+                        <a:srgbClr val="E3E7F0"/>
+                      </a:solidFill>
+                      <a:prstDash val="solid"/>
+                      <a:round/>
+                      <a:headEnd type="none" w="med" len="med"/>
+                      <a:tailEnd type="none" w="med" len="med"/>
+                    </a:lnR>
+                    <a:lnT w="6350" cap="flat" cmpd="sng" algn="ctr">
+                      <a:solidFill>
+                        <a:srgbClr val="E3E7F0"/>
+                      </a:solidFill>
+                      <a:prstDash val="solid"/>
+                      <a:round/>
+                      <a:headEnd type="none" w="med" len="med"/>
+                      <a:tailEnd type="none" w="med" len="med"/>
+                    </a:lnT>
+                    <a:lnB w="6350" cap="flat" cmpd="sng" algn="ctr">
+                      <a:solidFill>
+                        <a:srgbClr val="E3E7F0"/>
+                      </a:solidFill>
+                      <a:prstDash val="solid"/>
+                      <a:round/>
+                      <a:headEnd type="none" w="med" len="med"/>
+                      <a:tailEnd type="none" w="med" len="med"/>
+                    </a:lnB>
+                  </a:tcPr>
+                </a:tc>
+                <a:tc>
+                  <a:txBody>
+                    <a:bodyPr/>
+                    <a:lstStyle/>
+                    <a:p>
+                      <a:pPr algn="r" indent="0" marL="0">
+                        <a:buNone/>
+                      </a:pPr>
+                      <a:r>
+                        <a:rPr lang="en-US" sz="850" dirty="0">
+                          <a:solidFill>
+                            <a:srgbClr val="1A1A1A"/>
+                          </a:solidFill>
+                          <a:latin typeface="Calibri" pitchFamily="34" charset="0"/>
+                          <a:ea typeface="Calibri" pitchFamily="34" charset="-122"/>
+                          <a:cs typeface="Calibri" pitchFamily="34" charset="-120"/>
+                        </a:rPr>
+                        <a:t>9.0%</a:t>
+                      </a:r>
+                      <a:endParaRPr lang="en-US" sz="850" dirty="0">
+                        <a:latin typeface="Calibri" charset="0"/>
+                        <a:ea typeface="Calibri" charset="0"/>
+                        <a:cs typeface="Calibri" charset="0"/>
+                      </a:endParaRPr>
+                    </a:p>
+                  </a:txBody>
+                  <a:tcPr marL="25400" marR="25400" marT="25400" marB="25400">
+                    <a:lnL w="6350" cap="flat" cmpd="sng" algn="ctr">
+                      <a:solidFill>
+                        <a:srgbClr val="E3E7F0"/>
+                      </a:solidFill>
+                      <a:prstDash val="solid"/>
+                      <a:round/>
+                      <a:headEnd type="none" w="med" len="med"/>
+                      <a:tailEnd type="none" w="med" len="med"/>
+                    </a:lnL>
+                    <a:lnR w="6350" cap="flat" cmpd="sng" algn="ctr">
+                      <a:solidFill>
+                        <a:srgbClr val="E3E7F0"/>
+                      </a:solidFill>
+                      <a:prstDash val="solid"/>
+                      <a:round/>
+                      <a:headEnd type="none" w="med" len="med"/>
+                      <a:tailEnd type="none" w="med" len="med"/>
+                    </a:lnR>
+                    <a:lnT w="6350" cap="flat" cmpd="sng" algn="ctr">
+                      <a:solidFill>
+                        <a:srgbClr val="E3E7F0"/>
+                      </a:solidFill>
+                      <a:prstDash val="solid"/>
+                      <a:round/>
+                      <a:headEnd type="none" w="med" len="med"/>
+                      <a:tailEnd type="none" w="med" len="med"/>
+                    </a:lnT>
+                    <a:lnB w="6350" cap="flat" cmpd="sng" algn="ctr">
+                      <a:solidFill>
+                        <a:srgbClr val="E3E7F0"/>
+                      </a:solidFill>
+                      <a:prstDash val="solid"/>
+                      <a:round/>
+                      <a:headEnd type="none" w="med" len="med"/>
+                      <a:tailEnd type="none" w="med" len="med"/>
+                    </a:lnB>
+                  </a:tcPr>
+                </a:tc>
+              </a:tr>
+            </a:tbl>
+          </a:graphicData>
+        </a:graphic>
+      </p:graphicFrame>
       <p:sp>
         <p:nvSpPr>
-          <p:cNvPr id="10" name="Text 7"/>
+          <p:cNvPr id="11" name="Text 7"/>
           <p:cNvSpPr txBox="1"/>
           <p:nvPr/>
         </p:nvSpPr>
         <p:spPr>
           <a:xfrm>
-            <a:off x="6309360" y="1773936"/>
-            <a:ext cx="5303520" cy="1463040"/>
+            <a:off x="6172200" y="3328416"/>
+            <a:ext cx="5440680" cy="219456"/>
           </a:xfrm>
           <a:prstGeom prst="rect">
             <a:avLst/>
@@ -18166,120 +19258,2248 @@
           <a:ln/>
         </p:spPr>
         <p:txBody>
-          <a:bodyPr wrap="square" lIns="0" tIns="0" rIns="0" bIns="0" rtlCol="0" anchor="t"/>
+          <a:bodyPr wrap="square" lIns="0" tIns="0" rIns="0" bIns="0" rtlCol="0" anchor="ctr"/>
           <a:lstStyle/>
           <a:p>
-            <a:pPr marL="342900" indent="-342900">
-              <a:lnSpc>
-                <a:spcPct val="105000"/>
-              </a:lnSpc>
-              <a:spcAft>
-                <a:spcPts val="600"/>
-              </a:spcAft>
-              <a:buSzPct val="100000"/>
-              <a:buChar char="•"/>
+            <a:pPr indent="0" marL="0">
+              <a:buNone/>
             </a:pPr>
             <a:r>
-              <a:rPr lang="en-US" sz="1050" dirty="0">
+              <a:rPr lang="en-US" sz="1050" b="1" dirty="0">
                 <a:solidFill>
-                  <a:srgbClr val="1A1A1A"/>
+                  <a:srgbClr val="1E2761"/>
                 </a:solidFill>
                 <a:latin typeface="Calibri" pitchFamily="34" charset="0"/>
                 <a:ea typeface="Calibri" pitchFamily="34" charset="-122"/>
                 <a:cs typeface="Calibri" pitchFamily="34" charset="-120"/>
               </a:rPr>
-              <a:t>27 single-signal tests on item codes. None survives a monthly cross-sectional regression with controls.</a:t>
-            </a:r>
-            <a:endParaRPr lang="en-US" sz="1050" dirty="0"/>
-          </a:p>
-          <a:p>
-            <a:pPr marL="342900" indent="-342900">
-              <a:lnSpc>
-                <a:spcPct val="105000"/>
-              </a:lnSpc>
-              <a:spcAft>
-                <a:spcPts val="600"/>
-              </a:spcAft>
-              <a:buSzPct val="100000"/>
-              <a:buChar char="•"/>
-            </a:pPr>
-            <a:r>
-              <a:rPr lang="en-US" sz="1050" dirty="0">
-                <a:solidFill>
-                  <a:srgbClr val="1A1A1A"/>
-                </a:solidFill>
-                <a:latin typeface="Calibri" pitchFamily="34" charset="0"/>
-                <a:ea typeface="Calibri" pitchFamily="34" charset="-122"/>
-                <a:cs typeface="Calibri" pitchFamily="34" charset="-120"/>
-              </a:rPr>
-              <a:t>Joined into the model: validation rank correlation +0.1087 without, +0.1082 with. No gain.</a:t>
-            </a:r>
-            <a:endParaRPr lang="en-US" sz="1050" dirty="0"/>
-          </a:p>
-          <a:p>
-            <a:pPr marL="342900" indent="-342900">
-              <a:lnSpc>
-                <a:spcPct val="105000"/>
-              </a:lnSpc>
-              <a:spcAft>
-                <a:spcPts val="600"/>
-              </a:spcAft>
-              <a:buSzPct val="100000"/>
-              <a:buChar char="•"/>
-            </a:pPr>
-            <a:r>
-              <a:rPr lang="en-US" sz="1050" dirty="0">
-                <a:solidFill>
-                  <a:srgbClr val="1A1A1A"/>
-                </a:solidFill>
-                <a:latin typeface="Calibri" pitchFamily="34" charset="0"/>
-                <a:ea typeface="Calibri" pitchFamily="34" charset="-122"/>
-                <a:cs typeface="Calibri" pitchFamily="34" charset="-120"/>
-              </a:rPr>
-              <a:t>The model's own usage agrees - the ten filing columns take 1.71% of its attention against the 6.37% an average feature would.</a:t>
-            </a:r>
-            <a:endParaRPr lang="en-US" sz="1050" dirty="0"/>
-          </a:p>
-          <a:p>
-            <a:pPr marL="342900" indent="-342900">
-              <a:lnSpc>
-                <a:spcPct val="105000"/>
-              </a:lnSpc>
-              <a:spcAft>
-                <a:spcPts val="600"/>
-              </a:spcAft>
-              <a:buSzPct val="100000"/>
-              <a:buChar char="•"/>
-            </a:pPr>
-            <a:r>
-              <a:rPr lang="en-US" sz="1050" dirty="0">
-                <a:solidFill>
-                  <a:srgbClr val="1A1A1A"/>
-                </a:solidFill>
-                <a:latin typeface="Calibri" pitchFamily="34" charset="0"/>
-                <a:ea typeface="Calibri" pitchFamily="34" charset="-122"/>
-                <a:cs typeface="Calibri" pitchFamily="34" charset="-120"/>
-              </a:rPr>
-              <a:t>One exception: item 5.02 is null in aggregate (+0.046%/mo, t=+0.5) but splits into abrupt departures at -0.640%/mo (t=-1.9) and routine appointments at +0.121%.</a:t>
+              <a:t>Ten most used characteristics, averaged over six annual refits</a:t>
             </a:r>
             <a:endParaRPr lang="en-US" sz="1050" dirty="0"/>
           </a:p>
         </p:txBody>
       </p:sp>
+      <p:graphicFrame>
+        <p:nvGraphicFramePr>
+          <p:cNvPr id="10" name="Table 2"/>
+          <p:cNvGraphicFramePr>
+            <a:graphicFrameLocks noGrp="1"/>
+          </p:cNvGraphicFramePr>
+          <p:nvPr>
+            <p:extLst>
+              <p:ext uri="{D42A27DB-BD31-4B8C-83A1-F6EECF244321}">
+                <p14:modId xmlns:p14="http://schemas.microsoft.com/office/powerpoint/2010/main" val="1579011935"/>
+              </p:ext>
+            </p:extLst>
+          </p:nvPr>
+        </p:nvGraphicFramePr>
+        <p:xfrm>
+          <a:off x="6172200" y="3584448"/>
+          <a:ext cx="5440680" cy="914400"/>
+        </p:xfrm>
+        <a:graphic>
+          <a:graphicData uri="http://schemas.openxmlformats.org/drawingml/2006/table">
+            <a:tbl>
+              <a:tblPr/>
+              <a:tblGrid>
+                <a:gridCol w="1600200"/>
+                <a:gridCol w="2834640"/>
+                <a:gridCol w="1005840"/>
+              </a:tblGrid>
+              <a:tr h="187452">
+                <a:tc>
+                  <a:txBody>
+                    <a:bodyPr/>
+                    <a:lstStyle/>
+                    <a:p>
+                      <a:pPr algn="l" indent="0" marL="0">
+                        <a:buNone/>
+                      </a:pPr>
+                      <a:r>
+                        <a:rPr lang="en-US" sz="750" b="1" dirty="0">
+                          <a:solidFill>
+                            <a:srgbClr val="FFFFFF"/>
+                          </a:solidFill>
+                          <a:latin typeface="Calibri" pitchFamily="34" charset="0"/>
+                          <a:ea typeface="Calibri" pitchFamily="34" charset="-122"/>
+                          <a:cs typeface="Calibri" pitchFamily="34" charset="-120"/>
+                        </a:rPr>
+                        <a:t>Characteristic</a:t>
+                      </a:r>
+                      <a:endParaRPr lang="en-US" sz="750" dirty="0">
+                        <a:latin typeface="Calibri" charset="0"/>
+                        <a:ea typeface="Calibri" charset="0"/>
+                        <a:cs typeface="Calibri" charset="0"/>
+                      </a:endParaRPr>
+                    </a:p>
+                  </a:txBody>
+                  <a:tcPr marL="25400" marR="25400" marT="25400" marB="25400">
+                    <a:lnL w="6350" cap="flat" cmpd="sng" algn="ctr">
+                      <a:solidFill>
+                        <a:srgbClr val="E3E7F0"/>
+                      </a:solidFill>
+                      <a:prstDash val="solid"/>
+                      <a:round/>
+                      <a:headEnd type="none" w="med" len="med"/>
+                      <a:tailEnd type="none" w="med" len="med"/>
+                    </a:lnL>
+                    <a:lnR w="6350" cap="flat" cmpd="sng" algn="ctr">
+                      <a:solidFill>
+                        <a:srgbClr val="E3E7F0"/>
+                      </a:solidFill>
+                      <a:prstDash val="solid"/>
+                      <a:round/>
+                      <a:headEnd type="none" w="med" len="med"/>
+                      <a:tailEnd type="none" w="med" len="med"/>
+                    </a:lnR>
+                    <a:lnT w="6350" cap="flat" cmpd="sng" algn="ctr">
+                      <a:solidFill>
+                        <a:srgbClr val="E3E7F0"/>
+                      </a:solidFill>
+                      <a:prstDash val="solid"/>
+                      <a:round/>
+                      <a:headEnd type="none" w="med" len="med"/>
+                      <a:tailEnd type="none" w="med" len="med"/>
+                    </a:lnT>
+                    <a:lnB w="6350" cap="flat" cmpd="sng" algn="ctr">
+                      <a:solidFill>
+                        <a:srgbClr val="E3E7F0"/>
+                      </a:solidFill>
+                      <a:prstDash val="solid"/>
+                      <a:round/>
+                      <a:headEnd type="none" w="med" len="med"/>
+                      <a:tailEnd type="none" w="med" len="med"/>
+                    </a:lnB>
+                    <a:solidFill>
+                      <a:srgbClr val="1E2761"/>
+                    </a:solidFill>
+                  </a:tcPr>
+                </a:tc>
+                <a:tc>
+                  <a:txBody>
+                    <a:bodyPr/>
+                    <a:lstStyle/>
+                    <a:p>
+                      <a:pPr algn="r" indent="0" marL="0">
+                        <a:buNone/>
+                      </a:pPr>
+                      <a:r>
+                        <a:rPr lang="en-US" sz="750" b="1" dirty="0">
+                          <a:solidFill>
+                            <a:srgbClr val="FFFFFF"/>
+                          </a:solidFill>
+                          <a:latin typeface="Calibri" pitchFamily="34" charset="0"/>
+                          <a:ea typeface="Calibri" pitchFamily="34" charset="-122"/>
+                          <a:cs typeface="Calibri" pitchFamily="34" charset="-120"/>
+                        </a:rPr>
+                        <a:t>What it measures</a:t>
+                      </a:r>
+                      <a:endParaRPr lang="en-US" sz="750" dirty="0">
+                        <a:latin typeface="Calibri" charset="0"/>
+                        <a:ea typeface="Calibri" charset="0"/>
+                        <a:cs typeface="Calibri" charset="0"/>
+                      </a:endParaRPr>
+                    </a:p>
+                  </a:txBody>
+                  <a:tcPr marL="25400" marR="25400" marT="25400" marB="25400">
+                    <a:lnL w="6350" cap="flat" cmpd="sng" algn="ctr">
+                      <a:solidFill>
+                        <a:srgbClr val="E3E7F0"/>
+                      </a:solidFill>
+                      <a:prstDash val="solid"/>
+                      <a:round/>
+                      <a:headEnd type="none" w="med" len="med"/>
+                      <a:tailEnd type="none" w="med" len="med"/>
+                    </a:lnL>
+                    <a:lnR w="6350" cap="flat" cmpd="sng" algn="ctr">
+                      <a:solidFill>
+                        <a:srgbClr val="E3E7F0"/>
+                      </a:solidFill>
+                      <a:prstDash val="solid"/>
+                      <a:round/>
+                      <a:headEnd type="none" w="med" len="med"/>
+                      <a:tailEnd type="none" w="med" len="med"/>
+                    </a:lnR>
+                    <a:lnT w="6350" cap="flat" cmpd="sng" algn="ctr">
+                      <a:solidFill>
+                        <a:srgbClr val="E3E7F0"/>
+                      </a:solidFill>
+                      <a:prstDash val="solid"/>
+                      <a:round/>
+                      <a:headEnd type="none" w="med" len="med"/>
+                      <a:tailEnd type="none" w="med" len="med"/>
+                    </a:lnT>
+                    <a:lnB w="6350" cap="flat" cmpd="sng" algn="ctr">
+                      <a:solidFill>
+                        <a:srgbClr val="E3E7F0"/>
+                      </a:solidFill>
+                      <a:prstDash val="solid"/>
+                      <a:round/>
+                      <a:headEnd type="none" w="med" len="med"/>
+                      <a:tailEnd type="none" w="med" len="med"/>
+                    </a:lnB>
+                    <a:solidFill>
+                      <a:srgbClr val="1E2761"/>
+                    </a:solidFill>
+                  </a:tcPr>
+                </a:tc>
+                <a:tc>
+                  <a:txBody>
+                    <a:bodyPr/>
+                    <a:lstStyle/>
+                    <a:p>
+                      <a:pPr algn="r" indent="0" marL="0">
+                        <a:buNone/>
+                      </a:pPr>
+                      <a:r>
+                        <a:rPr lang="en-US" sz="750" b="1" dirty="0">
+                          <a:solidFill>
+                            <a:srgbClr val="FFFFFF"/>
+                          </a:solidFill>
+                          <a:latin typeface="Calibri" pitchFamily="34" charset="0"/>
+                          <a:ea typeface="Calibri" pitchFamily="34" charset="-122"/>
+                          <a:cs typeface="Calibri" pitchFamily="34" charset="-120"/>
+                        </a:rPr>
+                        <a:t>Share</a:t>
+                      </a:r>
+                      <a:endParaRPr lang="en-US" sz="750" dirty="0">
+                        <a:latin typeface="Calibri" charset="0"/>
+                        <a:ea typeface="Calibri" charset="0"/>
+                        <a:cs typeface="Calibri" charset="0"/>
+                      </a:endParaRPr>
+                    </a:p>
+                  </a:txBody>
+                  <a:tcPr marL="25400" marR="25400" marT="25400" marB="25400">
+                    <a:lnL w="6350" cap="flat" cmpd="sng" algn="ctr">
+                      <a:solidFill>
+                        <a:srgbClr val="E3E7F0"/>
+                      </a:solidFill>
+                      <a:prstDash val="solid"/>
+                      <a:round/>
+                      <a:headEnd type="none" w="med" len="med"/>
+                      <a:tailEnd type="none" w="med" len="med"/>
+                    </a:lnL>
+                    <a:lnR w="6350" cap="flat" cmpd="sng" algn="ctr">
+                      <a:solidFill>
+                        <a:srgbClr val="E3E7F0"/>
+                      </a:solidFill>
+                      <a:prstDash val="solid"/>
+                      <a:round/>
+                      <a:headEnd type="none" w="med" len="med"/>
+                      <a:tailEnd type="none" w="med" len="med"/>
+                    </a:lnR>
+                    <a:lnT w="6350" cap="flat" cmpd="sng" algn="ctr">
+                      <a:solidFill>
+                        <a:srgbClr val="E3E7F0"/>
+                      </a:solidFill>
+                      <a:prstDash val="solid"/>
+                      <a:round/>
+                      <a:headEnd type="none" w="med" len="med"/>
+                      <a:tailEnd type="none" w="med" len="med"/>
+                    </a:lnT>
+                    <a:lnB w="6350" cap="flat" cmpd="sng" algn="ctr">
+                      <a:solidFill>
+                        <a:srgbClr val="E3E7F0"/>
+                      </a:solidFill>
+                      <a:prstDash val="solid"/>
+                      <a:round/>
+                      <a:headEnd type="none" w="med" len="med"/>
+                      <a:tailEnd type="none" w="med" len="med"/>
+                    </a:lnB>
+                    <a:solidFill>
+                      <a:srgbClr val="1E2761"/>
+                    </a:solidFill>
+                  </a:tcPr>
+                </a:tc>
+              </a:tr>
+              <a:tr h="187452">
+                <a:tc>
+                  <a:txBody>
+                    <a:bodyPr/>
+                    <a:lstStyle/>
+                    <a:p>
+                      <a:pPr algn="l" indent="0" marL="0">
+                        <a:buNone/>
+                      </a:pPr>
+                      <a:r>
+                        <a:rPr lang="en-US" sz="800" dirty="0">
+                          <a:solidFill>
+                            <a:srgbClr val="1A1A1A"/>
+                          </a:solidFill>
+                          <a:latin typeface="Calibri" pitchFamily="34" charset="0"/>
+                          <a:ea typeface="Calibri" pitchFamily="34" charset="-122"/>
+                          <a:cs typeface="Calibri" pitchFamily="34" charset="-120"/>
+                        </a:rPr>
+                        <a:t>ivol_capm_252d</a:t>
+                      </a:r>
+                      <a:endParaRPr lang="en-US" sz="800" dirty="0">
+                        <a:latin typeface="Calibri" charset="0"/>
+                        <a:ea typeface="Calibri" charset="0"/>
+                        <a:cs typeface="Calibri" charset="0"/>
+                      </a:endParaRPr>
+                    </a:p>
+                  </a:txBody>
+                  <a:tcPr marL="25400" marR="25400" marT="25400" marB="25400">
+                    <a:lnL w="6350" cap="flat" cmpd="sng" algn="ctr">
+                      <a:solidFill>
+                        <a:srgbClr val="E3E7F0"/>
+                      </a:solidFill>
+                      <a:prstDash val="solid"/>
+                      <a:round/>
+                      <a:headEnd type="none" w="med" len="med"/>
+                      <a:tailEnd type="none" w="med" len="med"/>
+                    </a:lnL>
+                    <a:lnR w="6350" cap="flat" cmpd="sng" algn="ctr">
+                      <a:solidFill>
+                        <a:srgbClr val="E3E7F0"/>
+                      </a:solidFill>
+                      <a:prstDash val="solid"/>
+                      <a:round/>
+                      <a:headEnd type="none" w="med" len="med"/>
+                      <a:tailEnd type="none" w="med" len="med"/>
+                    </a:lnR>
+                    <a:lnT w="6350" cap="flat" cmpd="sng" algn="ctr">
+                      <a:solidFill>
+                        <a:srgbClr val="E3E7F0"/>
+                      </a:solidFill>
+                      <a:prstDash val="solid"/>
+                      <a:round/>
+                      <a:headEnd type="none" w="med" len="med"/>
+                      <a:tailEnd type="none" w="med" len="med"/>
+                    </a:lnT>
+                    <a:lnB w="6350" cap="flat" cmpd="sng" algn="ctr">
+                      <a:solidFill>
+                        <a:srgbClr val="E3E7F0"/>
+                      </a:solidFill>
+                      <a:prstDash val="solid"/>
+                      <a:round/>
+                      <a:headEnd type="none" w="med" len="med"/>
+                      <a:tailEnd type="none" w="med" len="med"/>
+                    </a:lnB>
+                  </a:tcPr>
+                </a:tc>
+                <a:tc>
+                  <a:txBody>
+                    <a:bodyPr/>
+                    <a:lstStyle/>
+                    <a:p>
+                      <a:pPr algn="r" indent="0" marL="0">
+                        <a:buNone/>
+                      </a:pPr>
+                      <a:r>
+                        <a:rPr lang="en-US" sz="800" dirty="0">
+                          <a:solidFill>
+                            <a:srgbClr val="1A1A1A"/>
+                          </a:solidFill>
+                          <a:latin typeface="Calibri" pitchFamily="34" charset="0"/>
+                          <a:ea typeface="Calibri" pitchFamily="34" charset="-122"/>
+                          <a:cs typeface="Calibri" pitchFamily="34" charset="-120"/>
+                        </a:rPr>
+                        <a:t>Idiosyncratic volatility vs CAPM, 252d</a:t>
+                      </a:r>
+                      <a:endParaRPr lang="en-US" sz="800" dirty="0">
+                        <a:latin typeface="Calibri" charset="0"/>
+                        <a:ea typeface="Calibri" charset="0"/>
+                        <a:cs typeface="Calibri" charset="0"/>
+                      </a:endParaRPr>
+                    </a:p>
+                  </a:txBody>
+                  <a:tcPr marL="25400" marR="25400" marT="25400" marB="25400">
+                    <a:lnL w="6350" cap="flat" cmpd="sng" algn="ctr">
+                      <a:solidFill>
+                        <a:srgbClr val="E3E7F0"/>
+                      </a:solidFill>
+                      <a:prstDash val="solid"/>
+                      <a:round/>
+                      <a:headEnd type="none" w="med" len="med"/>
+                      <a:tailEnd type="none" w="med" len="med"/>
+                    </a:lnL>
+                    <a:lnR w="6350" cap="flat" cmpd="sng" algn="ctr">
+                      <a:solidFill>
+                        <a:srgbClr val="E3E7F0"/>
+                      </a:solidFill>
+                      <a:prstDash val="solid"/>
+                      <a:round/>
+                      <a:headEnd type="none" w="med" len="med"/>
+                      <a:tailEnd type="none" w="med" len="med"/>
+                    </a:lnR>
+                    <a:lnT w="6350" cap="flat" cmpd="sng" algn="ctr">
+                      <a:solidFill>
+                        <a:srgbClr val="E3E7F0"/>
+                      </a:solidFill>
+                      <a:prstDash val="solid"/>
+                      <a:round/>
+                      <a:headEnd type="none" w="med" len="med"/>
+                      <a:tailEnd type="none" w="med" len="med"/>
+                    </a:lnT>
+                    <a:lnB w="6350" cap="flat" cmpd="sng" algn="ctr">
+                      <a:solidFill>
+                        <a:srgbClr val="E3E7F0"/>
+                      </a:solidFill>
+                      <a:prstDash val="solid"/>
+                      <a:round/>
+                      <a:headEnd type="none" w="med" len="med"/>
+                      <a:tailEnd type="none" w="med" len="med"/>
+                    </a:lnB>
+                  </a:tcPr>
+                </a:tc>
+                <a:tc>
+                  <a:txBody>
+                    <a:bodyPr/>
+                    <a:lstStyle/>
+                    <a:p>
+                      <a:pPr algn="r" indent="0" marL="0">
+                        <a:buNone/>
+                      </a:pPr>
+                      <a:r>
+                        <a:rPr lang="en-US" sz="800" dirty="0">
+                          <a:solidFill>
+                            <a:srgbClr val="1A1A1A"/>
+                          </a:solidFill>
+                          <a:latin typeface="Calibri" pitchFamily="34" charset="0"/>
+                          <a:ea typeface="Calibri" pitchFamily="34" charset="-122"/>
+                          <a:cs typeface="Calibri" pitchFamily="34" charset="-120"/>
+                        </a:rPr>
+                        <a:t>7.53%</a:t>
+                      </a:r>
+                      <a:endParaRPr lang="en-US" sz="800" dirty="0">
+                        <a:latin typeface="Calibri" charset="0"/>
+                        <a:ea typeface="Calibri" charset="0"/>
+                        <a:cs typeface="Calibri" charset="0"/>
+                      </a:endParaRPr>
+                    </a:p>
+                  </a:txBody>
+                  <a:tcPr marL="25400" marR="25400" marT="25400" marB="25400">
+                    <a:lnL w="6350" cap="flat" cmpd="sng" algn="ctr">
+                      <a:solidFill>
+                        <a:srgbClr val="E3E7F0"/>
+                      </a:solidFill>
+                      <a:prstDash val="solid"/>
+                      <a:round/>
+                      <a:headEnd type="none" w="med" len="med"/>
+                      <a:tailEnd type="none" w="med" len="med"/>
+                    </a:lnL>
+                    <a:lnR w="6350" cap="flat" cmpd="sng" algn="ctr">
+                      <a:solidFill>
+                        <a:srgbClr val="E3E7F0"/>
+                      </a:solidFill>
+                      <a:prstDash val="solid"/>
+                      <a:round/>
+                      <a:headEnd type="none" w="med" len="med"/>
+                      <a:tailEnd type="none" w="med" len="med"/>
+                    </a:lnR>
+                    <a:lnT w="6350" cap="flat" cmpd="sng" algn="ctr">
+                      <a:solidFill>
+                        <a:srgbClr val="E3E7F0"/>
+                      </a:solidFill>
+                      <a:prstDash val="solid"/>
+                      <a:round/>
+                      <a:headEnd type="none" w="med" len="med"/>
+                      <a:tailEnd type="none" w="med" len="med"/>
+                    </a:lnT>
+                    <a:lnB w="6350" cap="flat" cmpd="sng" algn="ctr">
+                      <a:solidFill>
+                        <a:srgbClr val="E3E7F0"/>
+                      </a:solidFill>
+                      <a:prstDash val="solid"/>
+                      <a:round/>
+                      <a:headEnd type="none" w="med" len="med"/>
+                      <a:tailEnd type="none" w="med" len="med"/>
+                    </a:lnB>
+                  </a:tcPr>
+                </a:tc>
+              </a:tr>
+              <a:tr h="187452">
+                <a:tc>
+                  <a:txBody>
+                    <a:bodyPr/>
+                    <a:lstStyle/>
+                    <a:p>
+                      <a:pPr algn="l" indent="0" marL="0">
+                        <a:buNone/>
+                      </a:pPr>
+                      <a:r>
+                        <a:rPr lang="en-US" sz="800" dirty="0">
+                          <a:solidFill>
+                            <a:srgbClr val="1A1A1A"/>
+                          </a:solidFill>
+                          <a:latin typeface="Calibri" pitchFamily="34" charset="0"/>
+                          <a:ea typeface="Calibri" pitchFamily="34" charset="-122"/>
+                          <a:cs typeface="Calibri" pitchFamily="34" charset="-120"/>
+                        </a:rPr>
+                        <a:t>lti_gr1a</a:t>
+                      </a:r>
+                      <a:endParaRPr lang="en-US" sz="800" dirty="0">
+                        <a:latin typeface="Calibri" charset="0"/>
+                        <a:ea typeface="Calibri" charset="0"/>
+                        <a:cs typeface="Calibri" charset="0"/>
+                      </a:endParaRPr>
+                    </a:p>
+                  </a:txBody>
+                  <a:tcPr marL="25400" marR="25400" marT="25400" marB="25400">
+                    <a:lnL w="6350" cap="flat" cmpd="sng" algn="ctr">
+                      <a:solidFill>
+                        <a:srgbClr val="E3E7F0"/>
+                      </a:solidFill>
+                      <a:prstDash val="solid"/>
+                      <a:round/>
+                      <a:headEnd type="none" w="med" len="med"/>
+                      <a:tailEnd type="none" w="med" len="med"/>
+                    </a:lnL>
+                    <a:lnR w="6350" cap="flat" cmpd="sng" algn="ctr">
+                      <a:solidFill>
+                        <a:srgbClr val="E3E7F0"/>
+                      </a:solidFill>
+                      <a:prstDash val="solid"/>
+                      <a:round/>
+                      <a:headEnd type="none" w="med" len="med"/>
+                      <a:tailEnd type="none" w="med" len="med"/>
+                    </a:lnR>
+                    <a:lnT w="6350" cap="flat" cmpd="sng" algn="ctr">
+                      <a:solidFill>
+                        <a:srgbClr val="E3E7F0"/>
+                      </a:solidFill>
+                      <a:prstDash val="solid"/>
+                      <a:round/>
+                      <a:headEnd type="none" w="med" len="med"/>
+                      <a:tailEnd type="none" w="med" len="med"/>
+                    </a:lnT>
+                    <a:lnB w="6350" cap="flat" cmpd="sng" algn="ctr">
+                      <a:solidFill>
+                        <a:srgbClr val="E3E7F0"/>
+                      </a:solidFill>
+                      <a:prstDash val="solid"/>
+                      <a:round/>
+                      <a:headEnd type="none" w="med" len="med"/>
+                      <a:tailEnd type="none" w="med" len="med"/>
+                    </a:lnB>
+                  </a:tcPr>
+                </a:tc>
+                <a:tc>
+                  <a:txBody>
+                    <a:bodyPr/>
+                    <a:lstStyle/>
+                    <a:p>
+                      <a:pPr algn="r" indent="0" marL="0">
+                        <a:buNone/>
+                      </a:pPr>
+                      <a:r>
+                        <a:rPr lang="en-US" sz="800" dirty="0">
+                          <a:solidFill>
+                            <a:srgbClr val="1A1A1A"/>
+                          </a:solidFill>
+                          <a:latin typeface="Calibri" pitchFamily="34" charset="0"/>
+                          <a:ea typeface="Calibri" pitchFamily="34" charset="-122"/>
+                          <a:cs typeface="Calibri" pitchFamily="34" charset="-120"/>
+                        </a:rPr>
+                        <a:t>Growth in long-term investments</a:t>
+                      </a:r>
+                      <a:endParaRPr lang="en-US" sz="800" dirty="0">
+                        <a:latin typeface="Calibri" charset="0"/>
+                        <a:ea typeface="Calibri" charset="0"/>
+                        <a:cs typeface="Calibri" charset="0"/>
+                      </a:endParaRPr>
+                    </a:p>
+                  </a:txBody>
+                  <a:tcPr marL="25400" marR="25400" marT="25400" marB="25400">
+                    <a:lnL w="6350" cap="flat" cmpd="sng" algn="ctr">
+                      <a:solidFill>
+                        <a:srgbClr val="E3E7F0"/>
+                      </a:solidFill>
+                      <a:prstDash val="solid"/>
+                      <a:round/>
+                      <a:headEnd type="none" w="med" len="med"/>
+                      <a:tailEnd type="none" w="med" len="med"/>
+                    </a:lnL>
+                    <a:lnR w="6350" cap="flat" cmpd="sng" algn="ctr">
+                      <a:solidFill>
+                        <a:srgbClr val="E3E7F0"/>
+                      </a:solidFill>
+                      <a:prstDash val="solid"/>
+                      <a:round/>
+                      <a:headEnd type="none" w="med" len="med"/>
+                      <a:tailEnd type="none" w="med" len="med"/>
+                    </a:lnR>
+                    <a:lnT w="6350" cap="flat" cmpd="sng" algn="ctr">
+                      <a:solidFill>
+                        <a:srgbClr val="E3E7F0"/>
+                      </a:solidFill>
+                      <a:prstDash val="solid"/>
+                      <a:round/>
+                      <a:headEnd type="none" w="med" len="med"/>
+                      <a:tailEnd type="none" w="med" len="med"/>
+                    </a:lnT>
+                    <a:lnB w="6350" cap="flat" cmpd="sng" algn="ctr">
+                      <a:solidFill>
+                        <a:srgbClr val="E3E7F0"/>
+                      </a:solidFill>
+                      <a:prstDash val="solid"/>
+                      <a:round/>
+                      <a:headEnd type="none" w="med" len="med"/>
+                      <a:tailEnd type="none" w="med" len="med"/>
+                    </a:lnB>
+                  </a:tcPr>
+                </a:tc>
+                <a:tc>
+                  <a:txBody>
+                    <a:bodyPr/>
+                    <a:lstStyle/>
+                    <a:p>
+                      <a:pPr algn="r" indent="0" marL="0">
+                        <a:buNone/>
+                      </a:pPr>
+                      <a:r>
+                        <a:rPr lang="en-US" sz="800" dirty="0">
+                          <a:solidFill>
+                            <a:srgbClr val="1A1A1A"/>
+                          </a:solidFill>
+                          <a:latin typeface="Calibri" pitchFamily="34" charset="0"/>
+                          <a:ea typeface="Calibri" pitchFamily="34" charset="-122"/>
+                          <a:cs typeface="Calibri" pitchFamily="34" charset="-120"/>
+                        </a:rPr>
+                        <a:t>4.67%</a:t>
+                      </a:r>
+                      <a:endParaRPr lang="en-US" sz="800" dirty="0">
+                        <a:latin typeface="Calibri" charset="0"/>
+                        <a:ea typeface="Calibri" charset="0"/>
+                        <a:cs typeface="Calibri" charset="0"/>
+                      </a:endParaRPr>
+                    </a:p>
+                  </a:txBody>
+                  <a:tcPr marL="25400" marR="25400" marT="25400" marB="25400">
+                    <a:lnL w="6350" cap="flat" cmpd="sng" algn="ctr">
+                      <a:solidFill>
+                        <a:srgbClr val="E3E7F0"/>
+                      </a:solidFill>
+                      <a:prstDash val="solid"/>
+                      <a:round/>
+                      <a:headEnd type="none" w="med" len="med"/>
+                      <a:tailEnd type="none" w="med" len="med"/>
+                    </a:lnL>
+                    <a:lnR w="6350" cap="flat" cmpd="sng" algn="ctr">
+                      <a:solidFill>
+                        <a:srgbClr val="E3E7F0"/>
+                      </a:solidFill>
+                      <a:prstDash val="solid"/>
+                      <a:round/>
+                      <a:headEnd type="none" w="med" len="med"/>
+                      <a:tailEnd type="none" w="med" len="med"/>
+                    </a:lnR>
+                    <a:lnT w="6350" cap="flat" cmpd="sng" algn="ctr">
+                      <a:solidFill>
+                        <a:srgbClr val="E3E7F0"/>
+                      </a:solidFill>
+                      <a:prstDash val="solid"/>
+                      <a:round/>
+                      <a:headEnd type="none" w="med" len="med"/>
+                      <a:tailEnd type="none" w="med" len="med"/>
+                    </a:lnT>
+                    <a:lnB w="6350" cap="flat" cmpd="sng" algn="ctr">
+                      <a:solidFill>
+                        <a:srgbClr val="E3E7F0"/>
+                      </a:solidFill>
+                      <a:prstDash val="solid"/>
+                      <a:round/>
+                      <a:headEnd type="none" w="med" len="med"/>
+                      <a:tailEnd type="none" w="med" len="med"/>
+                    </a:lnB>
+                  </a:tcPr>
+                </a:tc>
+              </a:tr>
+              <a:tr h="187452">
+                <a:tc>
+                  <a:txBody>
+                    <a:bodyPr/>
+                    <a:lstStyle/>
+                    <a:p>
+                      <a:pPr algn="l" indent="0" marL="0">
+                        <a:buNone/>
+                      </a:pPr>
+                      <a:r>
+                        <a:rPr lang="en-US" sz="800" dirty="0">
+                          <a:solidFill>
+                            <a:srgbClr val="1A1A1A"/>
+                          </a:solidFill>
+                          <a:latin typeface="Calibri" pitchFamily="34" charset="0"/>
+                          <a:ea typeface="Calibri" pitchFamily="34" charset="-122"/>
+                          <a:cs typeface="Calibri" pitchFamily="34" charset="-120"/>
+                        </a:rPr>
+                        <a:t>op_at</a:t>
+                      </a:r>
+                      <a:endParaRPr lang="en-US" sz="800" dirty="0">
+                        <a:latin typeface="Calibri" charset="0"/>
+                        <a:ea typeface="Calibri" charset="0"/>
+                        <a:cs typeface="Calibri" charset="0"/>
+                      </a:endParaRPr>
+                    </a:p>
+                  </a:txBody>
+                  <a:tcPr marL="25400" marR="25400" marT="25400" marB="25400">
+                    <a:lnL w="6350" cap="flat" cmpd="sng" algn="ctr">
+                      <a:solidFill>
+                        <a:srgbClr val="E3E7F0"/>
+                      </a:solidFill>
+                      <a:prstDash val="solid"/>
+                      <a:round/>
+                      <a:headEnd type="none" w="med" len="med"/>
+                      <a:tailEnd type="none" w="med" len="med"/>
+                    </a:lnL>
+                    <a:lnR w="6350" cap="flat" cmpd="sng" algn="ctr">
+                      <a:solidFill>
+                        <a:srgbClr val="E3E7F0"/>
+                      </a:solidFill>
+                      <a:prstDash val="solid"/>
+                      <a:round/>
+                      <a:headEnd type="none" w="med" len="med"/>
+                      <a:tailEnd type="none" w="med" len="med"/>
+                    </a:lnR>
+                    <a:lnT w="6350" cap="flat" cmpd="sng" algn="ctr">
+                      <a:solidFill>
+                        <a:srgbClr val="E3E7F0"/>
+                      </a:solidFill>
+                      <a:prstDash val="solid"/>
+                      <a:round/>
+                      <a:headEnd type="none" w="med" len="med"/>
+                      <a:tailEnd type="none" w="med" len="med"/>
+                    </a:lnT>
+                    <a:lnB w="6350" cap="flat" cmpd="sng" algn="ctr">
+                      <a:solidFill>
+                        <a:srgbClr val="E3E7F0"/>
+                      </a:solidFill>
+                      <a:prstDash val="solid"/>
+                      <a:round/>
+                      <a:headEnd type="none" w="med" len="med"/>
+                      <a:tailEnd type="none" w="med" len="med"/>
+                    </a:lnB>
+                  </a:tcPr>
+                </a:tc>
+                <a:tc>
+                  <a:txBody>
+                    <a:bodyPr/>
+                    <a:lstStyle/>
+                    <a:p>
+                      <a:pPr algn="r" indent="0" marL="0">
+                        <a:buNone/>
+                      </a:pPr>
+                      <a:r>
+                        <a:rPr lang="en-US" sz="800" dirty="0">
+                          <a:solidFill>
+                            <a:srgbClr val="1A1A1A"/>
+                          </a:solidFill>
+                          <a:latin typeface="Calibri" pitchFamily="34" charset="0"/>
+                          <a:ea typeface="Calibri" pitchFamily="34" charset="-122"/>
+                          <a:cs typeface="Calibri" pitchFamily="34" charset="-120"/>
+                        </a:rPr>
+                        <a:t>Operating profit / assets</a:t>
+                      </a:r>
+                      <a:endParaRPr lang="en-US" sz="800" dirty="0">
+                        <a:latin typeface="Calibri" charset="0"/>
+                        <a:ea typeface="Calibri" charset="0"/>
+                        <a:cs typeface="Calibri" charset="0"/>
+                      </a:endParaRPr>
+                    </a:p>
+                  </a:txBody>
+                  <a:tcPr marL="25400" marR="25400" marT="25400" marB="25400">
+                    <a:lnL w="6350" cap="flat" cmpd="sng" algn="ctr">
+                      <a:solidFill>
+                        <a:srgbClr val="E3E7F0"/>
+                      </a:solidFill>
+                      <a:prstDash val="solid"/>
+                      <a:round/>
+                      <a:headEnd type="none" w="med" len="med"/>
+                      <a:tailEnd type="none" w="med" len="med"/>
+                    </a:lnL>
+                    <a:lnR w="6350" cap="flat" cmpd="sng" algn="ctr">
+                      <a:solidFill>
+                        <a:srgbClr val="E3E7F0"/>
+                      </a:solidFill>
+                      <a:prstDash val="solid"/>
+                      <a:round/>
+                      <a:headEnd type="none" w="med" len="med"/>
+                      <a:tailEnd type="none" w="med" len="med"/>
+                    </a:lnR>
+                    <a:lnT w="6350" cap="flat" cmpd="sng" algn="ctr">
+                      <a:solidFill>
+                        <a:srgbClr val="E3E7F0"/>
+                      </a:solidFill>
+                      <a:prstDash val="solid"/>
+                      <a:round/>
+                      <a:headEnd type="none" w="med" len="med"/>
+                      <a:tailEnd type="none" w="med" len="med"/>
+                    </a:lnT>
+                    <a:lnB w="6350" cap="flat" cmpd="sng" algn="ctr">
+                      <a:solidFill>
+                        <a:srgbClr val="E3E7F0"/>
+                      </a:solidFill>
+                      <a:prstDash val="solid"/>
+                      <a:round/>
+                      <a:headEnd type="none" w="med" len="med"/>
+                      <a:tailEnd type="none" w="med" len="med"/>
+                    </a:lnB>
+                  </a:tcPr>
+                </a:tc>
+                <a:tc>
+                  <a:txBody>
+                    <a:bodyPr/>
+                    <a:lstStyle/>
+                    <a:p>
+                      <a:pPr algn="r" indent="0" marL="0">
+                        <a:buNone/>
+                      </a:pPr>
+                      <a:r>
+                        <a:rPr lang="en-US" sz="800" dirty="0">
+                          <a:solidFill>
+                            <a:srgbClr val="1A1A1A"/>
+                          </a:solidFill>
+                          <a:latin typeface="Calibri" pitchFamily="34" charset="0"/>
+                          <a:ea typeface="Calibri" pitchFamily="34" charset="-122"/>
+                          <a:cs typeface="Calibri" pitchFamily="34" charset="-120"/>
+                        </a:rPr>
+                        <a:t>3.60%</a:t>
+                      </a:r>
+                      <a:endParaRPr lang="en-US" sz="800" dirty="0">
+                        <a:latin typeface="Calibri" charset="0"/>
+                        <a:ea typeface="Calibri" charset="0"/>
+                        <a:cs typeface="Calibri" charset="0"/>
+                      </a:endParaRPr>
+                    </a:p>
+                  </a:txBody>
+                  <a:tcPr marL="25400" marR="25400" marT="25400" marB="25400">
+                    <a:lnL w="6350" cap="flat" cmpd="sng" algn="ctr">
+                      <a:solidFill>
+                        <a:srgbClr val="E3E7F0"/>
+                      </a:solidFill>
+                      <a:prstDash val="solid"/>
+                      <a:round/>
+                      <a:headEnd type="none" w="med" len="med"/>
+                      <a:tailEnd type="none" w="med" len="med"/>
+                    </a:lnL>
+                    <a:lnR w="6350" cap="flat" cmpd="sng" algn="ctr">
+                      <a:solidFill>
+                        <a:srgbClr val="E3E7F0"/>
+                      </a:solidFill>
+                      <a:prstDash val="solid"/>
+                      <a:round/>
+                      <a:headEnd type="none" w="med" len="med"/>
+                      <a:tailEnd type="none" w="med" len="med"/>
+                    </a:lnR>
+                    <a:lnT w="6350" cap="flat" cmpd="sng" algn="ctr">
+                      <a:solidFill>
+                        <a:srgbClr val="E3E7F0"/>
+                      </a:solidFill>
+                      <a:prstDash val="solid"/>
+                      <a:round/>
+                      <a:headEnd type="none" w="med" len="med"/>
+                      <a:tailEnd type="none" w="med" len="med"/>
+                    </a:lnT>
+                    <a:lnB w="6350" cap="flat" cmpd="sng" algn="ctr">
+                      <a:solidFill>
+                        <a:srgbClr val="E3E7F0"/>
+                      </a:solidFill>
+                      <a:prstDash val="solid"/>
+                      <a:round/>
+                      <a:headEnd type="none" w="med" len="med"/>
+                      <a:tailEnd type="none" w="med" len="med"/>
+                    </a:lnB>
+                  </a:tcPr>
+                </a:tc>
+              </a:tr>
+              <a:tr h="187452">
+                <a:tc>
+                  <a:txBody>
+                    <a:bodyPr/>
+                    <a:lstStyle/>
+                    <a:p>
+                      <a:pPr algn="l" indent="0" marL="0">
+                        <a:buNone/>
+                      </a:pPr>
+                      <a:r>
+                        <a:rPr lang="en-US" sz="800" dirty="0">
+                          <a:solidFill>
+                            <a:srgbClr val="1A1A1A"/>
+                          </a:solidFill>
+                          <a:latin typeface="Calibri" pitchFamily="34" charset="0"/>
+                          <a:ea typeface="Calibri" pitchFamily="34" charset="-122"/>
+                          <a:cs typeface="Calibri" pitchFamily="34" charset="-120"/>
+                        </a:rPr>
+                        <a:t>sti_gr1a</a:t>
+                      </a:r>
+                      <a:endParaRPr lang="en-US" sz="800" dirty="0">
+                        <a:latin typeface="Calibri" charset="0"/>
+                        <a:ea typeface="Calibri" charset="0"/>
+                        <a:cs typeface="Calibri" charset="0"/>
+                      </a:endParaRPr>
+                    </a:p>
+                  </a:txBody>
+                  <a:tcPr marL="25400" marR="25400" marT="25400" marB="25400">
+                    <a:lnL w="6350" cap="flat" cmpd="sng" algn="ctr">
+                      <a:solidFill>
+                        <a:srgbClr val="E3E7F0"/>
+                      </a:solidFill>
+                      <a:prstDash val="solid"/>
+                      <a:round/>
+                      <a:headEnd type="none" w="med" len="med"/>
+                      <a:tailEnd type="none" w="med" len="med"/>
+                    </a:lnL>
+                    <a:lnR w="6350" cap="flat" cmpd="sng" algn="ctr">
+                      <a:solidFill>
+                        <a:srgbClr val="E3E7F0"/>
+                      </a:solidFill>
+                      <a:prstDash val="solid"/>
+                      <a:round/>
+                      <a:headEnd type="none" w="med" len="med"/>
+                      <a:tailEnd type="none" w="med" len="med"/>
+                    </a:lnR>
+                    <a:lnT w="6350" cap="flat" cmpd="sng" algn="ctr">
+                      <a:solidFill>
+                        <a:srgbClr val="E3E7F0"/>
+                      </a:solidFill>
+                      <a:prstDash val="solid"/>
+                      <a:round/>
+                      <a:headEnd type="none" w="med" len="med"/>
+                      <a:tailEnd type="none" w="med" len="med"/>
+                    </a:lnT>
+                    <a:lnB w="6350" cap="flat" cmpd="sng" algn="ctr">
+                      <a:solidFill>
+                        <a:srgbClr val="E3E7F0"/>
+                      </a:solidFill>
+                      <a:prstDash val="solid"/>
+                      <a:round/>
+                      <a:headEnd type="none" w="med" len="med"/>
+                      <a:tailEnd type="none" w="med" len="med"/>
+                    </a:lnB>
+                  </a:tcPr>
+                </a:tc>
+                <a:tc>
+                  <a:txBody>
+                    <a:bodyPr/>
+                    <a:lstStyle/>
+                    <a:p>
+                      <a:pPr algn="r" indent="0" marL="0">
+                        <a:buNone/>
+                      </a:pPr>
+                      <a:r>
+                        <a:rPr lang="en-US" sz="800" dirty="0">
+                          <a:solidFill>
+                            <a:srgbClr val="1A1A1A"/>
+                          </a:solidFill>
+                          <a:latin typeface="Calibri" pitchFamily="34" charset="0"/>
+                          <a:ea typeface="Calibri" pitchFamily="34" charset="-122"/>
+                          <a:cs typeface="Calibri" pitchFamily="34" charset="-120"/>
+                        </a:rPr>
+                        <a:t>Growth in short-term investments</a:t>
+                      </a:r>
+                      <a:endParaRPr lang="en-US" sz="800" dirty="0">
+                        <a:latin typeface="Calibri" charset="0"/>
+                        <a:ea typeface="Calibri" charset="0"/>
+                        <a:cs typeface="Calibri" charset="0"/>
+                      </a:endParaRPr>
+                    </a:p>
+                  </a:txBody>
+                  <a:tcPr marL="25400" marR="25400" marT="25400" marB="25400">
+                    <a:lnL w="6350" cap="flat" cmpd="sng" algn="ctr">
+                      <a:solidFill>
+                        <a:srgbClr val="E3E7F0"/>
+                      </a:solidFill>
+                      <a:prstDash val="solid"/>
+                      <a:round/>
+                      <a:headEnd type="none" w="med" len="med"/>
+                      <a:tailEnd type="none" w="med" len="med"/>
+                    </a:lnL>
+                    <a:lnR w="6350" cap="flat" cmpd="sng" algn="ctr">
+                      <a:solidFill>
+                        <a:srgbClr val="E3E7F0"/>
+                      </a:solidFill>
+                      <a:prstDash val="solid"/>
+                      <a:round/>
+                      <a:headEnd type="none" w="med" len="med"/>
+                      <a:tailEnd type="none" w="med" len="med"/>
+                    </a:lnR>
+                    <a:lnT w="6350" cap="flat" cmpd="sng" algn="ctr">
+                      <a:solidFill>
+                        <a:srgbClr val="E3E7F0"/>
+                      </a:solidFill>
+                      <a:prstDash val="solid"/>
+                      <a:round/>
+                      <a:headEnd type="none" w="med" len="med"/>
+                      <a:tailEnd type="none" w="med" len="med"/>
+                    </a:lnT>
+                    <a:lnB w="6350" cap="flat" cmpd="sng" algn="ctr">
+                      <a:solidFill>
+                        <a:srgbClr val="E3E7F0"/>
+                      </a:solidFill>
+                      <a:prstDash val="solid"/>
+                      <a:round/>
+                      <a:headEnd type="none" w="med" len="med"/>
+                      <a:tailEnd type="none" w="med" len="med"/>
+                    </a:lnB>
+                  </a:tcPr>
+                </a:tc>
+                <a:tc>
+                  <a:txBody>
+                    <a:bodyPr/>
+                    <a:lstStyle/>
+                    <a:p>
+                      <a:pPr algn="r" indent="0" marL="0">
+                        <a:buNone/>
+                      </a:pPr>
+                      <a:r>
+                        <a:rPr lang="en-US" sz="800" dirty="0">
+                          <a:solidFill>
+                            <a:srgbClr val="1A1A1A"/>
+                          </a:solidFill>
+                          <a:latin typeface="Calibri" pitchFamily="34" charset="0"/>
+                          <a:ea typeface="Calibri" pitchFamily="34" charset="-122"/>
+                          <a:cs typeface="Calibri" pitchFamily="34" charset="-120"/>
+                        </a:rPr>
+                        <a:t>2.13%</a:t>
+                      </a:r>
+                      <a:endParaRPr lang="en-US" sz="800" dirty="0">
+                        <a:latin typeface="Calibri" charset="0"/>
+                        <a:ea typeface="Calibri" charset="0"/>
+                        <a:cs typeface="Calibri" charset="0"/>
+                      </a:endParaRPr>
+                    </a:p>
+                  </a:txBody>
+                  <a:tcPr marL="25400" marR="25400" marT="25400" marB="25400">
+                    <a:lnL w="6350" cap="flat" cmpd="sng" algn="ctr">
+                      <a:solidFill>
+                        <a:srgbClr val="E3E7F0"/>
+                      </a:solidFill>
+                      <a:prstDash val="solid"/>
+                      <a:round/>
+                      <a:headEnd type="none" w="med" len="med"/>
+                      <a:tailEnd type="none" w="med" len="med"/>
+                    </a:lnL>
+                    <a:lnR w="6350" cap="flat" cmpd="sng" algn="ctr">
+                      <a:solidFill>
+                        <a:srgbClr val="E3E7F0"/>
+                      </a:solidFill>
+                      <a:prstDash val="solid"/>
+                      <a:round/>
+                      <a:headEnd type="none" w="med" len="med"/>
+                      <a:tailEnd type="none" w="med" len="med"/>
+                    </a:lnR>
+                    <a:lnT w="6350" cap="flat" cmpd="sng" algn="ctr">
+                      <a:solidFill>
+                        <a:srgbClr val="E3E7F0"/>
+                      </a:solidFill>
+                      <a:prstDash val="solid"/>
+                      <a:round/>
+                      <a:headEnd type="none" w="med" len="med"/>
+                      <a:tailEnd type="none" w="med" len="med"/>
+                    </a:lnT>
+                    <a:lnB w="6350" cap="flat" cmpd="sng" algn="ctr">
+                      <a:solidFill>
+                        <a:srgbClr val="E3E7F0"/>
+                      </a:solidFill>
+                      <a:prstDash val="solid"/>
+                      <a:round/>
+                      <a:headEnd type="none" w="med" len="med"/>
+                      <a:tailEnd type="none" w="med" len="med"/>
+                    </a:lnB>
+                  </a:tcPr>
+                </a:tc>
+              </a:tr>
+              <a:tr h="187452">
+                <a:tc>
+                  <a:txBody>
+                    <a:bodyPr/>
+                    <a:lstStyle/>
+                    <a:p>
+                      <a:pPr algn="l" indent="0" marL="0">
+                        <a:buNone/>
+                      </a:pPr>
+                      <a:r>
+                        <a:rPr lang="en-US" sz="800" dirty="0">
+                          <a:solidFill>
+                            <a:srgbClr val="1A1A1A"/>
+                          </a:solidFill>
+                          <a:latin typeface="Calibri" pitchFamily="34" charset="0"/>
+                          <a:ea typeface="Calibri" pitchFamily="34" charset="-122"/>
+                          <a:cs typeface="Calibri" pitchFamily="34" charset="-120"/>
+                        </a:rPr>
+                        <a:t>ni_me</a:t>
+                      </a:r>
+                      <a:endParaRPr lang="en-US" sz="800" dirty="0">
+                        <a:latin typeface="Calibri" charset="0"/>
+                        <a:ea typeface="Calibri" charset="0"/>
+                        <a:cs typeface="Calibri" charset="0"/>
+                      </a:endParaRPr>
+                    </a:p>
+                  </a:txBody>
+                  <a:tcPr marL="25400" marR="25400" marT="25400" marB="25400">
+                    <a:lnL w="6350" cap="flat" cmpd="sng" algn="ctr">
+                      <a:solidFill>
+                        <a:srgbClr val="E3E7F0"/>
+                      </a:solidFill>
+                      <a:prstDash val="solid"/>
+                      <a:round/>
+                      <a:headEnd type="none" w="med" len="med"/>
+                      <a:tailEnd type="none" w="med" len="med"/>
+                    </a:lnL>
+                    <a:lnR w="6350" cap="flat" cmpd="sng" algn="ctr">
+                      <a:solidFill>
+                        <a:srgbClr val="E3E7F0"/>
+                      </a:solidFill>
+                      <a:prstDash val="solid"/>
+                      <a:round/>
+                      <a:headEnd type="none" w="med" len="med"/>
+                      <a:tailEnd type="none" w="med" len="med"/>
+                    </a:lnR>
+                    <a:lnT w="6350" cap="flat" cmpd="sng" algn="ctr">
+                      <a:solidFill>
+                        <a:srgbClr val="E3E7F0"/>
+                      </a:solidFill>
+                      <a:prstDash val="solid"/>
+                      <a:round/>
+                      <a:headEnd type="none" w="med" len="med"/>
+                      <a:tailEnd type="none" w="med" len="med"/>
+                    </a:lnT>
+                    <a:lnB w="6350" cap="flat" cmpd="sng" algn="ctr">
+                      <a:solidFill>
+                        <a:srgbClr val="E3E7F0"/>
+                      </a:solidFill>
+                      <a:prstDash val="solid"/>
+                      <a:round/>
+                      <a:headEnd type="none" w="med" len="med"/>
+                      <a:tailEnd type="none" w="med" len="med"/>
+                    </a:lnB>
+                  </a:tcPr>
+                </a:tc>
+                <a:tc>
+                  <a:txBody>
+                    <a:bodyPr/>
+                    <a:lstStyle/>
+                    <a:p>
+                      <a:pPr algn="r" indent="0" marL="0">
+                        <a:buNone/>
+                      </a:pPr>
+                      <a:r>
+                        <a:rPr lang="en-US" sz="800" dirty="0">
+                          <a:solidFill>
+                            <a:srgbClr val="1A1A1A"/>
+                          </a:solidFill>
+                          <a:latin typeface="Calibri" pitchFamily="34" charset="0"/>
+                          <a:ea typeface="Calibri" pitchFamily="34" charset="-122"/>
+                          <a:cs typeface="Calibri" pitchFamily="34" charset="-120"/>
+                        </a:rPr>
+                        <a:t>Earnings yield (net income / market cap)</a:t>
+                      </a:r>
+                      <a:endParaRPr lang="en-US" sz="800" dirty="0">
+                        <a:latin typeface="Calibri" charset="0"/>
+                        <a:ea typeface="Calibri" charset="0"/>
+                        <a:cs typeface="Calibri" charset="0"/>
+                      </a:endParaRPr>
+                    </a:p>
+                  </a:txBody>
+                  <a:tcPr marL="25400" marR="25400" marT="25400" marB="25400">
+                    <a:lnL w="6350" cap="flat" cmpd="sng" algn="ctr">
+                      <a:solidFill>
+                        <a:srgbClr val="E3E7F0"/>
+                      </a:solidFill>
+                      <a:prstDash val="solid"/>
+                      <a:round/>
+                      <a:headEnd type="none" w="med" len="med"/>
+                      <a:tailEnd type="none" w="med" len="med"/>
+                    </a:lnL>
+                    <a:lnR w="6350" cap="flat" cmpd="sng" algn="ctr">
+                      <a:solidFill>
+                        <a:srgbClr val="E3E7F0"/>
+                      </a:solidFill>
+                      <a:prstDash val="solid"/>
+                      <a:round/>
+                      <a:headEnd type="none" w="med" len="med"/>
+                      <a:tailEnd type="none" w="med" len="med"/>
+                    </a:lnR>
+                    <a:lnT w="6350" cap="flat" cmpd="sng" algn="ctr">
+                      <a:solidFill>
+                        <a:srgbClr val="E3E7F0"/>
+                      </a:solidFill>
+                      <a:prstDash val="solid"/>
+                      <a:round/>
+                      <a:headEnd type="none" w="med" len="med"/>
+                      <a:tailEnd type="none" w="med" len="med"/>
+                    </a:lnT>
+                    <a:lnB w="6350" cap="flat" cmpd="sng" algn="ctr">
+                      <a:solidFill>
+                        <a:srgbClr val="E3E7F0"/>
+                      </a:solidFill>
+                      <a:prstDash val="solid"/>
+                      <a:round/>
+                      <a:headEnd type="none" w="med" len="med"/>
+                      <a:tailEnd type="none" w="med" len="med"/>
+                    </a:lnB>
+                  </a:tcPr>
+                </a:tc>
+                <a:tc>
+                  <a:txBody>
+                    <a:bodyPr/>
+                    <a:lstStyle/>
+                    <a:p>
+                      <a:pPr algn="r" indent="0" marL="0">
+                        <a:buNone/>
+                      </a:pPr>
+                      <a:r>
+                        <a:rPr lang="en-US" sz="800" dirty="0">
+                          <a:solidFill>
+                            <a:srgbClr val="1A1A1A"/>
+                          </a:solidFill>
+                          <a:latin typeface="Calibri" pitchFamily="34" charset="0"/>
+                          <a:ea typeface="Calibri" pitchFamily="34" charset="-122"/>
+                          <a:cs typeface="Calibri" pitchFamily="34" charset="-120"/>
+                        </a:rPr>
+                        <a:t>1.99%</a:t>
+                      </a:r>
+                      <a:endParaRPr lang="en-US" sz="800" dirty="0">
+                        <a:latin typeface="Calibri" charset="0"/>
+                        <a:ea typeface="Calibri" charset="0"/>
+                        <a:cs typeface="Calibri" charset="0"/>
+                      </a:endParaRPr>
+                    </a:p>
+                  </a:txBody>
+                  <a:tcPr marL="25400" marR="25400" marT="25400" marB="25400">
+                    <a:lnL w="6350" cap="flat" cmpd="sng" algn="ctr">
+                      <a:solidFill>
+                        <a:srgbClr val="E3E7F0"/>
+                      </a:solidFill>
+                      <a:prstDash val="solid"/>
+                      <a:round/>
+                      <a:headEnd type="none" w="med" len="med"/>
+                      <a:tailEnd type="none" w="med" len="med"/>
+                    </a:lnL>
+                    <a:lnR w="6350" cap="flat" cmpd="sng" algn="ctr">
+                      <a:solidFill>
+                        <a:srgbClr val="E3E7F0"/>
+                      </a:solidFill>
+                      <a:prstDash val="solid"/>
+                      <a:round/>
+                      <a:headEnd type="none" w="med" len="med"/>
+                      <a:tailEnd type="none" w="med" len="med"/>
+                    </a:lnR>
+                    <a:lnT w="6350" cap="flat" cmpd="sng" algn="ctr">
+                      <a:solidFill>
+                        <a:srgbClr val="E3E7F0"/>
+                      </a:solidFill>
+                      <a:prstDash val="solid"/>
+                      <a:round/>
+                      <a:headEnd type="none" w="med" len="med"/>
+                      <a:tailEnd type="none" w="med" len="med"/>
+                    </a:lnT>
+                    <a:lnB w="6350" cap="flat" cmpd="sng" algn="ctr">
+                      <a:solidFill>
+                        <a:srgbClr val="E3E7F0"/>
+                      </a:solidFill>
+                      <a:prstDash val="solid"/>
+                      <a:round/>
+                      <a:headEnd type="none" w="med" len="med"/>
+                      <a:tailEnd type="none" w="med" len="med"/>
+                    </a:lnB>
+                  </a:tcPr>
+                </a:tc>
+              </a:tr>
+              <a:tr h="187452">
+                <a:tc>
+                  <a:txBody>
+                    <a:bodyPr/>
+                    <a:lstStyle/>
+                    <a:p>
+                      <a:pPr algn="l" indent="0" marL="0">
+                        <a:buNone/>
+                      </a:pPr>
+                      <a:r>
+                        <a:rPr lang="en-US" sz="800" dirty="0">
+                          <a:solidFill>
+                            <a:srgbClr val="1A1A1A"/>
+                          </a:solidFill>
+                          <a:latin typeface="Calibri" pitchFamily="34" charset="0"/>
+                          <a:ea typeface="Calibri" pitchFamily="34" charset="-122"/>
+                          <a:cs typeface="Calibri" pitchFamily="34" charset="-120"/>
+                        </a:rPr>
+                        <a:t>rmax5_21d</a:t>
+                      </a:r>
+                      <a:endParaRPr lang="en-US" sz="800" dirty="0">
+                        <a:latin typeface="Calibri" charset="0"/>
+                        <a:ea typeface="Calibri" charset="0"/>
+                        <a:cs typeface="Calibri" charset="0"/>
+                      </a:endParaRPr>
+                    </a:p>
+                  </a:txBody>
+                  <a:tcPr marL="25400" marR="25400" marT="25400" marB="25400">
+                    <a:lnL w="6350" cap="flat" cmpd="sng" algn="ctr">
+                      <a:solidFill>
+                        <a:srgbClr val="E3E7F0"/>
+                      </a:solidFill>
+                      <a:prstDash val="solid"/>
+                      <a:round/>
+                      <a:headEnd type="none" w="med" len="med"/>
+                      <a:tailEnd type="none" w="med" len="med"/>
+                    </a:lnL>
+                    <a:lnR w="6350" cap="flat" cmpd="sng" algn="ctr">
+                      <a:solidFill>
+                        <a:srgbClr val="E3E7F0"/>
+                      </a:solidFill>
+                      <a:prstDash val="solid"/>
+                      <a:round/>
+                      <a:headEnd type="none" w="med" len="med"/>
+                      <a:tailEnd type="none" w="med" len="med"/>
+                    </a:lnR>
+                    <a:lnT w="6350" cap="flat" cmpd="sng" algn="ctr">
+                      <a:solidFill>
+                        <a:srgbClr val="E3E7F0"/>
+                      </a:solidFill>
+                      <a:prstDash val="solid"/>
+                      <a:round/>
+                      <a:headEnd type="none" w="med" len="med"/>
+                      <a:tailEnd type="none" w="med" len="med"/>
+                    </a:lnT>
+                    <a:lnB w="6350" cap="flat" cmpd="sng" algn="ctr">
+                      <a:solidFill>
+                        <a:srgbClr val="E3E7F0"/>
+                      </a:solidFill>
+                      <a:prstDash val="solid"/>
+                      <a:round/>
+                      <a:headEnd type="none" w="med" len="med"/>
+                      <a:tailEnd type="none" w="med" len="med"/>
+                    </a:lnB>
+                  </a:tcPr>
+                </a:tc>
+                <a:tc>
+                  <a:txBody>
+                    <a:bodyPr/>
+                    <a:lstStyle/>
+                    <a:p>
+                      <a:pPr algn="r" indent="0" marL="0">
+                        <a:buNone/>
+                      </a:pPr>
+                      <a:r>
+                        <a:rPr lang="en-US" sz="800" dirty="0">
+                          <a:solidFill>
+                            <a:srgbClr val="1A1A1A"/>
+                          </a:solidFill>
+                          <a:latin typeface="Calibri" pitchFamily="34" charset="0"/>
+                          <a:ea typeface="Calibri" pitchFamily="34" charset="-122"/>
+                          <a:cs typeface="Calibri" pitchFamily="34" charset="-120"/>
+                        </a:rPr>
+                        <a:t>Mean of 5 best daily returns, 21d</a:t>
+                      </a:r>
+                      <a:endParaRPr lang="en-US" sz="800" dirty="0">
+                        <a:latin typeface="Calibri" charset="0"/>
+                        <a:ea typeface="Calibri" charset="0"/>
+                        <a:cs typeface="Calibri" charset="0"/>
+                      </a:endParaRPr>
+                    </a:p>
+                  </a:txBody>
+                  <a:tcPr marL="25400" marR="25400" marT="25400" marB="25400">
+                    <a:lnL w="6350" cap="flat" cmpd="sng" algn="ctr">
+                      <a:solidFill>
+                        <a:srgbClr val="E3E7F0"/>
+                      </a:solidFill>
+                      <a:prstDash val="solid"/>
+                      <a:round/>
+                      <a:headEnd type="none" w="med" len="med"/>
+                      <a:tailEnd type="none" w="med" len="med"/>
+                    </a:lnL>
+                    <a:lnR w="6350" cap="flat" cmpd="sng" algn="ctr">
+                      <a:solidFill>
+                        <a:srgbClr val="E3E7F0"/>
+                      </a:solidFill>
+                      <a:prstDash val="solid"/>
+                      <a:round/>
+                      <a:headEnd type="none" w="med" len="med"/>
+                      <a:tailEnd type="none" w="med" len="med"/>
+                    </a:lnR>
+                    <a:lnT w="6350" cap="flat" cmpd="sng" algn="ctr">
+                      <a:solidFill>
+                        <a:srgbClr val="E3E7F0"/>
+                      </a:solidFill>
+                      <a:prstDash val="solid"/>
+                      <a:round/>
+                      <a:headEnd type="none" w="med" len="med"/>
+                      <a:tailEnd type="none" w="med" len="med"/>
+                    </a:lnT>
+                    <a:lnB w="6350" cap="flat" cmpd="sng" algn="ctr">
+                      <a:solidFill>
+                        <a:srgbClr val="E3E7F0"/>
+                      </a:solidFill>
+                      <a:prstDash val="solid"/>
+                      <a:round/>
+                      <a:headEnd type="none" w="med" len="med"/>
+                      <a:tailEnd type="none" w="med" len="med"/>
+                    </a:lnB>
+                  </a:tcPr>
+                </a:tc>
+                <a:tc>
+                  <a:txBody>
+                    <a:bodyPr/>
+                    <a:lstStyle/>
+                    <a:p>
+                      <a:pPr algn="r" indent="0" marL="0">
+                        <a:buNone/>
+                      </a:pPr>
+                      <a:r>
+                        <a:rPr lang="en-US" sz="800" dirty="0">
+                          <a:solidFill>
+                            <a:srgbClr val="1A1A1A"/>
+                          </a:solidFill>
+                          <a:latin typeface="Calibri" pitchFamily="34" charset="0"/>
+                          <a:ea typeface="Calibri" pitchFamily="34" charset="-122"/>
+                          <a:cs typeface="Calibri" pitchFamily="34" charset="-120"/>
+                        </a:rPr>
+                        <a:t>1.80%</a:t>
+                      </a:r>
+                      <a:endParaRPr lang="en-US" sz="800" dirty="0">
+                        <a:latin typeface="Calibri" charset="0"/>
+                        <a:ea typeface="Calibri" charset="0"/>
+                        <a:cs typeface="Calibri" charset="0"/>
+                      </a:endParaRPr>
+                    </a:p>
+                  </a:txBody>
+                  <a:tcPr marL="25400" marR="25400" marT="25400" marB="25400">
+                    <a:lnL w="6350" cap="flat" cmpd="sng" algn="ctr">
+                      <a:solidFill>
+                        <a:srgbClr val="E3E7F0"/>
+                      </a:solidFill>
+                      <a:prstDash val="solid"/>
+                      <a:round/>
+                      <a:headEnd type="none" w="med" len="med"/>
+                      <a:tailEnd type="none" w="med" len="med"/>
+                    </a:lnL>
+                    <a:lnR w="6350" cap="flat" cmpd="sng" algn="ctr">
+                      <a:solidFill>
+                        <a:srgbClr val="E3E7F0"/>
+                      </a:solidFill>
+                      <a:prstDash val="solid"/>
+                      <a:round/>
+                      <a:headEnd type="none" w="med" len="med"/>
+                      <a:tailEnd type="none" w="med" len="med"/>
+                    </a:lnR>
+                    <a:lnT w="6350" cap="flat" cmpd="sng" algn="ctr">
+                      <a:solidFill>
+                        <a:srgbClr val="E3E7F0"/>
+                      </a:solidFill>
+                      <a:prstDash val="solid"/>
+                      <a:round/>
+                      <a:headEnd type="none" w="med" len="med"/>
+                      <a:tailEnd type="none" w="med" len="med"/>
+                    </a:lnT>
+                    <a:lnB w="6350" cap="flat" cmpd="sng" algn="ctr">
+                      <a:solidFill>
+                        <a:srgbClr val="E3E7F0"/>
+                      </a:solidFill>
+                      <a:prstDash val="solid"/>
+                      <a:round/>
+                      <a:headEnd type="none" w="med" len="med"/>
+                      <a:tailEnd type="none" w="med" len="med"/>
+                    </a:lnB>
+                  </a:tcPr>
+                </a:tc>
+              </a:tr>
+              <a:tr h="187452">
+                <a:tc>
+                  <a:txBody>
+                    <a:bodyPr/>
+                    <a:lstStyle/>
+                    <a:p>
+                      <a:pPr algn="l" indent="0" marL="0">
+                        <a:buNone/>
+                      </a:pPr>
+                      <a:r>
+                        <a:rPr lang="en-US" sz="800" dirty="0">
+                          <a:solidFill>
+                            <a:srgbClr val="1A1A1A"/>
+                          </a:solidFill>
+                          <a:latin typeface="Calibri" pitchFamily="34" charset="0"/>
+                          <a:ea typeface="Calibri" pitchFamily="34" charset="-122"/>
+                          <a:cs typeface="Calibri" pitchFamily="34" charset="-120"/>
+                        </a:rPr>
+                        <a:t>market_equity</a:t>
+                      </a:r>
+                      <a:endParaRPr lang="en-US" sz="800" dirty="0">
+                        <a:latin typeface="Calibri" charset="0"/>
+                        <a:ea typeface="Calibri" charset="0"/>
+                        <a:cs typeface="Calibri" charset="0"/>
+                      </a:endParaRPr>
+                    </a:p>
+                  </a:txBody>
+                  <a:tcPr marL="25400" marR="25400" marT="25400" marB="25400">
+                    <a:lnL w="6350" cap="flat" cmpd="sng" algn="ctr">
+                      <a:solidFill>
+                        <a:srgbClr val="E3E7F0"/>
+                      </a:solidFill>
+                      <a:prstDash val="solid"/>
+                      <a:round/>
+                      <a:headEnd type="none" w="med" len="med"/>
+                      <a:tailEnd type="none" w="med" len="med"/>
+                    </a:lnL>
+                    <a:lnR w="6350" cap="flat" cmpd="sng" algn="ctr">
+                      <a:solidFill>
+                        <a:srgbClr val="E3E7F0"/>
+                      </a:solidFill>
+                      <a:prstDash val="solid"/>
+                      <a:round/>
+                      <a:headEnd type="none" w="med" len="med"/>
+                      <a:tailEnd type="none" w="med" len="med"/>
+                    </a:lnR>
+                    <a:lnT w="6350" cap="flat" cmpd="sng" algn="ctr">
+                      <a:solidFill>
+                        <a:srgbClr val="E3E7F0"/>
+                      </a:solidFill>
+                      <a:prstDash val="solid"/>
+                      <a:round/>
+                      <a:headEnd type="none" w="med" len="med"/>
+                      <a:tailEnd type="none" w="med" len="med"/>
+                    </a:lnT>
+                    <a:lnB w="6350" cap="flat" cmpd="sng" algn="ctr">
+                      <a:solidFill>
+                        <a:srgbClr val="E3E7F0"/>
+                      </a:solidFill>
+                      <a:prstDash val="solid"/>
+                      <a:round/>
+                      <a:headEnd type="none" w="med" len="med"/>
+                      <a:tailEnd type="none" w="med" len="med"/>
+                    </a:lnB>
+                  </a:tcPr>
+                </a:tc>
+                <a:tc>
+                  <a:txBody>
+                    <a:bodyPr/>
+                    <a:lstStyle/>
+                    <a:p>
+                      <a:pPr algn="r" indent="0" marL="0">
+                        <a:buNone/>
+                      </a:pPr>
+                      <a:r>
+                        <a:rPr lang="en-US" sz="800" dirty="0">
+                          <a:solidFill>
+                            <a:srgbClr val="1A1A1A"/>
+                          </a:solidFill>
+                          <a:latin typeface="Calibri" pitchFamily="34" charset="0"/>
+                          <a:ea typeface="Calibri" pitchFamily="34" charset="-122"/>
+                          <a:cs typeface="Calibri" pitchFamily="34" charset="-120"/>
+                        </a:rPr>
+                        <a:t>Market capitalisation</a:t>
+                      </a:r>
+                      <a:endParaRPr lang="en-US" sz="800" dirty="0">
+                        <a:latin typeface="Calibri" charset="0"/>
+                        <a:ea typeface="Calibri" charset="0"/>
+                        <a:cs typeface="Calibri" charset="0"/>
+                      </a:endParaRPr>
+                    </a:p>
+                  </a:txBody>
+                  <a:tcPr marL="25400" marR="25400" marT="25400" marB="25400">
+                    <a:lnL w="6350" cap="flat" cmpd="sng" algn="ctr">
+                      <a:solidFill>
+                        <a:srgbClr val="E3E7F0"/>
+                      </a:solidFill>
+                      <a:prstDash val="solid"/>
+                      <a:round/>
+                      <a:headEnd type="none" w="med" len="med"/>
+                      <a:tailEnd type="none" w="med" len="med"/>
+                    </a:lnL>
+                    <a:lnR w="6350" cap="flat" cmpd="sng" algn="ctr">
+                      <a:solidFill>
+                        <a:srgbClr val="E3E7F0"/>
+                      </a:solidFill>
+                      <a:prstDash val="solid"/>
+                      <a:round/>
+                      <a:headEnd type="none" w="med" len="med"/>
+                      <a:tailEnd type="none" w="med" len="med"/>
+                    </a:lnR>
+                    <a:lnT w="6350" cap="flat" cmpd="sng" algn="ctr">
+                      <a:solidFill>
+                        <a:srgbClr val="E3E7F0"/>
+                      </a:solidFill>
+                      <a:prstDash val="solid"/>
+                      <a:round/>
+                      <a:headEnd type="none" w="med" len="med"/>
+                      <a:tailEnd type="none" w="med" len="med"/>
+                    </a:lnT>
+                    <a:lnB w="6350" cap="flat" cmpd="sng" algn="ctr">
+                      <a:solidFill>
+                        <a:srgbClr val="E3E7F0"/>
+                      </a:solidFill>
+                      <a:prstDash val="solid"/>
+                      <a:round/>
+                      <a:headEnd type="none" w="med" len="med"/>
+                      <a:tailEnd type="none" w="med" len="med"/>
+                    </a:lnB>
+                  </a:tcPr>
+                </a:tc>
+                <a:tc>
+                  <a:txBody>
+                    <a:bodyPr/>
+                    <a:lstStyle/>
+                    <a:p>
+                      <a:pPr algn="r" indent="0" marL="0">
+                        <a:buNone/>
+                      </a:pPr>
+                      <a:r>
+                        <a:rPr lang="en-US" sz="800" dirty="0">
+                          <a:solidFill>
+                            <a:srgbClr val="1A1A1A"/>
+                          </a:solidFill>
+                          <a:latin typeface="Calibri" pitchFamily="34" charset="0"/>
+                          <a:ea typeface="Calibri" pitchFamily="34" charset="-122"/>
+                          <a:cs typeface="Calibri" pitchFamily="34" charset="-120"/>
+                        </a:rPr>
+                        <a:t>1.75%</a:t>
+                      </a:r>
+                      <a:endParaRPr lang="en-US" sz="800" dirty="0">
+                        <a:latin typeface="Calibri" charset="0"/>
+                        <a:ea typeface="Calibri" charset="0"/>
+                        <a:cs typeface="Calibri" charset="0"/>
+                      </a:endParaRPr>
+                    </a:p>
+                  </a:txBody>
+                  <a:tcPr marL="25400" marR="25400" marT="25400" marB="25400">
+                    <a:lnL w="6350" cap="flat" cmpd="sng" algn="ctr">
+                      <a:solidFill>
+                        <a:srgbClr val="E3E7F0"/>
+                      </a:solidFill>
+                      <a:prstDash val="solid"/>
+                      <a:round/>
+                      <a:headEnd type="none" w="med" len="med"/>
+                      <a:tailEnd type="none" w="med" len="med"/>
+                    </a:lnL>
+                    <a:lnR w="6350" cap="flat" cmpd="sng" algn="ctr">
+                      <a:solidFill>
+                        <a:srgbClr val="E3E7F0"/>
+                      </a:solidFill>
+                      <a:prstDash val="solid"/>
+                      <a:round/>
+                      <a:headEnd type="none" w="med" len="med"/>
+                      <a:tailEnd type="none" w="med" len="med"/>
+                    </a:lnR>
+                    <a:lnT w="6350" cap="flat" cmpd="sng" algn="ctr">
+                      <a:solidFill>
+                        <a:srgbClr val="E3E7F0"/>
+                      </a:solidFill>
+                      <a:prstDash val="solid"/>
+                      <a:round/>
+                      <a:headEnd type="none" w="med" len="med"/>
+                      <a:tailEnd type="none" w="med" len="med"/>
+                    </a:lnT>
+                    <a:lnB w="6350" cap="flat" cmpd="sng" algn="ctr">
+                      <a:solidFill>
+                        <a:srgbClr val="E3E7F0"/>
+                      </a:solidFill>
+                      <a:prstDash val="solid"/>
+                      <a:round/>
+                      <a:headEnd type="none" w="med" len="med"/>
+                      <a:tailEnd type="none" w="med" len="med"/>
+                    </a:lnB>
+                  </a:tcPr>
+                </a:tc>
+              </a:tr>
+              <a:tr h="187452">
+                <a:tc>
+                  <a:txBody>
+                    <a:bodyPr/>
+                    <a:lstStyle/>
+                    <a:p>
+                      <a:pPr algn="l" indent="0" marL="0">
+                        <a:buNone/>
+                      </a:pPr>
+                      <a:r>
+                        <a:rPr lang="en-US" sz="800" dirty="0">
+                          <a:solidFill>
+                            <a:srgbClr val="1A1A1A"/>
+                          </a:solidFill>
+                          <a:latin typeface="Calibri" pitchFamily="34" charset="0"/>
+                          <a:ea typeface="Calibri" pitchFamily="34" charset="-122"/>
+                          <a:cs typeface="Calibri" pitchFamily="34" charset="-120"/>
+                        </a:rPr>
+                        <a:t>fcf_me</a:t>
+                      </a:r>
+                      <a:endParaRPr lang="en-US" sz="800" dirty="0">
+                        <a:latin typeface="Calibri" charset="0"/>
+                        <a:ea typeface="Calibri" charset="0"/>
+                        <a:cs typeface="Calibri" charset="0"/>
+                      </a:endParaRPr>
+                    </a:p>
+                  </a:txBody>
+                  <a:tcPr marL="25400" marR="25400" marT="25400" marB="25400">
+                    <a:lnL w="6350" cap="flat" cmpd="sng" algn="ctr">
+                      <a:solidFill>
+                        <a:srgbClr val="E3E7F0"/>
+                      </a:solidFill>
+                      <a:prstDash val="solid"/>
+                      <a:round/>
+                      <a:headEnd type="none" w="med" len="med"/>
+                      <a:tailEnd type="none" w="med" len="med"/>
+                    </a:lnL>
+                    <a:lnR w="6350" cap="flat" cmpd="sng" algn="ctr">
+                      <a:solidFill>
+                        <a:srgbClr val="E3E7F0"/>
+                      </a:solidFill>
+                      <a:prstDash val="solid"/>
+                      <a:round/>
+                      <a:headEnd type="none" w="med" len="med"/>
+                      <a:tailEnd type="none" w="med" len="med"/>
+                    </a:lnR>
+                    <a:lnT w="6350" cap="flat" cmpd="sng" algn="ctr">
+                      <a:solidFill>
+                        <a:srgbClr val="E3E7F0"/>
+                      </a:solidFill>
+                      <a:prstDash val="solid"/>
+                      <a:round/>
+                      <a:headEnd type="none" w="med" len="med"/>
+                      <a:tailEnd type="none" w="med" len="med"/>
+                    </a:lnT>
+                    <a:lnB w="6350" cap="flat" cmpd="sng" algn="ctr">
+                      <a:solidFill>
+                        <a:srgbClr val="E3E7F0"/>
+                      </a:solidFill>
+                      <a:prstDash val="solid"/>
+                      <a:round/>
+                      <a:headEnd type="none" w="med" len="med"/>
+                      <a:tailEnd type="none" w="med" len="med"/>
+                    </a:lnB>
+                  </a:tcPr>
+                </a:tc>
+                <a:tc>
+                  <a:txBody>
+                    <a:bodyPr/>
+                    <a:lstStyle/>
+                    <a:p>
+                      <a:pPr algn="r" indent="0" marL="0">
+                        <a:buNone/>
+                      </a:pPr>
+                      <a:r>
+                        <a:rPr lang="en-US" sz="800" dirty="0">
+                          <a:solidFill>
+                            <a:srgbClr val="1A1A1A"/>
+                          </a:solidFill>
+                          <a:latin typeface="Calibri" pitchFamily="34" charset="0"/>
+                          <a:ea typeface="Calibri" pitchFamily="34" charset="-122"/>
+                          <a:cs typeface="Calibri" pitchFamily="34" charset="-120"/>
+                        </a:rPr>
+                        <a:t>Free cash flow yield</a:t>
+                      </a:r>
+                      <a:endParaRPr lang="en-US" sz="800" dirty="0">
+                        <a:latin typeface="Calibri" charset="0"/>
+                        <a:ea typeface="Calibri" charset="0"/>
+                        <a:cs typeface="Calibri" charset="0"/>
+                      </a:endParaRPr>
+                    </a:p>
+                  </a:txBody>
+                  <a:tcPr marL="25400" marR="25400" marT="25400" marB="25400">
+                    <a:lnL w="6350" cap="flat" cmpd="sng" algn="ctr">
+                      <a:solidFill>
+                        <a:srgbClr val="E3E7F0"/>
+                      </a:solidFill>
+                      <a:prstDash val="solid"/>
+                      <a:round/>
+                      <a:headEnd type="none" w="med" len="med"/>
+                      <a:tailEnd type="none" w="med" len="med"/>
+                    </a:lnL>
+                    <a:lnR w="6350" cap="flat" cmpd="sng" algn="ctr">
+                      <a:solidFill>
+                        <a:srgbClr val="E3E7F0"/>
+                      </a:solidFill>
+                      <a:prstDash val="solid"/>
+                      <a:round/>
+                      <a:headEnd type="none" w="med" len="med"/>
+                      <a:tailEnd type="none" w="med" len="med"/>
+                    </a:lnR>
+                    <a:lnT w="6350" cap="flat" cmpd="sng" algn="ctr">
+                      <a:solidFill>
+                        <a:srgbClr val="E3E7F0"/>
+                      </a:solidFill>
+                      <a:prstDash val="solid"/>
+                      <a:round/>
+                      <a:headEnd type="none" w="med" len="med"/>
+                      <a:tailEnd type="none" w="med" len="med"/>
+                    </a:lnT>
+                    <a:lnB w="6350" cap="flat" cmpd="sng" algn="ctr">
+                      <a:solidFill>
+                        <a:srgbClr val="E3E7F0"/>
+                      </a:solidFill>
+                      <a:prstDash val="solid"/>
+                      <a:round/>
+                      <a:headEnd type="none" w="med" len="med"/>
+                      <a:tailEnd type="none" w="med" len="med"/>
+                    </a:lnB>
+                  </a:tcPr>
+                </a:tc>
+                <a:tc>
+                  <a:txBody>
+                    <a:bodyPr/>
+                    <a:lstStyle/>
+                    <a:p>
+                      <a:pPr algn="r" indent="0" marL="0">
+                        <a:buNone/>
+                      </a:pPr>
+                      <a:r>
+                        <a:rPr lang="en-US" sz="800" dirty="0">
+                          <a:solidFill>
+                            <a:srgbClr val="1A1A1A"/>
+                          </a:solidFill>
+                          <a:latin typeface="Calibri" pitchFamily="34" charset="0"/>
+                          <a:ea typeface="Calibri" pitchFamily="34" charset="-122"/>
+                          <a:cs typeface="Calibri" pitchFamily="34" charset="-120"/>
+                        </a:rPr>
+                        <a:t>1.72%</a:t>
+                      </a:r>
+                      <a:endParaRPr lang="en-US" sz="800" dirty="0">
+                        <a:latin typeface="Calibri" charset="0"/>
+                        <a:ea typeface="Calibri" charset="0"/>
+                        <a:cs typeface="Calibri" charset="0"/>
+                      </a:endParaRPr>
+                    </a:p>
+                  </a:txBody>
+                  <a:tcPr marL="25400" marR="25400" marT="25400" marB="25400">
+                    <a:lnL w="6350" cap="flat" cmpd="sng" algn="ctr">
+                      <a:solidFill>
+                        <a:srgbClr val="E3E7F0"/>
+                      </a:solidFill>
+                      <a:prstDash val="solid"/>
+                      <a:round/>
+                      <a:headEnd type="none" w="med" len="med"/>
+                      <a:tailEnd type="none" w="med" len="med"/>
+                    </a:lnL>
+                    <a:lnR w="6350" cap="flat" cmpd="sng" algn="ctr">
+                      <a:solidFill>
+                        <a:srgbClr val="E3E7F0"/>
+                      </a:solidFill>
+                      <a:prstDash val="solid"/>
+                      <a:round/>
+                      <a:headEnd type="none" w="med" len="med"/>
+                      <a:tailEnd type="none" w="med" len="med"/>
+                    </a:lnR>
+                    <a:lnT w="6350" cap="flat" cmpd="sng" algn="ctr">
+                      <a:solidFill>
+                        <a:srgbClr val="E3E7F0"/>
+                      </a:solidFill>
+                      <a:prstDash val="solid"/>
+                      <a:round/>
+                      <a:headEnd type="none" w="med" len="med"/>
+                      <a:tailEnd type="none" w="med" len="med"/>
+                    </a:lnT>
+                    <a:lnB w="6350" cap="flat" cmpd="sng" algn="ctr">
+                      <a:solidFill>
+                        <a:srgbClr val="E3E7F0"/>
+                      </a:solidFill>
+                      <a:prstDash val="solid"/>
+                      <a:round/>
+                      <a:headEnd type="none" w="med" len="med"/>
+                      <a:tailEnd type="none" w="med" len="med"/>
+                    </a:lnB>
+                  </a:tcPr>
+                </a:tc>
+              </a:tr>
+              <a:tr h="187452">
+                <a:tc>
+                  <a:txBody>
+                    <a:bodyPr/>
+                    <a:lstStyle/>
+                    <a:p>
+                      <a:pPr algn="l" indent="0" marL="0">
+                        <a:buNone/>
+                      </a:pPr>
+                      <a:r>
+                        <a:rPr lang="en-US" sz="800" dirty="0">
+                          <a:solidFill>
+                            <a:srgbClr val="1A1A1A"/>
+                          </a:solidFill>
+                          <a:latin typeface="Calibri" pitchFamily="34" charset="0"/>
+                          <a:ea typeface="Calibri" pitchFamily="34" charset="-122"/>
+                          <a:cs typeface="Calibri" pitchFamily="34" charset="-120"/>
+                        </a:rPr>
+                        <a:t>zero_trades_21d</a:t>
+                      </a:r>
+                      <a:endParaRPr lang="en-US" sz="800" dirty="0">
+                        <a:latin typeface="Calibri" charset="0"/>
+                        <a:ea typeface="Calibri" charset="0"/>
+                        <a:cs typeface="Calibri" charset="0"/>
+                      </a:endParaRPr>
+                    </a:p>
+                  </a:txBody>
+                  <a:tcPr marL="25400" marR="25400" marT="25400" marB="25400">
+                    <a:lnL w="6350" cap="flat" cmpd="sng" algn="ctr">
+                      <a:solidFill>
+                        <a:srgbClr val="E3E7F0"/>
+                      </a:solidFill>
+                      <a:prstDash val="solid"/>
+                      <a:round/>
+                      <a:headEnd type="none" w="med" len="med"/>
+                      <a:tailEnd type="none" w="med" len="med"/>
+                    </a:lnL>
+                    <a:lnR w="6350" cap="flat" cmpd="sng" algn="ctr">
+                      <a:solidFill>
+                        <a:srgbClr val="E3E7F0"/>
+                      </a:solidFill>
+                      <a:prstDash val="solid"/>
+                      <a:round/>
+                      <a:headEnd type="none" w="med" len="med"/>
+                      <a:tailEnd type="none" w="med" len="med"/>
+                    </a:lnR>
+                    <a:lnT w="6350" cap="flat" cmpd="sng" algn="ctr">
+                      <a:solidFill>
+                        <a:srgbClr val="E3E7F0"/>
+                      </a:solidFill>
+                      <a:prstDash val="solid"/>
+                      <a:round/>
+                      <a:headEnd type="none" w="med" len="med"/>
+                      <a:tailEnd type="none" w="med" len="med"/>
+                    </a:lnT>
+                    <a:lnB w="6350" cap="flat" cmpd="sng" algn="ctr">
+                      <a:solidFill>
+                        <a:srgbClr val="E3E7F0"/>
+                      </a:solidFill>
+                      <a:prstDash val="solid"/>
+                      <a:round/>
+                      <a:headEnd type="none" w="med" len="med"/>
+                      <a:tailEnd type="none" w="med" len="med"/>
+                    </a:lnB>
+                  </a:tcPr>
+                </a:tc>
+                <a:tc>
+                  <a:txBody>
+                    <a:bodyPr/>
+                    <a:lstStyle/>
+                    <a:p>
+                      <a:pPr algn="r" indent="0" marL="0">
+                        <a:buNone/>
+                      </a:pPr>
+                      <a:r>
+                        <a:rPr lang="en-US" sz="800" dirty="0">
+                          <a:solidFill>
+                            <a:srgbClr val="1A1A1A"/>
+                          </a:solidFill>
+                          <a:latin typeface="Calibri" pitchFamily="34" charset="0"/>
+                          <a:ea typeface="Calibri" pitchFamily="34" charset="-122"/>
+                          <a:cs typeface="Calibri" pitchFamily="34" charset="-120"/>
+                        </a:rPr>
+                        <a:t>Zero-volume days in 21d (illiquidity)</a:t>
+                      </a:r>
+                      <a:endParaRPr lang="en-US" sz="800" dirty="0">
+                        <a:latin typeface="Calibri" charset="0"/>
+                        <a:ea typeface="Calibri" charset="0"/>
+                        <a:cs typeface="Calibri" charset="0"/>
+                      </a:endParaRPr>
+                    </a:p>
+                  </a:txBody>
+                  <a:tcPr marL="25400" marR="25400" marT="25400" marB="25400">
+                    <a:lnL w="6350" cap="flat" cmpd="sng" algn="ctr">
+                      <a:solidFill>
+                        <a:srgbClr val="E3E7F0"/>
+                      </a:solidFill>
+                      <a:prstDash val="solid"/>
+                      <a:round/>
+                      <a:headEnd type="none" w="med" len="med"/>
+                      <a:tailEnd type="none" w="med" len="med"/>
+                    </a:lnL>
+                    <a:lnR w="6350" cap="flat" cmpd="sng" algn="ctr">
+                      <a:solidFill>
+                        <a:srgbClr val="E3E7F0"/>
+                      </a:solidFill>
+                      <a:prstDash val="solid"/>
+                      <a:round/>
+                      <a:headEnd type="none" w="med" len="med"/>
+                      <a:tailEnd type="none" w="med" len="med"/>
+                    </a:lnR>
+                    <a:lnT w="6350" cap="flat" cmpd="sng" algn="ctr">
+                      <a:solidFill>
+                        <a:srgbClr val="E3E7F0"/>
+                      </a:solidFill>
+                      <a:prstDash val="solid"/>
+                      <a:round/>
+                      <a:headEnd type="none" w="med" len="med"/>
+                      <a:tailEnd type="none" w="med" len="med"/>
+                    </a:lnT>
+                    <a:lnB w="6350" cap="flat" cmpd="sng" algn="ctr">
+                      <a:solidFill>
+                        <a:srgbClr val="E3E7F0"/>
+                      </a:solidFill>
+                      <a:prstDash val="solid"/>
+                      <a:round/>
+                      <a:headEnd type="none" w="med" len="med"/>
+                      <a:tailEnd type="none" w="med" len="med"/>
+                    </a:lnB>
+                  </a:tcPr>
+                </a:tc>
+                <a:tc>
+                  <a:txBody>
+                    <a:bodyPr/>
+                    <a:lstStyle/>
+                    <a:p>
+                      <a:pPr algn="r" indent="0" marL="0">
+                        <a:buNone/>
+                      </a:pPr>
+                      <a:r>
+                        <a:rPr lang="en-US" sz="800" dirty="0">
+                          <a:solidFill>
+                            <a:srgbClr val="1A1A1A"/>
+                          </a:solidFill>
+                          <a:latin typeface="Calibri" pitchFamily="34" charset="0"/>
+                          <a:ea typeface="Calibri" pitchFamily="34" charset="-122"/>
+                          <a:cs typeface="Calibri" pitchFamily="34" charset="-120"/>
+                        </a:rPr>
+                        <a:t>1.71%</a:t>
+                      </a:r>
+                      <a:endParaRPr lang="en-US" sz="800" dirty="0">
+                        <a:latin typeface="Calibri" charset="0"/>
+                        <a:ea typeface="Calibri" charset="0"/>
+                        <a:cs typeface="Calibri" charset="0"/>
+                      </a:endParaRPr>
+                    </a:p>
+                  </a:txBody>
+                  <a:tcPr marL="25400" marR="25400" marT="25400" marB="25400">
+                    <a:lnL w="6350" cap="flat" cmpd="sng" algn="ctr">
+                      <a:solidFill>
+                        <a:srgbClr val="E3E7F0"/>
+                      </a:solidFill>
+                      <a:prstDash val="solid"/>
+                      <a:round/>
+                      <a:headEnd type="none" w="med" len="med"/>
+                      <a:tailEnd type="none" w="med" len="med"/>
+                    </a:lnL>
+                    <a:lnR w="6350" cap="flat" cmpd="sng" algn="ctr">
+                      <a:solidFill>
+                        <a:srgbClr val="E3E7F0"/>
+                      </a:solidFill>
+                      <a:prstDash val="solid"/>
+                      <a:round/>
+                      <a:headEnd type="none" w="med" len="med"/>
+                      <a:tailEnd type="none" w="med" len="med"/>
+                    </a:lnR>
+                    <a:lnT w="6350" cap="flat" cmpd="sng" algn="ctr">
+                      <a:solidFill>
+                        <a:srgbClr val="E3E7F0"/>
+                      </a:solidFill>
+                      <a:prstDash val="solid"/>
+                      <a:round/>
+                      <a:headEnd type="none" w="med" len="med"/>
+                      <a:tailEnd type="none" w="med" len="med"/>
+                    </a:lnT>
+                    <a:lnB w="6350" cap="flat" cmpd="sng" algn="ctr">
+                      <a:solidFill>
+                        <a:srgbClr val="E3E7F0"/>
+                      </a:solidFill>
+                      <a:prstDash val="solid"/>
+                      <a:round/>
+                      <a:headEnd type="none" w="med" len="med"/>
+                      <a:tailEnd type="none" w="med" len="med"/>
+                    </a:lnB>
+                  </a:tcPr>
+                </a:tc>
+              </a:tr>
+              <a:tr h="187452">
+                <a:tc>
+                  <a:txBody>
+                    <a:bodyPr/>
+                    <a:lstStyle/>
+                    <a:p>
+                      <a:pPr algn="l" indent="0" marL="0">
+                        <a:buNone/>
+                      </a:pPr>
+                      <a:r>
+                        <a:rPr lang="en-US" sz="800" dirty="0">
+                          <a:solidFill>
+                            <a:srgbClr val="1A1A1A"/>
+                          </a:solidFill>
+                          <a:latin typeface="Calibri" pitchFamily="34" charset="0"/>
+                          <a:ea typeface="Calibri" pitchFamily="34" charset="-122"/>
+                          <a:cs typeface="Calibri" pitchFamily="34" charset="-120"/>
+                        </a:rPr>
+                        <a:t>op_atl1</a:t>
+                      </a:r>
+                      <a:endParaRPr lang="en-US" sz="800" dirty="0">
+                        <a:latin typeface="Calibri" charset="0"/>
+                        <a:ea typeface="Calibri" charset="0"/>
+                        <a:cs typeface="Calibri" charset="0"/>
+                      </a:endParaRPr>
+                    </a:p>
+                  </a:txBody>
+                  <a:tcPr marL="25400" marR="25400" marT="25400" marB="25400">
+                    <a:lnL w="6350" cap="flat" cmpd="sng" algn="ctr">
+                      <a:solidFill>
+                        <a:srgbClr val="E3E7F0"/>
+                      </a:solidFill>
+                      <a:prstDash val="solid"/>
+                      <a:round/>
+                      <a:headEnd type="none" w="med" len="med"/>
+                      <a:tailEnd type="none" w="med" len="med"/>
+                    </a:lnL>
+                    <a:lnR w="6350" cap="flat" cmpd="sng" algn="ctr">
+                      <a:solidFill>
+                        <a:srgbClr val="E3E7F0"/>
+                      </a:solidFill>
+                      <a:prstDash val="solid"/>
+                      <a:round/>
+                      <a:headEnd type="none" w="med" len="med"/>
+                      <a:tailEnd type="none" w="med" len="med"/>
+                    </a:lnR>
+                    <a:lnT w="6350" cap="flat" cmpd="sng" algn="ctr">
+                      <a:solidFill>
+                        <a:srgbClr val="E3E7F0"/>
+                      </a:solidFill>
+                      <a:prstDash val="solid"/>
+                      <a:round/>
+                      <a:headEnd type="none" w="med" len="med"/>
+                      <a:tailEnd type="none" w="med" len="med"/>
+                    </a:lnT>
+                    <a:lnB w="6350" cap="flat" cmpd="sng" algn="ctr">
+                      <a:solidFill>
+                        <a:srgbClr val="E3E7F0"/>
+                      </a:solidFill>
+                      <a:prstDash val="solid"/>
+                      <a:round/>
+                      <a:headEnd type="none" w="med" len="med"/>
+                      <a:tailEnd type="none" w="med" len="med"/>
+                    </a:lnB>
+                  </a:tcPr>
+                </a:tc>
+                <a:tc>
+                  <a:txBody>
+                    <a:bodyPr/>
+                    <a:lstStyle/>
+                    <a:p>
+                      <a:pPr algn="r" indent="0" marL="0">
+                        <a:buNone/>
+                      </a:pPr>
+                      <a:r>
+                        <a:rPr lang="en-US" sz="800" dirty="0">
+                          <a:solidFill>
+                            <a:srgbClr val="1A1A1A"/>
+                          </a:solidFill>
+                          <a:latin typeface="Calibri" pitchFamily="34" charset="0"/>
+                          <a:ea typeface="Calibri" pitchFamily="34" charset="-122"/>
+                          <a:cs typeface="Calibri" pitchFamily="34" charset="-120"/>
+                        </a:rPr>
+                        <a:t>Operating profit / lagged assets</a:t>
+                      </a:r>
+                      <a:endParaRPr lang="en-US" sz="800" dirty="0">
+                        <a:latin typeface="Calibri" charset="0"/>
+                        <a:ea typeface="Calibri" charset="0"/>
+                        <a:cs typeface="Calibri" charset="0"/>
+                      </a:endParaRPr>
+                    </a:p>
+                  </a:txBody>
+                  <a:tcPr marL="25400" marR="25400" marT="25400" marB="25400">
+                    <a:lnL w="6350" cap="flat" cmpd="sng" algn="ctr">
+                      <a:solidFill>
+                        <a:srgbClr val="E3E7F0"/>
+                      </a:solidFill>
+                      <a:prstDash val="solid"/>
+                      <a:round/>
+                      <a:headEnd type="none" w="med" len="med"/>
+                      <a:tailEnd type="none" w="med" len="med"/>
+                    </a:lnL>
+                    <a:lnR w="6350" cap="flat" cmpd="sng" algn="ctr">
+                      <a:solidFill>
+                        <a:srgbClr val="E3E7F0"/>
+                      </a:solidFill>
+                      <a:prstDash val="solid"/>
+                      <a:round/>
+                      <a:headEnd type="none" w="med" len="med"/>
+                      <a:tailEnd type="none" w="med" len="med"/>
+                    </a:lnR>
+                    <a:lnT w="6350" cap="flat" cmpd="sng" algn="ctr">
+                      <a:solidFill>
+                        <a:srgbClr val="E3E7F0"/>
+                      </a:solidFill>
+                      <a:prstDash val="solid"/>
+                      <a:round/>
+                      <a:headEnd type="none" w="med" len="med"/>
+                      <a:tailEnd type="none" w="med" len="med"/>
+                    </a:lnT>
+                    <a:lnB w="6350" cap="flat" cmpd="sng" algn="ctr">
+                      <a:solidFill>
+                        <a:srgbClr val="E3E7F0"/>
+                      </a:solidFill>
+                      <a:prstDash val="solid"/>
+                      <a:round/>
+                      <a:headEnd type="none" w="med" len="med"/>
+                      <a:tailEnd type="none" w="med" len="med"/>
+                    </a:lnB>
+                  </a:tcPr>
+                </a:tc>
+                <a:tc>
+                  <a:txBody>
+                    <a:bodyPr/>
+                    <a:lstStyle/>
+                    <a:p>
+                      <a:pPr algn="r" indent="0" marL="0">
+                        <a:buNone/>
+                      </a:pPr>
+                      <a:r>
+                        <a:rPr lang="en-US" sz="800" dirty="0">
+                          <a:solidFill>
+                            <a:srgbClr val="1A1A1A"/>
+                          </a:solidFill>
+                          <a:latin typeface="Calibri" pitchFamily="34" charset="0"/>
+                          <a:ea typeface="Calibri" pitchFamily="34" charset="-122"/>
+                          <a:cs typeface="Calibri" pitchFamily="34" charset="-120"/>
+                        </a:rPr>
+                        <a:t>1.66%</a:t>
+                      </a:r>
+                      <a:endParaRPr lang="en-US" sz="800" dirty="0">
+                        <a:latin typeface="Calibri" charset="0"/>
+                        <a:ea typeface="Calibri" charset="0"/>
+                        <a:cs typeface="Calibri" charset="0"/>
+                      </a:endParaRPr>
+                    </a:p>
+                  </a:txBody>
+                  <a:tcPr marL="25400" marR="25400" marT="25400" marB="25400">
+                    <a:lnL w="6350" cap="flat" cmpd="sng" algn="ctr">
+                      <a:solidFill>
+                        <a:srgbClr val="E3E7F0"/>
+                      </a:solidFill>
+                      <a:prstDash val="solid"/>
+                      <a:round/>
+                      <a:headEnd type="none" w="med" len="med"/>
+                      <a:tailEnd type="none" w="med" len="med"/>
+                    </a:lnL>
+                    <a:lnR w="6350" cap="flat" cmpd="sng" algn="ctr">
+                      <a:solidFill>
+                        <a:srgbClr val="E3E7F0"/>
+                      </a:solidFill>
+                      <a:prstDash val="solid"/>
+                      <a:round/>
+                      <a:headEnd type="none" w="med" len="med"/>
+                      <a:tailEnd type="none" w="med" len="med"/>
+                    </a:lnR>
+                    <a:lnT w="6350" cap="flat" cmpd="sng" algn="ctr">
+                      <a:solidFill>
+                        <a:srgbClr val="E3E7F0"/>
+                      </a:solidFill>
+                      <a:prstDash val="solid"/>
+                      <a:round/>
+                      <a:headEnd type="none" w="med" len="med"/>
+                      <a:tailEnd type="none" w="med" len="med"/>
+                    </a:lnT>
+                    <a:lnB w="6350" cap="flat" cmpd="sng" algn="ctr">
+                      <a:solidFill>
+                        <a:srgbClr val="E3E7F0"/>
+                      </a:solidFill>
+                      <a:prstDash val="solid"/>
+                      <a:round/>
+                      <a:headEnd type="none" w="med" len="med"/>
+                      <a:tailEnd type="none" w="med" len="med"/>
+                    </a:lnB>
+                  </a:tcPr>
+                </a:tc>
+              </a:tr>
+            </a:tbl>
+          </a:graphicData>
+        </a:graphic>
+      </p:graphicFrame>
       <p:sp>
         <p:nvSpPr>
-          <p:cNvPr id="11" name="Shape 8"/>
+          <p:cNvPr id="13" name="Shape 8"/>
           <p:cNvSpPr/>
           <p:nvPr/>
         </p:nvSpPr>
         <p:spPr>
           <a:xfrm>
-            <a:off x="6309360" y="4224528"/>
-            <a:ext cx="5303520" cy="1417320"/>
+            <a:off x="548640" y="5797296"/>
+            <a:ext cx="11064240" cy="914400"/>
           </a:xfrm>
           <a:prstGeom prst="roundRect">
             <a:avLst>
-              <a:gd name="adj" fmla="val 3871"/>
+              <a:gd name="adj" fmla="val 5000"/>
             </a:avLst>
           </a:prstGeom>
           <a:solidFill>
@@ -18295,53 +21515,14 @@
       </p:sp>
       <p:sp>
         <p:nvSpPr>
-          <p:cNvPr id="12" name="Text 9"/>
+          <p:cNvPr id="14" name="Text 9"/>
           <p:cNvSpPr txBox="1"/>
           <p:nvPr/>
         </p:nvSpPr>
         <p:spPr>
           <a:xfrm>
-            <a:off x="6510528" y="4352544"/>
-            <a:ext cx="4937760" cy="237744"/>
-          </a:xfrm>
-          <a:prstGeom prst="rect">
-            <a:avLst/>
-          </a:prstGeom>
-          <a:noFill/>
-          <a:ln/>
-        </p:spPr>
-        <p:txBody>
-          <a:bodyPr wrap="square" lIns="0" tIns="0" rIns="0" bIns="0" rtlCol="0" anchor="ctr"/>
-          <a:lstStyle/>
-          <a:p>
-            <a:pPr indent="0" marL="0">
-              <a:buNone/>
-            </a:pPr>
-            <a:r>
-              <a:rPr lang="en-US" sz="1100" b="1" dirty="0">
-                <a:solidFill>
-                  <a:srgbClr val="1E2761"/>
-                </a:solidFill>
-                <a:latin typeface="Calibri" pitchFamily="34" charset="0"/>
-                <a:ea typeface="Calibri" pitchFamily="34" charset="-122"/>
-                <a:cs typeface="Calibri" pitchFamily="34" charset="-120"/>
-              </a:rPr>
-              <a:t>The trap worth knowing</a:t>
-            </a:r>
-            <a:endParaRPr lang="en-US" sz="1100" dirty="0"/>
-          </a:p>
-        </p:txBody>
-      </p:sp>
-      <p:sp>
-        <p:nvSpPr>
-          <p:cNvPr id="13" name="Text 10"/>
-          <p:cNvSpPr txBox="1"/>
-          <p:nvPr/>
-        </p:nvSpPr>
-        <p:spPr>
-          <a:xfrm>
-            <a:off x="6510528" y="4608576"/>
-            <a:ext cx="4937760" cy="960120"/>
+            <a:off x="749808" y="5888736"/>
+            <a:ext cx="10661904" cy="768096"/>
           </a:xfrm>
           <a:prstGeom prst="rect">
             <a:avLst/>
@@ -18355,12 +21536,29 @@
           <a:p>
             <a:pPr indent="0" marL="0">
               <a:lnSpc>
-                <a:spcPct val="100000"/>
+                <a:spcPct val="98000"/>
               </a:lnSpc>
               <a:buNone/>
             </a:pPr>
             <a:r>
-              <a:rPr lang="en-US" sz="1000" dirty="0">
+              <a:rPr lang="en-US" sz="850" b="1" dirty="0">
+                <a:solidFill>
+                  <a:srgbClr val="1E2761"/>
+                </a:solidFill>
+                <a:latin typeface="Calibri" pitchFamily="34" charset="0"/>
+                <a:ea typeface="Calibri" pitchFamily="34" charset="-122"/>
+                <a:cs typeface="Calibri" pitchFamily="34" charset="-120"/>
+              </a:rPr>
+              <a:t>Where AI was used, and where it deliberately was not.  </a:t>
+            </a:r>
+            <a:pPr indent="0" marL="0">
+              <a:lnSpc>
+                <a:spcPct val="98000"/>
+              </a:lnSpc>
+              <a:buNone/>
+            </a:pPr>
+            <a:r>
+              <a:rPr lang="en-US" sz="850" dirty="0">
                 <a:solidFill>
                   <a:srgbClr val="1A1A1A"/>
                 </a:solidFill>
@@ -18368,9 +21566,9 @@
                 <a:ea typeface="Calibri" pitchFamily="34" charset="-122"/>
                 <a:cs typeface="Calibri" pitchFamily="34" charset="-120"/>
               </a:rPr>
-              <a:t>Item 5.02's own heading contains every keyword worth searching for. Measured raw, "appoint" appears in 99.2% of these filings and the sub-item markers in 88-100%. Strip the heading and they fall to 54.5% and below. Any classifier trained on the unstripped text is learning the title.</a:t>
+              <a:t>No part of the traded pipeline is agentic: every forecast comes from LightGBM and Ridge fitted to the supplied characteristics, and no language model reads a filing, proposes a feature or scores a stock. AI was used to write and review pipeline code, to run diagnostics, and to attack our own results - the short-leg regime split, the cross-fold leak in model selection, the survivorship structure of the 8-K linkage and the sector-neutrality tests were all found that way. Keeping it out of the forecast is how we prevent model-side look-ahead: an LLM trained past 2021 cannot be shown a 2021 stock and asked what happens next. Every AI-proposed change was scored on the pre-registered validation window before it was allowed near the book, and the ones that failed there are reported in the appendix rather than dropped.</a:t>
             </a:r>
-            <a:endParaRPr lang="en-US" sz="1000" dirty="0"/>
+            <a:endParaRPr lang="en-US" sz="850" dirty="0"/>
           </a:p>
         </p:txBody>
       </p:sp>
@@ -19054,7 +22252,7 @@
                 <a:ea typeface="Calibri" pitchFamily="34" charset="-122"/>
                 <a:cs typeface="Calibri" pitchFamily="34" charset="-120"/>
               </a:rPr>
-              <a:t>best +10.90% / worst -6.53%</a:t>
+              <a:t>best +10.90% 2022-01 / worst -6.53% 2022-08</a:t>
             </a:r>
             <a:endParaRPr lang="en-US" sz="950" dirty="0"/>
           </a:p>
@@ -27380,8 +30578,8 @@
         </p:nvSpPr>
         <p:spPr>
           <a:xfrm>
-            <a:off x="640080" y="1371600"/>
-            <a:ext cx="3520440" cy="292608"/>
+            <a:off x="640080" y="1207008"/>
+            <a:ext cx="3520440" cy="274320"/>
           </a:xfrm>
           <a:prstGeom prst="rect">
             <a:avLst/>
@@ -27397,7 +30595,7 @@
               <a:buNone/>
             </a:pPr>
             <a:r>
-              <a:rPr lang="en-US" sz="1500" b="1" dirty="0">
+              <a:rPr lang="en-US" sz="1350" b="1" dirty="0">
                 <a:solidFill>
                   <a:srgbClr val="CADCFC"/>
                 </a:solidFill>
@@ -27407,7 +30605,7 @@
               </a:rPr>
               <a:t>What worked</a:t>
             </a:r>
-            <a:endParaRPr lang="en-US" sz="1500" dirty="0"/>
+            <a:endParaRPr lang="en-US" sz="1350" dirty="0"/>
           </a:p>
         </p:txBody>
       </p:sp>
@@ -27419,8 +30617,8 @@
         </p:nvSpPr>
         <p:spPr>
           <a:xfrm>
-            <a:off x="640080" y="1755648"/>
-            <a:ext cx="3520440" cy="3566160"/>
+            <a:off x="640080" y="1536192"/>
+            <a:ext cx="3520440" cy="2286000"/>
           </a:xfrm>
           <a:prstGeom prst="rect">
             <a:avLst/>
@@ -27434,16 +30632,16 @@
           <a:p>
             <a:pPr marL="342900" indent="-342900">
               <a:lnSpc>
-                <a:spcPct val="105000"/>
+                <a:spcPct val="102000"/>
               </a:lnSpc>
               <a:spcAft>
-                <a:spcPts val="1000"/>
+                <a:spcPts val="600"/>
               </a:spcAft>
               <a:buSzPct val="100000"/>
               <a:buChar char="•"/>
             </a:pPr>
             <a:r>
-              <a:rPr lang="en-US" sz="1150" dirty="0">
+              <a:rPr lang="en-US" sz="950" dirty="0">
                 <a:solidFill>
                   <a:srgbClr val="FFFFFF"/>
                 </a:solidFill>
@@ -27451,23 +30649,23 @@
                 <a:ea typeface="Calibri" pitchFamily="34" charset="-122"/>
                 <a:cs typeface="Calibri" pitchFamily="34" charset="-120"/>
               </a:rPr>
-              <a:t>Portfolio construction moved the book from beta -0.537 to -0.159 and cut drawdown from -30% to -6.53%.</a:t>
+              <a:t>Construction moved the book from beta -0.537 to -0.159 and cut drawdown from -30% to -6.53%.</a:t>
             </a:r>
-            <a:endParaRPr lang="en-US" sz="1150" dirty="0"/>
+            <a:endParaRPr lang="en-US" sz="950" dirty="0"/>
           </a:p>
           <a:p>
             <a:pPr marL="342900" indent="-342900">
               <a:lnSpc>
-                <a:spcPct val="105000"/>
+                <a:spcPct val="102000"/>
               </a:lnSpc>
               <a:spcAft>
-                <a:spcPts val="1000"/>
+                <a:spcPts val="600"/>
               </a:spcAft>
               <a:buSzPct val="100000"/>
               <a:buChar char="•"/>
             </a:pPr>
             <a:r>
-              <a:rPr lang="en-US" sz="1150" dirty="0">
+              <a:rPr lang="en-US" sz="950" dirty="0">
                 <a:solidFill>
                   <a:srgbClr val="FFFFFF"/>
                 </a:solidFill>
@@ -27475,23 +30673,23 @@
                 <a:ea typeface="Calibri" pitchFamily="34" charset="-122"/>
                 <a:cs typeface="Calibri" pitchFamily="34" charset="-120"/>
               </a:rPr>
-              <a:t>Alpha survives market, size and value: +13.78%/yr, t=+2.47, R2 0.15. It is not a repackaged factor.</a:t>
+              <a:t>Alpha survives market, size, value and momentum: +15.15%/yr, t=+2.68, R2 0.17. Only value loads at all; the rest are indistinguishable from zero.</a:t>
             </a:r>
-            <a:endParaRPr lang="en-US" sz="1150" dirty="0"/>
+            <a:endParaRPr lang="en-US" sz="950" dirty="0"/>
           </a:p>
           <a:p>
             <a:pPr marL="342900" indent="-342900">
               <a:lnSpc>
-                <a:spcPct val="105000"/>
+                <a:spcPct val="102000"/>
               </a:lnSpc>
               <a:spcAft>
-                <a:spcPts val="1000"/>
+                <a:spcPts val="600"/>
               </a:spcAft>
               <a:buSzPct val="100000"/>
               <a:buChar char="•"/>
             </a:pPr>
             <a:r>
-              <a:rPr lang="en-US" sz="1150" dirty="0">
+              <a:rPr lang="en-US" sz="950" dirty="0">
                 <a:solidFill>
                   <a:srgbClr val="FFFFFF"/>
                 </a:solidFill>
@@ -27501,7 +30699,7 @@
               </a:rPr>
               <a:t>The long leg has genuine selection skill since 2023: +8.81% over the eligible universe, t=+2.4 across 44 months.</a:t>
             </a:r>
-            <a:endParaRPr lang="en-US" sz="1150" dirty="0"/>
+            <a:endParaRPr lang="en-US" sz="950" dirty="0"/>
           </a:p>
         </p:txBody>
       </p:sp>
@@ -27513,8 +30711,8 @@
         </p:nvSpPr>
         <p:spPr>
           <a:xfrm>
-            <a:off x="4434840" y="1371600"/>
-            <a:ext cx="3520440" cy="292608"/>
+            <a:off x="4434840" y="1207008"/>
+            <a:ext cx="3520440" cy="274320"/>
           </a:xfrm>
           <a:prstGeom prst="rect">
             <a:avLst/>
@@ -27530,7 +30728,7 @@
               <a:buNone/>
             </a:pPr>
             <a:r>
-              <a:rPr lang="en-US" sz="1500" b="1" dirty="0">
+              <a:rPr lang="en-US" sz="1350" b="1" dirty="0">
                 <a:solidFill>
                   <a:srgbClr val="F3C6C0"/>
                 </a:solidFill>
@@ -27540,7 +30738,7 @@
               </a:rPr>
               <a:t>What did not</a:t>
             </a:r>
-            <a:endParaRPr lang="en-US" sz="1500" dirty="0"/>
+            <a:endParaRPr lang="en-US" sz="1350" dirty="0"/>
           </a:p>
         </p:txBody>
       </p:sp>
@@ -27552,8 +30750,8 @@
         </p:nvSpPr>
         <p:spPr>
           <a:xfrm>
-            <a:off x="4434840" y="1755648"/>
-            <a:ext cx="3520440" cy="3566160"/>
+            <a:off x="4434840" y="1536192"/>
+            <a:ext cx="3520440" cy="2286000"/>
           </a:xfrm>
           <a:prstGeom prst="rect">
             <a:avLst/>
@@ -27567,16 +30765,16 @@
           <a:p>
             <a:pPr marL="342900" indent="-342900">
               <a:lnSpc>
-                <a:spcPct val="105000"/>
+                <a:spcPct val="102000"/>
               </a:lnSpc>
               <a:spcAft>
-                <a:spcPts val="1000"/>
+                <a:spcPts val="600"/>
               </a:spcAft>
               <a:buSzPct val="100000"/>
               <a:buChar char="•"/>
             </a:pPr>
             <a:r>
-              <a:rPr lang="en-US" sz="1150" dirty="0">
+              <a:rPr lang="en-US" sz="950" dirty="0">
                 <a:solidFill>
                   <a:srgbClr val="FFFFFF"/>
                 </a:solidFill>
@@ -27586,21 +30784,21 @@
               </a:rPr>
               <a:t>The short leg's edge was one regime. In the pre-test validation window it pointed the wrong way (+5.42% vs universe); since 2023 it is statistically zero.</a:t>
             </a:r>
-            <a:endParaRPr lang="en-US" sz="1150" dirty="0"/>
+            <a:endParaRPr lang="en-US" sz="950" dirty="0"/>
           </a:p>
           <a:p>
             <a:pPr marL="342900" indent="-342900">
               <a:lnSpc>
-                <a:spcPct val="105000"/>
+                <a:spcPct val="102000"/>
               </a:lnSpc>
               <a:spcAft>
-                <a:spcPts val="1000"/>
+                <a:spcPts val="600"/>
               </a:spcAft>
               <a:buSzPct val="100000"/>
               <a:buChar char="•"/>
             </a:pPr>
             <a:r>
-              <a:rPr lang="en-US" sz="1150" dirty="0">
+              <a:rPr lang="en-US" sz="950" dirty="0">
                 <a:solidFill>
                   <a:srgbClr val="FFFFFF"/>
                 </a:solidFill>
@@ -27608,23 +30806,23 @@
                 <a:ea typeface="Calibri" pitchFamily="34" charset="-122"/>
                 <a:cs typeface="Calibri" pitchFamily="34" charset="-120"/>
               </a:rPr>
-              <a:t>8-K signals add nothing measurable to the forecast, across three independent tests.</a:t>
+              <a:t>8-K signals add nothing measurable, across three independent tests - and the corpus itself is survivorship-linked, which is in the appendix.</a:t>
             </a:r>
-            <a:endParaRPr lang="en-US" sz="1150" dirty="0"/>
+            <a:endParaRPr lang="en-US" sz="950" dirty="0"/>
           </a:p>
           <a:p>
             <a:pPr marL="342900" indent="-342900">
               <a:lnSpc>
-                <a:spcPct val="105000"/>
+                <a:spcPct val="102000"/>
               </a:lnSpc>
               <a:spcAft>
-                <a:spcPts val="1000"/>
+                <a:spcPts val="600"/>
               </a:spcAft>
               <a:buSzPct val="100000"/>
               <a:buChar char="•"/>
             </a:pPr>
             <a:r>
-              <a:rPr lang="en-US" sz="1150" dirty="0">
+              <a:rPr lang="en-US" sz="950" dirty="0">
                 <a:solidFill>
                   <a:srgbClr val="FFFFFF"/>
                 </a:solidFill>
@@ -27634,7 +30832,7 @@
               </a:rPr>
               <a:t>Removing the 5 best months of 68 takes the information ratio from +0.88 to +0.36.</a:t>
             </a:r>
-            <a:endParaRPr lang="en-US" sz="1150" dirty="0"/>
+            <a:endParaRPr lang="en-US" sz="950" dirty="0"/>
           </a:p>
         </p:txBody>
       </p:sp>
@@ -27646,8 +30844,8 @@
         </p:nvSpPr>
         <p:spPr>
           <a:xfrm>
-            <a:off x="8229600" y="1371600"/>
-            <a:ext cx="3520440" cy="292608"/>
+            <a:off x="8229600" y="1207008"/>
+            <a:ext cx="3520440" cy="274320"/>
           </a:xfrm>
           <a:prstGeom prst="rect">
             <a:avLst/>
@@ -27663,7 +30861,7 @@
               <a:buNone/>
             </a:pPr>
             <a:r>
-              <a:rPr lang="en-US" sz="1500" b="1" dirty="0">
+              <a:rPr lang="en-US" sz="1350" b="1" dirty="0">
                 <a:solidFill>
                   <a:srgbClr val="CADCFC"/>
                 </a:solidFill>
@@ -27671,9 +30869,9 @@
                 <a:ea typeface="Calibri" pitchFamily="34" charset="-122"/>
                 <a:cs typeface="Calibri" pitchFamily="34" charset="-120"/>
               </a:rPr>
-              <a:t>What we would say about the future</a:t>
+              <a:t>What we would do next</a:t>
             </a:r>
-            <a:endParaRPr lang="en-US" sz="1500" dirty="0"/>
+            <a:endParaRPr lang="en-US" sz="1350" dirty="0"/>
           </a:p>
         </p:txBody>
       </p:sp>
@@ -27685,8 +30883,8 @@
         </p:nvSpPr>
         <p:spPr>
           <a:xfrm>
-            <a:off x="8229600" y="1755648"/>
-            <a:ext cx="3520440" cy="3566160"/>
+            <a:off x="8229600" y="1536192"/>
+            <a:ext cx="3520440" cy="2286000"/>
           </a:xfrm>
           <a:prstGeom prst="rect">
             <a:avLst/>
@@ -27700,16 +30898,16 @@
           <a:p>
             <a:pPr marL="342900" indent="-342900">
               <a:lnSpc>
-                <a:spcPct val="105000"/>
+                <a:spcPct val="102000"/>
               </a:lnSpc>
               <a:spcAft>
-                <a:spcPts val="1000"/>
+                <a:spcPts val="600"/>
               </a:spcAft>
               <a:buSzPct val="100000"/>
               <a:buChar char="•"/>
             </a:pPr>
             <a:r>
-              <a:rPr lang="en-US" sz="1150" dirty="0">
+              <a:rPr lang="en-US" sz="950" dirty="0">
                 <a:solidFill>
                   <a:srgbClr val="FFFFFF"/>
                 </a:solidFill>
@@ -27717,23 +30915,23 @@
                 <a:ea typeface="Calibri" pitchFamily="34" charset="-122"/>
                 <a:cs typeface="Calibri" pitchFamily="34" charset="-120"/>
               </a:rPr>
-              <a:t>The second half of the window runs at +0.62 against +1.12 in the first. The later figure is the more honest forward expectation; 2021-22 dominates the full-period number.</a:t>
+              <a:t>The second half of the window runs at +0.62 against +1.12. The later figure is the more honest forward expectation.</a:t>
             </a:r>
-            <a:endParaRPr lang="en-US" sz="1150" dirty="0"/>
+            <a:endParaRPr lang="en-US" sz="950" dirty="0"/>
           </a:p>
           <a:p>
             <a:pPr marL="342900" indent="-342900">
               <a:lnSpc>
-                <a:spcPct val="105000"/>
+                <a:spcPct val="102000"/>
               </a:lnSpc>
               <a:spcAft>
-                <a:spcPts val="1000"/>
+                <a:spcPts val="600"/>
               </a:spcAft>
               <a:buSzPct val="100000"/>
               <a:buChar char="•"/>
             </a:pPr>
             <a:r>
-              <a:rPr lang="en-US" sz="1150" dirty="0">
+              <a:rPr lang="en-US" sz="950" dirty="0">
                 <a:solidFill>
                   <a:srgbClr val="FFFFFF"/>
                 </a:solidFill>
@@ -27741,23 +30939,23 @@
                 <a:ea typeface="Calibri" pitchFamily="34" charset="-122"/>
                 <a:cs typeface="Calibri" pitchFamily="34" charset="-120"/>
               </a:rPr>
-              <a:t>The short book's job is neutrality, not return. We would size it as a hedge, not as a second source of alpha.</a:t>
+              <a:t>The short book's job is neutrality, not return. We would size it as a hedge.</a:t>
             </a:r>
-            <a:endParaRPr lang="en-US" sz="1150" dirty="0"/>
+            <a:endParaRPr lang="en-US" sz="950" dirty="0"/>
           </a:p>
           <a:p>
             <a:pPr marL="342900" indent="-342900">
               <a:lnSpc>
-                <a:spcPct val="105000"/>
+                <a:spcPct val="102000"/>
               </a:lnSpc>
               <a:spcAft>
-                <a:spcPts val="1000"/>
+                <a:spcPts val="600"/>
               </a:spcAft>
               <a:buSzPct val="100000"/>
               <a:buChar char="•"/>
             </a:pPr>
             <a:r>
-              <a:rPr lang="en-US" sz="1150" dirty="0">
+              <a:rPr lang="en-US" sz="950" dirty="0">
                 <a:solidFill>
                   <a:srgbClr val="FFFFFF"/>
                 </a:solidFill>
@@ -27765,23 +30963,23 @@
                 <a:ea typeface="Calibri" pitchFamily="34" charset="-122"/>
                 <a:cs typeface="Calibri" pitchFamily="34" charset="-120"/>
               </a:rPr>
-              <a:t>We evaluated the test period 13 times. Nine followed a diagnosed defect; three were genuine trials, one of which we removed after it failed.</a:t>
+              <a:t>Sector neutrality: 90% of capital sits in sector bets nobody chose. Tested four ways, reported as untested rather than rejected - our sample cannot resolve an effect that size. Appendix.</a:t>
             </a:r>
-            <a:endParaRPr lang="en-US" sz="1150" dirty="0"/>
+            <a:endParaRPr lang="en-US" sz="950" dirty="0"/>
           </a:p>
           <a:p>
             <a:pPr marL="342900" indent="-342900">
               <a:lnSpc>
-                <a:spcPct val="105000"/>
+                <a:spcPct val="102000"/>
               </a:lnSpc>
               <a:spcAft>
-                <a:spcPts val="1000"/>
+                <a:spcPts val="600"/>
               </a:spcAft>
               <a:buSzPct val="100000"/>
               <a:buChar char="•"/>
             </a:pPr>
             <a:r>
-              <a:rPr lang="en-US" sz="1150" dirty="0">
+              <a:rPr lang="en-US" sz="950" dirty="0">
                 <a:solidFill>
                   <a:srgbClr val="FFFFFF"/>
                 </a:solidFill>
@@ -27789,9 +30987,9 @@
                 <a:ea typeface="Calibri" pitchFamily="34" charset="-122"/>
                 <a:cs typeface="Calibri" pitchFamily="34" charset="-120"/>
               </a:rPr>
-              <a:t>The improvement we would make next is sector neutrality: 90% of capital sits in sector bets nobody chose. We tested it four ways and report it as untested rather than rejected - the appendix explains why our sample cannot resolve an effect that size.</a:t>
+              <a:t>We evaluated the test period 13 times. Nine followed a diagnosed defect.</a:t>
             </a:r>
-            <a:endParaRPr lang="en-US" sz="1150" dirty="0"/>
+            <a:endParaRPr lang="en-US" sz="950" dirty="0"/>
           </a:p>
         </p:txBody>
       </p:sp>
@@ -27803,8 +31001,8 @@
         </p:nvSpPr>
         <p:spPr>
           <a:xfrm>
-            <a:off x="640080" y="5577840"/>
-            <a:ext cx="10881360" cy="457200"/>
+            <a:off x="640080" y="4041648"/>
+            <a:ext cx="5394960" cy="256032"/>
           </a:xfrm>
           <a:prstGeom prst="rect">
             <a:avLst/>
@@ -27820,7 +31018,7 @@
               <a:buNone/>
             </a:pPr>
             <a:r>
-              <a:rPr lang="en-US" sz="1200" i="1" dirty="0">
+              <a:rPr lang="en-US" sz="1250" b="1" dirty="0">
                 <a:solidFill>
                   <a:srgbClr val="CADCFC"/>
                 </a:solidFill>
@@ -27828,9 +31026,308 @@
                 <a:ea typeface="Calibri" pitchFamily="34" charset="-122"/>
                 <a:cs typeface="Calibri" pitchFamily="34" charset="-120"/>
               </a:rPr>
-              <a:t>Every one of these was measured, not asserted. The appendix carries the regressions, the research log and the compliance output.</a:t>
+              <a:t>The positions that drove it</a:t>
             </a:r>
-            <a:endParaRPr lang="en-US" sz="1200" dirty="0"/>
+            <a:endParaRPr lang="en-US" sz="1250" dirty="0"/>
+          </a:p>
+        </p:txBody>
+      </p:sp>
+      <p:sp>
+        <p:nvSpPr>
+          <p:cNvPr id="10" name="Text 8"/>
+          <p:cNvSpPr txBox="1"/>
+          <p:nvPr/>
+        </p:nvSpPr>
+        <p:spPr>
+          <a:xfrm>
+            <a:off x="640080" y="4352544"/>
+            <a:ext cx="5394960" cy="2103120"/>
+          </a:xfrm>
+          <a:prstGeom prst="rect">
+            <a:avLst/>
+          </a:prstGeom>
+          <a:noFill/>
+          <a:ln/>
+        </p:spPr>
+        <p:txBody>
+          <a:bodyPr wrap="square" lIns="0" tIns="0" rIns="0" bIns="0" rtlCol="0" anchor="t"/>
+          <a:lstStyle/>
+          <a:p>
+            <a:pPr marL="342900" indent="-342900">
+              <a:lnSpc>
+                <a:spcPct val="102000"/>
+              </a:lnSpc>
+              <a:spcAft>
+                <a:spcPts val="400"/>
+              </a:spcAft>
+              <a:buSzPct val="100000"/>
+              <a:buChar char="•"/>
+            </a:pPr>
+            <a:r>
+              <a:rPr lang="en-US" sz="900" dirty="0">
+                <a:solidFill>
+                  <a:srgbClr val="FFFFFF"/>
+                </a:solidFill>
+                <a:latin typeface="Calibri" pitchFamily="34" charset="0"/>
+                <a:ea typeface="Calibri" pitchFamily="34" charset="-122"/>
+                <a:cs typeface="Calibri" pitchFamily="34" charset="-120"/>
+              </a:rPr>
+              <a:t>MXL, Maxlinear, Inc  +2.33%  (long, 5mo)</a:t>
+            </a:r>
+            <a:endParaRPr lang="en-US" sz="900" dirty="0"/>
+          </a:p>
+          <a:p>
+            <a:pPr marL="342900" indent="-342900">
+              <a:lnSpc>
+                <a:spcPct val="102000"/>
+              </a:lnSpc>
+              <a:spcAft>
+                <a:spcPts val="400"/>
+              </a:spcAft>
+              <a:buSzPct val="100000"/>
+              <a:buChar char="•"/>
+            </a:pPr>
+            <a:r>
+              <a:rPr lang="en-US" sz="900" dirty="0">
+                <a:solidFill>
+                  <a:srgbClr val="FFFFFF"/>
+                </a:solidFill>
+                <a:latin typeface="Calibri" pitchFamily="34" charset="0"/>
+                <a:ea typeface="Calibri" pitchFamily="34" charset="-122"/>
+                <a:cs typeface="Calibri" pitchFamily="34" charset="-120"/>
+              </a:rPr>
+              <a:t>CORT, Corcept Therapeutics Inc  +1.89%  (long, 46mo)</a:t>
+            </a:r>
+            <a:endParaRPr lang="en-US" sz="900" dirty="0"/>
+          </a:p>
+          <a:p>
+            <a:pPr marL="342900" indent="-342900">
+              <a:lnSpc>
+                <a:spcPct val="102000"/>
+              </a:lnSpc>
+              <a:spcAft>
+                <a:spcPts val="400"/>
+              </a:spcAft>
+              <a:buSzPct val="100000"/>
+              <a:buChar char="•"/>
+            </a:pPr>
+            <a:r>
+              <a:rPr lang="en-US" sz="900" dirty="0">
+                <a:solidFill>
+                  <a:srgbClr val="FFFFFF"/>
+                </a:solidFill>
+                <a:latin typeface="Calibri" pitchFamily="34" charset="0"/>
+                <a:ea typeface="Calibri" pitchFamily="34" charset="-122"/>
+                <a:cs typeface="Calibri" pitchFamily="34" charset="-120"/>
+              </a:rPr>
+              <a:t>AXON, Axon Enterprise Inc  +1.71%  (long, 38mo)</a:t>
+            </a:r>
+            <a:endParaRPr lang="en-US" sz="900" dirty="0"/>
+          </a:p>
+          <a:p>
+            <a:pPr marL="342900" indent="-342900">
+              <a:lnSpc>
+                <a:spcPct val="102000"/>
+              </a:lnSpc>
+              <a:spcAft>
+                <a:spcPts val="400"/>
+              </a:spcAft>
+              <a:buSzPct val="100000"/>
+              <a:buChar char="•"/>
+            </a:pPr>
+            <a:r>
+              <a:rPr lang="en-US" sz="900" dirty="0">
+                <a:solidFill>
+                  <a:srgbClr val="FFFFFF"/>
+                </a:solidFill>
+                <a:latin typeface="Calibri" pitchFamily="34" charset="0"/>
+                <a:ea typeface="Calibri" pitchFamily="34" charset="-122"/>
+                <a:cs typeface="Calibri" pitchFamily="34" charset="-120"/>
+              </a:rPr>
+              <a:t>RXT, Rackspace Technology Inc  +1.60%  (short, 17mo)</a:t>
+            </a:r>
+            <a:endParaRPr lang="en-US" sz="900" dirty="0"/>
+          </a:p>
+          <a:p>
+            <a:pPr marL="342900" indent="-342900">
+              <a:lnSpc>
+                <a:spcPct val="102000"/>
+              </a:lnSpc>
+              <a:spcAft>
+                <a:spcPts val="400"/>
+              </a:spcAft>
+              <a:buSzPct val="100000"/>
+              <a:buChar char="•"/>
+            </a:pPr>
+            <a:r>
+              <a:rPr lang="en-US" sz="900" dirty="0">
+                <a:solidFill>
+                  <a:srgbClr val="FFFFFF"/>
+                </a:solidFill>
+                <a:latin typeface="Calibri" pitchFamily="34" charset="0"/>
+                <a:ea typeface="Calibri" pitchFamily="34" charset="-122"/>
+                <a:cs typeface="Calibri" pitchFamily="34" charset="-120"/>
+              </a:rPr>
+              <a:t>Largest single loss: MDGL, Madrigal Pharmaceuticals Inc  -3.63%  (short, 26mo) - a short in a biotech that re-rated on trial data. No characteristic in the panel anticipates a readout, which is the honest limit of this approach.</a:t>
+            </a:r>
+            <a:endParaRPr lang="en-US" sz="900" dirty="0"/>
+          </a:p>
+        </p:txBody>
+      </p:sp>
+      <p:sp>
+        <p:nvSpPr>
+          <p:cNvPr id="11" name="Text 9"/>
+          <p:cNvSpPr txBox="1"/>
+          <p:nvPr/>
+        </p:nvSpPr>
+        <p:spPr>
+          <a:xfrm>
+            <a:off x="6309360" y="4041648"/>
+            <a:ext cx="5303520" cy="256032"/>
+          </a:xfrm>
+          <a:prstGeom prst="rect">
+            <a:avLst/>
+          </a:prstGeom>
+          <a:noFill/>
+          <a:ln/>
+        </p:spPr>
+        <p:txBody>
+          <a:bodyPr wrap="square" lIns="0" tIns="0" rIns="0" bIns="0" rtlCol="0" anchor="ctr"/>
+          <a:lstStyle/>
+          <a:p>
+            <a:pPr indent="0" marL="0">
+              <a:buNone/>
+            </a:pPr>
+            <a:r>
+              <a:rPr lang="en-US" sz="1250" b="1" dirty="0">
+                <a:solidFill>
+                  <a:srgbClr val="CADCFC"/>
+                </a:solidFill>
+                <a:latin typeface="Calibri" pitchFamily="34" charset="0"/>
+                <a:ea typeface="Calibri" pitchFamily="34" charset="-122"/>
+                <a:cs typeface="Calibri" pitchFamily="34" charset="-120"/>
+              </a:rPr>
+              <a:t>The macro backdrop</a:t>
+            </a:r>
+            <a:endParaRPr lang="en-US" sz="1250" dirty="0"/>
+          </a:p>
+        </p:txBody>
+      </p:sp>
+      <p:sp>
+        <p:nvSpPr>
+          <p:cNvPr id="12" name="Text 10"/>
+          <p:cNvSpPr txBox="1"/>
+          <p:nvPr/>
+        </p:nvSpPr>
+        <p:spPr>
+          <a:xfrm>
+            <a:off x="6309360" y="4352544"/>
+            <a:ext cx="5303520" cy="2103120"/>
+          </a:xfrm>
+          <a:prstGeom prst="rect">
+            <a:avLst/>
+          </a:prstGeom>
+          <a:noFill/>
+          <a:ln/>
+        </p:spPr>
+        <p:txBody>
+          <a:bodyPr wrap="square" lIns="0" tIns="0" rIns="0" bIns="0" rtlCol="0" anchor="t"/>
+          <a:lstStyle/>
+          <a:p>
+            <a:pPr marL="342900" indent="-342900">
+              <a:lnSpc>
+                <a:spcPct val="102000"/>
+              </a:lnSpc>
+              <a:spcAft>
+                <a:spcPts val="400"/>
+              </a:spcAft>
+              <a:buSzPct val="100000"/>
+              <a:buChar char="•"/>
+            </a:pPr>
+            <a:r>
+              <a:rPr lang="en-US" sz="900" dirty="0">
+                <a:solidFill>
+                  <a:srgbClr val="FFFFFF"/>
+                </a:solidFill>
+                <a:latin typeface="Calibri" pitchFamily="34" charset="0"/>
+                <a:ea typeface="Calibri" pitchFamily="34" charset="-122"/>
+                <a:cs typeface="Calibri" pitchFamily="34" charset="-120"/>
+              </a:rPr>
+              <a:t>2021  +12.95% against the S&amp;P's +26.89%. Post-COVID reflation and the retail speculative peak; the short book carried the year.</a:t>
+            </a:r>
+            <a:endParaRPr lang="en-US" sz="900" dirty="0"/>
+          </a:p>
+          <a:p>
+            <a:pPr marL="342900" indent="-342900">
+              <a:lnSpc>
+                <a:spcPct val="102000"/>
+              </a:lnSpc>
+              <a:spcAft>
+                <a:spcPts val="400"/>
+              </a:spcAft>
+              <a:buSzPct val="100000"/>
+              <a:buChar char="•"/>
+            </a:pPr>
+            <a:r>
+              <a:rPr lang="en-US" sz="900" dirty="0">
+                <a:solidFill>
+                  <a:srgbClr val="FFFFFF"/>
+                </a:solidFill>
+                <a:latin typeface="Calibri" pitchFamily="34" charset="0"/>
+                <a:ea typeface="Calibri" pitchFamily="34" charset="-122"/>
+                <a:cs typeface="Calibri" pitchFamily="34" charset="-120"/>
+              </a:rPr>
+              <a:t>2022  +38.51% while the S&amp;P fell -19.44%. The hiking cycle de-rated long-duration growth - our best year, and the clearest evidence the book is not a disguised long.</a:t>
+            </a:r>
+            <a:endParaRPr lang="en-US" sz="900" dirty="0"/>
+          </a:p>
+          <a:p>
+            <a:pPr marL="342900" indent="-342900">
+              <a:lnSpc>
+                <a:spcPct val="102000"/>
+              </a:lnSpc>
+              <a:spcAft>
+                <a:spcPts val="400"/>
+              </a:spcAft>
+              <a:buSzPct val="100000"/>
+              <a:buChar char="•"/>
+            </a:pPr>
+            <a:r>
+              <a:rPr lang="en-US" sz="900" dirty="0">
+                <a:solidFill>
+                  <a:srgbClr val="FFFFFF"/>
+                </a:solidFill>
+                <a:latin typeface="Calibri" pitchFamily="34" charset="0"/>
+                <a:ea typeface="Calibri" pitchFamily="34" charset="-122"/>
+                <a:cs typeface="Calibri" pitchFamily="34" charset="-120"/>
+              </a:rPr>
+              <a:t>2023-25  AI-led concentration in mega-caps. The short edge disappears and the long leg takes over; +0.46 over those three years.</a:t>
+            </a:r>
+            <a:endParaRPr lang="en-US" sz="900" dirty="0"/>
+          </a:p>
+          <a:p>
+            <a:pPr marL="342900" indent="-342900">
+              <a:lnSpc>
+                <a:spcPct val="102000"/>
+              </a:lnSpc>
+              <a:spcAft>
+                <a:spcPts val="400"/>
+              </a:spcAft>
+              <a:buSzPct val="100000"/>
+              <a:buChar char="•"/>
+            </a:pPr>
+            <a:r>
+              <a:rPr lang="en-US" sz="900" dirty="0">
+                <a:solidFill>
+                  <a:srgbClr val="FFFFFF"/>
+                </a:solidFill>
+                <a:latin typeface="Calibri" pitchFamily="34" charset="0"/>
+                <a:ea typeface="Calibri" pitchFamily="34" charset="-122"/>
+                <a:cs typeface="Calibri" pitchFamily="34" charset="-120"/>
+              </a:rPr>
+              <a:t>2026  +19.99% against +12.28% in eight months, with rolling beta drifting to -0.63 by August - the drift the appendix flags.</a:t>
+            </a:r>
+            <a:endParaRPr lang="en-US" sz="900" dirty="0"/>
           </a:p>
         </p:txBody>
       </p:sp>

--- a/05_submission/FIAM_deck.pptx
+++ b/05_submission/FIAM_deck.pptx
@@ -3606,6 +3606,138 @@
                   </a:tcPr>
                 </a:tc>
               </a:tr>
+              <a:tr h="237744">
+                <a:tc>
+                  <a:txBody>
+                    <a:bodyPr/>
+                    <a:lstStyle/>
+                    <a:p>
+                      <a:pPr algn="l" indent="0" marL="0">
+                        <a:buNone/>
+                      </a:pPr>
+                      <a:r>
+                        <a:rPr lang="en-US" sz="1050" dirty="0">
+                          <a:solidFill>
+                            <a:srgbClr val="1A1A1A"/>
+                          </a:solidFill>
+                          <a:latin typeface="Calibri" pitchFamily="34" charset="0"/>
+                          <a:ea typeface="Calibri" pitchFamily="34" charset="-122"/>
+                          <a:cs typeface="Calibri" pitchFamily="34" charset="-120"/>
+                        </a:rPr>
+                        <a:t>Coverage checked against delistings</a:t>
+                      </a:r>
+                      <a:endParaRPr lang="en-US" sz="1050" dirty="0">
+                        <a:latin typeface="Calibri" charset="0"/>
+                        <a:ea typeface="Calibri" charset="0"/>
+                        <a:cs typeface="Calibri" charset="0"/>
+                      </a:endParaRPr>
+                    </a:p>
+                  </a:txBody>
+                  <a:tcPr marL="50800" marR="50800" marT="50800" marB="50800">
+                    <a:lnL w="6350" cap="flat" cmpd="sng" algn="ctr">
+                      <a:solidFill>
+                        <a:srgbClr val="E3E7F0"/>
+                      </a:solidFill>
+                      <a:prstDash val="solid"/>
+                      <a:round/>
+                      <a:headEnd type="none" w="med" len="med"/>
+                      <a:tailEnd type="none" w="med" len="med"/>
+                    </a:lnL>
+                    <a:lnR w="6350" cap="flat" cmpd="sng" algn="ctr">
+                      <a:solidFill>
+                        <a:srgbClr val="E3E7F0"/>
+                      </a:solidFill>
+                      <a:prstDash val="solid"/>
+                      <a:round/>
+                      <a:headEnd type="none" w="med" len="med"/>
+                      <a:tailEnd type="none" w="med" len="med"/>
+                    </a:lnR>
+                    <a:lnT w="6350" cap="flat" cmpd="sng" algn="ctr">
+                      <a:solidFill>
+                        <a:srgbClr val="E3E7F0"/>
+                      </a:solidFill>
+                      <a:prstDash val="solid"/>
+                      <a:round/>
+                      <a:headEnd type="none" w="med" len="med"/>
+                      <a:tailEnd type="none" w="med" len="med"/>
+                    </a:lnT>
+                    <a:lnB w="6350" cap="flat" cmpd="sng" algn="ctr">
+                      <a:solidFill>
+                        <a:srgbClr val="E3E7F0"/>
+                      </a:solidFill>
+                      <a:prstDash val="solid"/>
+                      <a:round/>
+                      <a:headEnd type="none" w="med" len="med"/>
+                      <a:tailEnd type="none" w="med" len="med"/>
+                    </a:lnB>
+                  </a:tcPr>
+                </a:tc>
+                <a:tc>
+                  <a:txBody>
+                    <a:bodyPr/>
+                    <a:lstStyle/>
+                    <a:p>
+                      <a:pPr algn="r" indent="0" marL="0">
+                        <a:buNone/>
+                      </a:pPr>
+                      <a:r>
+                        <a:rPr lang="en-US" sz="1050" dirty="0">
+                          <a:solidFill>
+                            <a:srgbClr val="1A1A1A"/>
+                          </a:solidFill>
+                          <a:latin typeface="Calibri" pitchFamily="34" charset="0"/>
+                          <a:ea typeface="Calibri" pitchFamily="34" charset="-122"/>
+                          <a:cs typeface="Calibri" pitchFamily="34" charset="-120"/>
+                        </a:rPr>
+                        <a:t>Survivorship-linked: see below</a:t>
+                      </a:r>
+                      <a:endParaRPr lang="en-US" sz="1050" dirty="0">
+                        <a:latin typeface="Calibri" charset="0"/>
+                        <a:ea typeface="Calibri" charset="0"/>
+                        <a:cs typeface="Calibri" charset="0"/>
+                      </a:endParaRPr>
+                    </a:p>
+                  </a:txBody>
+                  <a:tcPr marL="50800" marR="50800" marT="50800" marB="50800">
+                    <a:lnL w="6350" cap="flat" cmpd="sng" algn="ctr">
+                      <a:solidFill>
+                        <a:srgbClr val="E3E7F0"/>
+                      </a:solidFill>
+                      <a:prstDash val="solid"/>
+                      <a:round/>
+                      <a:headEnd type="none" w="med" len="med"/>
+                      <a:tailEnd type="none" w="med" len="med"/>
+                    </a:lnL>
+                    <a:lnR w="6350" cap="flat" cmpd="sng" algn="ctr">
+                      <a:solidFill>
+                        <a:srgbClr val="E3E7F0"/>
+                      </a:solidFill>
+                      <a:prstDash val="solid"/>
+                      <a:round/>
+                      <a:headEnd type="none" w="med" len="med"/>
+                      <a:tailEnd type="none" w="med" len="med"/>
+                    </a:lnR>
+                    <a:lnT w="6350" cap="flat" cmpd="sng" algn="ctr">
+                      <a:solidFill>
+                        <a:srgbClr val="E3E7F0"/>
+                      </a:solidFill>
+                      <a:prstDash val="solid"/>
+                      <a:round/>
+                      <a:headEnd type="none" w="med" len="med"/>
+                      <a:tailEnd type="none" w="med" len="med"/>
+                    </a:lnT>
+                    <a:lnB w="6350" cap="flat" cmpd="sng" algn="ctr">
+                      <a:solidFill>
+                        <a:srgbClr val="E3E7F0"/>
+                      </a:solidFill>
+                      <a:prstDash val="solid"/>
+                      <a:round/>
+                      <a:headEnd type="none" w="med" len="med"/>
+                      <a:tailEnd type="none" w="med" len="med"/>
+                    </a:lnB>
+                  </a:tcPr>
+                </a:tc>
+              </a:tr>
             </a:tbl>
           </a:graphicData>
         </a:graphic>
@@ -3619,7 +3751,7 @@
         <p:spPr>
           <a:xfrm>
             <a:off x="548640" y="3200400"/>
-            <a:ext cx="6766560" cy="1097280"/>
+            <a:ext cx="6766560" cy="1828800"/>
           </a:xfrm>
           <a:prstGeom prst="rect">
             <a:avLst/>
@@ -3699,6 +3831,54 @@
                 <a:cs typeface="Calibri" pitchFamily="34" charset="-120"/>
               </a:rPr>
               <a:t>The triage uses no language model. Rules were read off the documents; --sample prints both sides for inspection and sorted 8 of 8 correctly on the sample shown.</a:t>
+            </a:r>
+            <a:endParaRPr lang="en-US" sz="1100" dirty="0"/>
+          </a:p>
+          <a:p>
+            <a:pPr marL="342900" indent="-342900">
+              <a:lnSpc>
+                <a:spcPct val="105000"/>
+              </a:lnSpc>
+              <a:spcAft>
+                <a:spcPts val="600"/>
+              </a:spcAft>
+              <a:buSzPct val="100000"/>
+              <a:buChar char="•"/>
+            </a:pPr>
+            <a:r>
+              <a:rPr lang="en-US" sz="1100" dirty="0">
+                <a:solidFill>
+                  <a:srgbClr val="1A1A1A"/>
+                </a:solidFill>
+                <a:latin typeface="Calibri" pitchFamily="34" charset="0"/>
+                <a:ea typeface="Calibri" pitchFamily="34" charset="-122"/>
+                <a:cs typeface="Calibri" pitchFamily="34" charset="-120"/>
+              </a:rPr>
+              <a:t>THE CORPUS IS SURVIVORSHIP-LINKED, and we found it while trying to confirm that our delisted holdings were acquisitions. Of the 59 positions that lose their forward return, only 18 appear in the 8-K data at all - 0 of 11 that vanish in 2021, 0 of 10 in 2022, 0 of 12 in 2023, 0 of 7 in 2024, then 10 of 11 in 2025 and 8 of 8 in 2026. Dunkin' Brands, Fitbit, Varian Medical Systems, Alexion Pharmaceuticals, Maxim Integrated, Luminex and Raven Industries each filed 8-Ks throughout 2015-2020 and have ZERO filings in a dataset that spans 2015-2026. The company list was built from identifiers that still resolve today, so anything acquired before roughly 2025 is simply absent.</a:t>
+            </a:r>
+            <a:endParaRPr lang="en-US" sz="1100" dirty="0"/>
+          </a:p>
+          <a:p>
+            <a:pPr marL="342900" indent="-342900">
+              <a:lnSpc>
+                <a:spcPct val="105000"/>
+              </a:lnSpc>
+              <a:spcAft>
+                <a:spcPts val="600"/>
+              </a:spcAft>
+              <a:buSzPct val="100000"/>
+              <a:buChar char="•"/>
+            </a:pPr>
+            <a:r>
+              <a:rPr lang="en-US" sz="1100" dirty="0">
+                <a:solidFill>
+                  <a:srgbClr val="1A1A1A"/>
+                </a:solidFill>
+                <a:latin typeface="Calibri" pitchFamily="34" charset="0"/>
+                <a:ea typeface="Calibri" pitchFamily="34" charset="-122"/>
+                <a:cs typeface="Calibri" pitchFamily="34" charset="-120"/>
+              </a:rPr>
+              <a:t>That makes missingness itself a forward-looking variable: a stock-month with no 8-K record is 12.1% likely to vanish within twelve months against 1.2% if covered (t +23.8), and it predicts next-month return at -0.24%/month (t -2.22, Fama-MacBeth). A tree splitting on missingness can therefore see survival information that was not observable at the rebalance date. It is the strongest argument for the exclusion we had already made on other grounds, and it is the most useful thing the text data told us.</a:t>
             </a:r>
             <a:endParaRPr lang="en-US" sz="1100" dirty="0"/>
           </a:p>
@@ -7418,7 +7598,7 @@
                 <a:ea typeface="Calibri" pitchFamily="34" charset="-122"/>
                 <a:cs typeface="Calibri" pitchFamily="34" charset="-120"/>
               </a:rPr>
-              <a:t>Loadings on size and value are insignificant, and the three-factor regression leaves most of the variation unexplained (t=+2.47, R2 0.15).</a:t>
+              <a:t>Of the four factor loadings only value is even borderline (t +2.0); market, size and momentum are indistinguishable from zero, and the regression leaves most of the variation unexplained (t=+2.47, R2 0.15).</a:t>
             </a:r>
             <a:endParaRPr lang="en-US" sz="1050" dirty="0"/>
           </a:p>
@@ -24530,7 +24710,7 @@
                           <a:ea typeface="Calibri" pitchFamily="34" charset="-122"/>
                           <a:cs typeface="Calibri" pitchFamily="34" charset="-120"/>
                         </a:rPr>
-                        <a:t>-3.07%</a:t>
+                        <a:t>+6.12%</a:t>
                       </a:r>
                       <a:endParaRPr lang="en-US" sz="950" dirty="0">
                         <a:latin typeface="Calibri" charset="0"/>
@@ -24595,7 +24775,7 @@
                           <a:ea typeface="Calibri" pitchFamily="34" charset="-122"/>
                           <a:cs typeface="Calibri" pitchFamily="34" charset="-120"/>
                         </a:rPr>
-                        <a:t>+8.81%</a:t>
+                        <a:t>+9.07%</a:t>
                       </a:r>
                       <a:endParaRPr lang="en-US" sz="950" dirty="0">
                         <a:latin typeface="Calibri" charset="0"/>
@@ -24727,7 +24907,7 @@
                           <a:ea typeface="Calibri" pitchFamily="34" charset="-122"/>
                           <a:cs typeface="Calibri" pitchFamily="34" charset="-120"/>
                         </a:rPr>
-                        <a:t>-0.5</a:t>
+                        <a:t>+1.2</a:t>
                       </a:r>
                       <a:endParaRPr lang="en-US" sz="950" dirty="0">
                         <a:latin typeface="Calibri" charset="0"/>
@@ -24792,7 +24972,7 @@
                           <a:ea typeface="Calibri" pitchFamily="34" charset="-122"/>
                           <a:cs typeface="Calibri" pitchFamily="34" charset="-120"/>
                         </a:rPr>
-                        <a:t>+2.4</a:t>
+                        <a:t>+2.7</a:t>
                       </a:r>
                       <a:endParaRPr lang="en-US" sz="950" dirty="0">
                         <a:latin typeface="Calibri" charset="0"/>
@@ -24924,7 +25104,7 @@
                           <a:ea typeface="Calibri" pitchFamily="34" charset="-122"/>
                           <a:cs typeface="Calibri" pitchFamily="34" charset="-120"/>
                         </a:rPr>
-                        <a:t>-29.35%</a:t>
+                        <a:t>-15.63%</a:t>
                       </a:r>
                       <a:endParaRPr lang="en-US" sz="950" dirty="0">
                         <a:latin typeface="Calibri" charset="0"/>
@@ -24989,7 +25169,7 @@
                           <a:ea typeface="Calibri" pitchFamily="34" charset="-122"/>
                           <a:cs typeface="Calibri" pitchFamily="34" charset="-120"/>
                         </a:rPr>
-                        <a:t>-1.61%</a:t>
+                        <a:t>-0.44%</a:t>
                       </a:r>
                       <a:endParaRPr lang="en-US" sz="950" dirty="0">
                         <a:latin typeface="Calibri" charset="0"/>
@@ -25121,7 +25301,7 @@
                           <a:ea typeface="Calibri" pitchFamily="34" charset="-122"/>
                           <a:cs typeface="Calibri" pitchFamily="34" charset="-120"/>
                         </a:rPr>
-                        <a:t>-2.5</a:t>
+                        <a:t>-2.2</a:t>
                       </a:r>
                       <a:endParaRPr lang="en-US" sz="950" dirty="0">
                         <a:latin typeface="Calibri" charset="0"/>
@@ -25186,7 +25366,7 @@
                           <a:ea typeface="Calibri" pitchFamily="34" charset="-122"/>
                           <a:cs typeface="Calibri" pitchFamily="34" charset="-120"/>
                         </a:rPr>
-                        <a:t>-0.2</a:t>
+                        <a:t>-0.1</a:t>
                       </a:r>
                       <a:endParaRPr lang="en-US" sz="950" dirty="0">
                         <a:latin typeface="Calibri" charset="0"/>
@@ -29748,7 +29928,7 @@
                           <a:ea typeface="Calibri" pitchFamily="34" charset="-122"/>
                           <a:cs typeface="Calibri" pitchFamily="34" charset="-120"/>
                         </a:rPr>
-                        <a:t>$27m -- 126-day average, not the monthly total</a:t>
+                        <a:t>$27m</a:t>
                       </a:r>
                       <a:endParaRPr lang="en-US" sz="950" dirty="0">
                         <a:latin typeface="Calibri" charset="0"/>
@@ -29815,6 +29995,203 @@
                           <a:ea typeface="Calibri" pitchFamily="34" charset="-122"/>
                           <a:cs typeface="Calibri" pitchFamily="34" charset="-120"/>
                         </a:rPr>
+                        <a:t>Median monthly dollar volume</a:t>
+                      </a:r>
+                      <a:endParaRPr lang="en-US" sz="950" dirty="0">
+                        <a:latin typeface="Calibri" charset="0"/>
+                        <a:ea typeface="Calibri" charset="0"/>
+                        <a:cs typeface="Calibri" charset="0"/>
+                      </a:endParaRPr>
+                    </a:p>
+                  </a:txBody>
+                  <a:tcPr marL="50800" marR="50800" marT="50800" marB="50800">
+                    <a:lnL w="6350" cap="flat" cmpd="sng" algn="ctr">
+                      <a:solidFill>
+                        <a:srgbClr val="E3E7F0"/>
+                      </a:solidFill>
+                      <a:prstDash val="solid"/>
+                      <a:round/>
+                      <a:headEnd type="none" w="med" len="med"/>
+                      <a:tailEnd type="none" w="med" len="med"/>
+                    </a:lnL>
+                    <a:lnR w="6350" cap="flat" cmpd="sng" algn="ctr">
+                      <a:solidFill>
+                        <a:srgbClr val="E3E7F0"/>
+                      </a:solidFill>
+                      <a:prstDash val="solid"/>
+                      <a:round/>
+                      <a:headEnd type="none" w="med" len="med"/>
+                      <a:tailEnd type="none" w="med" len="med"/>
+                    </a:lnR>
+                    <a:lnT w="6350" cap="flat" cmpd="sng" algn="ctr">
+                      <a:solidFill>
+                        <a:srgbClr val="E3E7F0"/>
+                      </a:solidFill>
+                      <a:prstDash val="solid"/>
+                      <a:round/>
+                      <a:headEnd type="none" w="med" len="med"/>
+                      <a:tailEnd type="none" w="med" len="med"/>
+                    </a:lnT>
+                    <a:lnB w="6350" cap="flat" cmpd="sng" algn="ctr">
+                      <a:solidFill>
+                        <a:srgbClr val="E3E7F0"/>
+                      </a:solidFill>
+                      <a:prstDash val="solid"/>
+                      <a:round/>
+                      <a:headEnd type="none" w="med" len="med"/>
+                      <a:tailEnd type="none" w="med" len="med"/>
+                    </a:lnB>
+                  </a:tcPr>
+                </a:tc>
+                <a:tc>
+                  <a:txBody>
+                    <a:bodyPr/>
+                    <a:lstStyle/>
+                    <a:p>
+                      <a:pPr algn="r" indent="0" marL="0">
+                        <a:buNone/>
+                      </a:pPr>
+                      <a:r>
+                        <a:rPr lang="en-US" sz="950" dirty="0">
+                          <a:solidFill>
+                            <a:srgbClr val="1A1A1A"/>
+                          </a:solidFill>
+                          <a:latin typeface="Calibri" pitchFamily="34" charset="0"/>
+                          <a:ea typeface="Calibri" pitchFamily="34" charset="-122"/>
+                          <a:cs typeface="Calibri" pitchFamily="34" charset="-120"/>
+                        </a:rPr>
+                        <a:t>$1.15bn</a:t>
+                      </a:r>
+                      <a:endParaRPr lang="en-US" sz="950" dirty="0">
+                        <a:latin typeface="Calibri" charset="0"/>
+                        <a:ea typeface="Calibri" charset="0"/>
+                        <a:cs typeface="Calibri" charset="0"/>
+                      </a:endParaRPr>
+                    </a:p>
+                  </a:txBody>
+                  <a:tcPr marL="50800" marR="50800" marT="50800" marB="50800">
+                    <a:lnL w="6350" cap="flat" cmpd="sng" algn="ctr">
+                      <a:solidFill>
+                        <a:srgbClr val="E3E7F0"/>
+                      </a:solidFill>
+                      <a:prstDash val="solid"/>
+                      <a:round/>
+                      <a:headEnd type="none" w="med" len="med"/>
+                      <a:tailEnd type="none" w="med" len="med"/>
+                    </a:lnL>
+                    <a:lnR w="6350" cap="flat" cmpd="sng" algn="ctr">
+                      <a:solidFill>
+                        <a:srgbClr val="E3E7F0"/>
+                      </a:solidFill>
+                      <a:prstDash val="solid"/>
+                      <a:round/>
+                      <a:headEnd type="none" w="med" len="med"/>
+                      <a:tailEnd type="none" w="med" len="med"/>
+                    </a:lnR>
+                    <a:lnT w="6350" cap="flat" cmpd="sng" algn="ctr">
+                      <a:solidFill>
+                        <a:srgbClr val="E3E7F0"/>
+                      </a:solidFill>
+                      <a:prstDash val="solid"/>
+                      <a:round/>
+                      <a:headEnd type="none" w="med" len="med"/>
+                      <a:tailEnd type="none" w="med" len="med"/>
+                    </a:lnT>
+                    <a:lnB w="6350" cap="flat" cmpd="sng" algn="ctr">
+                      <a:solidFill>
+                        <a:srgbClr val="E3E7F0"/>
+                      </a:solidFill>
+                      <a:prstDash val="solid"/>
+                      <a:round/>
+                      <a:headEnd type="none" w="med" len="med"/>
+                      <a:tailEnd type="none" w="med" len="med"/>
+                    </a:lnB>
+                  </a:tcPr>
+                </a:tc>
+                <a:tc>
+                  <a:txBody>
+                    <a:bodyPr/>
+                    <a:lstStyle/>
+                    <a:p>
+                      <a:pPr algn="r" indent="0" marL="0">
+                        <a:buNone/>
+                      </a:pPr>
+                      <a:r>
+                        <a:rPr lang="en-US" sz="950" dirty="0">
+                          <a:solidFill>
+                            <a:srgbClr val="1A1A1A"/>
+                          </a:solidFill>
+                          <a:latin typeface="Calibri" pitchFamily="34" charset="0"/>
+                          <a:ea typeface="Calibri" pitchFamily="34" charset="-122"/>
+                          <a:cs typeface="Calibri" pitchFamily="34" charset="-120"/>
+                        </a:rPr>
+                        <a:t>$0.56bn</a:t>
+                      </a:r>
+                      <a:endParaRPr lang="en-US" sz="950" dirty="0">
+                        <a:latin typeface="Calibri" charset="0"/>
+                        <a:ea typeface="Calibri" charset="0"/>
+                        <a:cs typeface="Calibri" charset="0"/>
+                      </a:endParaRPr>
+                    </a:p>
+                  </a:txBody>
+                  <a:tcPr marL="50800" marR="50800" marT="50800" marB="50800">
+                    <a:lnL w="6350" cap="flat" cmpd="sng" algn="ctr">
+                      <a:solidFill>
+                        <a:srgbClr val="E3E7F0"/>
+                      </a:solidFill>
+                      <a:prstDash val="solid"/>
+                      <a:round/>
+                      <a:headEnd type="none" w="med" len="med"/>
+                      <a:tailEnd type="none" w="med" len="med"/>
+                    </a:lnL>
+                    <a:lnR w="6350" cap="flat" cmpd="sng" algn="ctr">
+                      <a:solidFill>
+                        <a:srgbClr val="E3E7F0"/>
+                      </a:solidFill>
+                      <a:prstDash val="solid"/>
+                      <a:round/>
+                      <a:headEnd type="none" w="med" len="med"/>
+                      <a:tailEnd type="none" w="med" len="med"/>
+                    </a:lnR>
+                    <a:lnT w="6350" cap="flat" cmpd="sng" algn="ctr">
+                      <a:solidFill>
+                        <a:srgbClr val="E3E7F0"/>
+                      </a:solidFill>
+                      <a:prstDash val="solid"/>
+                      <a:round/>
+                      <a:headEnd type="none" w="med" len="med"/>
+                      <a:tailEnd type="none" w="med" len="med"/>
+                    </a:lnT>
+                    <a:lnB w="6350" cap="flat" cmpd="sng" algn="ctr">
+                      <a:solidFill>
+                        <a:srgbClr val="E3E7F0"/>
+                      </a:solidFill>
+                      <a:prstDash val="solid"/>
+                      <a:round/>
+                      <a:headEnd type="none" w="med" len="med"/>
+                      <a:tailEnd type="none" w="med" len="med"/>
+                    </a:lnB>
+                  </a:tcPr>
+                </a:tc>
+              </a:tr>
+              <a:tr h="210312">
+                <a:tc>
+                  <a:txBody>
+                    <a:bodyPr/>
+                    <a:lstStyle/>
+                    <a:p>
+                      <a:pPr algn="l" indent="0" marL="0">
+                        <a:buNone/>
+                      </a:pPr>
+                      <a:r>
+                        <a:rPr lang="en-US" sz="950" dirty="0">
+                          <a:solidFill>
+                            <a:srgbClr val="1A1A1A"/>
+                          </a:solidFill>
+                          <a:latin typeface="Calibri" pitchFamily="34" charset="0"/>
+                          <a:ea typeface="Calibri" pitchFamily="34" charset="-122"/>
+                          <a:cs typeface="Calibri" pitchFamily="34" charset="-120"/>
+                        </a:rPr>
                         <a:t>Median price</a:t>
                       </a:r>
                       <a:endParaRPr lang="en-US" sz="950" dirty="0">
@@ -29945,7 +30322,7 @@
                           <a:ea typeface="Calibri" pitchFamily="34" charset="-122"/>
                           <a:cs typeface="Calibri" pitchFamily="34" charset="-120"/>
                         </a:rPr>
-                        <a:t>-</a:t>
+                        <a:t>$45.05</a:t>
                       </a:r>
                       <a:endParaRPr lang="en-US" sz="950" dirty="0">
                         <a:latin typeface="Calibri" charset="0"/>
@@ -30203,8 +30580,8 @@
         </p:nvSpPr>
         <p:spPr>
           <a:xfrm>
-            <a:off x="548640" y="5486400"/>
-            <a:ext cx="5669280" cy="457200"/>
+            <a:off x="548640" y="5870448"/>
+            <a:ext cx="6766560" cy="457200"/>
           </a:xfrm>
           <a:prstGeom prst="rect">
             <a:avLst/>
@@ -30228,7 +30605,7 @@
                 <a:ea typeface="Calibri" pitchFamily="34" charset="-122"/>
                 <a:cs typeface="Calibri" pitchFamily="34" charset="-120"/>
               </a:rPr>
-              <a:t>The short book is more liquid than the long book. The unscreened version had a $50m median cap and a $2.63 median price.</a:t>
+              <a:t>Dollar volume is the trailing 126-day daily average; the monthly row is the month's total, and the two differ by roughly the number of trading days. The short book is more liquid than the long book on both. The unscreened version had a $50m median cap and a $2.63 median price.</a:t>
             </a:r>
             <a:endParaRPr lang="en-US" sz="1000" dirty="0"/>
           </a:p>
@@ -30697,7 +31074,7 @@
                 <a:ea typeface="Calibri" pitchFamily="34" charset="-122"/>
                 <a:cs typeface="Calibri" pitchFamily="34" charset="-120"/>
               </a:rPr>
-              <a:t>The long leg has genuine selection skill since 2023: +8.81% over the eligible universe, t=+2.4 across 44 months.</a:t>
+              <a:t>The long leg has genuine selection skill since 2023: +9.07% over the eligible universe, t +2.7 across 44 months.</a:t>
             </a:r>
             <a:endParaRPr lang="en-US" sz="950" dirty="0"/>
           </a:p>
@@ -30963,7 +31340,7 @@
                 <a:ea typeface="Calibri" pitchFamily="34" charset="-122"/>
                 <a:cs typeface="Calibri" pitchFamily="34" charset="-120"/>
               </a:rPr>
-              <a:t>Sector neutrality: 90% of capital sits in sector bets nobody chose. Tested four ways, reported as untested rather than rejected - our sample cannot resolve an effect that size. Appendix.</a:t>
+              <a:t>Sector neutrality: 90% of capital sits in sector bets nobody chose. Every arm we tested beats the book on the test period and LOSES to it on the only window the model never saw (-0.66 against -1.05 net of costs), so we report it as untested rather than rejected and did not change the book on evidence our sample cannot resolve. Appendix.</a:t>
             </a:r>
             <a:endParaRPr lang="en-US" sz="950" dirty="0"/>
           </a:p>
@@ -31518,7 +31895,7 @@
                         <a:buNone/>
                       </a:pPr>
                       <a:r>
-                        <a:rPr lang="en-US" sz="950" b="1" dirty="0">
+                        <a:rPr lang="en-US" sz="900" b="1" dirty="0">
                           <a:solidFill>
                             <a:srgbClr val="FFFFFF"/>
                           </a:solidFill>
@@ -31528,7 +31905,7 @@
                         </a:rPr>
                         <a:t>Period</a:t>
                       </a:r>
-                      <a:endParaRPr lang="en-US" sz="950" dirty="0">
+                      <a:endParaRPr lang="en-US" sz="900" dirty="0">
                         <a:latin typeface="Calibri" charset="0"/>
                         <a:ea typeface="Calibri" charset="0"/>
                         <a:cs typeface="Calibri" charset="0"/>
@@ -31586,7 +31963,7 @@
                         <a:buNone/>
                       </a:pPr>
                       <a:r>
-                        <a:rPr lang="en-US" sz="950" b="1" dirty="0">
+                        <a:rPr lang="en-US" sz="900" b="1" dirty="0">
                           <a:solidFill>
                             <a:srgbClr val="FFFFFF"/>
                           </a:solidFill>
@@ -31596,7 +31973,7 @@
                         </a:rPr>
                         <a:t>Universe</a:t>
                       </a:r>
-                      <a:endParaRPr lang="en-US" sz="950" dirty="0">
+                      <a:endParaRPr lang="en-US" sz="900" dirty="0">
                         <a:latin typeface="Calibri" charset="0"/>
                         <a:ea typeface="Calibri" charset="0"/>
                         <a:cs typeface="Calibri" charset="0"/>
@@ -31654,7 +32031,7 @@
                         <a:buNone/>
                       </a:pPr>
                       <a:r>
-                        <a:rPr lang="en-US" sz="950" b="1" dirty="0">
+                        <a:rPr lang="en-US" sz="900" b="1" dirty="0">
                           <a:solidFill>
                             <a:srgbClr val="FFFFFF"/>
                           </a:solidFill>
@@ -31664,7 +32041,7 @@
                         </a:rPr>
                         <a:t>Long vs universe</a:t>
                       </a:r>
-                      <a:endParaRPr lang="en-US" sz="950" dirty="0">
+                      <a:endParaRPr lang="en-US" sz="900" dirty="0">
                         <a:latin typeface="Calibri" charset="0"/>
                         <a:ea typeface="Calibri" charset="0"/>
                         <a:cs typeface="Calibri" charset="0"/>
@@ -31722,7 +32099,7 @@
                         <a:buNone/>
                       </a:pPr>
                       <a:r>
-                        <a:rPr lang="en-US" sz="950" b="1" dirty="0">
+                        <a:rPr lang="en-US" sz="900" b="1" dirty="0">
                           <a:solidFill>
                             <a:srgbClr val="FFFFFF"/>
                           </a:solidFill>
@@ -31732,7 +32109,7 @@
                         </a:rPr>
                         <a:t>Short vs universe</a:t>
                       </a:r>
-                      <a:endParaRPr lang="en-US" sz="950" dirty="0">
+                      <a:endParaRPr lang="en-US" sz="900" dirty="0">
                         <a:latin typeface="Calibri" charset="0"/>
                         <a:ea typeface="Calibri" charset="0"/>
                         <a:cs typeface="Calibri" charset="0"/>
@@ -31792,7 +32169,7 @@
                         <a:buNone/>
                       </a:pPr>
                       <a:r>
-                        <a:rPr lang="en-US" sz="1000" dirty="0">
+                        <a:rPr lang="en-US" sz="950" dirty="0">
                           <a:solidFill>
                             <a:srgbClr val="1A1A1A"/>
                           </a:solidFill>
@@ -31800,9 +32177,9 @@
                           <a:ea typeface="Calibri" pitchFamily="34" charset="-122"/>
                           <a:cs typeface="Calibri" pitchFamily="34" charset="-120"/>
                         </a:rPr>
-                        <a:t>2019-20 (pre-test validation)</a:t>
-                      </a:r>
-                      <a:endParaRPr lang="en-US" sz="1000" dirty="0">
+                        <a:t>2019-20 (validation build)</a:t>
+                      </a:r>
+                      <a:endParaRPr lang="en-US" sz="950" dirty="0">
                         <a:latin typeface="Calibri" charset="0"/>
                         <a:ea typeface="Calibri" charset="0"/>
                         <a:cs typeface="Calibri" charset="0"/>
@@ -31857,7 +32234,7 @@
                         <a:buNone/>
                       </a:pPr>
                       <a:r>
-                        <a:rPr lang="en-US" sz="1000" dirty="0">
+                        <a:rPr lang="en-US" sz="950" dirty="0">
                           <a:solidFill>
                             <a:srgbClr val="1A1A1A"/>
                           </a:solidFill>
@@ -31867,7 +32244,7 @@
                         </a:rPr>
                         <a:t>+25.03%</a:t>
                       </a:r>
-                      <a:endParaRPr lang="en-US" sz="1000" dirty="0">
+                      <a:endParaRPr lang="en-US" sz="950" dirty="0">
                         <a:latin typeface="Calibri" charset="0"/>
                         <a:ea typeface="Calibri" charset="0"/>
                         <a:cs typeface="Calibri" charset="0"/>
@@ -31922,7 +32299,7 @@
                         <a:buNone/>
                       </a:pPr>
                       <a:r>
-                        <a:rPr lang="en-US" sz="1000" dirty="0">
+                        <a:rPr lang="en-US" sz="950" dirty="0">
                           <a:solidFill>
                             <a:srgbClr val="1A1A1A"/>
                           </a:solidFill>
@@ -31932,7 +32309,7 @@
                         </a:rPr>
                         <a:t>+0.85%  (t +0.1)</a:t>
                       </a:r>
-                      <a:endParaRPr lang="en-US" sz="1000" dirty="0">
+                      <a:endParaRPr lang="en-US" sz="950" dirty="0">
                         <a:latin typeface="Calibri" charset="0"/>
                         <a:ea typeface="Calibri" charset="0"/>
                         <a:cs typeface="Calibri" charset="0"/>
@@ -31987,7 +32364,7 @@
                         <a:buNone/>
                       </a:pPr>
                       <a:r>
-                        <a:rPr lang="en-US" sz="1000" dirty="0">
+                        <a:rPr lang="en-US" sz="950" dirty="0">
                           <a:solidFill>
                             <a:srgbClr val="1A1A1A"/>
                           </a:solidFill>
@@ -31997,7 +32374,7 @@
                         </a:rPr>
                         <a:t>+5.42%  (t +1.1)</a:t>
                       </a:r>
-                      <a:endParaRPr lang="en-US" sz="1000" dirty="0">
+                      <a:endParaRPr lang="en-US" sz="950" dirty="0">
                         <a:latin typeface="Calibri" charset="0"/>
                         <a:ea typeface="Calibri" charset="0"/>
                         <a:cs typeface="Calibri" charset="0"/>
@@ -32054,7 +32431,7 @@
                         <a:buNone/>
                       </a:pPr>
                       <a:r>
-                        <a:rPr lang="en-US" sz="1000" dirty="0">
+                        <a:rPr lang="en-US" sz="950" dirty="0">
                           <a:solidFill>
                             <a:srgbClr val="1A1A1A"/>
                           </a:solidFill>
@@ -32064,7 +32441,7 @@
                         </a:rPr>
                         <a:t>2021-22</a:t>
                       </a:r>
-                      <a:endParaRPr lang="en-US" sz="1000" dirty="0">
+                      <a:endParaRPr lang="en-US" sz="950" dirty="0">
                         <a:latin typeface="Calibri" charset="0"/>
                         <a:ea typeface="Calibri" charset="0"/>
                         <a:cs typeface="Calibri" charset="0"/>
@@ -32119,7 +32496,7 @@
                         <a:buNone/>
                       </a:pPr>
                       <a:r>
-                        <a:rPr lang="en-US" sz="1000" dirty="0">
+                        <a:rPr lang="en-US" sz="950" dirty="0">
                           <a:solidFill>
                             <a:srgbClr val="1A1A1A"/>
                           </a:solidFill>
@@ -32127,9 +32504,9 @@
                           <a:ea typeface="Calibri" pitchFamily="34" charset="-122"/>
                           <a:cs typeface="Calibri" pitchFamily="34" charset="-120"/>
                         </a:rPr>
-                        <a:t>-1.57%</a:t>
-                      </a:r>
-                      <a:endParaRPr lang="en-US" sz="1000" dirty="0">
+                        <a:t>-3.73%</a:t>
+                      </a:r>
+                      <a:endParaRPr lang="en-US" sz="950" dirty="0">
                         <a:latin typeface="Calibri" charset="0"/>
                         <a:ea typeface="Calibri" charset="0"/>
                         <a:cs typeface="Calibri" charset="0"/>
@@ -32184,7 +32561,7 @@
                         <a:buNone/>
                       </a:pPr>
                       <a:r>
-                        <a:rPr lang="en-US" sz="1000" dirty="0">
+                        <a:rPr lang="en-US" sz="950" dirty="0">
                           <a:solidFill>
                             <a:srgbClr val="1A1A1A"/>
                           </a:solidFill>
@@ -32192,9 +32569,9 @@
                           <a:ea typeface="Calibri" pitchFamily="34" charset="-122"/>
                           <a:cs typeface="Calibri" pitchFamily="34" charset="-120"/>
                         </a:rPr>
-                        <a:t>-3.07%  (t -0.5)</a:t>
-                      </a:r>
-                      <a:endParaRPr lang="en-US" sz="1000" dirty="0">
+                        <a:t>+6.12%  (t +1.2)</a:t>
+                      </a:r>
+                      <a:endParaRPr lang="en-US" sz="950" dirty="0">
                         <a:latin typeface="Calibri" charset="0"/>
                         <a:ea typeface="Calibri" charset="0"/>
                         <a:cs typeface="Calibri" charset="0"/>
@@ -32249,7 +32626,7 @@
                         <a:buNone/>
                       </a:pPr>
                       <a:r>
-                        <a:rPr lang="en-US" sz="1000" dirty="0">
+                        <a:rPr lang="en-US" sz="950" dirty="0">
                           <a:solidFill>
                             <a:srgbClr val="1A1A1A"/>
                           </a:solidFill>
@@ -32257,9 +32634,9 @@
                           <a:ea typeface="Calibri" pitchFamily="34" charset="-122"/>
                           <a:cs typeface="Calibri" pitchFamily="34" charset="-120"/>
                         </a:rPr>
-                        <a:t>-29.35%  (t -2.5)</a:t>
-                      </a:r>
-                      <a:endParaRPr lang="en-US" sz="1000" dirty="0">
+                        <a:t>-15.63%  (t -2.2)</a:t>
+                      </a:r>
+                      <a:endParaRPr lang="en-US" sz="950" dirty="0">
                         <a:latin typeface="Calibri" charset="0"/>
                         <a:ea typeface="Calibri" charset="0"/>
                         <a:cs typeface="Calibri" charset="0"/>
@@ -32316,7 +32693,7 @@
                         <a:buNone/>
                       </a:pPr>
                       <a:r>
-                        <a:rPr lang="en-US" sz="1000" dirty="0">
+                        <a:rPr lang="en-US" sz="950" dirty="0">
                           <a:solidFill>
                             <a:srgbClr val="1A1A1A"/>
                           </a:solidFill>
@@ -32326,7 +32703,7 @@
                         </a:rPr>
                         <a:t>2023-26</a:t>
                       </a:r>
-                      <a:endParaRPr lang="en-US" sz="1000" dirty="0">
+                      <a:endParaRPr lang="en-US" sz="950" dirty="0">
                         <a:latin typeface="Calibri" charset="0"/>
                         <a:ea typeface="Calibri" charset="0"/>
                         <a:cs typeface="Calibri" charset="0"/>
@@ -32381,7 +32758,7 @@
                         <a:buNone/>
                       </a:pPr>
                       <a:r>
-                        <a:rPr lang="en-US" sz="1000" dirty="0">
+                        <a:rPr lang="en-US" sz="950" dirty="0">
                           <a:solidFill>
                             <a:srgbClr val="1A1A1A"/>
                           </a:solidFill>
@@ -32389,9 +32766,9 @@
                           <a:ea typeface="Calibri" pitchFamily="34" charset="-122"/>
                           <a:cs typeface="Calibri" pitchFamily="34" charset="-120"/>
                         </a:rPr>
-                        <a:t>+12.05%</a:t>
-                      </a:r>
-                      <a:endParaRPr lang="en-US" sz="1000" dirty="0">
+                        <a:t>+11.93%</a:t>
+                      </a:r>
+                      <a:endParaRPr lang="en-US" sz="950" dirty="0">
                         <a:latin typeface="Calibri" charset="0"/>
                         <a:ea typeface="Calibri" charset="0"/>
                         <a:cs typeface="Calibri" charset="0"/>
@@ -32446,7 +32823,7 @@
                         <a:buNone/>
                       </a:pPr>
                       <a:r>
-                        <a:rPr lang="en-US" sz="1000" dirty="0">
+                        <a:rPr lang="en-US" sz="950" dirty="0">
                           <a:solidFill>
                             <a:srgbClr val="1A1A1A"/>
                           </a:solidFill>
@@ -32454,9 +32831,9 @@
                           <a:ea typeface="Calibri" pitchFamily="34" charset="-122"/>
                           <a:cs typeface="Calibri" pitchFamily="34" charset="-120"/>
                         </a:rPr>
-                        <a:t>+8.81%  (t +2.4)</a:t>
-                      </a:r>
-                      <a:endParaRPr lang="en-US" sz="1000" dirty="0">
+                        <a:t>+9.07%  (t +2.7)</a:t>
+                      </a:r>
+                      <a:endParaRPr lang="en-US" sz="950" dirty="0">
                         <a:latin typeface="Calibri" charset="0"/>
                         <a:ea typeface="Calibri" charset="0"/>
                         <a:cs typeface="Calibri" charset="0"/>
@@ -32511,7 +32888,7 @@
                         <a:buNone/>
                       </a:pPr>
                       <a:r>
-                        <a:rPr lang="en-US" sz="1000" dirty="0">
+                        <a:rPr lang="en-US" sz="950" dirty="0">
                           <a:solidFill>
                             <a:srgbClr val="1A1A1A"/>
                           </a:solidFill>
@@ -32519,9 +32896,271 @@
                           <a:ea typeface="Calibri" pitchFamily="34" charset="-122"/>
                           <a:cs typeface="Calibri" pitchFamily="34" charset="-120"/>
                         </a:rPr>
-                        <a:t>-1.61%  (t -0.2)</a:t>
-                      </a:r>
-                      <a:endParaRPr lang="en-US" sz="1000" dirty="0">
+                        <a:t>-0.44%  (t -0.1)</a:t>
+                      </a:r>
+                      <a:endParaRPr lang="en-US" sz="950" dirty="0">
+                        <a:latin typeface="Calibri" charset="0"/>
+                        <a:ea typeface="Calibri" charset="0"/>
+                        <a:cs typeface="Calibri" charset="0"/>
+                      </a:endParaRPr>
+                    </a:p>
+                  </a:txBody>
+                  <a:tcPr marL="50800" marR="50800" marT="50800" marB="50800">
+                    <a:lnL w="6350" cap="flat" cmpd="sng" algn="ctr">
+                      <a:solidFill>
+                        <a:srgbClr val="E3E7F0"/>
+                      </a:solidFill>
+                      <a:prstDash val="solid"/>
+                      <a:round/>
+                      <a:headEnd type="none" w="med" len="med"/>
+                      <a:tailEnd type="none" w="med" len="med"/>
+                    </a:lnL>
+                    <a:lnR w="6350" cap="flat" cmpd="sng" algn="ctr">
+                      <a:solidFill>
+                        <a:srgbClr val="E3E7F0"/>
+                      </a:solidFill>
+                      <a:prstDash val="solid"/>
+                      <a:round/>
+                      <a:headEnd type="none" w="med" len="med"/>
+                      <a:tailEnd type="none" w="med" len="med"/>
+                    </a:lnR>
+                    <a:lnT w="6350" cap="flat" cmpd="sng" algn="ctr">
+                      <a:solidFill>
+                        <a:srgbClr val="E3E7F0"/>
+                      </a:solidFill>
+                      <a:prstDash val="solid"/>
+                      <a:round/>
+                      <a:headEnd type="none" w="med" len="med"/>
+                      <a:tailEnd type="none" w="med" len="med"/>
+                    </a:lnT>
+                    <a:lnB w="6350" cap="flat" cmpd="sng" algn="ctr">
+                      <a:solidFill>
+                        <a:srgbClr val="E3E7F0"/>
+                      </a:solidFill>
+                      <a:prstDash val="solid"/>
+                      <a:round/>
+                      <a:headEnd type="none" w="med" len="med"/>
+                      <a:tailEnd type="none" w="med" len="med"/>
+                    </a:lnB>
+                  </a:tcPr>
+                </a:tc>
+              </a:tr>
+              <a:tr h="210312">
+                <a:tc>
+                  <a:txBody>
+                    <a:bodyPr/>
+                    <a:lstStyle/>
+                    <a:p>
+                      <a:pPr algn="l" indent="0" marL="0">
+                        <a:buNone/>
+                      </a:pPr>
+                      <a:r>
+                        <a:rPr lang="en-US" sz="950" dirty="0">
+                          <a:solidFill>
+                            <a:srgbClr val="1A1A1A"/>
+                          </a:solidFill>
+                          <a:latin typeface="Calibri" pitchFamily="34" charset="0"/>
+                          <a:ea typeface="Calibri" pitchFamily="34" charset="-122"/>
+                          <a:cs typeface="Calibri" pitchFamily="34" charset="-120"/>
+                        </a:rPr>
+                        <a:t>Full period</a:t>
+                      </a:r>
+                      <a:endParaRPr lang="en-US" sz="950" dirty="0">
+                        <a:latin typeface="Calibri" charset="0"/>
+                        <a:ea typeface="Calibri" charset="0"/>
+                        <a:cs typeface="Calibri" charset="0"/>
+                      </a:endParaRPr>
+                    </a:p>
+                  </a:txBody>
+                  <a:tcPr marL="50800" marR="50800" marT="50800" marB="50800">
+                    <a:lnL w="6350" cap="flat" cmpd="sng" algn="ctr">
+                      <a:solidFill>
+                        <a:srgbClr val="E3E7F0"/>
+                      </a:solidFill>
+                      <a:prstDash val="solid"/>
+                      <a:round/>
+                      <a:headEnd type="none" w="med" len="med"/>
+                      <a:tailEnd type="none" w="med" len="med"/>
+                    </a:lnL>
+                    <a:lnR w="6350" cap="flat" cmpd="sng" algn="ctr">
+                      <a:solidFill>
+                        <a:srgbClr val="E3E7F0"/>
+                      </a:solidFill>
+                      <a:prstDash val="solid"/>
+                      <a:round/>
+                      <a:headEnd type="none" w="med" len="med"/>
+                      <a:tailEnd type="none" w="med" len="med"/>
+                    </a:lnR>
+                    <a:lnT w="6350" cap="flat" cmpd="sng" algn="ctr">
+                      <a:solidFill>
+                        <a:srgbClr val="E3E7F0"/>
+                      </a:solidFill>
+                      <a:prstDash val="solid"/>
+                      <a:round/>
+                      <a:headEnd type="none" w="med" len="med"/>
+                      <a:tailEnd type="none" w="med" len="med"/>
+                    </a:lnT>
+                    <a:lnB w="6350" cap="flat" cmpd="sng" algn="ctr">
+                      <a:solidFill>
+                        <a:srgbClr val="E3E7F0"/>
+                      </a:solidFill>
+                      <a:prstDash val="solid"/>
+                      <a:round/>
+                      <a:headEnd type="none" w="med" len="med"/>
+                      <a:tailEnd type="none" w="med" len="med"/>
+                    </a:lnB>
+                  </a:tcPr>
+                </a:tc>
+                <a:tc>
+                  <a:txBody>
+                    <a:bodyPr/>
+                    <a:lstStyle/>
+                    <a:p>
+                      <a:pPr algn="r" indent="0" marL="0">
+                        <a:buNone/>
+                      </a:pPr>
+                      <a:r>
+                        <a:rPr lang="en-US" sz="950" dirty="0">
+                          <a:solidFill>
+                            <a:srgbClr val="1A1A1A"/>
+                          </a:solidFill>
+                          <a:latin typeface="Calibri" pitchFamily="34" charset="0"/>
+                          <a:ea typeface="Calibri" pitchFamily="34" charset="-122"/>
+                          <a:cs typeface="Calibri" pitchFamily="34" charset="-120"/>
+                        </a:rPr>
+                        <a:t>+6.40%</a:t>
+                      </a:r>
+                      <a:endParaRPr lang="en-US" sz="950" dirty="0">
+                        <a:latin typeface="Calibri" charset="0"/>
+                        <a:ea typeface="Calibri" charset="0"/>
+                        <a:cs typeface="Calibri" charset="0"/>
+                      </a:endParaRPr>
+                    </a:p>
+                  </a:txBody>
+                  <a:tcPr marL="50800" marR="50800" marT="50800" marB="50800">
+                    <a:lnL w="6350" cap="flat" cmpd="sng" algn="ctr">
+                      <a:solidFill>
+                        <a:srgbClr val="E3E7F0"/>
+                      </a:solidFill>
+                      <a:prstDash val="solid"/>
+                      <a:round/>
+                      <a:headEnd type="none" w="med" len="med"/>
+                      <a:tailEnd type="none" w="med" len="med"/>
+                    </a:lnL>
+                    <a:lnR w="6350" cap="flat" cmpd="sng" algn="ctr">
+                      <a:solidFill>
+                        <a:srgbClr val="E3E7F0"/>
+                      </a:solidFill>
+                      <a:prstDash val="solid"/>
+                      <a:round/>
+                      <a:headEnd type="none" w="med" len="med"/>
+                      <a:tailEnd type="none" w="med" len="med"/>
+                    </a:lnR>
+                    <a:lnT w="6350" cap="flat" cmpd="sng" algn="ctr">
+                      <a:solidFill>
+                        <a:srgbClr val="E3E7F0"/>
+                      </a:solidFill>
+                      <a:prstDash val="solid"/>
+                      <a:round/>
+                      <a:headEnd type="none" w="med" len="med"/>
+                      <a:tailEnd type="none" w="med" len="med"/>
+                    </a:lnT>
+                    <a:lnB w="6350" cap="flat" cmpd="sng" algn="ctr">
+                      <a:solidFill>
+                        <a:srgbClr val="E3E7F0"/>
+                      </a:solidFill>
+                      <a:prstDash val="solid"/>
+                      <a:round/>
+                      <a:headEnd type="none" w="med" len="med"/>
+                      <a:tailEnd type="none" w="med" len="med"/>
+                    </a:lnB>
+                  </a:tcPr>
+                </a:tc>
+                <a:tc>
+                  <a:txBody>
+                    <a:bodyPr/>
+                    <a:lstStyle/>
+                    <a:p>
+                      <a:pPr algn="r" indent="0" marL="0">
+                        <a:buNone/>
+                      </a:pPr>
+                      <a:r>
+                        <a:rPr lang="en-US" sz="950" dirty="0">
+                          <a:solidFill>
+                            <a:srgbClr val="1A1A1A"/>
+                          </a:solidFill>
+                          <a:latin typeface="Calibri" pitchFamily="34" charset="0"/>
+                          <a:ea typeface="Calibri" pitchFamily="34" charset="-122"/>
+                          <a:cs typeface="Calibri" pitchFamily="34" charset="-120"/>
+                        </a:rPr>
+                        <a:t>+8.03%  (t +2.8)</a:t>
+                      </a:r>
+                      <a:endParaRPr lang="en-US" sz="950" dirty="0">
+                        <a:latin typeface="Calibri" charset="0"/>
+                        <a:ea typeface="Calibri" charset="0"/>
+                        <a:cs typeface="Calibri" charset="0"/>
+                      </a:endParaRPr>
+                    </a:p>
+                  </a:txBody>
+                  <a:tcPr marL="50800" marR="50800" marT="50800" marB="50800">
+                    <a:lnL w="6350" cap="flat" cmpd="sng" algn="ctr">
+                      <a:solidFill>
+                        <a:srgbClr val="E3E7F0"/>
+                      </a:solidFill>
+                      <a:prstDash val="solid"/>
+                      <a:round/>
+                      <a:headEnd type="none" w="med" len="med"/>
+                      <a:tailEnd type="none" w="med" len="med"/>
+                    </a:lnL>
+                    <a:lnR w="6350" cap="flat" cmpd="sng" algn="ctr">
+                      <a:solidFill>
+                        <a:srgbClr val="E3E7F0"/>
+                      </a:solidFill>
+                      <a:prstDash val="solid"/>
+                      <a:round/>
+                      <a:headEnd type="none" w="med" len="med"/>
+                      <a:tailEnd type="none" w="med" len="med"/>
+                    </a:lnR>
+                    <a:lnT w="6350" cap="flat" cmpd="sng" algn="ctr">
+                      <a:solidFill>
+                        <a:srgbClr val="E3E7F0"/>
+                      </a:solidFill>
+                      <a:prstDash val="solid"/>
+                      <a:round/>
+                      <a:headEnd type="none" w="med" len="med"/>
+                      <a:tailEnd type="none" w="med" len="med"/>
+                    </a:lnT>
+                    <a:lnB w="6350" cap="flat" cmpd="sng" algn="ctr">
+                      <a:solidFill>
+                        <a:srgbClr val="E3E7F0"/>
+                      </a:solidFill>
+                      <a:prstDash val="solid"/>
+                      <a:round/>
+                      <a:headEnd type="none" w="med" len="med"/>
+                      <a:tailEnd type="none" w="med" len="med"/>
+                    </a:lnB>
+                  </a:tcPr>
+                </a:tc>
+                <a:tc>
+                  <a:txBody>
+                    <a:bodyPr/>
+                    <a:lstStyle/>
+                    <a:p>
+                      <a:pPr algn="r" indent="0" marL="0">
+                        <a:buNone/>
+                      </a:pPr>
+                      <a:r>
+                        <a:rPr lang="en-US" sz="950" dirty="0">
+                          <a:solidFill>
+                            <a:srgbClr val="1A1A1A"/>
+                          </a:solidFill>
+                          <a:latin typeface="Calibri" pitchFamily="34" charset="0"/>
+                          <a:ea typeface="Calibri" pitchFamily="34" charset="-122"/>
+                          <a:cs typeface="Calibri" pitchFamily="34" charset="-120"/>
+                        </a:rPr>
+                        <a:t>-5.80%  (t -1.5)</a:t>
+                      </a:r>
+                      <a:endParaRPr lang="en-US" sz="950" dirty="0">
                         <a:latin typeface="Calibri" charset="0"/>
                         <a:ea typeface="Calibri" charset="0"/>
                         <a:cs typeface="Calibri" charset="0"/>

--- a/05_submission/FIAM_deck.pptx
+++ b/05_submission/FIAM_deck.pptx
@@ -17077,7 +17077,7 @@
         <p:spPr>
           <a:xfrm>
             <a:off x="548640" y="1700784"/>
-            <a:ext cx="5394960" cy="1463040"/>
+            <a:ext cx="5394960" cy="1828800"/>
           </a:xfrm>
           <a:prstGeom prst="rect">
             <a:avLst/>
@@ -17100,7 +17100,7 @@
               <a:buChar char="•"/>
             </a:pPr>
             <a:r>
-              <a:rPr lang="en-US" sz="1000" dirty="0">
+              <a:rPr lang="en-US" sz="950" dirty="0">
                 <a:solidFill>
                   <a:srgbClr val="1A1A1A"/>
                 </a:solidFill>
@@ -17108,9 +17108,9 @@
                 <a:ea typeface="Calibri" pitchFamily="34" charset="-122"/>
                 <a:cs typeface="Calibri" pitchFamily="34" charset="-120"/>
               </a:rPr>
-              <a:t>Gradient-boosted trees, refit annually on an expanding window with a rolling two-year validation block, split by target month. Chosen over the linear models on validation rank correlation, fold by fold.</a:t>
+              <a:t>Gradient-boosted trees, refit annually on an expanding window with a rolling two-year validation block, split by target month. Trees won four of the six folds; Ridge joined the blend in 2022 and 2023, on that fold's validation rank correlation.</a:t>
             </a:r>
-            <a:endParaRPr lang="en-US" sz="1000" dirty="0"/>
+            <a:endParaRPr lang="en-US" sz="950" dirty="0"/>
           </a:p>
           <a:p>
             <a:pPr marL="342900" indent="-342900">
@@ -17124,7 +17124,7 @@
               <a:buChar char="•"/>
             </a:pPr>
             <a:r>
-              <a:rPr lang="en-US" sz="1000" dirty="0">
+              <a:rPr lang="en-US" sz="950" dirty="0">
                 <a:solidFill>
                   <a:srgbClr val="1A1A1A"/>
                 </a:solidFill>
@@ -17134,7 +17134,7 @@
               </a:rPr>
               <a:t>Missing values are NOT imputed for the trees. Missingness is informative - stocks missing the most characteristics have a median cap of $282m against $1,687m.</a:t>
             </a:r>
-            <a:endParaRPr lang="en-US" sz="1000" dirty="0"/>
+            <a:endParaRPr lang="en-US" sz="950" dirty="0"/>
           </a:p>
           <a:p>
             <a:pPr marL="342900" indent="-342900">
@@ -17148,7 +17148,7 @@
               <a:buChar char="•"/>
             </a:pPr>
             <a:r>
-              <a:rPr lang="en-US" sz="1000" dirty="0">
+              <a:rPr lang="en-US" sz="950" dirty="0">
                 <a:solidFill>
                   <a:srgbClr val="1A1A1A"/>
                 </a:solidFill>
@@ -17158,7 +17158,7 @@
               </a:rPr>
               <a:t>The target is demeaned within each month. Fitting raw returns stopped after ONE boosting round: training averaged +0.27%/month against +2.52% in validation.</a:t>
             </a:r>
-            <a:endParaRPr lang="en-US" sz="1000" dirty="0"/>
+            <a:endParaRPr lang="en-US" sz="950" dirty="0"/>
           </a:p>
           <a:p>
             <a:pPr marL="342900" indent="-342900">
@@ -17172,7 +17172,7 @@
               <a:buChar char="•"/>
             </a:pPr>
             <a:r>
-              <a:rPr lang="en-US" sz="1000" dirty="0">
+              <a:rPr lang="en-US" sz="950" dirty="0">
                 <a:solidFill>
                   <a:srgbClr val="1A1A1A"/>
                 </a:solidFill>
@@ -17182,7 +17182,31 @@
               </a:rPr>
               <a:t>Model choice is made inside each fold on that fold's validation block only.</a:t>
             </a:r>
-            <a:endParaRPr lang="en-US" sz="1000" dirty="0"/>
+            <a:endParaRPr lang="en-US" sz="950" dirty="0"/>
+          </a:p>
+          <a:p>
+            <a:pPr marL="342900" indent="-342900">
+              <a:lnSpc>
+                <a:spcPct val="105000"/>
+              </a:lnSpc>
+              <a:spcAft>
+                <a:spcPts val="600"/>
+              </a:spcAft>
+              <a:buSzPct val="100000"/>
+              <a:buChar char="•"/>
+            </a:pPr>
+            <a:r>
+              <a:rPr lang="en-US" sz="950" dirty="0">
+                <a:solidFill>
+                  <a:srgbClr val="1A1A1A"/>
+                </a:solidFill>
+                <a:latin typeface="Calibri" pitchFamily="34" charset="0"/>
+                <a:ea typeface="Calibri" pitchFamily="34" charset="-122"/>
+                <a:cs typeface="Calibri" pitchFamily="34" charset="-120"/>
+              </a:rPr>
+              <a:t>Weights are fractions of NAV, summing to 200% gross and +12.5% net. Short proceeds sit in 3-month T-bills, which is why the benchmark is cash plus 4% and why the cash leg cancels out of the active return.</a:t>
+            </a:r>
+            <a:endParaRPr lang="en-US" sz="950" dirty="0"/>
           </a:p>
         </p:txBody>
       </p:sp>
@@ -17194,7 +17218,7 @@
         </p:nvSpPr>
         <p:spPr>
           <a:xfrm>
-            <a:off x="548640" y="3675888"/>
+            <a:off x="548640" y="3858768"/>
             <a:ext cx="5394960" cy="237744"/>
           </a:xfrm>
           <a:prstGeom prst="rect">
@@ -17240,7 +17264,7 @@
           </p:nvPr>
         </p:nvGraphicFramePr>
         <p:xfrm>
-          <a:off x="548640" y="3931920"/>
+          <a:off x="548640" y="4114800"/>
           <a:ext cx="5394960" cy="914400"/>
         </p:xfrm>
         <a:graphic>
@@ -18258,7 +18282,7 @@
         </p:nvSpPr>
         <p:spPr>
           <a:xfrm>
-            <a:off x="548640" y="5321808"/>
+            <a:off x="548640" y="5376672"/>
             <a:ext cx="5394960" cy="457200"/>
           </a:xfrm>
           <a:prstGeom prst="rect">
@@ -18283,7 +18307,7 @@
                 <a:ea typeface="Calibri" pitchFamily="34" charset="-122"/>
                 <a:cs typeface="Calibri" pitchFamily="34" charset="-120"/>
               </a:rPr>
-              <a:t>The rules note 1-2% is typical even for neural networks; a large positive number would mean a leak, not skill. The 8-K corpus was measured and excluded - three independent tests, one null, one exception, in the appendix.</a:t>
+              <a:t>The rules note 1-2% is typical even for neural networks; a large positive number would mean a leak, not skill. The 8-K corpus was measured and excluded - the appendix has all three tests.</a:t>
             </a:r>
             <a:endParaRPr lang="en-US" sz="1000" dirty="0"/>
           </a:p>
@@ -21674,12 +21698,12 @@
         </p:nvSpPr>
         <p:spPr>
           <a:xfrm>
-            <a:off x="548640" y="5797296"/>
-            <a:ext cx="11064240" cy="914400"/>
+            <a:off x="548640" y="5888736"/>
+            <a:ext cx="11064240" cy="859536"/>
           </a:xfrm>
           <a:prstGeom prst="roundRect">
             <a:avLst>
-              <a:gd name="adj" fmla="val 5000"/>
+              <a:gd name="adj" fmla="val 5319"/>
             </a:avLst>
           </a:prstGeom>
           <a:solidFill>
@@ -21701,8 +21725,8 @@
         </p:nvSpPr>
         <p:spPr>
           <a:xfrm>
-            <a:off x="749808" y="5888736"/>
-            <a:ext cx="10661904" cy="768096"/>
+            <a:off x="749808" y="5971032"/>
+            <a:ext cx="10661904" cy="731520"/>
           </a:xfrm>
           <a:prstGeom prst="rect">
             <a:avLst/>

--- a/05_submission/FIAM_deck.pptx
+++ b/05_submission/FIAM_deck.pptx
@@ -1130,7 +1130,7 @@
           <a:p>
             <a:r>
               <a:rPr lang="en-US" dirty="0"/>
-              <a:t>2024 is the only year that trails the hurdle. 2022's +38% coincides with a -19% market and is the period we treat as non-repeatable.</a:t>
+              <a:t>2024 is the only year that trails the hurdle. 2022's +38.51% coincides with a -19.44% market and is the period we treat as non-repeatable.</a:t>
             </a:r>
             <a:endParaRPr lang="en-US" dirty="0"/>
           </a:p>
@@ -22168,7 +22168,7 @@
                 <a:ea typeface="Calibri" pitchFamily="34" charset="-122"/>
                 <a:cs typeface="Calibri" pitchFamily="34" charset="-120"/>
               </a:rPr>
-              <a:t>hurdle +50.87%</a:t>
+              <a:t>hurdle +50.87%, S&amp;P +104.63%</a:t>
             </a:r>
             <a:endParaRPr lang="en-US" sz="950" dirty="0"/>
           </a:p>
@@ -22470,7 +22470,66 @@
         </p:nvSpPr>
         <p:spPr>
           <a:xfrm>
-            <a:off x="548640" y="3154680"/>
+            <a:off x="548640" y="3017520"/>
+            <a:ext cx="11064240" cy="274320"/>
+          </a:xfrm>
+          <a:prstGeom prst="rect">
+            <a:avLst/>
+          </a:prstGeom>
+          <a:noFill/>
+          <a:ln/>
+        </p:spPr>
+        <p:txBody>
+          <a:bodyPr wrap="square" lIns="0" tIns="0" rIns="0" bIns="0" rtlCol="0" anchor="t"/>
+          <a:lstStyle/>
+          <a:p>
+            <a:pPr indent="0" marL="0">
+              <a:lnSpc>
+                <a:spcPct val="100000"/>
+              </a:lnSpc>
+              <a:buNone/>
+            </a:pPr>
+            <a:r>
+              <a:rPr lang="en-US" sz="1000" b="1" dirty="0">
+                <a:solidFill>
+                  <a:srgbClr val="1E2761"/>
+                </a:solidFill>
+                <a:latin typeface="Calibri" pitchFamily="34" charset="0"/>
+                <a:ea typeface="Calibri" pitchFamily="34" charset="-122"/>
+                <a:cs typeface="Calibri" pitchFamily="34" charset="-120"/>
+              </a:rPr>
+              <a:t>Each leg separately, per month:  </a:t>
+            </a:r>
+            <a:pPr indent="0" marL="0">
+              <a:lnSpc>
+                <a:spcPct val="100000"/>
+              </a:lnSpc>
+              <a:buNone/>
+            </a:pPr>
+            <a:r>
+              <a:rPr lang="en-US" sz="1000" dirty="0">
+                <a:solidFill>
+                  <a:srgbClr val="1A1A1A"/>
+                </a:solidFill>
+                <a:latin typeface="Calibri" pitchFamily="34" charset="0"/>
+                <a:ea typeface="Calibri" pitchFamily="34" charset="-122"/>
+                <a:cs typeface="Calibri" pitchFamily="34" charset="-120"/>
+              </a:rPr>
+              <a:t>long +1.297%, short +0.004%. The short leg contributes almost nothing on average and earns its place by what it removes, not by what it adds.</a:t>
+            </a:r>
+            <a:endParaRPr lang="en-US" sz="1000" dirty="0"/>
+          </a:p>
+        </p:txBody>
+      </p:sp>
+      <p:sp>
+        <p:nvSpPr>
+          <p:cNvPr id="21" name="Text 19"/>
+          <p:cNvSpPr txBox="1"/>
+          <p:nvPr/>
+        </p:nvSpPr>
+        <p:spPr>
+          <a:xfrm>
+            <a:off x="548640" y="3364992"/>
             <a:ext cx="5120640" cy="256032"/>
           </a:xfrm>
           <a:prstGeom prst="rect">
@@ -22516,7 +22575,7 @@
           </p:nvPr>
         </p:nvGraphicFramePr>
         <p:xfrm>
-          <a:off x="548640" y="3438144"/>
+          <a:off x="548640" y="3657600"/>
           <a:ext cx="5577840" cy="914400"/>
         </p:xfrm>
         <a:graphic>
@@ -24381,13 +24440,13 @@
       </p:graphicFrame>
       <p:sp>
         <p:nvSpPr>
-          <p:cNvPr id="22" name="Text 19"/>
+          <p:cNvPr id="23" name="Text 20"/>
           <p:cNvSpPr txBox="1"/>
           <p:nvPr/>
         </p:nvSpPr>
         <p:spPr>
           <a:xfrm>
-            <a:off x="6492240" y="3154680"/>
+            <a:off x="6492240" y="3364992"/>
             <a:ext cx="5120640" cy="256032"/>
           </a:xfrm>
           <a:prstGeom prst="rect">
@@ -24433,7 +24492,7 @@
           </p:nvPr>
         </p:nvGraphicFramePr>
         <p:xfrm>
-          <a:off x="6492240" y="3438144"/>
+          <a:off x="6492240" y="3657600"/>
           <a:ext cx="5120640" cy="914400"/>
         </p:xfrm>
         <a:graphic>
@@ -24455,7 +24514,7 @@
                         <a:buNone/>
                       </a:pPr>
                       <a:r>
-                        <a:rPr lang="en-US" sz="900" b="1" dirty="0">
+                        <a:rPr lang="en-US" sz="850" b="1" dirty="0">
                           <a:solidFill>
                             <a:srgbClr val="FFFFFF"/>
                           </a:solidFill>
@@ -24465,7 +24524,7 @@
                         </a:rPr>
                         <a:t>Leg, measured against the eligible universe</a:t>
                       </a:r>
-                      <a:endParaRPr lang="en-US" sz="900" dirty="0">
+                      <a:endParaRPr lang="en-US" sz="850" dirty="0">
                         <a:latin typeface="Calibri" charset="0"/>
                         <a:ea typeface="Calibri" charset="0"/>
                         <a:cs typeface="Calibri" charset="0"/>
@@ -24523,7 +24582,7 @@
                         <a:buNone/>
                       </a:pPr>
                       <a:r>
-                        <a:rPr lang="en-US" sz="900" b="1" dirty="0">
+                        <a:rPr lang="en-US" sz="850" b="1" dirty="0">
                           <a:solidFill>
                             <a:srgbClr val="FFFFFF"/>
                           </a:solidFill>
@@ -24533,7 +24592,7 @@
                         </a:rPr>
                         <a:t>2021-22</a:t>
                       </a:r>
-                      <a:endParaRPr lang="en-US" sz="900" dirty="0">
+                      <a:endParaRPr lang="en-US" sz="850" dirty="0">
                         <a:latin typeface="Calibri" charset="0"/>
                         <a:ea typeface="Calibri" charset="0"/>
                         <a:cs typeface="Calibri" charset="0"/>
@@ -24591,7 +24650,7 @@
                         <a:buNone/>
                       </a:pPr>
                       <a:r>
-                        <a:rPr lang="en-US" sz="900" b="1" dirty="0">
+                        <a:rPr lang="en-US" sz="850" b="1" dirty="0">
                           <a:solidFill>
                             <a:srgbClr val="FFFFFF"/>
                           </a:solidFill>
@@ -24601,7 +24660,7 @@
                         </a:rPr>
                         <a:t>2023-26</a:t>
                       </a:r>
-                      <a:endParaRPr lang="en-US" sz="900" dirty="0">
+                      <a:endParaRPr lang="en-US" sz="850" dirty="0">
                         <a:latin typeface="Calibri" charset="0"/>
                         <a:ea typeface="Calibri" charset="0"/>
                         <a:cs typeface="Calibri" charset="0"/>
@@ -24661,7 +24720,7 @@
                         <a:buNone/>
                       </a:pPr>
                       <a:r>
-                        <a:rPr lang="en-US" sz="950" dirty="0">
+                        <a:rPr lang="en-US" sz="900" dirty="0">
                           <a:solidFill>
                             <a:srgbClr val="1A1A1A"/>
                           </a:solidFill>
@@ -24671,7 +24730,7 @@
                         </a:rPr>
                         <a:t>Long leg excess</a:t>
                       </a:r>
-                      <a:endParaRPr lang="en-US" sz="950" dirty="0">
+                      <a:endParaRPr lang="en-US" sz="900" dirty="0">
                         <a:latin typeface="Calibri" charset="0"/>
                         <a:ea typeface="Calibri" charset="0"/>
                         <a:cs typeface="Calibri" charset="0"/>
@@ -24726,7 +24785,7 @@
                         <a:buNone/>
                       </a:pPr>
                       <a:r>
-                        <a:rPr lang="en-US" sz="950" dirty="0">
+                        <a:rPr lang="en-US" sz="900" dirty="0">
                           <a:solidFill>
                             <a:srgbClr val="1A1A1A"/>
                           </a:solidFill>
@@ -24736,7 +24795,7 @@
                         </a:rPr>
                         <a:t>+6.12%</a:t>
                       </a:r>
-                      <a:endParaRPr lang="en-US" sz="950" dirty="0">
+                      <a:endParaRPr lang="en-US" sz="900" dirty="0">
                         <a:latin typeface="Calibri" charset="0"/>
                         <a:ea typeface="Calibri" charset="0"/>
                         <a:cs typeface="Calibri" charset="0"/>
@@ -24791,7 +24850,7 @@
                         <a:buNone/>
                       </a:pPr>
                       <a:r>
-                        <a:rPr lang="en-US" sz="950" dirty="0">
+                        <a:rPr lang="en-US" sz="900" dirty="0">
                           <a:solidFill>
                             <a:srgbClr val="1A1A1A"/>
                           </a:solidFill>
@@ -24801,7 +24860,7 @@
                         </a:rPr>
                         <a:t>+9.07%</a:t>
                       </a:r>
-                      <a:endParaRPr lang="en-US" sz="950" dirty="0">
+                      <a:endParaRPr lang="en-US" sz="900" dirty="0">
                         <a:latin typeface="Calibri" charset="0"/>
                         <a:ea typeface="Calibri" charset="0"/>
                         <a:cs typeface="Calibri" charset="0"/>
@@ -24858,7 +24917,7 @@
                         <a:buNone/>
                       </a:pPr>
                       <a:r>
-                        <a:rPr lang="en-US" sz="950" dirty="0">
+                        <a:rPr lang="en-US" sz="900" dirty="0">
                           <a:solidFill>
                             <a:srgbClr val="1A1A1A"/>
                           </a:solidFill>
@@ -24868,7 +24927,7 @@
                         </a:rPr>
                         <a:t>Long leg t-statistic</a:t>
                       </a:r>
-                      <a:endParaRPr lang="en-US" sz="950" dirty="0">
+                      <a:endParaRPr lang="en-US" sz="900" dirty="0">
                         <a:latin typeface="Calibri" charset="0"/>
                         <a:ea typeface="Calibri" charset="0"/>
                         <a:cs typeface="Calibri" charset="0"/>
@@ -24923,7 +24982,7 @@
                         <a:buNone/>
                       </a:pPr>
                       <a:r>
-                        <a:rPr lang="en-US" sz="950" dirty="0">
+                        <a:rPr lang="en-US" sz="900" dirty="0">
                           <a:solidFill>
                             <a:srgbClr val="1A1A1A"/>
                           </a:solidFill>
@@ -24933,7 +24992,7 @@
                         </a:rPr>
                         <a:t>+1.2</a:t>
                       </a:r>
-                      <a:endParaRPr lang="en-US" sz="950" dirty="0">
+                      <a:endParaRPr lang="en-US" sz="900" dirty="0">
                         <a:latin typeface="Calibri" charset="0"/>
                         <a:ea typeface="Calibri" charset="0"/>
                         <a:cs typeface="Calibri" charset="0"/>
@@ -24988,7 +25047,7 @@
                         <a:buNone/>
                       </a:pPr>
                       <a:r>
-                        <a:rPr lang="en-US" sz="950" dirty="0">
+                        <a:rPr lang="en-US" sz="900" dirty="0">
                           <a:solidFill>
                             <a:srgbClr val="1A1A1A"/>
                           </a:solidFill>
@@ -24998,7 +25057,7 @@
                         </a:rPr>
                         <a:t>+2.7</a:t>
                       </a:r>
-                      <a:endParaRPr lang="en-US" sz="950" dirty="0">
+                      <a:endParaRPr lang="en-US" sz="900" dirty="0">
                         <a:latin typeface="Calibri" charset="0"/>
                         <a:ea typeface="Calibri" charset="0"/>
                         <a:cs typeface="Calibri" charset="0"/>
@@ -25055,7 +25114,7 @@
                         <a:buNone/>
                       </a:pPr>
                       <a:r>
-                        <a:rPr lang="en-US" sz="950" dirty="0">
+                        <a:rPr lang="en-US" sz="900" dirty="0">
                           <a:solidFill>
                             <a:srgbClr val="1A1A1A"/>
                           </a:solidFill>
@@ -25065,7 +25124,7 @@
                         </a:rPr>
                         <a:t>Short leg excess (negative is good)</a:t>
                       </a:r>
-                      <a:endParaRPr lang="en-US" sz="950" dirty="0">
+                      <a:endParaRPr lang="en-US" sz="900" dirty="0">
                         <a:latin typeface="Calibri" charset="0"/>
                         <a:ea typeface="Calibri" charset="0"/>
                         <a:cs typeface="Calibri" charset="0"/>
@@ -25120,7 +25179,7 @@
                         <a:buNone/>
                       </a:pPr>
                       <a:r>
-                        <a:rPr lang="en-US" sz="950" dirty="0">
+                        <a:rPr lang="en-US" sz="900" dirty="0">
                           <a:solidFill>
                             <a:srgbClr val="1A1A1A"/>
                           </a:solidFill>
@@ -25130,7 +25189,7 @@
                         </a:rPr>
                         <a:t>-15.63%</a:t>
                       </a:r>
-                      <a:endParaRPr lang="en-US" sz="950" dirty="0">
+                      <a:endParaRPr lang="en-US" sz="900" dirty="0">
                         <a:latin typeface="Calibri" charset="0"/>
                         <a:ea typeface="Calibri" charset="0"/>
                         <a:cs typeface="Calibri" charset="0"/>
@@ -25185,7 +25244,7 @@
                         <a:buNone/>
                       </a:pPr>
                       <a:r>
-                        <a:rPr lang="en-US" sz="950" dirty="0">
+                        <a:rPr lang="en-US" sz="900" dirty="0">
                           <a:solidFill>
                             <a:srgbClr val="1A1A1A"/>
                           </a:solidFill>
@@ -25195,7 +25254,7 @@
                         </a:rPr>
                         <a:t>-0.44%</a:t>
                       </a:r>
-                      <a:endParaRPr lang="en-US" sz="950" dirty="0">
+                      <a:endParaRPr lang="en-US" sz="900" dirty="0">
                         <a:latin typeface="Calibri" charset="0"/>
                         <a:ea typeface="Calibri" charset="0"/>
                         <a:cs typeface="Calibri" charset="0"/>
@@ -25252,7 +25311,7 @@
                         <a:buNone/>
                       </a:pPr>
                       <a:r>
-                        <a:rPr lang="en-US" sz="950" dirty="0">
+                        <a:rPr lang="en-US" sz="900" dirty="0">
                           <a:solidFill>
                             <a:srgbClr val="1A1A1A"/>
                           </a:solidFill>
@@ -25262,7 +25321,7 @@
                         </a:rPr>
                         <a:t>Short leg t-statistic</a:t>
                       </a:r>
-                      <a:endParaRPr lang="en-US" sz="950" dirty="0">
+                      <a:endParaRPr lang="en-US" sz="900" dirty="0">
                         <a:latin typeface="Calibri" charset="0"/>
                         <a:ea typeface="Calibri" charset="0"/>
                         <a:cs typeface="Calibri" charset="0"/>
@@ -25317,7 +25376,7 @@
                         <a:buNone/>
                       </a:pPr>
                       <a:r>
-                        <a:rPr lang="en-US" sz="950" dirty="0">
+                        <a:rPr lang="en-US" sz="900" dirty="0">
                           <a:solidFill>
                             <a:srgbClr val="1A1A1A"/>
                           </a:solidFill>
@@ -25327,7 +25386,7 @@
                         </a:rPr>
                         <a:t>-2.2</a:t>
                       </a:r>
-                      <a:endParaRPr lang="en-US" sz="950" dirty="0">
+                      <a:endParaRPr lang="en-US" sz="900" dirty="0">
                         <a:latin typeface="Calibri" charset="0"/>
                         <a:ea typeface="Calibri" charset="0"/>
                         <a:cs typeface="Calibri" charset="0"/>
@@ -25382,7 +25441,7 @@
                         <a:buNone/>
                       </a:pPr>
                       <a:r>
-                        <a:rPr lang="en-US" sz="950" dirty="0">
+                        <a:rPr lang="en-US" sz="900" dirty="0">
                           <a:solidFill>
                             <a:srgbClr val="1A1A1A"/>
                           </a:solidFill>
@@ -25392,7 +25451,7 @@
                         </a:rPr>
                         <a:t>-0.1</a:t>
                       </a:r>
-                      <a:endParaRPr lang="en-US" sz="950" dirty="0">
+                      <a:endParaRPr lang="en-US" sz="900" dirty="0">
                         <a:latin typeface="Calibri" charset="0"/>
                         <a:ea typeface="Calibri" charset="0"/>
                         <a:cs typeface="Calibri" charset="0"/>
@@ -25445,14 +25504,14 @@
       </p:graphicFrame>
       <p:sp>
         <p:nvSpPr>
-          <p:cNvPr id="24" name="Text 20"/>
+          <p:cNvPr id="25" name="Text 21"/>
           <p:cNvSpPr txBox="1"/>
           <p:nvPr/>
         </p:nvSpPr>
         <p:spPr>
           <a:xfrm>
-            <a:off x="6492240" y="4572000"/>
-            <a:ext cx="5120640" cy="731520"/>
+            <a:off x="6492240" y="4864608"/>
+            <a:ext cx="5120640" cy="566928"/>
           </a:xfrm>
           <a:prstGeom prst="rect">
             <a:avLst/>
@@ -25466,12 +25525,12 @@
           <a:p>
             <a:pPr indent="0" marL="0">
               <a:lnSpc>
-                <a:spcPct val="105000"/>
+                <a:spcPct val="100000"/>
               </a:lnSpc>
               <a:buNone/>
             </a:pPr>
             <a:r>
-              <a:rPr lang="en-US" sz="1000" i="1" dirty="0">
+              <a:rPr lang="en-US" sz="900" i="1" dirty="0">
                 <a:solidFill>
                   <a:srgbClr val="1A1A1A"/>
                 </a:solidFill>
@@ -25481,13 +25540,13 @@
               </a:rPr>
               <a:t>Raw contribution conflates a rising market with poor selection. Measured against the universe we could actually trade, the legs take turns: the short book carried 2021-22, the long book carries 2023-26.</a:t>
             </a:r>
-            <a:endParaRPr lang="en-US" sz="1000" dirty="0"/>
+            <a:endParaRPr lang="en-US" sz="900" dirty="0"/>
           </a:p>
         </p:txBody>
       </p:sp>
       <p:pic>
         <p:nvPicPr>
-          <p:cNvPr id="25" name="Image 0" descr="C:\Users\junho\AppData\Local\Temp\claude\fiam_team\05_submission\figures\histogram.png">    </p:cNvPr>
+          <p:cNvPr id="26" name="Image 0" descr="C:\Users\junho\AppData\Local\Temp\claude\fiam_team\05_submission\figures\histogram.png">    </p:cNvPr>
           <p:cNvPicPr>
             <a:picLocks noChangeAspect="1"/>
           </p:cNvPicPr>
@@ -25501,8 +25560,8 @@
         </p:blipFill>
         <p:spPr>
           <a:xfrm>
-            <a:off x="6492240" y="5230368"/>
-            <a:ext cx="5120640" cy="1481328"/>
+            <a:off x="6492240" y="5449824"/>
+            <a:ext cx="5120640" cy="1316736"/>
           </a:xfrm>
           <a:prstGeom prst="rect">
             <a:avLst/>
@@ -33347,7 +33406,7 @@
                 <a:ea typeface="Calibri" pitchFamily="34" charset="-122"/>
                 <a:cs typeface="Calibri" pitchFamily="34" charset="-120"/>
               </a:rPr>
-              <a:t>The 2021-22 short alpha survives sector adjustment almost intact (-26.90% vs -25.62%), so it was stock selection inside sectors, not a bet against technology.</a:t>
+              <a:t>The 2021-22 short alpha survives sector adjustment intact: -15.63% against the whole universe and -16.36% against its own sectors. It was stock selection inside sectors, not a bet against technology.</a:t>
             </a:r>
             <a:endParaRPr lang="en-US" sz="1100" dirty="0"/>
           </a:p>

--- a/05_submission/FIAM_deck.pptx
+++ b/05_submission/FIAM_deck.pptx
@@ -2697,7 +2697,7 @@
                 <a:ea typeface="Calibri" pitchFamily="34" charset="-122"/>
                 <a:cs typeface="Calibri" pitchFamily="34" charset="-120"/>
               </a:rPr>
-              <a:t>The alpha changed legs mid-period. 2021-22 came almost entirely from the short book during the speculative unwind; since 2023 it has come from the long book. We do not claim the first is repeatable.</a:t>
+              <a:t>Measured against the universe it picks from, the long leg is positive in both halves of the window (+8.03% over the full period, t +2.8). The short leg's own contribution is concentrated in the 2021-22 unwind (-15.63%) and is indistinguishable from zero since. We treat it as the hedge, not as a second source of alpha.</a:t>
             </a:r>
             <a:endParaRPr lang="en-US" sz="1200" dirty="0"/>
           </a:p>
@@ -17204,7 +17204,7 @@
                 <a:ea typeface="Calibri" pitchFamily="34" charset="-122"/>
                 <a:cs typeface="Calibri" pitchFamily="34" charset="-120"/>
               </a:rPr>
-              <a:t>Weights are fractions of NAV, summing to 200% gross and +12.5% net. Short proceeds sit in 3-month T-bills, which is why the benchmark is cash plus 4% and why the cash leg cancels out of the active return.</a:t>
+              <a:t>Weights are fractions of NAV, summing to 200% gross and +12.5% net. Returns are built as spread = sum of weight x ret_exc_lead1m, total = 3M T-bill + spread, hurdle = 3M T-bill + 4%/12. The rules warn not to assume the risk-free rate inside ret_exc is the T-bill, so we measured it: backed out of the panel it runs 3.111% against the T-bill's 3.281%, and at our net exposure that residual is +0.033%/yr, moving the information ratio by -0.0026. Reported, not assumed.</a:t>
             </a:r>
             <a:endParaRPr lang="en-US" sz="950" dirty="0"/>
           </a:p>
@@ -17218,7 +17218,7 @@
         </p:nvSpPr>
         <p:spPr>
           <a:xfrm>
-            <a:off x="548640" y="3858768"/>
+            <a:off x="548640" y="4224528"/>
             <a:ext cx="5394960" cy="237744"/>
           </a:xfrm>
           <a:prstGeom prst="rect">
@@ -17264,7 +17264,7 @@
           </p:nvPr>
         </p:nvGraphicFramePr>
         <p:xfrm>
-          <a:off x="548640" y="4114800"/>
+          <a:off x="548640" y="4480560"/>
           <a:ext cx="5394960" cy="914400"/>
         </p:xfrm>
         <a:graphic>
@@ -17286,7 +17286,7 @@
                         <a:buNone/>
                       </a:pPr>
                       <a:r>
-                        <a:rPr lang="en-US" sz="900" b="1" dirty="0">
+                        <a:rPr lang="en-US" sz="850" b="1" dirty="0">
                           <a:solidFill>
                             <a:srgbClr val="FFFFFF"/>
                           </a:solidFill>
@@ -17296,7 +17296,7 @@
                         </a:rPr>
                         <a:t>Model</a:t>
                       </a:r>
-                      <a:endParaRPr lang="en-US" sz="900" dirty="0">
+                      <a:endParaRPr lang="en-US" sz="850" dirty="0">
                         <a:latin typeface="Calibri" charset="0"/>
                         <a:ea typeface="Calibri" charset="0"/>
                         <a:cs typeface="Calibri" charset="0"/>
@@ -17354,7 +17354,7 @@
                         <a:buNone/>
                       </a:pPr>
                       <a:r>
-                        <a:rPr lang="en-US" sz="900" b="1" dirty="0">
+                        <a:rPr lang="en-US" sz="850" b="1" dirty="0">
                           <a:solidFill>
                             <a:srgbClr val="FFFFFF"/>
                           </a:solidFill>
@@ -17364,7 +17364,7 @@
                         </a:rPr>
                         <a:t>OOS R2</a:t>
                       </a:r>
-                      <a:endParaRPr lang="en-US" sz="900" dirty="0">
+                      <a:endParaRPr lang="en-US" sz="850" dirty="0">
                         <a:latin typeface="Calibri" charset="0"/>
                         <a:ea typeface="Calibri" charset="0"/>
                         <a:cs typeface="Calibri" charset="0"/>
@@ -17422,7 +17422,7 @@
                         <a:buNone/>
                       </a:pPr>
                       <a:r>
-                        <a:rPr lang="en-US" sz="900" b="1" dirty="0">
+                        <a:rPr lang="en-US" sz="850" b="1" dirty="0">
                           <a:solidFill>
                             <a:srgbClr val="FFFFFF"/>
                           </a:solidFill>
@@ -17432,7 +17432,7 @@
                         </a:rPr>
                         <a:t>Monthly IC</a:t>
                       </a:r>
-                      <a:endParaRPr lang="en-US" sz="900" dirty="0">
+                      <a:endParaRPr lang="en-US" sz="850" dirty="0">
                         <a:latin typeface="Calibri" charset="0"/>
                         <a:ea typeface="Calibri" charset="0"/>
                         <a:cs typeface="Calibri" charset="0"/>
@@ -17492,7 +17492,7 @@
                         <a:buNone/>
                       </a:pPr>
                       <a:r>
-                        <a:rPr lang="en-US" sz="950" dirty="0">
+                        <a:rPr lang="en-US" sz="900" dirty="0">
                           <a:solidFill>
                             <a:srgbClr val="1A1A1A"/>
                           </a:solidFill>
@@ -17502,7 +17502,7 @@
                         </a:rPr>
                         <a:t>Gradient-boosted trees</a:t>
                       </a:r>
-                      <a:endParaRPr lang="en-US" sz="950" dirty="0">
+                      <a:endParaRPr lang="en-US" sz="900" dirty="0">
                         <a:latin typeface="Calibri" charset="0"/>
                         <a:ea typeface="Calibri" charset="0"/>
                         <a:cs typeface="Calibri" charset="0"/>
@@ -17557,7 +17557,7 @@
                         <a:buNone/>
                       </a:pPr>
                       <a:r>
-                        <a:rPr lang="en-US" sz="950" dirty="0">
+                        <a:rPr lang="en-US" sz="900" dirty="0">
                           <a:solidFill>
                             <a:srgbClr val="1A1A1A"/>
                           </a:solidFill>
@@ -17567,7 +17567,7 @@
                         </a:rPr>
                         <a:t>+0.3956%</a:t>
                       </a:r>
-                      <a:endParaRPr lang="en-US" sz="950" dirty="0">
+                      <a:endParaRPr lang="en-US" sz="900" dirty="0">
                         <a:latin typeface="Calibri" charset="0"/>
                         <a:ea typeface="Calibri" charset="0"/>
                         <a:cs typeface="Calibri" charset="0"/>
@@ -17622,7 +17622,7 @@
                         <a:buNone/>
                       </a:pPr>
                       <a:r>
-                        <a:rPr lang="en-US" sz="950" dirty="0">
+                        <a:rPr lang="en-US" sz="900" dirty="0">
                           <a:solidFill>
                             <a:srgbClr val="1A1A1A"/>
                           </a:solidFill>
@@ -17632,7 +17632,7 @@
                         </a:rPr>
                         <a:t>+0.1354</a:t>
                       </a:r>
-                      <a:endParaRPr lang="en-US" sz="950" dirty="0">
+                      <a:endParaRPr lang="en-US" sz="900" dirty="0">
                         <a:latin typeface="Calibri" charset="0"/>
                         <a:ea typeface="Calibri" charset="0"/>
                         <a:cs typeface="Calibri" charset="0"/>
@@ -17689,7 +17689,7 @@
                         <a:buNone/>
                       </a:pPr>
                       <a:r>
-                        <a:rPr lang="en-US" sz="950" dirty="0">
+                        <a:rPr lang="en-US" sz="900" dirty="0">
                           <a:solidFill>
                             <a:srgbClr val="1A1A1A"/>
                           </a:solidFill>
@@ -17699,7 +17699,7 @@
                         </a:rPr>
                         <a:t>Ridge</a:t>
                       </a:r>
-                      <a:endParaRPr lang="en-US" sz="950" dirty="0">
+                      <a:endParaRPr lang="en-US" sz="900" dirty="0">
                         <a:latin typeface="Calibri" charset="0"/>
                         <a:ea typeface="Calibri" charset="0"/>
                         <a:cs typeface="Calibri" charset="0"/>
@@ -17754,7 +17754,7 @@
                         <a:buNone/>
                       </a:pPr>
                       <a:r>
-                        <a:rPr lang="en-US" sz="950" dirty="0">
+                        <a:rPr lang="en-US" sz="900" dirty="0">
                           <a:solidFill>
                             <a:srgbClr val="1A1A1A"/>
                           </a:solidFill>
@@ -17764,7 +17764,7 @@
                         </a:rPr>
                         <a:t>+0.0278%</a:t>
                       </a:r>
-                      <a:endParaRPr lang="en-US" sz="950" dirty="0">
+                      <a:endParaRPr lang="en-US" sz="900" dirty="0">
                         <a:latin typeface="Calibri" charset="0"/>
                         <a:ea typeface="Calibri" charset="0"/>
                         <a:cs typeface="Calibri" charset="0"/>
@@ -17819,7 +17819,7 @@
                         <a:buNone/>
                       </a:pPr>
                       <a:r>
-                        <a:rPr lang="en-US" sz="950" dirty="0">
+                        <a:rPr lang="en-US" sz="900" dirty="0">
                           <a:solidFill>
                             <a:srgbClr val="1A1A1A"/>
                           </a:solidFill>
@@ -17829,7 +17829,7 @@
                         </a:rPr>
                         <a:t>+0.1193</a:t>
                       </a:r>
-                      <a:endParaRPr lang="en-US" sz="950" dirty="0">
+                      <a:endParaRPr lang="en-US" sz="900" dirty="0">
                         <a:latin typeface="Calibri" charset="0"/>
                         <a:ea typeface="Calibri" charset="0"/>
                         <a:cs typeface="Calibri" charset="0"/>
@@ -17886,7 +17886,7 @@
                         <a:buNone/>
                       </a:pPr>
                       <a:r>
-                        <a:rPr lang="en-US" sz="950" dirty="0">
+                        <a:rPr lang="en-US" sz="900" dirty="0">
                           <a:solidFill>
                             <a:srgbClr val="1A1A1A"/>
                           </a:solidFill>
@@ -17896,7 +17896,7 @@
                         </a:rPr>
                         <a:t>OLS</a:t>
                       </a:r>
-                      <a:endParaRPr lang="en-US" sz="950" dirty="0">
+                      <a:endParaRPr lang="en-US" sz="900" dirty="0">
                         <a:latin typeface="Calibri" charset="0"/>
                         <a:ea typeface="Calibri" charset="0"/>
                         <a:cs typeface="Calibri" charset="0"/>
@@ -17951,7 +17951,7 @@
                         <a:buNone/>
                       </a:pPr>
                       <a:r>
-                        <a:rPr lang="en-US" sz="950" dirty="0">
+                        <a:rPr lang="en-US" sz="900" dirty="0">
                           <a:solidFill>
                             <a:srgbClr val="1A1A1A"/>
                           </a:solidFill>
@@ -17961,7 +17961,7 @@
                         </a:rPr>
                         <a:t>-0.0068%</a:t>
                       </a:r>
-                      <a:endParaRPr lang="en-US" sz="950" dirty="0">
+                      <a:endParaRPr lang="en-US" sz="900" dirty="0">
                         <a:latin typeface="Calibri" charset="0"/>
                         <a:ea typeface="Calibri" charset="0"/>
                         <a:cs typeface="Calibri" charset="0"/>
@@ -18016,7 +18016,7 @@
                         <a:buNone/>
                       </a:pPr>
                       <a:r>
-                        <a:rPr lang="en-US" sz="950" dirty="0">
+                        <a:rPr lang="en-US" sz="900" dirty="0">
                           <a:solidFill>
                             <a:srgbClr val="1A1A1A"/>
                           </a:solidFill>
@@ -18026,7 +18026,7 @@
                         </a:rPr>
                         <a:t>+0.0806</a:t>
                       </a:r>
-                      <a:endParaRPr lang="en-US" sz="950" dirty="0">
+                      <a:endParaRPr lang="en-US" sz="900" dirty="0">
                         <a:latin typeface="Calibri" charset="0"/>
                         <a:ea typeface="Calibri" charset="0"/>
                         <a:cs typeface="Calibri" charset="0"/>
@@ -18083,7 +18083,7 @@
                         <a:buNone/>
                       </a:pPr>
                       <a:r>
-                        <a:rPr lang="en-US" sz="950" dirty="0">
+                        <a:rPr lang="en-US" sz="900" dirty="0">
                           <a:solidFill>
                             <a:srgbClr val="1A1A1A"/>
                           </a:solidFill>
@@ -18093,7 +18093,7 @@
                         </a:rPr>
                         <a:t>Lasso / Elastic Net</a:t>
                       </a:r>
-                      <a:endParaRPr lang="en-US" sz="950" dirty="0">
+                      <a:endParaRPr lang="en-US" sz="900" dirty="0">
                         <a:latin typeface="Calibri" charset="0"/>
                         <a:ea typeface="Calibri" charset="0"/>
                         <a:cs typeface="Calibri" charset="0"/>
@@ -18148,7 +18148,7 @@
                         <a:buNone/>
                       </a:pPr>
                       <a:r>
-                        <a:rPr lang="en-US" sz="950" dirty="0">
+                        <a:rPr lang="en-US" sz="900" dirty="0">
                           <a:solidFill>
                             <a:srgbClr val="1A1A1A"/>
                           </a:solidFill>
@@ -18158,7 +18158,7 @@
                         </a:rPr>
                         <a:t>negative</a:t>
                       </a:r>
-                      <a:endParaRPr lang="en-US" sz="950" dirty="0">
+                      <a:endParaRPr lang="en-US" sz="900" dirty="0">
                         <a:latin typeface="Calibri" charset="0"/>
                         <a:ea typeface="Calibri" charset="0"/>
                         <a:cs typeface="Calibri" charset="0"/>
@@ -18213,7 +18213,7 @@
                         <a:buNone/>
                       </a:pPr>
                       <a:r>
-                        <a:rPr lang="en-US" sz="950" dirty="0">
+                        <a:rPr lang="en-US" sz="900" dirty="0">
                           <a:solidFill>
                             <a:srgbClr val="1A1A1A"/>
                           </a:solidFill>
@@ -18223,7 +18223,7 @@
                         </a:rPr>
                         <a:t>+0.08</a:t>
                       </a:r>
-                      <a:endParaRPr lang="en-US" sz="950" dirty="0">
+                      <a:endParaRPr lang="en-US" sz="900" dirty="0">
                         <a:latin typeface="Calibri" charset="0"/>
                         <a:ea typeface="Calibri" charset="0"/>
                         <a:cs typeface="Calibri" charset="0"/>
@@ -18282,7 +18282,7 @@
         </p:nvSpPr>
         <p:spPr>
           <a:xfrm>
-            <a:off x="548640" y="5376672"/>
+            <a:off x="548640" y="5632704"/>
             <a:ext cx="5394960" cy="457200"/>
           </a:xfrm>
           <a:prstGeom prst="rect">
@@ -21698,12 +21698,12 @@
         </p:nvSpPr>
         <p:spPr>
           <a:xfrm>
-            <a:off x="548640" y="5888736"/>
-            <a:ext cx="11064240" cy="859536"/>
+            <a:off x="548640" y="6126480"/>
+            <a:ext cx="11064240" cy="658368"/>
           </a:xfrm>
           <a:prstGeom prst="roundRect">
             <a:avLst>
-              <a:gd name="adj" fmla="val 5319"/>
+              <a:gd name="adj" fmla="val 6944"/>
             </a:avLst>
           </a:prstGeom>
           <a:solidFill>
@@ -21725,8 +21725,8 @@
         </p:nvSpPr>
         <p:spPr>
           <a:xfrm>
-            <a:off x="749808" y="5971032"/>
-            <a:ext cx="10661904" cy="731520"/>
+            <a:off x="749808" y="6190488"/>
+            <a:ext cx="10661904" cy="548640"/>
           </a:xfrm>
           <a:prstGeom prst="rect">
             <a:avLst/>
@@ -25538,7 +25538,7 @@
                 <a:ea typeface="Calibri" pitchFamily="34" charset="-122"/>
                 <a:cs typeface="Calibri" pitchFamily="34" charset="-120"/>
               </a:rPr>
-              <a:t>Raw contribution conflates a rising market with poor selection. Measured against the universe we could actually trade, the legs take turns: the short book carried 2021-22, the long book carries 2023-26.</a:t>
+              <a:t>Raw contribution conflates a rising market with poor selection. Measured against the universe we could actually trade, the long leg is positive in both periods; the short leg's own edge sits in the 2021-22 unwind and is flat afterwards.</a:t>
             </a:r>
             <a:endParaRPr lang="en-US" sz="900" dirty="0"/>
           </a:p>
@@ -31157,7 +31157,7 @@
                 <a:ea typeface="Calibri" pitchFamily="34" charset="-122"/>
                 <a:cs typeface="Calibri" pitchFamily="34" charset="-120"/>
               </a:rPr>
-              <a:t>The long leg has genuine selection skill since 2023: +9.07% over the eligible universe, t +2.7 across 44 months.</a:t>
+              <a:t>The long leg is the steady part: +8.03% over the eligible universe across 68 months, t +2.8, and positive in both halves (+6.12% then +9.07%).</a:t>
             </a:r>
             <a:endParaRPr lang="en-US" sz="950" dirty="0"/>
           </a:p>
@@ -33514,7 +33514,7 @@
                 <a:ea typeface="Calibri" pitchFamily="34" charset="-122"/>
                 <a:cs typeface="Calibri" pitchFamily="34" charset="-120"/>
               </a:rPr>
-              <a:t>The long leg also shows skill in only one regime. If we discount the short result as regime-specific, the same scepticism applies to the long one. The framing we prefer is that the legs take turns: shorts pay when speculative names unwind, longs pay when quality leads.</a:t>
+              <a:t>Recomputed on the submitted book, the two legs are not symmetric. The long leg is positive in both periods and clears its own standard error over the full window; the short leg's edge is confined to 2021-22. So the framing is not that they take turns - it is that the long leg carries the alpha and the short leg is a hedge that happened to pay during the unwind. Sizing it as a second alpha source would be reading one regime as a rule.</a:t>
             </a:r>
             <a:endParaRPr lang="en-US" sz="1050" dirty="0"/>
           </a:p>

--- a/05_submission/FIAM_deck.pptx
+++ b/05_submission/FIAM_deck.pptx
@@ -2759,7 +2759,7 @@
                 <a:ea typeface="Calibri" pitchFamily="34" charset="-122"/>
                 <a:cs typeface="Calibri" pitchFamily="34" charset="-120"/>
               </a:rPr>
-              <a:t>Junhong Zhou   ·   Tony Tran   ·   Faig Haji   ·   Bohan Zhang   ·   Alex [surname]</a:t>
+              <a:t>Junhong Zhou   ·   Tony Tran   ·   Faig Haji   ·   Bohan Zhang   ·   Alex Zhao</a:t>
             </a:r>
             <a:endParaRPr lang="en-US" sz="1200" dirty="0"/>
           </a:p>
@@ -3854,7 +3854,7 @@
                 <a:ea typeface="Calibri" pitchFamily="34" charset="-122"/>
                 <a:cs typeface="Calibri" pitchFamily="34" charset="-120"/>
               </a:rPr>
-              <a:t>THE CORPUS IS SURVIVORSHIP-LINKED, and we found it while trying to confirm that our delisted holdings were acquisitions. Of the 59 positions that lose their forward return, only 18 appear in the 8-K data at all - 0 of 11 that vanish in 2021, 0 of 10 in 2022, 0 of 12 in 2023, 0 of 7 in 2024, then 10 of 11 in 2025 and 8 of 8 in 2026. Dunkin' Brands, Fitbit, Varian Medical Systems, Alexion Pharmaceuticals, Maxim Integrated, Luminex and Raven Industries each filed 8-Ks throughout 2015-2020 and have ZERO filings in a dataset that spans 2015-2026. The company list was built from identifiers that still resolve today, so anything acquired before roughly 2025 is simply absent.</a:t>
+              <a:t>THE CORPUS IS SURVIVORSHIP-LINKED, and we found it while trying to confirm that our delisted holdings were acquisitions. The cleanest version of it is panel-wide and does not depend on which book is current: of the stocks still listed at the panel's end, 93.2% covered (3,260 of 3,497 stocks); of those that left before 2025, 1.6% covered (42 of 2,626 stocks). Dunkin' Brands, Fitbit, Varian Medical Systems, Alexion Pharmaceuticals, Maxim Integrated, Luminex and Raven Industries each filed 8-Ks throughout 2015-2020 and have ZERO filings in a corpus spanning 2015-2026. The company list was built from identifiers that still resolve today, so anything acquired before roughly 2025 is simply absent.</a:t>
             </a:r>
             <a:endParaRPr lang="en-US" sz="1100" dirty="0"/>
           </a:p>
@@ -7566,7 +7566,7 @@
         </p:nvSpPr>
         <p:spPr>
           <a:xfrm>
-            <a:off x="6400800" y="2743200"/>
+            <a:off x="6400800" y="2980944"/>
             <a:ext cx="5212080" cy="1463040"/>
           </a:xfrm>
           <a:prstGeom prst="rect">
@@ -7598,7 +7598,7 @@
                 <a:ea typeface="Calibri" pitchFamily="34" charset="-122"/>
                 <a:cs typeface="Calibri" pitchFamily="34" charset="-120"/>
               </a:rPr>
-              <a:t>Of the four factor loadings only value is even borderline (t +2.0); market, size and momentum are indistinguishable from zero, and the regression leaves most of the variation unexplained (t=+2.47, R2 0.15).</a:t>
+              <a:t>Of the four factor loadings only value is even borderline (t +2.0); market, size and momentum are indistinguishable from zero, and the regression leaves most of the variation unexplained (t=+2.68, R2 0.17).</a:t>
             </a:r>
             <a:endParaRPr lang="en-US" sz="1050" dirty="0"/>
           </a:p>
@@ -30663,8 +30663,8 @@
         </p:nvSpPr>
         <p:spPr>
           <a:xfrm>
-            <a:off x="548640" y="5870448"/>
-            <a:ext cx="6766560" cy="457200"/>
+            <a:off x="548640" y="5852160"/>
+            <a:ext cx="5669280" cy="457200"/>
           </a:xfrm>
           <a:prstGeom prst="rect">
             <a:avLst/>
@@ -31532,7 +31532,7 @@
                 <a:ea typeface="Calibri" pitchFamily="34" charset="-122"/>
                 <a:cs typeface="Calibri" pitchFamily="34" charset="-120"/>
               </a:rPr>
-              <a:t>MXL, Maxlinear, Inc  +2.33%  (long, 5mo)</a:t>
+              <a:t>MXL, MaxLinear, Inc  +2.33%  (long, 5mo)</a:t>
             </a:r>
             <a:endParaRPr lang="en-US" sz="900" dirty="0"/>
           </a:p>
@@ -31761,7 +31761,7 @@
                 <a:ea typeface="Calibri" pitchFamily="34" charset="-122"/>
                 <a:cs typeface="Calibri" pitchFamily="34" charset="-120"/>
               </a:rPr>
-              <a:t>2023-25  AI-led concentration in mega-caps. The short edge disappears and the long leg takes over; +0.46 over those three years.</a:t>
+              <a:t>2023-25  AI-led concentration in mega-caps. The short edge disappears and the long leg carries on; +0.46 over those three years.</a:t>
             </a:r>
             <a:endParaRPr lang="en-US" sz="900" dirty="0"/>
           </a:p>

--- a/05_submission/FIAM_deck.pptx
+++ b/05_submission/FIAM_deck.pptx
@@ -8037,7 +8037,7 @@
               <a:buNone/>
             </a:pPr>
             <a:r>
-              <a:rPr lang="en-US" sz="1050" dirty="0">
+              <a:rPr lang="en-US" sz="1000" dirty="0">
                 <a:solidFill>
                   <a:srgbClr val="1A1A1A"/>
                 </a:solidFill>
@@ -8045,9 +8045,29 @@
                 <a:ea typeface="Calibri" pitchFamily="34" charset="-122"/>
                 <a:cs typeface="Calibri" pitchFamily="34" charset="-120"/>
               </a:rPr>
-              <a:t>MAIN.py runs the whole chain from the supplied parquet files to the compliance gate and the exhibits on these slides, and exits non-zero if any rule is broken. 22 automatic checks cover look-ahead (predictor list, split keying, preprocessing fit window, cross-fold selection) and the trading criteria (100-500 names, gross &lt;= 200%, net inside +/-50%, both legs, coverage, tradability). A separate test feeds the checker 21 deliberately broken inputs and asserts each is caught; all 21 fire. The traded book records 0 failures across all 68 months.</a:t>
+              <a:t>MAIN.py runs the whole chain from the supplied parquet files to the compliance gate and the exhibits on these slides, and exits non-zero if any rule is broken. 21 automatic checks cover look-ahead (predictor list, split keying, preprocessing fit window, cross-fold selection) and the trading criteria (100-500 names, gross &lt;= 200%, net inside +/-50%, both legs, coverage, tradability). A separate test feeds the checker 21 deliberately broken inputs and asserts each is caught; all 21 fire.</a:t>
             </a:r>
-            <a:endParaRPr lang="en-US" sz="1050" dirty="0"/>
+            <a:endParaRPr lang="en-US" sz="1000" dirty="0"/>
+          </a:p>
+          <a:p>
+            <a:pPr indent="0" marL="0">
+              <a:lnSpc>
+                <a:spcPct val="102000"/>
+              </a:lnSpc>
+              <a:buNone/>
+            </a:pPr>
+            <a:r>
+              <a:rPr lang="en-US" sz="1000" dirty="0">
+                <a:solidFill>
+                  <a:srgbClr val="1A1A1A"/>
+                </a:solidFill>
+                <a:latin typeface="Calibri" pitchFamily="34" charset="0"/>
+                <a:ea typeface="Calibri" pitchFamily="34" charset="-122"/>
+                <a:cs typeface="Calibri" pitchFamily="34" charset="-120"/>
+              </a:rPr>
+              <a:t>The traded book records 0 rule failures across all 68 months. It does breach one standard we set ourselves and the rules do not: 1 of 68 months carry a beta-weighted net beyond +0.30 (worst +0.310 in 2025-08). The beta control sizes the legs to offset the gap between estimated and realised leg beta, so an ex-ante tilt past the threshold can be the construction working as designed - but we report it rather than move the threshold to fit.</a:t>
+            </a:r>
+            <a:endParaRPr lang="en-US" sz="1000" dirty="0"/>
           </a:p>
         </p:txBody>
       </p:sp>

--- a/05_submission/FIAM_deck.pptx
+++ b/05_submission/FIAM_deck.pptx
@@ -2739,7 +2739,7 @@
                 <a:ea typeface="Calibri" pitchFamily="34" charset="-122"/>
                 <a:cs typeface="Calibri" pitchFamily="34" charset="-120"/>
               </a:rPr>
-              <a:t>[TEAM NAME - FILL IN]</a:t>
+              <a:t>Mont Royal Carlo</a:t>
             </a:r>
             <a:endParaRPr lang="en-US" sz="1200" dirty="0"/>
           </a:p>
